--- a/lecons/USA/Practical Geography/12_USA_PRA_QT03a_Measures_of_Central_Tendency_Range_and_Quartiles.pptx
+++ b/lecons/USA/Practical Geography/12_USA_PRA_QT03a_Measures_of_Central_Tendency_Range_and_Quartiles.pptx
@@ -72,13 +72,9 @@
     <p:sldId id="320" r:id="rId66"/>
     <p:sldId id="321" r:id="rId67"/>
     <p:sldId id="322" r:id="rId68"/>
-    <p:sldId id="323" r:id="rId69"/>
-    <p:sldId id="324" r:id="rId70"/>
-    <p:sldId id="325" r:id="rId71"/>
-    <p:sldId id="326" r:id="rId72"/>
   </p:sldIdLst>
   <p:notesMasterIdLst>
-    <p:notesMasterId r:id="rId73"/>
+    <p:notesMasterId r:id="rId69"/>
   </p:notesMasterIdLst>
   <p:sldSz cx="12192000" cy="6858000"/>
   <p:notesSz cx="6858000" cy="12192000"/>
@@ -3388,7 +3384,7 @@
           <a:p>
             <a:r>
               <a:rPr lang="en-US" dirty="0"/>
-              <a:t>Let us copy The Mean. The mean is calculated and assessed as follows. Copy the point on Formula on the left, then draw the diagram on the right: examples of the mean. Give it a title and label it clearly.</a:t>
+              <a:t>Let us copy The Mean. The mean is calculated and assessed as follows. Copy the point on Formula and example on the left, then draw the diagram on the right: the mean. Give it a title and label it clearly.</a:t>
             </a:r>
             <a:endParaRPr lang="en-US" dirty="0"/>
           </a:p>
@@ -3564,7 +3560,7 @@
           <a:p>
             <a:r>
               <a:rPr lang="en-US" dirty="0"/>
-              <a:t>We continue with The Mean. On this slide we have Example 1 and Example 2. Write each point on a new line, with the key term first, and explain it in your own words when we revise. When you finish, we go to the next slide.</a:t>
+              <a:t>We continue with The Mean. Copy the point on Example of station A: write the key term first, then its explanation.</a:t>
             </a:r>
             <a:endParaRPr lang="en-US" dirty="0"/>
           </a:p>
@@ -3652,7 +3648,7 @@
           <a:p>
             <a:r>
               <a:rPr lang="en-US" dirty="0"/>
-              <a:t>We continue with The Mean. On this slide we have Advantages. Write each point on a new line, with the key term first, and explain it in your own words when we revise. When you finish, we go to the next slide.</a:t>
+              <a:t>We continue with The Mean. Copy the point on Advantages: write the key term first, then its explanation.</a:t>
             </a:r>
             <a:endParaRPr lang="en-US" dirty="0"/>
           </a:p>
@@ -3740,7 +3736,7 @@
           <a:p>
             <a:r>
               <a:rPr lang="en-US" dirty="0"/>
-              <a:t>We continue with The Mean. On this slide we have Disadvantages. Write each point on a new line, with the key term first, and explain it in your own words when we revise.</a:t>
+              <a:t>We continue with The Mean. Copy the point on Disadvantages: write the key term first, then its explanation.</a:t>
             </a:r>
             <a:endParaRPr lang="en-US" dirty="0"/>
           </a:p>
@@ -3828,7 +3824,7 @@
           <a:p>
             <a:r>
               <a:rPr lang="en-US" dirty="0"/>
-              <a:t>Let us copy The Median. The median is found and assessed as follows. Copy the point on Method on the left, then draw the diagram on the right: finding the median. Give it a title and label it clearly.</a:t>
+              <a:t>Let us copy The Median. The median is found and assessed as follows. Copy the point on Method on the left, then draw the diagram on the right: the median. Give it a title and label it clearly.</a:t>
             </a:r>
             <a:endParaRPr lang="en-US" dirty="0"/>
           </a:p>
@@ -3916,7 +3912,7 @@
           <a:p>
             <a:r>
               <a:rPr lang="en-US" dirty="0"/>
-              <a:t>We continue with The Median. On this slide we have Odd number of values and Even number of values. Write each point on a new line, with the key term first, and explain it in your own words when we revise. When you finish, we go to the next slide.</a:t>
+              <a:t>We continue with The Median. Copy the point on Odd and even numbers of values: write the key term first, then its explanation.</a:t>
             </a:r>
             <a:endParaRPr lang="en-US" dirty="0"/>
           </a:p>
@@ -4004,7 +4000,7 @@
           <a:p>
             <a:r>
               <a:rPr lang="en-US" dirty="0"/>
-              <a:t>We continue with The Median. On this slide we have Example of Ndu (1963–1972) and Advantages and disadvantages. Write each point on a new line, with the key term first, and explain it in your own words when we revise. When you finish, we go to the next slide.</a:t>
+              <a:t>We continue with The Median. Copy the point on Example of Ndu (1963 to 1972): write the key term first, then its explanation.</a:t>
             </a:r>
             <a:endParaRPr lang="en-US" dirty="0"/>
           </a:p>
@@ -4092,7 +4088,7 @@
           <a:p>
             <a:r>
               <a:rPr lang="en-US" dirty="0"/>
-              <a:t>We continue with The Median. Copy this carefully.</a:t>
+              <a:t>We continue with The Median. Copy the point on Advantages and disadvantages: write the key term first, then its explanation.</a:t>
             </a:r>
             <a:endParaRPr lang="en-US" dirty="0"/>
           </a:p>
@@ -4180,7 +4176,7 @@
           <a:p>
             <a:r>
               <a:rPr lang="en-US" dirty="0"/>
-              <a:t>Let us copy The Mode. The mode is found and assessed as follows. Copy the point on Method on the left, then draw the diagram on the right: a frequency table. Give it a title and label it clearly.</a:t>
+              <a:t>Let us copy The Mode. The mode is found and assessed as follows. Copy the point on Method and example on the left, then draw the diagram on the right: the mode. Give it a title and label it clearly.</a:t>
             </a:r>
             <a:endParaRPr lang="en-US" dirty="0"/>
           </a:p>
@@ -4268,7 +4264,7 @@
           <a:p>
             <a:r>
               <a:rPr lang="en-US" dirty="0"/>
-              <a:t>We continue with The Mode. On this slide we have Example and Special cases. Write each point on a new line, with the key term first, and explain it in your own words when we revise. When you finish, we go to the next slide.</a:t>
+              <a:t>We continue with The Mode. Copy the point on Special cases: write the key term first, then its explanation.</a:t>
             </a:r>
             <a:endParaRPr lang="en-US" dirty="0"/>
           </a:p>
@@ -4356,7 +4352,7 @@
           <a:p>
             <a:r>
               <a:rPr lang="en-US" dirty="0"/>
-              <a:t>We continue with The Mode. On this slide we have Advantages. Write each point on a new line, with the key term first, and explain it in your own words when we revise.</a:t>
+              <a:t>Copy the point on Advantages and disadvantages on the left, then draw the diagram on the right: comparing the three measures. Give it a title and label it clearly.</a:t>
             </a:r>
             <a:endParaRPr lang="en-US" dirty="0"/>
           </a:p>
@@ -4532,7 +4528,7 @@
           <a:p>
             <a:r>
               <a:rPr lang="en-US" dirty="0"/>
-              <a:t>Copy the point on Disadvantages on the left, then draw the diagram on the right: mean, median and mode compared. Give it a title and label it clearly.</a:t>
+              <a:t>Let us copy The Range. The range is calculated and assessed as follows. Copy the point on Formula and example on the left, then draw the diagram on the right: a maximum and minimum thermometer. Give it a title and label it clearly.</a:t>
             </a:r>
             <a:endParaRPr lang="en-US" dirty="0"/>
           </a:p>
@@ -4620,7 +4616,7 @@
           <a:p>
             <a:r>
               <a:rPr lang="en-US" dirty="0"/>
-              <a:t>Let us copy The Range. The range is calculated and assessed as follows. On this slide we have Formula. Write each point on a new line, with the key term first, and explain it in your own words when we revise.</a:t>
+              <a:t>We continue with The Range. Copy the point on Interpretation and assessment: write the key term first, then its explanation.</a:t>
             </a:r>
             <a:endParaRPr lang="en-US" dirty="0"/>
           </a:p>
@@ -4708,7 +4704,7 @@
           <a:p>
             <a:r>
               <a:rPr lang="en-US" dirty="0"/>
-              <a:t>Copy the point on Example on the left, then draw the diagram on the right: a maximum and minimum thermometer. Give it a title and label it clearly.</a:t>
+              <a:t>Let us copy Quartiles and the Interquartile Range. The quartiles and the interquartile range are calculated as follows. Copy the point on Steps on the left, then draw the diagram on the right: quartiles. Give it a title and label it clearly.</a:t>
             </a:r>
             <a:endParaRPr lang="en-US" dirty="0"/>
           </a:p>
@@ -4796,7 +4792,7 @@
           <a:p>
             <a:r>
               <a:rPr lang="en-US" dirty="0"/>
-              <a:t>We continue with The Range. On this slide we have Interpretation and Advantages and disadvantages. Write each point on a new line, with the key term first, and explain it in your own words when we revise. When you finish, we go to the next slide.</a:t>
+              <a:t>We continue with Quartiles and the Interquartile Range. Copy the point on Example 1 (n = 11): write the key term first, then its explanation.</a:t>
             </a:r>
             <a:endParaRPr lang="en-US" dirty="0"/>
           </a:p>
@@ -4884,7 +4880,7 @@
           <a:p>
             <a:r>
               <a:rPr lang="en-US" dirty="0"/>
-              <a:t>We continue with The Range. Copy this carefully.</a:t>
+              <a:t>We continue with Quartiles and the Interquartile Range. Copy the point on Example 2 (n = 13): write the key term first, then its explanation.</a:t>
             </a:r>
             <a:endParaRPr lang="en-US" dirty="0"/>
           </a:p>
@@ -4972,7 +4968,7 @@
           <a:p>
             <a:r>
               <a:rPr lang="en-US" dirty="0"/>
-              <a:t>Let us copy Quartiles and the Interquartile Range. The quartiles and the IQR are calculated as follows. On this slide we have Steps. Write each point on a new line, with the key term first, and explain it in your own words when we revise. When you finish, we go to the next slide.</a:t>
+              <a:t>Copy the point on Advantage on the left, then draw the diagram on the right: a box and whisker plot. Give it a title and label it clearly.</a:t>
             </a:r>
             <a:endParaRPr lang="en-US" dirty="0"/>
           </a:p>
@@ -5060,7 +5056,7 @@
           <a:p>
             <a:r>
               <a:rPr lang="en-US" dirty="0"/>
-              <a:t>We continue with Quartiles and the Interquartile Range. Copy this carefully.</a:t>
+              <a:t>Now let us check what you have understood. Question 1: Find the mean, median and mode of 4, 7, 7, 9, 13. Answer in your exercise book.</a:t>
             </a:r>
             <a:endParaRPr lang="en-US" dirty="0"/>
           </a:p>
@@ -5148,7 +5144,7 @@
           <a:p>
             <a:r>
               <a:rPr lang="en-US" dirty="0"/>
-              <a:t>Copy the point on Example 1 (n = 11) on the left, then draw the diagram on the right: quartiles and IQR. Give it a title and label it clearly.</a:t>
+              <a:t>The expected answer is: mean = 40 ÷ 5 = 8; median = 7; mode = 7. If you got it right, well done.</a:t>
             </a:r>
             <a:endParaRPr lang="en-US" dirty="0"/>
           </a:p>
@@ -5236,7 +5232,7 @@
           <a:p>
             <a:r>
               <a:rPr lang="en-US" dirty="0"/>
-              <a:t>We continue with Quartiles and the Interquartile Range. On this slide we have Example 2 (n = 13). Write each point on a new line, with the key term first, and explain it in your own words when we revise.</a:t>
+              <a:t>Now let us check what you have understood. Question 2: Why is the median better than the mean for Oumarou's farms? Answer in your exercise book.</a:t>
             </a:r>
             <a:endParaRPr lang="en-US" dirty="0"/>
           </a:p>
@@ -5324,7 +5320,7 @@
           <a:p>
             <a:r>
               <a:rPr lang="en-US" dirty="0"/>
-              <a:t>Copy the point on Advantage on the left, then draw the diagram on the right: a box-and-whisker plot. Give it a title and label it clearly.</a:t>
+              <a:t>The expected answer is: the outlier (45 bags) raises the mean to about 21.3, while the median (19) represents most farms. If you got it right, well done.</a:t>
             </a:r>
             <a:endParaRPr lang="en-US" dirty="0"/>
           </a:p>
@@ -5500,7 +5496,7 @@
           <a:p>
             <a:r>
               <a:rPr lang="en-US" dirty="0"/>
-              <a:t>Now let us check what you have understood. Question 1: Find the mean, median and mode of 4, 7, 7, 9, 13. Answer in your exercise book.</a:t>
+              <a:t>For those who need more practice, fill in the blanks in your exercise book. The answers are: number 1, n; number 2, mode; number 3, Q1.</a:t>
             </a:r>
             <a:endParaRPr lang="en-US" dirty="0"/>
           </a:p>
@@ -5588,7 +5584,7 @@
           <a:p>
             <a:r>
               <a:rPr lang="en-US" dirty="0"/>
-              <a:t>The expected answer is: mean = 40 ÷ 5 = 8; median = 7; mode = 7. If you got it right, well done.</a:t>
+              <a:t>For your homework: Calculate the mean of 3, 5, 7 and 9. We shall correct it at the beginning of our next lesson.</a:t>
             </a:r>
             <a:endParaRPr lang="en-US" dirty="0"/>
           </a:p>
@@ -5676,7 +5672,7 @@
           <a:p>
             <a:r>
               <a:rPr lang="en-US" dirty="0"/>
-              <a:t>Now let us check what you have understood. Question 2: Why is the median better than the mean for Oumarou's farms? Answer in your exercise book.</a:t>
+              <a:t>Our next lesson will be on Quantitative Techniques 3 (Part 2): Measures of Dispersion: Variance, Standard Deviation and Coefficient of Variation. Thank you for your attention, and see you next time.</a:t>
             </a:r>
             <a:endParaRPr lang="en-US" dirty="0"/>
           </a:p>
@@ -5764,7 +5760,7 @@
           <a:p>
             <a:r>
               <a:rPr lang="en-US" dirty="0"/>
-              <a:t>The expected answer is: the outlier (45 bags) raises the mean to about 21.3, while the median (19) represents most farms. If you got it right, well done.</a:t>
+              <a:t>Let us play the bilingual game. I say a word in English, and you give me the French word. Then we do the reverse.</a:t>
             </a:r>
             <a:endParaRPr lang="en-US" dirty="0"/>
           </a:p>
@@ -5852,7 +5848,7 @@
           <a:p>
             <a:r>
               <a:rPr lang="en-US" dirty="0"/>
-              <a:t>For those who need more practice, fill in the blanks in your exercise book. The answers are: number 1, n; number 2, mode; number 3, Q1.</a:t>
+              <a:t>I record this information in the official logbook of the class after the lesson.</a:t>
             </a:r>
             <a:endParaRPr lang="en-US" dirty="0"/>
           </a:p>
@@ -5940,7 +5936,7 @@
           <a:p>
             <a:r>
               <a:rPr lang="en-US" dirty="0"/>
-              <a:t>For your homework: Calculate the mean of 3, 5, 7 and 9. We shall correct it at the beginning of our next lesson.</a:t>
+              <a:t>I complete the second page of the logbook: the matter taught, the evaluation, the homework and the attendance.</a:t>
             </a:r>
             <a:endParaRPr lang="en-US" dirty="0"/>
           </a:p>
@@ -6028,7 +6024,7 @@
           <a:p>
             <a:r>
               <a:rPr lang="en-US" dirty="0"/>
-              <a:t>Our next lesson will be on Quantitative Techniques 3 (Part 2): Measures of Dispersion: Variance, Standard Deviation and Coefficient of Variation. Thank you for your attention, and see you next time.</a:t>
+              <a:t>This slide is for me, the teacher: it gives the timing of the lesson and what to do if the projector is not available.</a:t>
             </a:r>
             <a:endParaRPr lang="en-US" dirty="0"/>
           </a:p>
@@ -6116,7 +6112,7 @@
           <a:p>
             <a:r>
               <a:rPr lang="en-US" dirty="0"/>
-              <a:t>Let us play the bilingual game. I say a word in English, and you give me the French word. Then we do the reverse.</a:t>
+              <a:t>These are the references and picture credits used to prepare this lesson.</a:t>
             </a:r>
             <a:endParaRPr lang="en-US" dirty="0"/>
           </a:p>
@@ -6140,182 +6136,6 @@
             <a:fld id="{F7021451-1387-4CA6-816F-3879F97B5CBC}" type="slidenum">
               <a:rPr lang="en-US"/>
               <a:t>67</a:t>
-            </a:fld>
-            <a:endParaRPr lang="en-US"/>
-          </a:p>
-        </p:txBody>
-      </p:sp>
-    </p:spTree>
-    <p:extLst>
-      <p:ext uri="{BB962C8B-B14F-4D97-AF65-F5344CB8AC3E}">
-        <p14:creationId xmlns:p14="http://schemas.microsoft.com/office/powerpoint/2010/main" val="1024086991"/>
-      </p:ext>
-    </p:extLst>
-  </p:cSld>
-  <p:clrMapOvr>
-    <a:masterClrMapping/>
-  </p:clrMapOvr>
-</p:notes>
-</file>
-
-<file path=ppt/notesSlides/notesSlide68.xml><?xml version="1.0" encoding="utf-8"?>
-<p:notes xmlns:a="http://schemas.openxmlformats.org/drawingml/2006/main" xmlns:r="http://schemas.openxmlformats.org/officeDocument/2006/relationships" xmlns:p="http://schemas.openxmlformats.org/presentationml/2006/main">
-  <p:cSld>
-    <p:spTree>
-      <p:nvGrpSpPr>
-        <p:cNvPr id="1" name=""/>
-        <p:cNvGrpSpPr/>
-        <p:nvPr/>
-      </p:nvGrpSpPr>
-      <p:grpSpPr>
-        <a:xfrm>
-          <a:off x="0" y="0"/>
-          <a:ext cx="0" cy="0"/>
-          <a:chOff x="0" y="0"/>
-          <a:chExt cx="0" cy="0"/>
-        </a:xfrm>
-      </p:grpSpPr>
-      <p:sp>
-        <p:nvSpPr>
-          <p:cNvPr id="2" name="Slide Image Placeholder 1"/>
-          <p:cNvSpPr>
-            <a:spLocks noGrp="1" noRot="1" noChangeAspect="1"/>
-          </p:cNvSpPr>
-          <p:nvPr>
-            <p:ph type="sldImg"/>
-          </p:nvPr>
-        </p:nvSpPr>
-        <p:spPr/>
-      </p:sp>
-      <p:sp>
-        <p:nvSpPr>
-          <p:cNvPr id="3" name="Notes Placeholder 2"/>
-          <p:cNvSpPr>
-            <a:spLocks noGrp="1"/>
-          </p:cNvSpPr>
-          <p:nvPr>
-            <p:ph type="body" idx="1"/>
-          </p:nvPr>
-        </p:nvSpPr>
-        <p:spPr/>
-        <p:txBody>
-          <a:bodyPr/>
-          <a:lstStyle/>
-          <a:p>
-            <a:r>
-              <a:rPr lang="en-US" dirty="0"/>
-              <a:t>I record this information in the official logbook of the class after the lesson.</a:t>
-            </a:r>
-            <a:endParaRPr lang="en-US" dirty="0"/>
-          </a:p>
-        </p:txBody>
-      </p:sp>
-      <p:sp>
-        <p:nvSpPr>
-          <p:cNvPr id="4" name="Slide Number Placeholder 3"/>
-          <p:cNvSpPr>
-            <a:spLocks noGrp="1"/>
-          </p:cNvSpPr>
-          <p:nvPr>
-            <p:ph type="sldNum" sz="quarter" idx="10"/>
-          </p:nvPr>
-        </p:nvSpPr>
-        <p:spPr/>
-        <p:txBody>
-          <a:bodyPr/>
-          <a:lstStyle/>
-          <a:p>
-            <a:fld id="{F7021451-1387-4CA6-816F-3879F97B5CBC}" type="slidenum">
-              <a:rPr lang="en-US"/>
-              <a:t>68</a:t>
-            </a:fld>
-            <a:endParaRPr lang="en-US"/>
-          </a:p>
-        </p:txBody>
-      </p:sp>
-    </p:spTree>
-    <p:extLst>
-      <p:ext uri="{BB962C8B-B14F-4D97-AF65-F5344CB8AC3E}">
-        <p14:creationId xmlns:p14="http://schemas.microsoft.com/office/powerpoint/2010/main" val="1024086991"/>
-      </p:ext>
-    </p:extLst>
-  </p:cSld>
-  <p:clrMapOvr>
-    <a:masterClrMapping/>
-  </p:clrMapOvr>
-</p:notes>
-</file>
-
-<file path=ppt/notesSlides/notesSlide69.xml><?xml version="1.0" encoding="utf-8"?>
-<p:notes xmlns:a="http://schemas.openxmlformats.org/drawingml/2006/main" xmlns:r="http://schemas.openxmlformats.org/officeDocument/2006/relationships" xmlns:p="http://schemas.openxmlformats.org/presentationml/2006/main">
-  <p:cSld>
-    <p:spTree>
-      <p:nvGrpSpPr>
-        <p:cNvPr id="1" name=""/>
-        <p:cNvGrpSpPr/>
-        <p:nvPr/>
-      </p:nvGrpSpPr>
-      <p:grpSpPr>
-        <a:xfrm>
-          <a:off x="0" y="0"/>
-          <a:ext cx="0" cy="0"/>
-          <a:chOff x="0" y="0"/>
-          <a:chExt cx="0" cy="0"/>
-        </a:xfrm>
-      </p:grpSpPr>
-      <p:sp>
-        <p:nvSpPr>
-          <p:cNvPr id="2" name="Slide Image Placeholder 1"/>
-          <p:cNvSpPr>
-            <a:spLocks noGrp="1" noRot="1" noChangeAspect="1"/>
-          </p:cNvSpPr>
-          <p:nvPr>
-            <p:ph type="sldImg"/>
-          </p:nvPr>
-        </p:nvSpPr>
-        <p:spPr/>
-      </p:sp>
-      <p:sp>
-        <p:nvSpPr>
-          <p:cNvPr id="3" name="Notes Placeholder 2"/>
-          <p:cNvSpPr>
-            <a:spLocks noGrp="1"/>
-          </p:cNvSpPr>
-          <p:nvPr>
-            <p:ph type="body" idx="1"/>
-          </p:nvPr>
-        </p:nvSpPr>
-        <p:spPr/>
-        <p:txBody>
-          <a:bodyPr/>
-          <a:lstStyle/>
-          <a:p>
-            <a:r>
-              <a:rPr lang="en-US" dirty="0"/>
-              <a:t>I complete the second page of the logbook: the matter taught, the evaluation, the homework and the attendance.</a:t>
-            </a:r>
-            <a:endParaRPr lang="en-US" dirty="0"/>
-          </a:p>
-        </p:txBody>
-      </p:sp>
-      <p:sp>
-        <p:nvSpPr>
-          <p:cNvPr id="4" name="Slide Number Placeholder 3"/>
-          <p:cNvSpPr>
-            <a:spLocks noGrp="1"/>
-          </p:cNvSpPr>
-          <p:nvPr>
-            <p:ph type="sldNum" sz="quarter" idx="10"/>
-          </p:nvPr>
-        </p:nvSpPr>
-        <p:spPr/>
-        <p:txBody>
-          <a:bodyPr/>
-          <a:lstStyle/>
-          <a:p>
-            <a:fld id="{F7021451-1387-4CA6-816F-3879F97B5CBC}" type="slidenum">
-              <a:rPr lang="en-US"/>
-              <a:t>69</a:t>
             </a:fld>
             <a:endParaRPr lang="en-US"/>
           </a:p>
@@ -6404,182 +6224,6 @@
             <a:fld id="{F7021451-1387-4CA6-816F-3879F97B5CBC}" type="slidenum">
               <a:rPr lang="en-US"/>
               <a:t>7</a:t>
-            </a:fld>
-            <a:endParaRPr lang="en-US"/>
-          </a:p>
-        </p:txBody>
-      </p:sp>
-    </p:spTree>
-    <p:extLst>
-      <p:ext uri="{BB962C8B-B14F-4D97-AF65-F5344CB8AC3E}">
-        <p14:creationId xmlns:p14="http://schemas.microsoft.com/office/powerpoint/2010/main" val="1024086991"/>
-      </p:ext>
-    </p:extLst>
-  </p:cSld>
-  <p:clrMapOvr>
-    <a:masterClrMapping/>
-  </p:clrMapOvr>
-</p:notes>
-</file>
-
-<file path=ppt/notesSlides/notesSlide70.xml><?xml version="1.0" encoding="utf-8"?>
-<p:notes xmlns:a="http://schemas.openxmlformats.org/drawingml/2006/main" xmlns:r="http://schemas.openxmlformats.org/officeDocument/2006/relationships" xmlns:p="http://schemas.openxmlformats.org/presentationml/2006/main">
-  <p:cSld>
-    <p:spTree>
-      <p:nvGrpSpPr>
-        <p:cNvPr id="1" name=""/>
-        <p:cNvGrpSpPr/>
-        <p:nvPr/>
-      </p:nvGrpSpPr>
-      <p:grpSpPr>
-        <a:xfrm>
-          <a:off x="0" y="0"/>
-          <a:ext cx="0" cy="0"/>
-          <a:chOff x="0" y="0"/>
-          <a:chExt cx="0" cy="0"/>
-        </a:xfrm>
-      </p:grpSpPr>
-      <p:sp>
-        <p:nvSpPr>
-          <p:cNvPr id="2" name="Slide Image Placeholder 1"/>
-          <p:cNvSpPr>
-            <a:spLocks noGrp="1" noRot="1" noChangeAspect="1"/>
-          </p:cNvSpPr>
-          <p:nvPr>
-            <p:ph type="sldImg"/>
-          </p:nvPr>
-        </p:nvSpPr>
-        <p:spPr/>
-      </p:sp>
-      <p:sp>
-        <p:nvSpPr>
-          <p:cNvPr id="3" name="Notes Placeholder 2"/>
-          <p:cNvSpPr>
-            <a:spLocks noGrp="1"/>
-          </p:cNvSpPr>
-          <p:nvPr>
-            <p:ph type="body" idx="1"/>
-          </p:nvPr>
-        </p:nvSpPr>
-        <p:spPr/>
-        <p:txBody>
-          <a:bodyPr/>
-          <a:lstStyle/>
-          <a:p>
-            <a:r>
-              <a:rPr lang="en-US" dirty="0"/>
-              <a:t>This slide is for me, the teacher: it gives the timing of the lesson and what to do if the projector is not available.</a:t>
-            </a:r>
-            <a:endParaRPr lang="en-US" dirty="0"/>
-          </a:p>
-        </p:txBody>
-      </p:sp>
-      <p:sp>
-        <p:nvSpPr>
-          <p:cNvPr id="4" name="Slide Number Placeholder 3"/>
-          <p:cNvSpPr>
-            <a:spLocks noGrp="1"/>
-          </p:cNvSpPr>
-          <p:nvPr>
-            <p:ph type="sldNum" sz="quarter" idx="10"/>
-          </p:nvPr>
-        </p:nvSpPr>
-        <p:spPr/>
-        <p:txBody>
-          <a:bodyPr/>
-          <a:lstStyle/>
-          <a:p>
-            <a:fld id="{F7021451-1387-4CA6-816F-3879F97B5CBC}" type="slidenum">
-              <a:rPr lang="en-US"/>
-              <a:t>70</a:t>
-            </a:fld>
-            <a:endParaRPr lang="en-US"/>
-          </a:p>
-        </p:txBody>
-      </p:sp>
-    </p:spTree>
-    <p:extLst>
-      <p:ext uri="{BB962C8B-B14F-4D97-AF65-F5344CB8AC3E}">
-        <p14:creationId xmlns:p14="http://schemas.microsoft.com/office/powerpoint/2010/main" val="1024086991"/>
-      </p:ext>
-    </p:extLst>
-  </p:cSld>
-  <p:clrMapOvr>
-    <a:masterClrMapping/>
-  </p:clrMapOvr>
-</p:notes>
-</file>
-
-<file path=ppt/notesSlides/notesSlide71.xml><?xml version="1.0" encoding="utf-8"?>
-<p:notes xmlns:a="http://schemas.openxmlformats.org/drawingml/2006/main" xmlns:r="http://schemas.openxmlformats.org/officeDocument/2006/relationships" xmlns:p="http://schemas.openxmlformats.org/presentationml/2006/main">
-  <p:cSld>
-    <p:spTree>
-      <p:nvGrpSpPr>
-        <p:cNvPr id="1" name=""/>
-        <p:cNvGrpSpPr/>
-        <p:nvPr/>
-      </p:nvGrpSpPr>
-      <p:grpSpPr>
-        <a:xfrm>
-          <a:off x="0" y="0"/>
-          <a:ext cx="0" cy="0"/>
-          <a:chOff x="0" y="0"/>
-          <a:chExt cx="0" cy="0"/>
-        </a:xfrm>
-      </p:grpSpPr>
-      <p:sp>
-        <p:nvSpPr>
-          <p:cNvPr id="2" name="Slide Image Placeholder 1"/>
-          <p:cNvSpPr>
-            <a:spLocks noGrp="1" noRot="1" noChangeAspect="1"/>
-          </p:cNvSpPr>
-          <p:nvPr>
-            <p:ph type="sldImg"/>
-          </p:nvPr>
-        </p:nvSpPr>
-        <p:spPr/>
-      </p:sp>
-      <p:sp>
-        <p:nvSpPr>
-          <p:cNvPr id="3" name="Notes Placeholder 2"/>
-          <p:cNvSpPr>
-            <a:spLocks noGrp="1"/>
-          </p:cNvSpPr>
-          <p:nvPr>
-            <p:ph type="body" idx="1"/>
-          </p:nvPr>
-        </p:nvSpPr>
-        <p:spPr/>
-        <p:txBody>
-          <a:bodyPr/>
-          <a:lstStyle/>
-          <a:p>
-            <a:r>
-              <a:rPr lang="en-US" dirty="0"/>
-              <a:t>These are the references and picture credits used to prepare this lesson.</a:t>
-            </a:r>
-            <a:endParaRPr lang="en-US" dirty="0"/>
-          </a:p>
-        </p:txBody>
-      </p:sp>
-      <p:sp>
-        <p:nvSpPr>
-          <p:cNvPr id="4" name="Slide Number Placeholder 3"/>
-          <p:cNvSpPr>
-            <a:spLocks noGrp="1"/>
-          </p:cNvSpPr>
-          <p:nvPr>
-            <p:ph type="sldNum" sz="quarter" idx="10"/>
-          </p:nvPr>
-        </p:nvSpPr>
-        <p:spPr/>
-        <p:txBody>
-          <a:bodyPr/>
-          <a:lstStyle/>
-          <a:p>
-            <a:fld id="{F7021451-1387-4CA6-816F-3879F97B5CBC}" type="slidenum">
-              <a:rPr lang="en-US"/>
-              <a:t>71</a:t>
             </a:fld>
             <a:endParaRPr lang="en-US"/>
           </a:p>
@@ -16263,7 +15907,7 @@
         <p:spPr>
           <a:xfrm>
             <a:off x="365760" y="1737360"/>
-            <a:ext cx="5120640" cy="457200"/>
+            <a:ext cx="6035040" cy="457200"/>
           </a:xfrm>
           <a:prstGeom prst="rect">
             <a:avLst/>
@@ -16304,7 +15948,7 @@
         <p:spPr>
           <a:xfrm>
             <a:off x="365760" y="2240280"/>
-            <a:ext cx="4846320" cy="4160520"/>
+            <a:ext cx="6035040" cy="4160520"/>
           </a:xfrm>
           <a:prstGeom prst="rect">
             <a:avLst/>
@@ -16323,7 +15967,7 @@
               <a:buNone/>
             </a:pPr>
             <a:r>
-              <a:rPr lang="en-US" sz="3600" i="1" dirty="0">
+              <a:rPr lang="en-US" sz="3000" i="1" dirty="0">
                 <a:solidFill>
                   <a:srgbClr val="111111"/>
                 </a:solidFill>
@@ -16333,7 +15977,7 @@
               </a:rPr>
               <a:t>The mean is calculated and assessed as follows:</a:t>
             </a:r>
-            <a:endParaRPr lang="en-US" sz="3600" dirty="0"/>
+            <a:endParaRPr lang="en-US" sz="3000" dirty="0"/>
           </a:p>
           <a:p>
             <a:pPr algn="l" indent="0" marL="0">
@@ -16343,7 +15987,7 @@
               <a:buNone/>
             </a:pPr>
             <a:r>
-              <a:rPr lang="en-US" sz="3600" b="1" dirty="0">
+              <a:rPr lang="en-US" sz="3000" b="1" dirty="0">
                 <a:solidFill>
                   <a:srgbClr val="111111"/>
                 </a:solidFill>
@@ -16351,7 +15995,7 @@
                 <a:ea typeface="Times New Roman" pitchFamily="34" charset="-122"/>
                 <a:cs typeface="Times New Roman" pitchFamily="34" charset="-120"/>
               </a:rPr>
-              <a:t>Formula: </a:t>
+              <a:t>Formula and example: </a:t>
             </a:r>
             <a:pPr algn="l" indent="0" marL="0">
               <a:spcAft>
@@ -16360,7 +16004,7 @@
               <a:buNone/>
             </a:pPr>
             <a:r>
-              <a:rPr lang="en-US" sz="3600" dirty="0">
+              <a:rPr lang="en-US" sz="3000" dirty="0">
                 <a:solidFill>
                   <a:srgbClr val="111111"/>
                 </a:solidFill>
@@ -16368,9 +16012,9 @@
                 <a:ea typeface="Times New Roman" pitchFamily="34" charset="-122"/>
                 <a:cs typeface="Times New Roman" pitchFamily="34" charset="-120"/>
               </a:rPr>
-              <a:t>Mean (x̄) = Σx ÷ n, where Σx is the sum of the values and n the number of values.</a:t>
-            </a:r>
-            <a:endParaRPr lang="en-US" sz="3600" dirty="0"/>
+              <a:t>Mean (x̄) = Σx ÷ n, where Σx is the sum of the values and n the number of values. For the services of 10 villages (3, 10, 6, 8, 4, 5, 7, 18, 2, 1), the mean is 64 ÷ 10 = 6.4 services.</a:t>
+            </a:r>
+            <a:endParaRPr lang="en-US" sz="3000" dirty="0"/>
           </a:p>
         </p:txBody>
       </p:sp>
@@ -16390,8 +16034,8 @@
         </p:blipFill>
         <p:spPr>
           <a:xfrm>
-            <a:off x="5349240" y="2617506"/>
-            <a:ext cx="6659575" cy="2601397"/>
+            <a:off x="6537960" y="2849678"/>
+            <a:ext cx="5470855" cy="2137053"/>
           </a:xfrm>
           <a:prstGeom prst="rect">
             <a:avLst/>
@@ -16406,8 +16050,8 @@
         </p:nvSpPr>
         <p:spPr>
           <a:xfrm>
-            <a:off x="5349240" y="6089904"/>
-            <a:ext cx="6659575" cy="347472"/>
+            <a:off x="6537960" y="6089904"/>
+            <a:ext cx="5470855" cy="347472"/>
           </a:xfrm>
           <a:prstGeom prst="rect">
             <a:avLst/>
@@ -16431,7 +16075,7 @@
                 <a:ea typeface="Times New Roman" pitchFamily="34" charset="-122"/>
                 <a:cs typeface="Times New Roman" pitchFamily="34" charset="-120"/>
               </a:rPr>
-              <a:t>Illustration: examples of the mean</a:t>
+              <a:t>Illustration: the mean</a:t>
             </a:r>
             <a:endParaRPr lang="en-US" sz="1600" dirty="0"/>
           </a:p>
@@ -16805,7 +16449,7 @@
         <p:spPr>
           <a:xfrm>
             <a:off x="0" y="658368"/>
-            <a:ext cx="3840480" cy="5833872"/>
+            <a:ext cx="5120640" cy="5833872"/>
           </a:xfrm>
           <a:prstGeom prst="rect">
             <a:avLst/>
@@ -16820,8 +16464,8 @@
         </p:nvSpPr>
         <p:spPr>
           <a:xfrm>
-            <a:off x="4069080" y="1005840"/>
-            <a:ext cx="7802575" cy="731520"/>
+            <a:off x="5349240" y="1005840"/>
+            <a:ext cx="6522415" cy="731520"/>
           </a:xfrm>
           <a:prstGeom prst="rect">
             <a:avLst/>
@@ -16861,8 +16505,8 @@
         </p:nvSpPr>
         <p:spPr>
           <a:xfrm>
-            <a:off x="4069080" y="1737360"/>
-            <a:ext cx="7802575" cy="457200"/>
+            <a:off x="5349240" y="1737360"/>
+            <a:ext cx="6522415" cy="457200"/>
           </a:xfrm>
           <a:prstGeom prst="rect">
             <a:avLst/>
@@ -16900,8 +16544,8 @@
         </p:nvSpPr>
         <p:spPr>
           <a:xfrm>
-            <a:off x="4069080" y="2240280"/>
-            <a:ext cx="7802575" cy="4206240"/>
+            <a:off x="5349240" y="2240280"/>
+            <a:ext cx="6522415" cy="4206240"/>
           </a:xfrm>
           <a:prstGeom prst="rect">
             <a:avLst/>
@@ -16928,7 +16572,7 @@
                 <a:ea typeface="Times New Roman" pitchFamily="34" charset="-122"/>
                 <a:cs typeface="Times New Roman" pitchFamily="34" charset="-120"/>
               </a:rPr>
-              <a:t>Example 1: </a:t>
+              <a:t>Example of station A: </a:t>
             </a:r>
             <a:pPr algn="l" indent="0" marL="0">
               <a:spcAft>
@@ -16945,44 +16589,7 @@
                 <a:ea typeface="Times New Roman" pitchFamily="34" charset="-122"/>
                 <a:cs typeface="Times New Roman" pitchFamily="34" charset="-120"/>
               </a:rPr>
-              <a:t>Services in 10 villages (3, 10, 6, 8, 4, 5, 7, 18, 2, 1): 64 ÷ 10 = 6.4 services.</a:t>
-            </a:r>
-            <a:endParaRPr lang="en-US" sz="4000" dirty="0"/>
-          </a:p>
-          <a:p>
-            <a:pPr algn="l" indent="0" marL="0">
-              <a:spcAft>
-                <a:spcPts val="800"/>
-              </a:spcAft>
-              <a:buNone/>
-            </a:pPr>
-            <a:r>
-              <a:rPr lang="en-US" sz="4000" b="1" dirty="0">
-                <a:solidFill>
-                  <a:srgbClr val="111111"/>
-                </a:solidFill>
-                <a:latin typeface="Times New Roman" pitchFamily="34" charset="0"/>
-                <a:ea typeface="Times New Roman" pitchFamily="34" charset="-122"/>
-                <a:cs typeface="Times New Roman" pitchFamily="34" charset="-120"/>
-              </a:rPr>
-              <a:t>Example 2: </a:t>
-            </a:r>
-            <a:pPr algn="l" indent="0" marL="0">
-              <a:spcAft>
-                <a:spcPts val="800"/>
-              </a:spcAft>
-              <a:buNone/>
-            </a:pPr>
-            <a:r>
-              <a:rPr lang="en-US" sz="4000" dirty="0">
-                <a:solidFill>
-                  <a:srgbClr val="111111"/>
-                </a:solidFill>
-                <a:latin typeface="Times New Roman" pitchFamily="34" charset="0"/>
-                <a:ea typeface="Times New Roman" pitchFamily="34" charset="-122"/>
-                <a:cs typeface="Times New Roman" pitchFamily="34" charset="-120"/>
-              </a:rPr>
-              <a:t>Monthly temperatures of station A: Σx = 322 for 12 months, so the mean is about 26.8 °C.</a:t>
+              <a:t>The twelve monthly temperatures of station A add up to Σx = 322. The mean temperature is therefore 322 ÷ 12 ≈ 26.8 °C.</a:t>
             </a:r>
             <a:endParaRPr lang="en-US" sz="4000" dirty="0"/>
           </a:p>
@@ -17117,7 +16724,7 @@
         <p:spPr>
           <a:xfrm>
             <a:off x="0" y="658368"/>
-            <a:ext cx="1463040" cy="5833872"/>
+            <a:ext cx="5120640" cy="5833872"/>
           </a:xfrm>
           <a:prstGeom prst="rect">
             <a:avLst/>
@@ -17132,8 +16739,8 @@
         </p:nvSpPr>
         <p:spPr>
           <a:xfrm>
-            <a:off x="1691640" y="1005840"/>
-            <a:ext cx="10180015" cy="731520"/>
+            <a:off x="5349240" y="1005840"/>
+            <a:ext cx="6522415" cy="731520"/>
           </a:xfrm>
           <a:prstGeom prst="rect">
             <a:avLst/>
@@ -17173,8 +16780,8 @@
         </p:nvSpPr>
         <p:spPr>
           <a:xfrm>
-            <a:off x="1691640" y="1737360"/>
-            <a:ext cx="10180015" cy="457200"/>
+            <a:off x="5349240" y="1737360"/>
+            <a:ext cx="6522415" cy="457200"/>
           </a:xfrm>
           <a:prstGeom prst="rect">
             <a:avLst/>
@@ -17198,7 +16805,7 @@
                 <a:ea typeface="Times New Roman" pitchFamily="34" charset="-122"/>
                 <a:cs typeface="Times New Roman" pitchFamily="34" charset="-120"/>
               </a:rPr>
-              <a:t>A) The Mean (continued)</a:t>
+              <a:t>A) The Mean</a:t>
             </a:r>
             <a:endParaRPr lang="en-US" sz="3200" dirty="0"/>
           </a:p>
@@ -17212,8 +16819,8 @@
         </p:nvSpPr>
         <p:spPr>
           <a:xfrm>
-            <a:off x="1691640" y="2240280"/>
-            <a:ext cx="10180015" cy="4206240"/>
+            <a:off x="5349240" y="2240280"/>
+            <a:ext cx="6522415" cy="4206240"/>
           </a:xfrm>
           <a:prstGeom prst="rect">
             <a:avLst/>
@@ -17240,17 +16847,13 @@
                 <a:ea typeface="Times New Roman" pitchFamily="34" charset="-122"/>
                 <a:cs typeface="Times New Roman" pitchFamily="34" charset="-120"/>
               </a:rPr>
-              <a:t>Advantages:</a:t>
-            </a:r>
-            <a:endParaRPr lang="en-US" sz="4000" dirty="0"/>
-          </a:p>
-          <a:p>
-            <a:pPr algn="l" marL="342900" indent="-342900">
+              <a:t>Advantages: </a:t>
+            </a:r>
+            <a:pPr algn="l" indent="0" marL="0">
               <a:spcAft>
                 <a:spcPts val="800"/>
               </a:spcAft>
-              <a:buSzPct val="100000"/>
-              <a:buChar char="•"/>
+              <a:buNone/>
             </a:pPr>
             <a:r>
               <a:rPr lang="en-US" sz="4000" dirty="0">
@@ -17261,70 +16864,7 @@
                 <a:ea typeface="Times New Roman" pitchFamily="34" charset="-122"/>
                 <a:cs typeface="Times New Roman" pitchFamily="34" charset="-120"/>
               </a:rPr>
-              <a:t>It is familiar and easy to understand.</a:t>
-            </a:r>
-            <a:endParaRPr lang="en-US" sz="4000" dirty="0"/>
-          </a:p>
-          <a:p>
-            <a:pPr algn="l" marL="342900" indent="-342900">
-              <a:spcAft>
-                <a:spcPts val="800"/>
-              </a:spcAft>
-              <a:buSzPct val="100000"/>
-              <a:buChar char="•"/>
-            </a:pPr>
-            <a:r>
-              <a:rPr lang="en-US" sz="4000" dirty="0">
-                <a:solidFill>
-                  <a:srgbClr val="111111"/>
-                </a:solidFill>
-                <a:latin typeface="Times New Roman" pitchFamily="34" charset="0"/>
-                <a:ea typeface="Times New Roman" pitchFamily="34" charset="-122"/>
-                <a:cs typeface="Times New Roman" pitchFamily="34" charset="-120"/>
-              </a:rPr>
-              <a:t>It uses every value.</a:t>
-            </a:r>
-            <a:endParaRPr lang="en-US" sz="4000" dirty="0"/>
-          </a:p>
-          <a:p>
-            <a:pPr algn="l" marL="342900" indent="-342900">
-              <a:spcAft>
-                <a:spcPts val="800"/>
-              </a:spcAft>
-              <a:buSzPct val="100000"/>
-              <a:buChar char="•"/>
-            </a:pPr>
-            <a:r>
-              <a:rPr lang="en-US" sz="4000" dirty="0">
-                <a:solidFill>
-                  <a:srgbClr val="111111"/>
-                </a:solidFill>
-                <a:latin typeface="Times New Roman" pitchFamily="34" charset="0"/>
-                <a:ea typeface="Times New Roman" pitchFamily="34" charset="-122"/>
-                <a:cs typeface="Times New Roman" pitchFamily="34" charset="-120"/>
-              </a:rPr>
-              <a:t>There is only one mean.</a:t>
-            </a:r>
-            <a:endParaRPr lang="en-US" sz="4000" dirty="0"/>
-          </a:p>
-          <a:p>
-            <a:pPr algn="l" marL="342900" indent="-342900">
-              <a:spcAft>
-                <a:spcPts val="800"/>
-              </a:spcAft>
-              <a:buSzPct val="100000"/>
-              <a:buChar char="•"/>
-            </a:pPr>
-            <a:r>
-              <a:rPr lang="en-US" sz="4000" dirty="0">
-                <a:solidFill>
-                  <a:srgbClr val="111111"/>
-                </a:solidFill>
-                <a:latin typeface="Times New Roman" pitchFamily="34" charset="0"/>
-                <a:ea typeface="Times New Roman" pitchFamily="34" charset="-122"/>
-                <a:cs typeface="Times New Roman" pitchFamily="34" charset="-120"/>
-              </a:rPr>
-              <a:t>It is needed for the standard deviation.</a:t>
+              <a:t>The mean is familiar, easy to understand and uses every value of the set. It is also needed to calculate the standard deviation.</a:t>
             </a:r>
             <a:endParaRPr lang="en-US" sz="4000" dirty="0"/>
           </a:p>
@@ -17540,7 +17080,7 @@
                 <a:ea typeface="Times New Roman" pitchFamily="34" charset="-122"/>
                 <a:cs typeface="Times New Roman" pitchFamily="34" charset="-120"/>
               </a:rPr>
-              <a:t>A) The Mean (continued)</a:t>
+              <a:t>A) The Mean</a:t>
             </a:r>
             <a:endParaRPr lang="en-US" sz="3200" dirty="0"/>
           </a:p>
@@ -17582,17 +17122,13 @@
                 <a:ea typeface="Times New Roman" pitchFamily="34" charset="-122"/>
                 <a:cs typeface="Times New Roman" pitchFamily="34" charset="-120"/>
               </a:rPr>
-              <a:t>Disadvantages:</a:t>
-            </a:r>
-            <a:endParaRPr lang="en-US" sz="4000" dirty="0"/>
-          </a:p>
-          <a:p>
-            <a:pPr algn="l" marL="342900" indent="-342900">
+              <a:t>Disadvantages: </a:t>
+            </a:r>
+            <a:pPr algn="l" indent="0" marL="0">
               <a:spcAft>
                 <a:spcPts val="800"/>
               </a:spcAft>
-              <a:buSzPct val="100000"/>
-              <a:buChar char="•"/>
+              <a:buNone/>
             </a:pPr>
             <a:r>
               <a:rPr lang="en-US" sz="4000" dirty="0">
@@ -17603,49 +17139,7 @@
                 <a:ea typeface="Times New Roman" pitchFamily="34" charset="-122"/>
                 <a:cs typeface="Times New Roman" pitchFamily="34" charset="-120"/>
               </a:rPr>
-              <a:t>It is distorted by outliers, as the 45-bag farm.</a:t>
-            </a:r>
-            <a:endParaRPr lang="en-US" sz="4000" dirty="0"/>
-          </a:p>
-          <a:p>
-            <a:pPr algn="l" marL="342900" indent="-342900">
-              <a:spcAft>
-                <a:spcPts val="800"/>
-              </a:spcAft>
-              <a:buSzPct val="100000"/>
-              <a:buChar char="•"/>
-            </a:pPr>
-            <a:r>
-              <a:rPr lang="en-US" sz="4000" dirty="0">
-                <a:solidFill>
-                  <a:srgbClr val="111111"/>
-                </a:solidFill>
-                <a:latin typeface="Times New Roman" pitchFamily="34" charset="0"/>
-                <a:ea typeface="Times New Roman" pitchFamily="34" charset="-122"/>
-                <a:cs typeface="Times New Roman" pitchFamily="34" charset="-120"/>
-              </a:rPr>
-              <a:t>It may not be an actual value.</a:t>
-            </a:r>
-            <a:endParaRPr lang="en-US" sz="4000" dirty="0"/>
-          </a:p>
-          <a:p>
-            <a:pPr algn="l" marL="342900" indent="-342900">
-              <a:spcAft>
-                <a:spcPts val="800"/>
-              </a:spcAft>
-              <a:buSzPct val="100000"/>
-              <a:buChar char="•"/>
-            </a:pPr>
-            <a:r>
-              <a:rPr lang="en-US" sz="4000" dirty="0">
-                <a:solidFill>
-                  <a:srgbClr val="111111"/>
-                </a:solidFill>
-                <a:latin typeface="Times New Roman" pitchFamily="34" charset="0"/>
-                <a:ea typeface="Times New Roman" pitchFamily="34" charset="-122"/>
-                <a:cs typeface="Times New Roman" pitchFamily="34" charset="-120"/>
-              </a:rPr>
-              <a:t>It cannot be used for categories.</a:t>
+              <a:t>It is distorted by outliers: for 3, 4, 5, 6 and 45 bags, the mean of 12.6 bags does not represent most farms. It may also not be an actual value and cannot be used for categories.</a:t>
             </a:r>
             <a:endParaRPr lang="en-US" sz="4000" dirty="0"/>
           </a:p>
@@ -17813,7 +17307,7 @@
         <p:spPr>
           <a:xfrm>
             <a:off x="365760" y="1737360"/>
-            <a:ext cx="5120640" cy="457200"/>
+            <a:ext cx="6035040" cy="457200"/>
           </a:xfrm>
           <a:prstGeom prst="rect">
             <a:avLst/>
@@ -17854,7 +17348,7 @@
         <p:spPr>
           <a:xfrm>
             <a:off x="365760" y="2240280"/>
-            <a:ext cx="4846320" cy="4160520"/>
+            <a:ext cx="6035040" cy="4160520"/>
           </a:xfrm>
           <a:prstGeom prst="rect">
             <a:avLst/>
@@ -17918,7 +17412,7 @@
                 <a:ea typeface="Times New Roman" pitchFamily="34" charset="-122"/>
                 <a:cs typeface="Times New Roman" pitchFamily="34" charset="-120"/>
               </a:rPr>
-              <a:t>Order the values, then take the value in position (n + 1) ÷ 2.</a:t>
+              <a:t>Put the values in order, then take the value in position (n + 1) ÷ 2. The median is the middle value of the set.</a:t>
             </a:r>
             <a:endParaRPr lang="en-US" sz="3600" dirty="0"/>
           </a:p>
@@ -17940,8 +17434,8 @@
         </p:blipFill>
         <p:spPr>
           <a:xfrm>
-            <a:off x="5349240" y="2617506"/>
-            <a:ext cx="6659575" cy="2601397"/>
+            <a:off x="6537960" y="2849678"/>
+            <a:ext cx="5470855" cy="2137053"/>
           </a:xfrm>
           <a:prstGeom prst="rect">
             <a:avLst/>
@@ -17956,8 +17450,8 @@
         </p:nvSpPr>
         <p:spPr>
           <a:xfrm>
-            <a:off x="5349240" y="6089904"/>
-            <a:ext cx="6659575" cy="347472"/>
+            <a:off x="6537960" y="6089904"/>
+            <a:ext cx="5470855" cy="347472"/>
           </a:xfrm>
           <a:prstGeom prst="rect">
             <a:avLst/>
@@ -17981,7 +17475,7 @@
                 <a:ea typeface="Times New Roman" pitchFamily="34" charset="-122"/>
                 <a:cs typeface="Times New Roman" pitchFamily="34" charset="-120"/>
               </a:rPr>
-              <a:t>Illustration: finding the median</a:t>
+              <a:t>Illustration: the median</a:t>
             </a:r>
             <a:endParaRPr lang="en-US" sz="1600" dirty="0"/>
           </a:p>
@@ -18239,7 +17733,7 @@
                 <a:ea typeface="Times New Roman" pitchFamily="34" charset="-122"/>
                 <a:cs typeface="Times New Roman" pitchFamily="34" charset="-120"/>
               </a:rPr>
-              <a:t>Odd number of values: </a:t>
+              <a:t>Odd and even numbers of values: </a:t>
             </a:r>
             <a:pPr algn="l" indent="0" marL="0">
               <a:spcAft>
@@ -18256,44 +17750,7 @@
                 <a:ea typeface="Times New Roman" pitchFamily="34" charset="-122"/>
                 <a:cs typeface="Times New Roman" pitchFamily="34" charset="-120"/>
               </a:rPr>
-              <a:t>3, 4, 5, 6, 8, 8, 10: position (7 + 1) ÷ 2 = 4th, so the median is 6.</a:t>
-            </a:r>
-            <a:endParaRPr lang="en-US" sz="4000" dirty="0"/>
-          </a:p>
-          <a:p>
-            <a:pPr algn="l" indent="0" marL="0">
-              <a:spcAft>
-                <a:spcPts val="800"/>
-              </a:spcAft>
-              <a:buNone/>
-            </a:pPr>
-            <a:r>
-              <a:rPr lang="en-US" sz="4000" b="1" dirty="0">
-                <a:solidFill>
-                  <a:srgbClr val="111111"/>
-                </a:solidFill>
-                <a:latin typeface="Times New Roman" pitchFamily="34" charset="0"/>
-                <a:ea typeface="Times New Roman" pitchFamily="34" charset="-122"/>
-                <a:cs typeface="Times New Roman" pitchFamily="34" charset="-120"/>
-              </a:rPr>
-              <a:t>Even number of values: </a:t>
-            </a:r>
-            <a:pPr algn="l" indent="0" marL="0">
-              <a:spcAft>
-                <a:spcPts val="800"/>
-              </a:spcAft>
-              <a:buNone/>
-            </a:pPr>
-            <a:r>
-              <a:rPr lang="en-US" sz="4000" dirty="0">
-                <a:solidFill>
-                  <a:srgbClr val="111111"/>
-                </a:solidFill>
-                <a:latin typeface="Times New Roman" pitchFamily="34" charset="0"/>
-                <a:ea typeface="Times New Roman" pitchFamily="34" charset="-122"/>
-                <a:cs typeface="Times New Roman" pitchFamily="34" charset="-120"/>
-              </a:rPr>
-              <a:t>2, 3, 4, 5, 6, 7, 9, 12: the median is the mean of the 4th and 5th values, (5 + 6) ÷ 2 = 5.5.</a:t>
+              <a:t>For 3, 4, 5, 6, 8, 8, 10, the position is (7 + 1) ÷ 2 = 4th, so the median is 6. For 2, 3, 4, 5, 6, 7, 9, 12, the median is the mean of the 4th and 5th values, (5 + 6) ÷ 2 = 5.5.</a:t>
             </a:r>
             <a:endParaRPr lang="en-US" sz="4000" dirty="0"/>
           </a:p>
@@ -18428,7 +17885,7 @@
         <p:spPr>
           <a:xfrm>
             <a:off x="0" y="658368"/>
-            <a:ext cx="1463040" cy="5833872"/>
+            <a:ext cx="3840480" cy="5833872"/>
           </a:xfrm>
           <a:prstGeom prst="rect">
             <a:avLst/>
@@ -18443,8 +17900,8 @@
         </p:nvSpPr>
         <p:spPr>
           <a:xfrm>
-            <a:off x="1691640" y="1005840"/>
-            <a:ext cx="10180015" cy="731520"/>
+            <a:off x="4069080" y="1005840"/>
+            <a:ext cx="7802575" cy="731520"/>
           </a:xfrm>
           <a:prstGeom prst="rect">
             <a:avLst/>
@@ -18484,8 +17941,8 @@
         </p:nvSpPr>
         <p:spPr>
           <a:xfrm>
-            <a:off x="1691640" y="1737360"/>
-            <a:ext cx="10180015" cy="457200"/>
+            <a:off x="4069080" y="1737360"/>
+            <a:ext cx="7802575" cy="457200"/>
           </a:xfrm>
           <a:prstGeom prst="rect">
             <a:avLst/>
@@ -18509,7 +17966,7 @@
                 <a:ea typeface="Times New Roman" pitchFamily="34" charset="-122"/>
                 <a:cs typeface="Times New Roman" pitchFamily="34" charset="-120"/>
               </a:rPr>
-              <a:t>B) The Median (continued)</a:t>
+              <a:t>B) The Median</a:t>
             </a:r>
             <a:endParaRPr lang="en-US" sz="3200" dirty="0"/>
           </a:p>
@@ -18523,8 +17980,8 @@
         </p:nvSpPr>
         <p:spPr>
           <a:xfrm>
-            <a:off x="1691640" y="2240280"/>
-            <a:ext cx="10180015" cy="4206240"/>
+            <a:off x="4069080" y="2240280"/>
+            <a:ext cx="7802575" cy="4206240"/>
           </a:xfrm>
           <a:prstGeom prst="rect">
             <a:avLst/>
@@ -18551,7 +18008,7 @@
                 <a:ea typeface="Times New Roman" pitchFamily="34" charset="-122"/>
                 <a:cs typeface="Times New Roman" pitchFamily="34" charset="-120"/>
               </a:rPr>
-              <a:t>Example of Ndu (1963–1972): </a:t>
+              <a:t>Example of Ndu (1963 to 1972): </a:t>
             </a:r>
             <a:pPr algn="l" indent="0" marL="0">
               <a:spcAft>
@@ -18568,48 +18025,7 @@
                 <a:ea typeface="Times New Roman" pitchFamily="34" charset="-122"/>
                 <a:cs typeface="Times New Roman" pitchFamily="34" charset="-120"/>
               </a:rPr>
-              <a:t>The 5th and 6th of the ordered annual rainfalls are 1,942 and 1,904 mm, so the median is 1,923 mm.</a:t>
-            </a:r>
-            <a:endParaRPr lang="en-US" sz="4000" dirty="0"/>
-          </a:p>
-          <a:p>
-            <a:pPr algn="l" indent="0" marL="0">
-              <a:spcAft>
-                <a:spcPts val="800"/>
-              </a:spcAft>
-              <a:buNone/>
-            </a:pPr>
-            <a:r>
-              <a:rPr lang="en-US" sz="4000" b="1" dirty="0">
-                <a:solidFill>
-                  <a:srgbClr val="111111"/>
-                </a:solidFill>
-                <a:latin typeface="Times New Roman" pitchFamily="34" charset="0"/>
-                <a:ea typeface="Times New Roman" pitchFamily="34" charset="-122"/>
-                <a:cs typeface="Times New Roman" pitchFamily="34" charset="-120"/>
-              </a:rPr>
-              <a:t>Advantages and disadvantages:</a:t>
-            </a:r>
-            <a:endParaRPr lang="en-US" sz="4000" dirty="0"/>
-          </a:p>
-          <a:p>
-            <a:pPr algn="l" marL="342900" indent="-342900">
-              <a:spcAft>
-                <a:spcPts val="800"/>
-              </a:spcAft>
-              <a:buSzPct val="100000"/>
-              <a:buChar char="•"/>
-            </a:pPr>
-            <a:r>
-              <a:rPr lang="en-US" sz="4000" dirty="0">
-                <a:solidFill>
-                  <a:srgbClr val="111111"/>
-                </a:solidFill>
-                <a:latin typeface="Times New Roman" pitchFamily="34" charset="0"/>
-                <a:ea typeface="Times New Roman" pitchFamily="34" charset="-122"/>
-                <a:cs typeface="Times New Roman" pitchFamily="34" charset="-120"/>
-              </a:rPr>
-              <a:t>Advantage: it is easy and not affected by outliers.</a:t>
+              <a:t>The annual rainfalls of the ten years are put in order. The 5th and 6th values are 1,942 and 1,904 mm, so the median is 1,923 mm.</a:t>
             </a:r>
             <a:endParaRPr lang="en-US" sz="4000" dirty="0"/>
           </a:p>
@@ -18744,7 +18160,7 @@
         <p:spPr>
           <a:xfrm>
             <a:off x="0" y="658368"/>
-            <a:ext cx="5120640" cy="5833872"/>
+            <a:ext cx="3840480" cy="5833872"/>
           </a:xfrm>
           <a:prstGeom prst="rect">
             <a:avLst/>
@@ -18759,8 +18175,8 @@
         </p:nvSpPr>
         <p:spPr>
           <a:xfrm>
-            <a:off x="5349240" y="1005840"/>
-            <a:ext cx="6522415" cy="731520"/>
+            <a:off x="4069080" y="1005840"/>
+            <a:ext cx="7802575" cy="731520"/>
           </a:xfrm>
           <a:prstGeom prst="rect">
             <a:avLst/>
@@ -18800,8 +18216,8 @@
         </p:nvSpPr>
         <p:spPr>
           <a:xfrm>
-            <a:off x="5349240" y="1737360"/>
-            <a:ext cx="6522415" cy="457200"/>
+            <a:off x="4069080" y="1737360"/>
+            <a:ext cx="7802575" cy="457200"/>
           </a:xfrm>
           <a:prstGeom prst="rect">
             <a:avLst/>
@@ -18825,7 +18241,7 @@
                 <a:ea typeface="Times New Roman" pitchFamily="34" charset="-122"/>
                 <a:cs typeface="Times New Roman" pitchFamily="34" charset="-120"/>
               </a:rPr>
-              <a:t>B) The Median (continued)</a:t>
+              <a:t>B) The Median</a:t>
             </a:r>
             <a:endParaRPr lang="en-US" sz="3200" dirty="0"/>
           </a:p>
@@ -18839,8 +18255,8 @@
         </p:nvSpPr>
         <p:spPr>
           <a:xfrm>
-            <a:off x="5349240" y="2240280"/>
-            <a:ext cx="6522415" cy="4206240"/>
+            <a:off x="4069080" y="2240280"/>
+            <a:ext cx="7802575" cy="4206240"/>
           </a:xfrm>
           <a:prstGeom prst="rect">
             <a:avLst/>
@@ -18852,15 +18268,14 @@
           <a:bodyPr wrap="square" lIns="0" tIns="0" rIns="0" bIns="0" rtlCol="0" anchor="t"/>
           <a:lstStyle/>
           <a:p>
-            <a:pPr algn="l" marL="342900" indent="-342900">
+            <a:pPr algn="l" indent="0" marL="0">
               <a:spcAft>
                 <a:spcPts val="800"/>
               </a:spcAft>
-              <a:buSzPct val="100000"/>
-              <a:buChar char="•"/>
-            </a:pPr>
-            <a:r>
-              <a:rPr lang="en-US" sz="4000" dirty="0">
+              <a:buNone/>
+            </a:pPr>
+            <a:r>
+              <a:rPr lang="en-US" sz="4000" b="1" dirty="0">
                 <a:solidFill>
                   <a:srgbClr val="111111"/>
                 </a:solidFill>
@@ -18868,7 +18283,24 @@
                 <a:ea typeface="Times New Roman" pitchFamily="34" charset="-122"/>
                 <a:cs typeface="Times New Roman" pitchFamily="34" charset="-120"/>
               </a:rPr>
-              <a:t>Disadvantage: it ignores most values and is slow to find for large sets.</a:t>
+              <a:t>Advantages and disadvantages: </a:t>
+            </a:r>
+            <a:pPr algn="l" indent="0" marL="0">
+              <a:spcAft>
+                <a:spcPts val="800"/>
+              </a:spcAft>
+              <a:buNone/>
+            </a:pPr>
+            <a:r>
+              <a:rPr lang="en-US" sz="4000" dirty="0">
+                <a:solidFill>
+                  <a:srgbClr val="111111"/>
+                </a:solidFill>
+                <a:latin typeface="Times New Roman" pitchFamily="34" charset="0"/>
+                <a:ea typeface="Times New Roman" pitchFamily="34" charset="-122"/>
+                <a:cs typeface="Times New Roman" pitchFamily="34" charset="-120"/>
+              </a:rPr>
+              <a:t>The median is easy to find and is not affected by outliers. However, it ignores most values and is slow to find for large sets.</a:t>
             </a:r>
             <a:endParaRPr lang="en-US" sz="4000" dirty="0"/>
           </a:p>
@@ -19036,7 +18468,7 @@
         <p:spPr>
           <a:xfrm>
             <a:off x="365760" y="1737360"/>
-            <a:ext cx="5120640" cy="457200"/>
+            <a:ext cx="6035040" cy="457200"/>
           </a:xfrm>
           <a:prstGeom prst="rect">
             <a:avLst/>
@@ -19077,7 +18509,7 @@
         <p:spPr>
           <a:xfrm>
             <a:off x="365760" y="2240280"/>
-            <a:ext cx="4846320" cy="4160520"/>
+            <a:ext cx="6035040" cy="4160520"/>
           </a:xfrm>
           <a:prstGeom prst="rect">
             <a:avLst/>
@@ -19096,7 +18528,7 @@
               <a:buNone/>
             </a:pPr>
             <a:r>
-              <a:rPr lang="en-US" sz="3600" i="1" dirty="0">
+              <a:rPr lang="en-US" sz="3200" i="1" dirty="0">
                 <a:solidFill>
                   <a:srgbClr val="111111"/>
                 </a:solidFill>
@@ -19106,7 +18538,7 @@
               </a:rPr>
               <a:t>The mode is found and assessed as follows:</a:t>
             </a:r>
-            <a:endParaRPr lang="en-US" sz="3600" dirty="0"/>
+            <a:endParaRPr lang="en-US" sz="3200" dirty="0"/>
           </a:p>
           <a:p>
             <a:pPr algn="l" indent="0" marL="0">
@@ -19116,7 +18548,7 @@
               <a:buNone/>
             </a:pPr>
             <a:r>
-              <a:rPr lang="en-US" sz="3600" b="1" dirty="0">
+              <a:rPr lang="en-US" sz="3200" b="1" dirty="0">
                 <a:solidFill>
                   <a:srgbClr val="111111"/>
                 </a:solidFill>
@@ -19124,7 +18556,7 @@
                 <a:ea typeface="Times New Roman" pitchFamily="34" charset="-122"/>
                 <a:cs typeface="Times New Roman" pitchFamily="34" charset="-120"/>
               </a:rPr>
-              <a:t>Method: </a:t>
+              <a:t>Method and example: </a:t>
             </a:r>
             <a:pPr algn="l" indent="0" marL="0">
               <a:spcAft>
@@ -19133,7 +18565,7 @@
               <a:buNone/>
             </a:pPr>
             <a:r>
-              <a:rPr lang="en-US" sz="3600" dirty="0">
+              <a:rPr lang="en-US" sz="3200" dirty="0">
                 <a:solidFill>
                   <a:srgbClr val="111111"/>
                 </a:solidFill>
@@ -19141,9 +18573,9 @@
                 <a:ea typeface="Times New Roman" pitchFamily="34" charset="-122"/>
                 <a:cs typeface="Times New Roman" pitchFamily="34" charset="-120"/>
               </a:rPr>
-              <a:t>The mode is the most frequent value, found by counting with a frequency table.</a:t>
-            </a:r>
-            <a:endParaRPr lang="en-US" sz="3600" dirty="0"/>
+              <a:t>The mode is the most frequent value, found by counting with a frequency table. At station A, 28 °C occurs in 6 months, so the mode is 28 °C.</a:t>
+            </a:r>
+            <a:endParaRPr lang="en-US" sz="3200" dirty="0"/>
           </a:p>
         </p:txBody>
       </p:sp>
@@ -19163,8 +18595,8 @@
         </p:blipFill>
         <p:spPr>
           <a:xfrm>
-            <a:off x="5349240" y="2617506"/>
-            <a:ext cx="6659575" cy="2601397"/>
+            <a:off x="6537960" y="2849678"/>
+            <a:ext cx="5470855" cy="2137053"/>
           </a:xfrm>
           <a:prstGeom prst="rect">
             <a:avLst/>
@@ -19179,8 +18611,8 @@
         </p:nvSpPr>
         <p:spPr>
           <a:xfrm>
-            <a:off x="5349240" y="6089904"/>
-            <a:ext cx="6659575" cy="347472"/>
+            <a:off x="6537960" y="6089904"/>
+            <a:ext cx="5470855" cy="347472"/>
           </a:xfrm>
           <a:prstGeom prst="rect">
             <a:avLst/>
@@ -19204,7 +18636,7 @@
                 <a:ea typeface="Times New Roman" pitchFamily="34" charset="-122"/>
                 <a:cs typeface="Times New Roman" pitchFamily="34" charset="-120"/>
               </a:rPr>
-              <a:t>Illustration: a frequency table</a:t>
+              <a:t>Illustration: the mode</a:t>
             </a:r>
             <a:endParaRPr lang="en-US" sz="1600" dirty="0"/>
           </a:p>
@@ -19339,7 +18771,7 @@
         <p:spPr>
           <a:xfrm>
             <a:off x="0" y="658368"/>
-            <a:ext cx="2468880" cy="5833872"/>
+            <a:ext cx="3840480" cy="5833872"/>
           </a:xfrm>
           <a:prstGeom prst="rect">
             <a:avLst/>
@@ -19354,8 +18786,8 @@
         </p:nvSpPr>
         <p:spPr>
           <a:xfrm>
-            <a:off x="2697480" y="1005840"/>
-            <a:ext cx="9174175" cy="731520"/>
+            <a:off x="4069080" y="1005840"/>
+            <a:ext cx="7802575" cy="731520"/>
           </a:xfrm>
           <a:prstGeom prst="rect">
             <a:avLst/>
@@ -19395,8 +18827,8 @@
         </p:nvSpPr>
         <p:spPr>
           <a:xfrm>
-            <a:off x="2697480" y="1737360"/>
-            <a:ext cx="9174175" cy="457200"/>
+            <a:off x="4069080" y="1737360"/>
+            <a:ext cx="7802575" cy="457200"/>
           </a:xfrm>
           <a:prstGeom prst="rect">
             <a:avLst/>
@@ -19434,8 +18866,8 @@
         </p:nvSpPr>
         <p:spPr>
           <a:xfrm>
-            <a:off x="2697480" y="2240280"/>
-            <a:ext cx="9174175" cy="4206240"/>
+            <a:off x="4069080" y="2240280"/>
+            <a:ext cx="7802575" cy="4206240"/>
           </a:xfrm>
           <a:prstGeom prst="rect">
             <a:avLst/>
@@ -19462,7 +18894,7 @@
                 <a:ea typeface="Times New Roman" pitchFamily="34" charset="-122"/>
                 <a:cs typeface="Times New Roman" pitchFamily="34" charset="-120"/>
               </a:rPr>
-              <a:t>Example: </a:t>
+              <a:t>Special cases: </a:t>
             </a:r>
             <a:pPr algn="l" indent="0" marL="0">
               <a:spcAft>
@@ -19479,69 +18911,7 @@
                 <a:ea typeface="Times New Roman" pitchFamily="34" charset="-122"/>
                 <a:cs typeface="Times New Roman" pitchFamily="34" charset="-120"/>
               </a:rPr>
-              <a:t>At station A, 28 °C occurs in 6 months, so the mode is 28 °C.</a:t>
-            </a:r>
-            <a:endParaRPr lang="en-US" sz="4000" dirty="0"/>
-          </a:p>
-          <a:p>
-            <a:pPr algn="l" indent="0" marL="0">
-              <a:spcAft>
-                <a:spcPts val="800"/>
-              </a:spcAft>
-              <a:buNone/>
-            </a:pPr>
-            <a:r>
-              <a:rPr lang="en-US" sz="4000" b="1" dirty="0">
-                <a:solidFill>
-                  <a:srgbClr val="111111"/>
-                </a:solidFill>
-                <a:latin typeface="Times New Roman" pitchFamily="34" charset="0"/>
-                <a:ea typeface="Times New Roman" pitchFamily="34" charset="-122"/>
-                <a:cs typeface="Times New Roman" pitchFamily="34" charset="-120"/>
-              </a:rPr>
-              <a:t>Special cases:</a:t>
-            </a:r>
-            <a:endParaRPr lang="en-US" sz="4000" dirty="0"/>
-          </a:p>
-          <a:p>
-            <a:pPr algn="l" marL="342900" indent="-342900">
-              <a:spcAft>
-                <a:spcPts val="800"/>
-              </a:spcAft>
-              <a:buSzPct val="100000"/>
-              <a:buChar char="•"/>
-            </a:pPr>
-            <a:r>
-              <a:rPr lang="en-US" sz="4000" dirty="0">
-                <a:solidFill>
-                  <a:srgbClr val="111111"/>
-                </a:solidFill>
-                <a:latin typeface="Times New Roman" pitchFamily="34" charset="0"/>
-                <a:ea typeface="Times New Roman" pitchFamily="34" charset="-122"/>
-                <a:cs typeface="Times New Roman" pitchFamily="34" charset="-120"/>
-              </a:rPr>
-              <a:t>2, 5, 8, 3, 7, 4, 11: no mode.</a:t>
-            </a:r>
-            <a:endParaRPr lang="en-US" sz="4000" dirty="0"/>
-          </a:p>
-          <a:p>
-            <a:pPr algn="l" marL="342900" indent="-342900">
-              <a:spcAft>
-                <a:spcPts val="800"/>
-              </a:spcAft>
-              <a:buSzPct val="100000"/>
-              <a:buChar char="•"/>
-            </a:pPr>
-            <a:r>
-              <a:rPr lang="en-US" sz="4000" dirty="0">
-                <a:solidFill>
-                  <a:srgbClr val="111111"/>
-                </a:solidFill>
-                <a:latin typeface="Times New Roman" pitchFamily="34" charset="0"/>
-                <a:ea typeface="Times New Roman" pitchFamily="34" charset="-122"/>
-                <a:cs typeface="Times New Roman" pitchFamily="34" charset="-120"/>
-              </a:rPr>
-              <a:t>1, 8, 7, 8, 5, 9, 11, 5: two modes, 5 and 8 (bimodal).</a:t>
+              <a:t>The set 2, 5, 8, 3, 7, 4, 11 has no mode, because no value is repeated. The set 1, 8, 7, 8, 5, 9, 11, 5 has two modes, 5 and 8, and is called bimodal.</a:t>
             </a:r>
             <a:endParaRPr lang="en-US" sz="4000" dirty="0"/>
           </a:p>
@@ -19659,9 +19029,150 @@
           </a:p>
         </p:txBody>
       </p:sp>
+      <p:sp>
+        <p:nvSpPr>
+          <p:cNvPr id="3" name="Text 1"/>
+          <p:cNvSpPr/>
+          <p:nvPr/>
+        </p:nvSpPr>
+        <p:spPr>
+          <a:xfrm>
+            <a:off x="365760" y="1005840"/>
+            <a:ext cx="11460175" cy="731520"/>
+          </a:xfrm>
+          <a:prstGeom prst="rect">
+            <a:avLst/>
+          </a:prstGeom>
+          <a:noFill/>
+          <a:ln/>
+        </p:spPr>
+        <p:txBody>
+          <a:bodyPr wrap="square" lIns="0" tIns="0" rIns="0" bIns="0" rtlCol="0" anchor="ctr">
+            <a:normAutofit/>
+          </a:bodyPr>
+          <a:lstStyle/>
+          <a:p>
+            <a:pPr algn="ctr" indent="0" marL="0">
+              <a:buNone/>
+            </a:pPr>
+            <a:r>
+              <a:rPr lang="en-US" sz="3600" b="1" dirty="0">
+                <a:solidFill>
+                  <a:srgbClr val="990011"/>
+                </a:solidFill>
+                <a:latin typeface="Times New Roman" pitchFamily="34" charset="0"/>
+                <a:ea typeface="Times New Roman" pitchFamily="34" charset="-122"/>
+                <a:cs typeface="Times New Roman" pitchFamily="34" charset="-120"/>
+              </a:rPr>
+              <a:t>1. Measures of Central Tendency</a:t>
+            </a:r>
+            <a:endParaRPr lang="en-US" sz="3600" dirty="0"/>
+          </a:p>
+        </p:txBody>
+      </p:sp>
+      <p:sp>
+        <p:nvSpPr>
+          <p:cNvPr id="4" name="Text 2"/>
+          <p:cNvSpPr/>
+          <p:nvPr/>
+        </p:nvSpPr>
+        <p:spPr>
+          <a:xfrm>
+            <a:off x="365760" y="1737360"/>
+            <a:ext cx="6035040" cy="457200"/>
+          </a:xfrm>
+          <a:prstGeom prst="rect">
+            <a:avLst/>
+          </a:prstGeom>
+          <a:noFill/>
+          <a:ln/>
+        </p:spPr>
+        <p:txBody>
+          <a:bodyPr wrap="square" lIns="0" tIns="0" rIns="0" bIns="0" rtlCol="0" anchor="ctr">
+            <a:normAutofit/>
+          </a:bodyPr>
+          <a:lstStyle/>
+          <a:p>
+            <a:pPr algn="l" indent="0" marL="0">
+              <a:buNone/>
+            </a:pPr>
+            <a:r>
+              <a:rPr lang="en-US" sz="3000" b="1" dirty="0">
+                <a:solidFill>
+                  <a:srgbClr val="990011"/>
+                </a:solidFill>
+                <a:latin typeface="Times New Roman" pitchFamily="34" charset="0"/>
+                <a:ea typeface="Times New Roman" pitchFamily="34" charset="-122"/>
+                <a:cs typeface="Times New Roman" pitchFamily="34" charset="-120"/>
+              </a:rPr>
+              <a:t>C) The Mode</a:t>
+            </a:r>
+            <a:endParaRPr lang="en-US" sz="3000" dirty="0"/>
+          </a:p>
+        </p:txBody>
+      </p:sp>
+      <p:sp>
+        <p:nvSpPr>
+          <p:cNvPr id="5" name="Text 3"/>
+          <p:cNvSpPr/>
+          <p:nvPr/>
+        </p:nvSpPr>
+        <p:spPr>
+          <a:xfrm>
+            <a:off x="365760" y="2240280"/>
+            <a:ext cx="6035040" cy="4160520"/>
+          </a:xfrm>
+          <a:prstGeom prst="rect">
+            <a:avLst/>
+          </a:prstGeom>
+          <a:noFill/>
+          <a:ln/>
+        </p:spPr>
+        <p:txBody>
+          <a:bodyPr wrap="square" lIns="0" tIns="0" rIns="0" bIns="0" rtlCol="0" anchor="t"/>
+          <a:lstStyle/>
+          <a:p>
+            <a:pPr algn="l" indent="0" marL="0">
+              <a:spcAft>
+                <a:spcPts val="800"/>
+              </a:spcAft>
+              <a:buNone/>
+            </a:pPr>
+            <a:r>
+              <a:rPr lang="en-US" sz="3200" b="1" dirty="0">
+                <a:solidFill>
+                  <a:srgbClr val="111111"/>
+                </a:solidFill>
+                <a:latin typeface="Times New Roman" pitchFamily="34" charset="0"/>
+                <a:ea typeface="Times New Roman" pitchFamily="34" charset="-122"/>
+                <a:cs typeface="Times New Roman" pitchFamily="34" charset="-120"/>
+              </a:rPr>
+              <a:t>Advantages and disadvantages: </a:t>
+            </a:r>
+            <a:pPr algn="l" indent="0" marL="0">
+              <a:spcAft>
+                <a:spcPts val="800"/>
+              </a:spcAft>
+              <a:buNone/>
+            </a:pPr>
+            <a:r>
+              <a:rPr lang="en-US" sz="3200" dirty="0">
+                <a:solidFill>
+                  <a:srgbClr val="111111"/>
+                </a:solidFill>
+                <a:latin typeface="Times New Roman" pitchFamily="34" charset="0"/>
+                <a:ea typeface="Times New Roman" pitchFamily="34" charset="-122"/>
+                <a:cs typeface="Times New Roman" pitchFamily="34" charset="-120"/>
+              </a:rPr>
+              <a:t>The mode can be used for categories, such as soil types or means of transport, and is not affected by outliers. However, there may be no mode or several, and it ignores the other values.</a:t>
+            </a:r>
+            <a:endParaRPr lang="en-US" sz="3200" dirty="0"/>
+          </a:p>
+        </p:txBody>
+      </p:sp>
       <p:pic>
         <p:nvPicPr>
-          <p:cNvPr id="3" name="Image 0" descr="/home/claude/f4/img/minesec_sheet.png">    </p:cNvPr>
+          <p:cNvPr id="6" name="Image 0" descr="/home/claude/f4/img/v2/stat2_central_compare.png">    </p:cNvPr>
           <p:cNvPicPr>
             <a:picLocks noChangeAspect="1"/>
           </p:cNvPicPr>
@@ -19675,8 +19186,8 @@
         </p:blipFill>
         <p:spPr>
           <a:xfrm>
-            <a:off x="0" y="658368"/>
-            <a:ext cx="5120640" cy="5833872"/>
+            <a:off x="6537960" y="2849678"/>
+            <a:ext cx="5470855" cy="2137053"/>
           </a:xfrm>
           <a:prstGeom prst="rect">
             <a:avLst/>
@@ -19685,14 +19196,14 @@
       </p:pic>
       <p:sp>
         <p:nvSpPr>
-          <p:cNvPr id="4" name="Text 1"/>
+          <p:cNvPr id="7" name="Text 4"/>
           <p:cNvSpPr/>
           <p:nvPr/>
         </p:nvSpPr>
         <p:spPr>
           <a:xfrm>
-            <a:off x="5349240" y="1005840"/>
-            <a:ext cx="6522415" cy="731520"/>
+            <a:off x="6537960" y="6089904"/>
+            <a:ext cx="5470855" cy="347472"/>
           </a:xfrm>
           <a:prstGeom prst="rect">
             <a:avLst/>
@@ -19701,124 +19212,24 @@
           <a:ln/>
         </p:spPr>
         <p:txBody>
-          <a:bodyPr wrap="square" lIns="0" tIns="0" rIns="0" bIns="0" rtlCol="0" anchor="ctr">
-            <a:normAutofit/>
-          </a:bodyPr>
+          <a:bodyPr wrap="square" lIns="0" tIns="0" rIns="0" bIns="0" rtlCol="0" anchor="ctr"/>
           <a:lstStyle/>
           <a:p>
             <a:pPr algn="ctr" indent="0" marL="0">
               <a:buNone/>
             </a:pPr>
             <a:r>
-              <a:rPr lang="en-US" sz="3600" b="1" dirty="0">
-                <a:solidFill>
-                  <a:srgbClr val="990011"/>
+              <a:rPr lang="en-US" sz="1600" i="1" dirty="0">
+                <a:solidFill>
+                  <a:srgbClr val="555555"/>
                 </a:solidFill>
                 <a:latin typeface="Times New Roman" pitchFamily="34" charset="0"/>
                 <a:ea typeface="Times New Roman" pitchFamily="34" charset="-122"/>
                 <a:cs typeface="Times New Roman" pitchFamily="34" charset="-120"/>
               </a:rPr>
-              <a:t>1. Measures of Central Tendency</a:t>
-            </a:r>
-            <a:endParaRPr lang="en-US" sz="3600" dirty="0"/>
-          </a:p>
-        </p:txBody>
-      </p:sp>
-      <p:sp>
-        <p:nvSpPr>
-          <p:cNvPr id="5" name="Text 2"/>
-          <p:cNvSpPr/>
-          <p:nvPr/>
-        </p:nvSpPr>
-        <p:spPr>
-          <a:xfrm>
-            <a:off x="5349240" y="1737360"/>
-            <a:ext cx="6522415" cy="457200"/>
-          </a:xfrm>
-          <a:prstGeom prst="rect">
-            <a:avLst/>
-          </a:prstGeom>
-          <a:noFill/>
-          <a:ln/>
-        </p:spPr>
-        <p:txBody>
-          <a:bodyPr wrap="square" lIns="0" tIns="0" rIns="0" bIns="0" rtlCol="0" anchor="ctr"/>
-          <a:lstStyle/>
-          <a:p>
-            <a:pPr algn="l" indent="0" marL="0">
-              <a:buNone/>
-            </a:pPr>
-            <a:r>
-              <a:rPr lang="en-US" sz="3200" b="1" dirty="0">
-                <a:solidFill>
-                  <a:srgbClr val="990011"/>
-                </a:solidFill>
-                <a:latin typeface="Times New Roman" pitchFamily="34" charset="0"/>
-                <a:ea typeface="Times New Roman" pitchFamily="34" charset="-122"/>
-                <a:cs typeface="Times New Roman" pitchFamily="34" charset="-120"/>
-              </a:rPr>
-              <a:t>C) The Mode (continued)</a:t>
-            </a:r>
-            <a:endParaRPr lang="en-US" sz="3200" dirty="0"/>
-          </a:p>
-        </p:txBody>
-      </p:sp>
-      <p:sp>
-        <p:nvSpPr>
-          <p:cNvPr id="6" name="Text 3"/>
-          <p:cNvSpPr/>
-          <p:nvPr/>
-        </p:nvSpPr>
-        <p:spPr>
-          <a:xfrm>
-            <a:off x="5349240" y="2240280"/>
-            <a:ext cx="6522415" cy="4206240"/>
-          </a:xfrm>
-          <a:prstGeom prst="rect">
-            <a:avLst/>
-          </a:prstGeom>
-          <a:noFill/>
-          <a:ln/>
-        </p:spPr>
-        <p:txBody>
-          <a:bodyPr wrap="square" lIns="0" tIns="0" rIns="0" bIns="0" rtlCol="0" anchor="t"/>
-          <a:lstStyle/>
-          <a:p>
-            <a:pPr algn="l" indent="0" marL="0">
-              <a:spcAft>
-                <a:spcPts val="800"/>
-              </a:spcAft>
-              <a:buNone/>
-            </a:pPr>
-            <a:r>
-              <a:rPr lang="en-US" sz="4000" b="1" dirty="0">
-                <a:solidFill>
-                  <a:srgbClr val="111111"/>
-                </a:solidFill>
-                <a:latin typeface="Times New Roman" pitchFamily="34" charset="0"/>
-                <a:ea typeface="Times New Roman" pitchFamily="34" charset="-122"/>
-                <a:cs typeface="Times New Roman" pitchFamily="34" charset="-120"/>
-              </a:rPr>
-              <a:t>Advantages: </a:t>
-            </a:r>
-            <a:pPr algn="l" indent="0" marL="0">
-              <a:spcAft>
-                <a:spcPts val="800"/>
-              </a:spcAft>
-              <a:buNone/>
-            </a:pPr>
-            <a:r>
-              <a:rPr lang="en-US" sz="4000" dirty="0">
-                <a:solidFill>
-                  <a:srgbClr val="111111"/>
-                </a:solidFill>
-                <a:latin typeface="Times New Roman" pitchFamily="34" charset="0"/>
-                <a:ea typeface="Times New Roman" pitchFamily="34" charset="-122"/>
-                <a:cs typeface="Times New Roman" pitchFamily="34" charset="-120"/>
-              </a:rPr>
-              <a:t>It works for categories (soil types, means of transport), is easy to find and is not affected by outliers.</a:t>
-            </a:r>
-            <a:endParaRPr lang="en-US" sz="4000" dirty="0"/>
+              <a:t>Illustration: comparing the three measures</a:t>
+            </a:r>
+            <a:endParaRPr lang="en-US" sz="1600" dirty="0"/>
           </a:p>
         </p:txBody>
       </p:sp>
@@ -20188,7 +19599,7 @@
                 <a:ea typeface="Times New Roman" pitchFamily="34" charset="-122"/>
                 <a:cs typeface="Times New Roman" pitchFamily="34" charset="-120"/>
               </a:rPr>
-              <a:t>1. Measures of Central Tendency</a:t>
+              <a:t>2. The Range</a:t>
             </a:r>
             <a:endParaRPr lang="en-US" sz="3600" dirty="0"/>
           </a:p>
@@ -20202,49 +19613,8 @@
         </p:nvSpPr>
         <p:spPr>
           <a:xfrm>
-            <a:off x="365760" y="1737360"/>
-            <a:ext cx="5120640" cy="457200"/>
-          </a:xfrm>
-          <a:prstGeom prst="rect">
-            <a:avLst/>
-          </a:prstGeom>
-          <a:noFill/>
-          <a:ln/>
-        </p:spPr>
-        <p:txBody>
-          <a:bodyPr wrap="square" lIns="0" tIns="0" rIns="0" bIns="0" rtlCol="0" anchor="ctr">
-            <a:normAutofit/>
-          </a:bodyPr>
-          <a:lstStyle/>
-          <a:p>
-            <a:pPr algn="l" indent="0" marL="0">
-              <a:buNone/>
-            </a:pPr>
-            <a:r>
-              <a:rPr lang="en-US" sz="3000" b="1" dirty="0">
-                <a:solidFill>
-                  <a:srgbClr val="990011"/>
-                </a:solidFill>
-                <a:latin typeface="Times New Roman" pitchFamily="34" charset="0"/>
-                <a:ea typeface="Times New Roman" pitchFamily="34" charset="-122"/>
-                <a:cs typeface="Times New Roman" pitchFamily="34" charset="-120"/>
-              </a:rPr>
-              <a:t>C) The Mode</a:t>
-            </a:r>
-            <a:endParaRPr lang="en-US" sz="3000" dirty="0"/>
-          </a:p>
-        </p:txBody>
-      </p:sp>
-      <p:sp>
-        <p:nvSpPr>
-          <p:cNvPr id="5" name="Text 3"/>
-          <p:cNvSpPr/>
-          <p:nvPr/>
-        </p:nvSpPr>
-        <p:spPr>
-          <a:xfrm>
-            <a:off x="365760" y="2240280"/>
-            <a:ext cx="4846320" cy="4160520"/>
+            <a:off x="365760" y="1783080"/>
+            <a:ext cx="6035040" cy="4617720"/>
           </a:xfrm>
           <a:prstGeom prst="rect">
             <a:avLst/>
@@ -20263,7 +19633,7 @@
               <a:buNone/>
             </a:pPr>
             <a:r>
-              <a:rPr lang="en-US" sz="3600" b="1" dirty="0">
+              <a:rPr lang="en-US" sz="3600" i="1" dirty="0">
                 <a:solidFill>
                   <a:srgbClr val="111111"/>
                 </a:solidFill>
@@ -20271,8 +19641,11 @@
                 <a:ea typeface="Times New Roman" pitchFamily="34" charset="-122"/>
                 <a:cs typeface="Times New Roman" pitchFamily="34" charset="-120"/>
               </a:rPr>
-              <a:t>Disadvantages: </a:t>
-            </a:r>
+              <a:t>The range is calculated and assessed as follows:</a:t>
+            </a:r>
+            <a:endParaRPr lang="en-US" sz="3600" dirty="0"/>
+          </a:p>
+          <a:p>
             <a:pPr algn="l" indent="0" marL="0">
               <a:spcAft>
                 <a:spcPts val="800"/>
@@ -20280,7 +19653,7 @@
               <a:buNone/>
             </a:pPr>
             <a:r>
-              <a:rPr lang="en-US" sz="3600" dirty="0">
+              <a:rPr lang="en-US" sz="3600" b="1" dirty="0">
                 <a:solidFill>
                   <a:srgbClr val="111111"/>
                 </a:solidFill>
@@ -20288,7 +19661,24 @@
                 <a:ea typeface="Times New Roman" pitchFamily="34" charset="-122"/>
                 <a:cs typeface="Times New Roman" pitchFamily="34" charset="-120"/>
               </a:rPr>
-              <a:t>There may be no mode or several modes, and it ignores the other values.</a:t>
+              <a:t>Formula and example: </a:t>
+            </a:r>
+            <a:pPr algn="l" indent="0" marL="0">
+              <a:spcAft>
+                <a:spcPts val="800"/>
+              </a:spcAft>
+              <a:buNone/>
+            </a:pPr>
+            <a:r>
+              <a:rPr lang="en-US" sz="3600" dirty="0">
+                <a:solidFill>
+                  <a:srgbClr val="111111"/>
+                </a:solidFill>
+                <a:latin typeface="Times New Roman" pitchFamily="34" charset="0"/>
+                <a:ea typeface="Times New Roman" pitchFamily="34" charset="-122"/>
+                <a:cs typeface="Times New Roman" pitchFamily="34" charset="-120"/>
+              </a:rPr>
+              <a:t>Range = highest value − lowest value. For the maximum temperatures of Garoua in a week (38, 40, 42, 37, 44, 41, 39 °C), the range is 44 − 37 = 7 °C.</a:t>
             </a:r>
             <a:endParaRPr lang="en-US" sz="3600" dirty="0"/>
           </a:p>
@@ -20296,7 +19686,7 @@
       </p:sp>
       <p:pic>
         <p:nvPicPr>
-          <p:cNvPr id="6" name="Image 0" descr="/home/claude/f4/img/v2/stat2_central_compare.png">    </p:cNvPr>
+          <p:cNvPr id="5" name="Image 0" descr="/home/claude/f4/img/v2/f4_maxmin.jpg">    </p:cNvPr>
           <p:cNvPicPr>
             <a:picLocks noChangeAspect="1"/>
           </p:cNvPicPr>
@@ -20310,8 +19700,8 @@
         </p:blipFill>
         <p:spPr>
           <a:xfrm>
-            <a:off x="5349240" y="2617506"/>
-            <a:ext cx="6659575" cy="2601397"/>
+            <a:off x="6537960" y="2400897"/>
+            <a:ext cx="5470855" cy="3034615"/>
           </a:xfrm>
           <a:prstGeom prst="rect">
             <a:avLst/>
@@ -20320,14 +19710,14 @@
       </p:pic>
       <p:sp>
         <p:nvSpPr>
-          <p:cNvPr id="7" name="Text 4"/>
+          <p:cNvPr id="6" name="Text 3"/>
           <p:cNvSpPr/>
           <p:nvPr/>
         </p:nvSpPr>
         <p:spPr>
           <a:xfrm>
-            <a:off x="5349240" y="6089904"/>
-            <a:ext cx="6659575" cy="347472"/>
+            <a:off x="6537960" y="6089904"/>
+            <a:ext cx="5470855" cy="347472"/>
           </a:xfrm>
           <a:prstGeom prst="rect">
             <a:avLst/>
@@ -20351,7 +19741,7 @@
                 <a:ea typeface="Times New Roman" pitchFamily="34" charset="-122"/>
                 <a:cs typeface="Times New Roman" pitchFamily="34" charset="-120"/>
               </a:rPr>
-              <a:t>Illustration: mean, median and mode compared</a:t>
+              <a:t>Illustration: a maximum and minimum thermometer</a:t>
             </a:r>
             <a:endParaRPr lang="en-US" sz="1600" dirty="0"/>
           </a:p>
@@ -20486,7 +19876,7 @@
         <p:spPr>
           <a:xfrm>
             <a:off x="0" y="658368"/>
-            <a:ext cx="5120640" cy="5833872"/>
+            <a:ext cx="2468880" cy="5833872"/>
           </a:xfrm>
           <a:prstGeom prst="rect">
             <a:avLst/>
@@ -20501,8 +19891,8 @@
         </p:nvSpPr>
         <p:spPr>
           <a:xfrm>
-            <a:off x="5349240" y="1005840"/>
-            <a:ext cx="6522415" cy="731520"/>
+            <a:off x="2697480" y="1005840"/>
+            <a:ext cx="9174175" cy="731520"/>
           </a:xfrm>
           <a:prstGeom prst="rect">
             <a:avLst/>
@@ -20542,8 +19932,8 @@
         </p:nvSpPr>
         <p:spPr>
           <a:xfrm>
-            <a:off x="5349240" y="1783080"/>
-            <a:ext cx="6522415" cy="4663440"/>
+            <a:off x="2697480" y="1783080"/>
+            <a:ext cx="9174175" cy="4663440"/>
           </a:xfrm>
           <a:prstGeom prst="rect">
             <a:avLst/>
@@ -20562,7 +19952,7 @@
               <a:buNone/>
             </a:pPr>
             <a:r>
-              <a:rPr lang="en-US" sz="4000" i="1" dirty="0">
+              <a:rPr lang="en-US" sz="4000" b="1" dirty="0">
                 <a:solidFill>
                   <a:srgbClr val="111111"/>
                 </a:solidFill>
@@ -20570,11 +19960,8 @@
                 <a:ea typeface="Times New Roman" pitchFamily="34" charset="-122"/>
                 <a:cs typeface="Times New Roman" pitchFamily="34" charset="-120"/>
               </a:rPr>
-              <a:t>The range is calculated and assessed as follows:</a:t>
-            </a:r>
-            <a:endParaRPr lang="en-US" sz="4000" dirty="0"/>
-          </a:p>
-          <a:p>
+              <a:t>Interpretation and assessment: </a:t>
+            </a:r>
             <a:pPr algn="l" indent="0" marL="0">
               <a:spcAft>
                 <a:spcPts val="800"/>
@@ -20582,7 +19969,7 @@
               <a:buNone/>
             </a:pPr>
             <a:r>
-              <a:rPr lang="en-US" sz="4000" b="1" dirty="0">
+              <a:rPr lang="en-US" sz="4000" dirty="0">
                 <a:solidFill>
                   <a:srgbClr val="111111"/>
                 </a:solidFill>
@@ -20590,24 +19977,7 @@
                 <a:ea typeface="Times New Roman" pitchFamily="34" charset="-122"/>
                 <a:cs typeface="Times New Roman" pitchFamily="34" charset="-120"/>
               </a:rPr>
-              <a:t>Formula: </a:t>
-            </a:r>
-            <a:pPr algn="l" indent="0" marL="0">
-              <a:spcAft>
-                <a:spcPts val="800"/>
-              </a:spcAft>
-              <a:buNone/>
-            </a:pPr>
-            <a:r>
-              <a:rPr lang="en-US" sz="4000" dirty="0">
-                <a:solidFill>
-                  <a:srgbClr val="111111"/>
-                </a:solidFill>
-                <a:latin typeface="Times New Roman" pitchFamily="34" charset="0"/>
-                <a:ea typeface="Times New Roman" pitchFamily="34" charset="-122"/>
-                <a:cs typeface="Times New Roman" pitchFamily="34" charset="-120"/>
-              </a:rPr>
-              <a:t>Range = highest value − lowest value.</a:t>
+              <a:t>A large range shows widely spread data, while a small range, such as 28 − 23 = 5 °C at station A, shows clustered data. The range is simple and quick, but it uses only the two extreme values and is misled by outliers.</a:t>
             </a:r>
             <a:endParaRPr lang="en-US" sz="4000" dirty="0"/>
           </a:p>
@@ -20760,7 +20130,7 @@
                 <a:ea typeface="Times New Roman" pitchFamily="34" charset="-122"/>
                 <a:cs typeface="Times New Roman" pitchFamily="34" charset="-120"/>
               </a:rPr>
-              <a:t>2. The Range</a:t>
+              <a:t>3. Quartiles and the Interquartile Range</a:t>
             </a:r>
             <a:endParaRPr lang="en-US" sz="3600" dirty="0"/>
           </a:p>
@@ -20775,7 +20145,7 @@
         <p:spPr>
           <a:xfrm>
             <a:off x="365760" y="1783080"/>
-            <a:ext cx="4846320" cy="4617720"/>
+            <a:ext cx="6035040" cy="4617720"/>
           </a:xfrm>
           <a:prstGeom prst="rect">
             <a:avLst/>
@@ -20794,7 +20164,7 @@
               <a:buNone/>
             </a:pPr>
             <a:r>
-              <a:rPr lang="en-US" sz="3600" b="1" dirty="0">
+              <a:rPr lang="en-US" sz="3000" i="1" dirty="0">
                 <a:solidFill>
                   <a:srgbClr val="111111"/>
                 </a:solidFill>
@@ -20802,8 +20172,11 @@
                 <a:ea typeface="Times New Roman" pitchFamily="34" charset="-122"/>
                 <a:cs typeface="Times New Roman" pitchFamily="34" charset="-120"/>
               </a:rPr>
-              <a:t>Example: </a:t>
-            </a:r>
+              <a:t>The quartiles and the interquartile range are calculated as follows:</a:t>
+            </a:r>
+            <a:endParaRPr lang="en-US" sz="3000" dirty="0"/>
+          </a:p>
+          <a:p>
             <a:pPr algn="l" indent="0" marL="0">
               <a:spcAft>
                 <a:spcPts val="800"/>
@@ -20811,7 +20184,7 @@
               <a:buNone/>
             </a:pPr>
             <a:r>
-              <a:rPr lang="en-US" sz="3600" dirty="0">
+              <a:rPr lang="en-US" sz="3000" b="1" dirty="0">
                 <a:solidFill>
                   <a:srgbClr val="111111"/>
                 </a:solidFill>
@@ -20819,15 +20192,32 @@
                 <a:ea typeface="Times New Roman" pitchFamily="34" charset="-122"/>
                 <a:cs typeface="Times New Roman" pitchFamily="34" charset="-120"/>
               </a:rPr>
-              <a:t>Garoua maxima for a week (38, 40, 42, 37, 44, 41, 39 °C): 44 − 37 = 7 °C.</a:t>
-            </a:r>
-            <a:endParaRPr lang="en-US" sz="3600" dirty="0"/>
+              <a:t>Steps: </a:t>
+            </a:r>
+            <a:pPr algn="l" indent="0" marL="0">
+              <a:spcAft>
+                <a:spcPts val="800"/>
+              </a:spcAft>
+              <a:buNone/>
+            </a:pPr>
+            <a:r>
+              <a:rPr lang="en-US" sz="3000" dirty="0">
+                <a:solidFill>
+                  <a:srgbClr val="111111"/>
+                </a:solidFill>
+                <a:latin typeface="Times New Roman" pitchFamily="34" charset="0"/>
+                <a:ea typeface="Times New Roman" pitchFamily="34" charset="-122"/>
+                <a:cs typeface="Times New Roman" pitchFamily="34" charset="-120"/>
+              </a:rPr>
+              <a:t>Put the data in order and find the median (Q2). The lower quartile (Q1) is the median of the lower half, the upper quartile (Q3) is the median of the upper half, and IQR = Q3 − Q1.</a:t>
+            </a:r>
+            <a:endParaRPr lang="en-US" sz="3000" dirty="0"/>
           </a:p>
         </p:txBody>
       </p:sp>
       <p:pic>
         <p:nvPicPr>
-          <p:cNvPr id="5" name="Image 0" descr="/home/claude/f4/img/v2/f4_maxmin.jpg">    </p:cNvPr>
+          <p:cNvPr id="5" name="Image 0" descr="/home/claude/f4/img/v2/stat2_iqr.png">    </p:cNvPr>
           <p:cNvPicPr>
             <a:picLocks noChangeAspect="1"/>
           </p:cNvPicPr>
@@ -20841,8 +20231,8 @@
         </p:blipFill>
         <p:spPr>
           <a:xfrm>
-            <a:off x="5349240" y="2071212"/>
-            <a:ext cx="6659575" cy="3693983"/>
+            <a:off x="6537960" y="2849678"/>
+            <a:ext cx="5470855" cy="2137053"/>
           </a:xfrm>
           <a:prstGeom prst="rect">
             <a:avLst/>
@@ -20857,8 +20247,8 @@
         </p:nvSpPr>
         <p:spPr>
           <a:xfrm>
-            <a:off x="5349240" y="6089904"/>
-            <a:ext cx="6659575" cy="347472"/>
+            <a:off x="6537960" y="6089904"/>
+            <a:ext cx="5470855" cy="347472"/>
           </a:xfrm>
           <a:prstGeom prst="rect">
             <a:avLst/>
@@ -20882,7 +20272,7 @@
                 <a:ea typeface="Times New Roman" pitchFamily="34" charset="-122"/>
                 <a:cs typeface="Times New Roman" pitchFamily="34" charset="-120"/>
               </a:rPr>
-              <a:t>Illustration: a maximum and minimum thermometer</a:t>
+              <a:t>Illustration: quartiles</a:t>
             </a:r>
             <a:endParaRPr lang="en-US" sz="1600" dirty="0"/>
           </a:p>
@@ -21017,7 +20407,7 @@
         <p:spPr>
           <a:xfrm>
             <a:off x="0" y="658368"/>
-            <a:ext cx="3840480" cy="5833872"/>
+            <a:ext cx="5120640" cy="5833872"/>
           </a:xfrm>
           <a:prstGeom prst="rect">
             <a:avLst/>
@@ -21032,8 +20422,8 @@
         </p:nvSpPr>
         <p:spPr>
           <a:xfrm>
-            <a:off x="4069080" y="1005840"/>
-            <a:ext cx="7802575" cy="731520"/>
+            <a:off x="5349240" y="1005840"/>
+            <a:ext cx="6522415" cy="731520"/>
           </a:xfrm>
           <a:prstGeom prst="rect">
             <a:avLst/>
@@ -21059,7 +20449,7 @@
                 <a:ea typeface="Times New Roman" pitchFamily="34" charset="-122"/>
                 <a:cs typeface="Times New Roman" pitchFamily="34" charset="-120"/>
               </a:rPr>
-              <a:t>2. The Range</a:t>
+              <a:t>3. Quartiles and the Interquartile Range</a:t>
             </a:r>
             <a:endParaRPr lang="en-US" sz="3600" dirty="0"/>
           </a:p>
@@ -21073,8 +20463,8 @@
         </p:nvSpPr>
         <p:spPr>
           <a:xfrm>
-            <a:off x="4069080" y="1783080"/>
-            <a:ext cx="7802575" cy="4663440"/>
+            <a:off x="5349240" y="1783080"/>
+            <a:ext cx="6522415" cy="4663440"/>
           </a:xfrm>
           <a:prstGeom prst="rect">
             <a:avLst/>
@@ -21101,7 +20491,7 @@
                 <a:ea typeface="Times New Roman" pitchFamily="34" charset="-122"/>
                 <a:cs typeface="Times New Roman" pitchFamily="34" charset="-120"/>
               </a:rPr>
-              <a:t>Interpretation: </a:t>
+              <a:t>Example 1 (n = 11): </a:t>
             </a:r>
             <a:pPr algn="l" indent="0" marL="0">
               <a:spcAft>
@@ -21118,48 +20508,7 @@
                 <a:ea typeface="Times New Roman" pitchFamily="34" charset="-122"/>
                 <a:cs typeface="Times New Roman" pitchFamily="34" charset="-120"/>
               </a:rPr>
-              <a:t>A large range shows widely spread data; a small range shows clustered data, as 28 − 23 = 5 °C at station A.</a:t>
-            </a:r>
-            <a:endParaRPr lang="en-US" sz="4000" dirty="0"/>
-          </a:p>
-          <a:p>
-            <a:pPr algn="l" indent="0" marL="0">
-              <a:spcAft>
-                <a:spcPts val="800"/>
-              </a:spcAft>
-              <a:buNone/>
-            </a:pPr>
-            <a:r>
-              <a:rPr lang="en-US" sz="4000" b="1" dirty="0">
-                <a:solidFill>
-                  <a:srgbClr val="111111"/>
-                </a:solidFill>
-                <a:latin typeface="Times New Roman" pitchFamily="34" charset="0"/>
-                <a:ea typeface="Times New Roman" pitchFamily="34" charset="-122"/>
-                <a:cs typeface="Times New Roman" pitchFamily="34" charset="-120"/>
-              </a:rPr>
-              <a:t>Advantages and disadvantages:</a:t>
-            </a:r>
-            <a:endParaRPr lang="en-US" sz="4000" dirty="0"/>
-          </a:p>
-          <a:p>
-            <a:pPr algn="l" marL="342900" indent="-342900">
-              <a:spcAft>
-                <a:spcPts val="800"/>
-              </a:spcAft>
-              <a:buSzPct val="100000"/>
-              <a:buChar char="•"/>
-            </a:pPr>
-            <a:r>
-              <a:rPr lang="en-US" sz="4000" dirty="0">
-                <a:solidFill>
-                  <a:srgbClr val="111111"/>
-                </a:solidFill>
-                <a:latin typeface="Times New Roman" pitchFamily="34" charset="0"/>
-                <a:ea typeface="Times New Roman" pitchFamily="34" charset="-122"/>
-                <a:cs typeface="Times New Roman" pitchFamily="34" charset="-120"/>
-              </a:rPr>
-              <a:t>Advantage: simple and quick.</a:t>
+              <a:t>For eleven values from 102 to 118, the median is 109, Q1 is 105 and Q3 is 115. The interquartile range is 115 − 105 = 10.</a:t>
             </a:r>
             <a:endParaRPr lang="en-US" sz="4000" dirty="0"/>
           </a:p>
@@ -21336,7 +20685,7 @@
                 <a:ea typeface="Times New Roman" pitchFamily="34" charset="-122"/>
                 <a:cs typeface="Times New Roman" pitchFamily="34" charset="-120"/>
               </a:rPr>
-              <a:t>2. The Range (continued)</a:t>
+              <a:t>3. Quartiles and the Interquartile Range</a:t>
             </a:r>
             <a:endParaRPr lang="en-US" sz="3600" dirty="0"/>
           </a:p>
@@ -21363,15 +20712,14 @@
           <a:bodyPr wrap="square" lIns="0" tIns="0" rIns="0" bIns="0" rtlCol="0" anchor="t"/>
           <a:lstStyle/>
           <a:p>
-            <a:pPr algn="l" marL="342900" indent="-342900">
+            <a:pPr algn="l" indent="0" marL="0">
               <a:spcAft>
                 <a:spcPts val="800"/>
               </a:spcAft>
-              <a:buSzPct val="100000"/>
-              <a:buChar char="•"/>
-            </a:pPr>
-            <a:r>
-              <a:rPr lang="en-US" sz="4000" dirty="0">
+              <a:buNone/>
+            </a:pPr>
+            <a:r>
+              <a:rPr lang="en-US" sz="4000" b="1" dirty="0">
                 <a:solidFill>
                   <a:srgbClr val="111111"/>
                 </a:solidFill>
@@ -21379,7 +20727,24 @@
                 <a:ea typeface="Times New Roman" pitchFamily="34" charset="-122"/>
                 <a:cs typeface="Times New Roman" pitchFamily="34" charset="-120"/>
               </a:rPr>
-              <a:t>Disadvantage: it uses only the two extreme values and is misled by outliers.</a:t>
+              <a:t>Example 2 (n = 13): </a:t>
+            </a:r>
+            <a:pPr algn="l" indent="0" marL="0">
+              <a:spcAft>
+                <a:spcPts val="800"/>
+              </a:spcAft>
+              <a:buNone/>
+            </a:pPr>
+            <a:r>
+              <a:rPr lang="en-US" sz="4000" dirty="0">
+                <a:solidFill>
+                  <a:srgbClr val="111111"/>
+                </a:solidFill>
+                <a:latin typeface="Times New Roman" pitchFamily="34" charset="0"/>
+                <a:ea typeface="Times New Roman" pitchFamily="34" charset="-122"/>
+                <a:cs typeface="Times New Roman" pitchFamily="34" charset="-120"/>
+              </a:rPr>
+              <a:t>For 10, 25, 30, 30, 40, 41, 42, 50, 55, 70, 101, 110, 111, the median is 42 and Q1 = (30 + 30) ÷ 2 = 30. Q3 = (70 + 101) ÷ 2 = 85.5, so the IQR is 85.5 − 30 = 55.5.</a:t>
             </a:r>
             <a:endParaRPr lang="en-US" sz="4000" dirty="0"/>
           </a:p>
@@ -21497,9 +20862,109 @@
           </a:p>
         </p:txBody>
       </p:sp>
+      <p:sp>
+        <p:nvSpPr>
+          <p:cNvPr id="3" name="Text 1"/>
+          <p:cNvSpPr/>
+          <p:nvPr/>
+        </p:nvSpPr>
+        <p:spPr>
+          <a:xfrm>
+            <a:off x="365760" y="1005840"/>
+            <a:ext cx="11460175" cy="731520"/>
+          </a:xfrm>
+          <a:prstGeom prst="rect">
+            <a:avLst/>
+          </a:prstGeom>
+          <a:noFill/>
+          <a:ln/>
+        </p:spPr>
+        <p:txBody>
+          <a:bodyPr wrap="square" lIns="0" tIns="0" rIns="0" bIns="0" rtlCol="0" anchor="ctr">
+            <a:normAutofit/>
+          </a:bodyPr>
+          <a:lstStyle/>
+          <a:p>
+            <a:pPr algn="ctr" indent="0" marL="0">
+              <a:buNone/>
+            </a:pPr>
+            <a:r>
+              <a:rPr lang="en-US" sz="3600" b="1" dirty="0">
+                <a:solidFill>
+                  <a:srgbClr val="990011"/>
+                </a:solidFill>
+                <a:latin typeface="Times New Roman" pitchFamily="34" charset="0"/>
+                <a:ea typeface="Times New Roman" pitchFamily="34" charset="-122"/>
+                <a:cs typeface="Times New Roman" pitchFamily="34" charset="-120"/>
+              </a:rPr>
+              <a:t>3. Quartiles and the Interquartile Range</a:t>
+            </a:r>
+            <a:endParaRPr lang="en-US" sz="3600" dirty="0"/>
+          </a:p>
+        </p:txBody>
+      </p:sp>
+      <p:sp>
+        <p:nvSpPr>
+          <p:cNvPr id="4" name="Text 2"/>
+          <p:cNvSpPr/>
+          <p:nvPr/>
+        </p:nvSpPr>
+        <p:spPr>
+          <a:xfrm>
+            <a:off x="365760" y="1783080"/>
+            <a:ext cx="6035040" cy="4617720"/>
+          </a:xfrm>
+          <a:prstGeom prst="rect">
+            <a:avLst/>
+          </a:prstGeom>
+          <a:noFill/>
+          <a:ln/>
+        </p:spPr>
+        <p:txBody>
+          <a:bodyPr wrap="square" lIns="0" tIns="0" rIns="0" bIns="0" rtlCol="0" anchor="t"/>
+          <a:lstStyle/>
+          <a:p>
+            <a:pPr algn="l" indent="0" marL="0">
+              <a:spcAft>
+                <a:spcPts val="800"/>
+              </a:spcAft>
+              <a:buNone/>
+            </a:pPr>
+            <a:r>
+              <a:rPr lang="en-US" sz="3600" b="1" dirty="0">
+                <a:solidFill>
+                  <a:srgbClr val="111111"/>
+                </a:solidFill>
+                <a:latin typeface="Times New Roman" pitchFamily="34" charset="0"/>
+                <a:ea typeface="Times New Roman" pitchFamily="34" charset="-122"/>
+                <a:cs typeface="Times New Roman" pitchFamily="34" charset="-120"/>
+              </a:rPr>
+              <a:t>Advantage: </a:t>
+            </a:r>
+            <a:pPr algn="l" indent="0" marL="0">
+              <a:spcAft>
+                <a:spcPts val="800"/>
+              </a:spcAft>
+              <a:buNone/>
+            </a:pPr>
+            <a:r>
+              <a:rPr lang="en-US" sz="3600" dirty="0">
+                <a:solidFill>
+                  <a:srgbClr val="111111"/>
+                </a:solidFill>
+                <a:latin typeface="Times New Roman" pitchFamily="34" charset="0"/>
+                <a:ea typeface="Times New Roman" pitchFamily="34" charset="-122"/>
+                <a:cs typeface="Times New Roman" pitchFamily="34" charset="-120"/>
+              </a:rPr>
+              <a:t>The IQR covers the middle 50 % of the data and ignores the lowest and highest quarters. It is therefore not affected by outliers, unlike the range.</a:t>
+            </a:r>
+            <a:endParaRPr lang="en-US" sz="3600" dirty="0"/>
+          </a:p>
+        </p:txBody>
+      </p:sp>
       <p:pic>
         <p:nvPicPr>
-          <p:cNvPr id="3" name="Image 0" descr="/home/claude/f4/img/minesec_sheet.png">    </p:cNvPr>
+          <p:cNvPr id="5" name="Image 0" descr="/home/claude/f4/img/v2/box_whisker_big.png">    </p:cNvPr>
           <p:cNvPicPr>
             <a:picLocks noChangeAspect="1"/>
           </p:cNvPicPr>
@@ -21513,8 +20978,8 @@
         </p:blipFill>
         <p:spPr>
           <a:xfrm>
-            <a:off x="0" y="658368"/>
-            <a:ext cx="2468880" cy="5833872"/>
+            <a:off x="6537960" y="2721454"/>
+            <a:ext cx="5470855" cy="2393499"/>
           </a:xfrm>
           <a:prstGeom prst="rect">
             <a:avLst/>
@@ -21523,14 +20988,14 @@
       </p:pic>
       <p:sp>
         <p:nvSpPr>
-          <p:cNvPr id="4" name="Text 1"/>
+          <p:cNvPr id="6" name="Text 3"/>
           <p:cNvSpPr/>
           <p:nvPr/>
         </p:nvSpPr>
         <p:spPr>
           <a:xfrm>
-            <a:off x="2697480" y="1005840"/>
-            <a:ext cx="9174175" cy="731520"/>
+            <a:off x="6537960" y="6089904"/>
+            <a:ext cx="5470855" cy="347472"/>
           </a:xfrm>
           <a:prstGeom prst="rect">
             <a:avLst/>
@@ -21539,151 +21004,24 @@
           <a:ln/>
         </p:spPr>
         <p:txBody>
-          <a:bodyPr wrap="square" lIns="0" tIns="0" rIns="0" bIns="0" rtlCol="0" anchor="ctr">
-            <a:normAutofit/>
-          </a:bodyPr>
+          <a:bodyPr wrap="square" lIns="0" tIns="0" rIns="0" bIns="0" rtlCol="0" anchor="ctr"/>
           <a:lstStyle/>
           <a:p>
             <a:pPr algn="ctr" indent="0" marL="0">
               <a:buNone/>
             </a:pPr>
             <a:r>
-              <a:rPr lang="en-US" sz="3600" b="1" dirty="0">
-                <a:solidFill>
-                  <a:srgbClr val="990011"/>
+              <a:rPr lang="en-US" sz="1600" i="1" dirty="0">
+                <a:solidFill>
+                  <a:srgbClr val="555555"/>
                 </a:solidFill>
                 <a:latin typeface="Times New Roman" pitchFamily="34" charset="0"/>
                 <a:ea typeface="Times New Roman" pitchFamily="34" charset="-122"/>
                 <a:cs typeface="Times New Roman" pitchFamily="34" charset="-120"/>
               </a:rPr>
-              <a:t>3. Quartiles and the Interquartile Range</a:t>
-            </a:r>
-            <a:endParaRPr lang="en-US" sz="3600" dirty="0"/>
-          </a:p>
-        </p:txBody>
-      </p:sp>
-      <p:sp>
-        <p:nvSpPr>
-          <p:cNvPr id="5" name="Text 2"/>
-          <p:cNvSpPr/>
-          <p:nvPr/>
-        </p:nvSpPr>
-        <p:spPr>
-          <a:xfrm>
-            <a:off x="2697480" y="1783080"/>
-            <a:ext cx="9174175" cy="4663440"/>
-          </a:xfrm>
-          <a:prstGeom prst="rect">
-            <a:avLst/>
-          </a:prstGeom>
-          <a:noFill/>
-          <a:ln/>
-        </p:spPr>
-        <p:txBody>
-          <a:bodyPr wrap="square" lIns="0" tIns="0" rIns="0" bIns="0" rtlCol="0" anchor="t"/>
-          <a:lstStyle/>
-          <a:p>
-            <a:pPr algn="l" indent="0" marL="0">
-              <a:spcAft>
-                <a:spcPts val="800"/>
-              </a:spcAft>
-              <a:buNone/>
-            </a:pPr>
-            <a:r>
-              <a:rPr lang="en-US" sz="4000" i="1" dirty="0">
-                <a:solidFill>
-                  <a:srgbClr val="111111"/>
-                </a:solidFill>
-                <a:latin typeface="Times New Roman" pitchFamily="34" charset="0"/>
-                <a:ea typeface="Times New Roman" pitchFamily="34" charset="-122"/>
-                <a:cs typeface="Times New Roman" pitchFamily="34" charset="-120"/>
-              </a:rPr>
-              <a:t>The quartiles and the IQR are calculated as follows:</a:t>
-            </a:r>
-            <a:endParaRPr lang="en-US" sz="4000" dirty="0"/>
-          </a:p>
-          <a:p>
-            <a:pPr algn="l" indent="0" marL="0">
-              <a:spcAft>
-                <a:spcPts val="800"/>
-              </a:spcAft>
-              <a:buNone/>
-            </a:pPr>
-            <a:r>
-              <a:rPr lang="en-US" sz="4000" b="1" dirty="0">
-                <a:solidFill>
-                  <a:srgbClr val="111111"/>
-                </a:solidFill>
-                <a:latin typeface="Times New Roman" pitchFamily="34" charset="0"/>
-                <a:ea typeface="Times New Roman" pitchFamily="34" charset="-122"/>
-                <a:cs typeface="Times New Roman" pitchFamily="34" charset="-120"/>
-              </a:rPr>
-              <a:t>Steps:</a:t>
-            </a:r>
-            <a:endParaRPr lang="en-US" sz="4000" dirty="0"/>
-          </a:p>
-          <a:p>
-            <a:pPr algn="l" marL="342900" indent="-342900">
-              <a:spcAft>
-                <a:spcPts val="800"/>
-              </a:spcAft>
-              <a:buSzPct val="100000"/>
-              <a:buChar char="•"/>
-            </a:pPr>
-            <a:r>
-              <a:rPr lang="en-US" sz="4000" dirty="0">
-                <a:solidFill>
-                  <a:srgbClr val="111111"/>
-                </a:solidFill>
-                <a:latin typeface="Times New Roman" pitchFamily="34" charset="0"/>
-                <a:ea typeface="Times New Roman" pitchFamily="34" charset="-122"/>
-                <a:cs typeface="Times New Roman" pitchFamily="34" charset="-120"/>
-              </a:rPr>
-              <a:t>Order the data.</a:t>
-            </a:r>
-            <a:endParaRPr lang="en-US" sz="4000" dirty="0"/>
-          </a:p>
-          <a:p>
-            <a:pPr algn="l" marL="342900" indent="-342900">
-              <a:spcAft>
-                <a:spcPts val="800"/>
-              </a:spcAft>
-              <a:buSzPct val="100000"/>
-              <a:buChar char="•"/>
-            </a:pPr>
-            <a:r>
-              <a:rPr lang="en-US" sz="4000" dirty="0">
-                <a:solidFill>
-                  <a:srgbClr val="111111"/>
-                </a:solidFill>
-                <a:latin typeface="Times New Roman" pitchFamily="34" charset="0"/>
-                <a:ea typeface="Times New Roman" pitchFamily="34" charset="-122"/>
-                <a:cs typeface="Times New Roman" pitchFamily="34" charset="-120"/>
-              </a:rPr>
-              <a:t>Find the median (Q2).</a:t>
-            </a:r>
-            <a:endParaRPr lang="en-US" sz="4000" dirty="0"/>
-          </a:p>
-          <a:p>
-            <a:pPr algn="l" marL="342900" indent="-342900">
-              <a:spcAft>
-                <a:spcPts val="800"/>
-              </a:spcAft>
-              <a:buSzPct val="100000"/>
-              <a:buChar char="•"/>
-            </a:pPr>
-            <a:r>
-              <a:rPr lang="en-US" sz="4000" dirty="0">
-                <a:solidFill>
-                  <a:srgbClr val="111111"/>
-                </a:solidFill>
-                <a:latin typeface="Times New Roman" pitchFamily="34" charset="0"/>
-                <a:ea typeface="Times New Roman" pitchFamily="34" charset="-122"/>
-                <a:cs typeface="Times New Roman" pitchFamily="34" charset="-120"/>
-              </a:rPr>
-              <a:t>Q1 is the median of the lower half.</a:t>
-            </a:r>
-            <a:endParaRPr lang="en-US" sz="4000" dirty="0"/>
+              <a:t>Illustration: a box and whisker plot</a:t>
+            </a:r>
+            <a:endParaRPr lang="en-US" sz="1600" dirty="0"/>
           </a:p>
         </p:txBody>
       </p:sp>
@@ -21793,7 +21131,7 @@
                 <a:ea typeface="Calibri" pitchFamily="34" charset="-122"/>
                 <a:cs typeface="Calibri" pitchFamily="34" charset="-120"/>
               </a:rPr>
-              <a:t>BOARD SUMMARY</a:t>
+              <a:t>FORMATIVE EVALUATION</a:t>
             </a:r>
             <a:endParaRPr lang="en-US" sz="1400" dirty="0"/>
           </a:p>
@@ -21858,7 +21196,7 @@
                 <a:ea typeface="Times New Roman" pitchFamily="34" charset="-122"/>
                 <a:cs typeface="Times New Roman" pitchFamily="34" charset="-120"/>
               </a:rPr>
-              <a:t>3. Quartiles and the Interquartile Range (continued)</a:t>
+              <a:t>Evaluation 1</a:t>
             </a:r>
             <a:endParaRPr lang="en-US" sz="3600" dirty="0"/>
           </a:p>
@@ -21885,12 +21223,11 @@
           <a:bodyPr wrap="square" lIns="0" tIns="0" rIns="0" bIns="0" rtlCol="0" anchor="t"/>
           <a:lstStyle/>
           <a:p>
-            <a:pPr algn="l" marL="342900" indent="-342900">
+            <a:pPr algn="l" indent="0" marL="0">
               <a:spcAft>
                 <a:spcPts val="800"/>
               </a:spcAft>
-              <a:buSzPct val="100000"/>
-              <a:buChar char="•"/>
+              <a:buNone/>
             </a:pPr>
             <a:r>
               <a:rPr lang="en-US" sz="4000" dirty="0">
@@ -21901,28 +21238,7 @@
                 <a:ea typeface="Times New Roman" pitchFamily="34" charset="-122"/>
                 <a:cs typeface="Times New Roman" pitchFamily="34" charset="-120"/>
               </a:rPr>
-              <a:t>Q3 is the median of the upper half.</a:t>
-            </a:r>
-            <a:endParaRPr lang="en-US" sz="4000" dirty="0"/>
-          </a:p>
-          <a:p>
-            <a:pPr algn="l" marL="342900" indent="-342900">
-              <a:spcAft>
-                <a:spcPts val="800"/>
-              </a:spcAft>
-              <a:buSzPct val="100000"/>
-              <a:buChar char="•"/>
-            </a:pPr>
-            <a:r>
-              <a:rPr lang="en-US" sz="4000" dirty="0">
-                <a:solidFill>
-                  <a:srgbClr val="111111"/>
-                </a:solidFill>
-                <a:latin typeface="Times New Roman" pitchFamily="34" charset="0"/>
-                <a:ea typeface="Times New Roman" pitchFamily="34" charset="-122"/>
-                <a:cs typeface="Times New Roman" pitchFamily="34" charset="-120"/>
-              </a:rPr>
-              <a:t>IQR = Q3 − Q1.</a:t>
+              <a:t>Find the mean, median and mode of 4, 7, 7, 9, 13.</a:t>
             </a:r>
             <a:endParaRPr lang="en-US" sz="4000" dirty="0"/>
           </a:p>
@@ -22034,115 +21350,15 @@
                 <a:ea typeface="Calibri" pitchFamily="34" charset="-122"/>
                 <a:cs typeface="Calibri" pitchFamily="34" charset="-120"/>
               </a:rPr>
-              <a:t>BOARD SUMMARY</a:t>
+              <a:t>FORMATIVE EVALUATION</a:t>
             </a:r>
             <a:endParaRPr lang="en-US" sz="1400" dirty="0"/>
-          </a:p>
-        </p:txBody>
-      </p:sp>
-      <p:sp>
-        <p:nvSpPr>
-          <p:cNvPr id="3" name="Text 1"/>
-          <p:cNvSpPr/>
-          <p:nvPr/>
-        </p:nvSpPr>
-        <p:spPr>
-          <a:xfrm>
-            <a:off x="365760" y="1005840"/>
-            <a:ext cx="11460175" cy="731520"/>
-          </a:xfrm>
-          <a:prstGeom prst="rect">
-            <a:avLst/>
-          </a:prstGeom>
-          <a:noFill/>
-          <a:ln/>
-        </p:spPr>
-        <p:txBody>
-          <a:bodyPr wrap="square" lIns="0" tIns="0" rIns="0" bIns="0" rtlCol="0" anchor="ctr">
-            <a:normAutofit/>
-          </a:bodyPr>
-          <a:lstStyle/>
-          <a:p>
-            <a:pPr algn="ctr" indent="0" marL="0">
-              <a:buNone/>
-            </a:pPr>
-            <a:r>
-              <a:rPr lang="en-US" sz="3600" b="1" dirty="0">
-                <a:solidFill>
-                  <a:srgbClr val="990011"/>
-                </a:solidFill>
-                <a:latin typeface="Times New Roman" pitchFamily="34" charset="0"/>
-                <a:ea typeface="Times New Roman" pitchFamily="34" charset="-122"/>
-                <a:cs typeface="Times New Roman" pitchFamily="34" charset="-120"/>
-              </a:rPr>
-              <a:t>3. Quartiles and the Interquartile Range</a:t>
-            </a:r>
-            <a:endParaRPr lang="en-US" sz="3600" dirty="0"/>
-          </a:p>
-        </p:txBody>
-      </p:sp>
-      <p:sp>
-        <p:nvSpPr>
-          <p:cNvPr id="4" name="Text 2"/>
-          <p:cNvSpPr/>
-          <p:nvPr/>
-        </p:nvSpPr>
-        <p:spPr>
-          <a:xfrm>
-            <a:off x="365760" y="1783080"/>
-            <a:ext cx="4846320" cy="4617720"/>
-          </a:xfrm>
-          <a:prstGeom prst="rect">
-            <a:avLst/>
-          </a:prstGeom>
-          <a:noFill/>
-          <a:ln/>
-        </p:spPr>
-        <p:txBody>
-          <a:bodyPr wrap="square" lIns="0" tIns="0" rIns="0" bIns="0" rtlCol="0" anchor="t"/>
-          <a:lstStyle/>
-          <a:p>
-            <a:pPr algn="l" indent="0" marL="0">
-              <a:spcAft>
-                <a:spcPts val="800"/>
-              </a:spcAft>
-              <a:buNone/>
-            </a:pPr>
-            <a:r>
-              <a:rPr lang="en-US" sz="3600" b="1" dirty="0">
-                <a:solidFill>
-                  <a:srgbClr val="111111"/>
-                </a:solidFill>
-                <a:latin typeface="Times New Roman" pitchFamily="34" charset="0"/>
-                <a:ea typeface="Times New Roman" pitchFamily="34" charset="-122"/>
-                <a:cs typeface="Times New Roman" pitchFamily="34" charset="-120"/>
-              </a:rPr>
-              <a:t>Example 1 (n = 11): </a:t>
-            </a:r>
-            <a:pPr algn="l" indent="0" marL="0">
-              <a:spcAft>
-                <a:spcPts val="800"/>
-              </a:spcAft>
-              <a:buNone/>
-            </a:pPr>
-            <a:r>
-              <a:rPr lang="en-US" sz="3600" dirty="0">
-                <a:solidFill>
-                  <a:srgbClr val="111111"/>
-                </a:solidFill>
-                <a:latin typeface="Times New Roman" pitchFamily="34" charset="0"/>
-                <a:ea typeface="Times New Roman" pitchFamily="34" charset="-122"/>
-                <a:cs typeface="Times New Roman" pitchFamily="34" charset="-120"/>
-              </a:rPr>
-              <a:t>102 … 118: median = 109, Q1 = 105, Q3 = 115, so IQR = 10.</a:t>
-            </a:r>
-            <a:endParaRPr lang="en-US" sz="3600" dirty="0"/>
           </a:p>
         </p:txBody>
       </p:sp>
       <p:pic>
         <p:nvPicPr>
-          <p:cNvPr id="5" name="Image 0" descr="/home/claude/f4/img/v2/stat2_iqr.png">    </p:cNvPr>
+          <p:cNvPr id="3" name="Image 0" descr="/home/claude/f4/img/minesec_sheet.png">    </p:cNvPr>
           <p:cNvPicPr>
             <a:picLocks noChangeAspect="1"/>
           </p:cNvPicPr>
@@ -22156,8 +21372,8 @@
         </p:blipFill>
         <p:spPr>
           <a:xfrm>
-            <a:off x="5349240" y="2617506"/>
-            <a:ext cx="6659575" cy="2601397"/>
+            <a:off x="0" y="658368"/>
+            <a:ext cx="5120640" cy="5833872"/>
           </a:xfrm>
           <a:prstGeom prst="rect">
             <a:avLst/>
@@ -22166,14 +21382,14 @@
       </p:pic>
       <p:sp>
         <p:nvSpPr>
-          <p:cNvPr id="6" name="Text 3"/>
+          <p:cNvPr id="4" name="Text 1"/>
           <p:cNvSpPr/>
           <p:nvPr/>
         </p:nvSpPr>
         <p:spPr>
           <a:xfrm>
-            <a:off x="5349240" y="6089904"/>
-            <a:ext cx="6659575" cy="347472"/>
+            <a:off x="5349240" y="1005840"/>
+            <a:ext cx="6522415" cy="731520"/>
           </a:xfrm>
           <a:prstGeom prst="rect">
             <a:avLst/>
@@ -22182,24 +21398,68 @@
           <a:ln/>
         </p:spPr>
         <p:txBody>
-          <a:bodyPr wrap="square" lIns="0" tIns="0" rIns="0" bIns="0" rtlCol="0" anchor="ctr"/>
+          <a:bodyPr wrap="square" lIns="0" tIns="0" rIns="0" bIns="0" rtlCol="0" anchor="ctr">
+            <a:normAutofit/>
+          </a:bodyPr>
           <a:lstStyle/>
           <a:p>
             <a:pPr algn="ctr" indent="0" marL="0">
               <a:buNone/>
             </a:pPr>
             <a:r>
-              <a:rPr lang="en-US" sz="1600" i="1" dirty="0">
-                <a:solidFill>
-                  <a:srgbClr val="555555"/>
+              <a:rPr lang="en-US" sz="3600" b="1" dirty="0">
+                <a:solidFill>
+                  <a:srgbClr val="990011"/>
                 </a:solidFill>
                 <a:latin typeface="Times New Roman" pitchFamily="34" charset="0"/>
                 <a:ea typeface="Times New Roman" pitchFamily="34" charset="-122"/>
                 <a:cs typeface="Times New Roman" pitchFamily="34" charset="-120"/>
               </a:rPr>
-              <a:t>Illustration: quartiles and IQR</a:t>
-            </a:r>
-            <a:endParaRPr lang="en-US" sz="1600" dirty="0"/>
+              <a:t>Expected Answer</a:t>
+            </a:r>
+            <a:endParaRPr lang="en-US" sz="3600" dirty="0"/>
+          </a:p>
+        </p:txBody>
+      </p:sp>
+      <p:sp>
+        <p:nvSpPr>
+          <p:cNvPr id="5" name="Text 2"/>
+          <p:cNvSpPr/>
+          <p:nvPr/>
+        </p:nvSpPr>
+        <p:spPr>
+          <a:xfrm>
+            <a:off x="5349240" y="1783080"/>
+            <a:ext cx="6522415" cy="4663440"/>
+          </a:xfrm>
+          <a:prstGeom prst="rect">
+            <a:avLst/>
+          </a:prstGeom>
+          <a:noFill/>
+          <a:ln/>
+        </p:spPr>
+        <p:txBody>
+          <a:bodyPr wrap="square" lIns="0" tIns="0" rIns="0" bIns="0" rtlCol="0" anchor="t"/>
+          <a:lstStyle/>
+          <a:p>
+            <a:pPr algn="l" indent="0" marL="0">
+              <a:spcAft>
+                <a:spcPts val="800"/>
+              </a:spcAft>
+              <a:buNone/>
+            </a:pPr>
+            <a:r>
+              <a:rPr lang="en-US" sz="4000" dirty="0">
+                <a:solidFill>
+                  <a:srgbClr val="111111"/>
+                </a:solidFill>
+                <a:latin typeface="Times New Roman" pitchFamily="34" charset="0"/>
+                <a:ea typeface="Times New Roman" pitchFamily="34" charset="-122"/>
+                <a:cs typeface="Times New Roman" pitchFamily="34" charset="-120"/>
+              </a:rPr>
+              <a:t>Mean = 40 ÷ 5 = 8; median = 7; mode = 7.</a:t>
+            </a:r>
+            <a:endParaRPr lang="en-US" sz="4000" dirty="0"/>
           </a:p>
         </p:txBody>
       </p:sp>
@@ -22309,7 +21569,7 @@
                 <a:ea typeface="Calibri" pitchFamily="34" charset="-122"/>
                 <a:cs typeface="Calibri" pitchFamily="34" charset="-120"/>
               </a:rPr>
-              <a:t>BOARD SUMMARY</a:t>
+              <a:t>FORMATIVE EVALUATION</a:t>
             </a:r>
             <a:endParaRPr lang="en-US" sz="1400" dirty="0"/>
           </a:p>
@@ -22374,7 +21634,7 @@
                 <a:ea typeface="Times New Roman" pitchFamily="34" charset="-122"/>
                 <a:cs typeface="Times New Roman" pitchFamily="34" charset="-120"/>
               </a:rPr>
-              <a:t>3. Quartiles and the Interquartile Range</a:t>
+              <a:t>Evaluation 2</a:t>
             </a:r>
             <a:endParaRPr lang="en-US" sz="3600" dirty="0"/>
           </a:p>
@@ -22408,7 +21668,7 @@
               <a:buNone/>
             </a:pPr>
             <a:r>
-              <a:rPr lang="en-US" sz="4000" b="1" dirty="0">
+              <a:rPr lang="en-US" sz="4000" dirty="0">
                 <a:solidFill>
                   <a:srgbClr val="111111"/>
                 </a:solidFill>
@@ -22416,24 +21676,7 @@
                 <a:ea typeface="Times New Roman" pitchFamily="34" charset="-122"/>
                 <a:cs typeface="Times New Roman" pitchFamily="34" charset="-120"/>
               </a:rPr>
-              <a:t>Example 2 (n = 13): </a:t>
-            </a:r>
-            <a:pPr algn="l" indent="0" marL="0">
-              <a:spcAft>
-                <a:spcPts val="800"/>
-              </a:spcAft>
-              <a:buNone/>
-            </a:pPr>
-            <a:r>
-              <a:rPr lang="en-US" sz="4000" dirty="0">
-                <a:solidFill>
-                  <a:srgbClr val="111111"/>
-                </a:solidFill>
-                <a:latin typeface="Times New Roman" pitchFamily="34" charset="0"/>
-                <a:ea typeface="Times New Roman" pitchFamily="34" charset="-122"/>
-                <a:cs typeface="Times New Roman" pitchFamily="34" charset="-120"/>
-              </a:rPr>
-              <a:t>10, 25, 30, 30, 40, 41, 42, 50, 55, 70, 101, 110, 111: median = 42, Q1 = 30, Q3 = 85.5, so IQR = 55.5.</a:t>
+              <a:t>Why is the median better than the mean for Oumarou's farms?</a:t>
             </a:r>
             <a:endParaRPr lang="en-US" sz="4000" dirty="0"/>
           </a:p>
@@ -22545,115 +21788,15 @@
                 <a:ea typeface="Calibri" pitchFamily="34" charset="-122"/>
                 <a:cs typeface="Calibri" pitchFamily="34" charset="-120"/>
               </a:rPr>
-              <a:t>BOARD SUMMARY</a:t>
+              <a:t>FORMATIVE EVALUATION</a:t>
             </a:r>
             <a:endParaRPr lang="en-US" sz="1400" dirty="0"/>
-          </a:p>
-        </p:txBody>
-      </p:sp>
-      <p:sp>
-        <p:nvSpPr>
-          <p:cNvPr id="3" name="Text 1"/>
-          <p:cNvSpPr/>
-          <p:nvPr/>
-        </p:nvSpPr>
-        <p:spPr>
-          <a:xfrm>
-            <a:off x="365760" y="1005840"/>
-            <a:ext cx="11460175" cy="731520"/>
-          </a:xfrm>
-          <a:prstGeom prst="rect">
-            <a:avLst/>
-          </a:prstGeom>
-          <a:noFill/>
-          <a:ln/>
-        </p:spPr>
-        <p:txBody>
-          <a:bodyPr wrap="square" lIns="0" tIns="0" rIns="0" bIns="0" rtlCol="0" anchor="ctr">
-            <a:normAutofit/>
-          </a:bodyPr>
-          <a:lstStyle/>
-          <a:p>
-            <a:pPr algn="ctr" indent="0" marL="0">
-              <a:buNone/>
-            </a:pPr>
-            <a:r>
-              <a:rPr lang="en-US" sz="3600" b="1" dirty="0">
-                <a:solidFill>
-                  <a:srgbClr val="990011"/>
-                </a:solidFill>
-                <a:latin typeface="Times New Roman" pitchFamily="34" charset="0"/>
-                <a:ea typeface="Times New Roman" pitchFamily="34" charset="-122"/>
-                <a:cs typeface="Times New Roman" pitchFamily="34" charset="-120"/>
-              </a:rPr>
-              <a:t>3. Quartiles and the Interquartile Range</a:t>
-            </a:r>
-            <a:endParaRPr lang="en-US" sz="3600" dirty="0"/>
-          </a:p>
-        </p:txBody>
-      </p:sp>
-      <p:sp>
-        <p:nvSpPr>
-          <p:cNvPr id="4" name="Text 2"/>
-          <p:cNvSpPr/>
-          <p:nvPr/>
-        </p:nvSpPr>
-        <p:spPr>
-          <a:xfrm>
-            <a:off x="365760" y="1783080"/>
-            <a:ext cx="4846320" cy="4617720"/>
-          </a:xfrm>
-          <a:prstGeom prst="rect">
-            <a:avLst/>
-          </a:prstGeom>
-          <a:noFill/>
-          <a:ln/>
-        </p:spPr>
-        <p:txBody>
-          <a:bodyPr wrap="square" lIns="0" tIns="0" rIns="0" bIns="0" rtlCol="0" anchor="t"/>
-          <a:lstStyle/>
-          <a:p>
-            <a:pPr algn="l" indent="0" marL="0">
-              <a:spcAft>
-                <a:spcPts val="800"/>
-              </a:spcAft>
-              <a:buNone/>
-            </a:pPr>
-            <a:r>
-              <a:rPr lang="en-US" sz="3600" b="1" dirty="0">
-                <a:solidFill>
-                  <a:srgbClr val="111111"/>
-                </a:solidFill>
-                <a:latin typeface="Times New Roman" pitchFamily="34" charset="0"/>
-                <a:ea typeface="Times New Roman" pitchFamily="34" charset="-122"/>
-                <a:cs typeface="Times New Roman" pitchFamily="34" charset="-120"/>
-              </a:rPr>
-              <a:t>Advantage: </a:t>
-            </a:r>
-            <a:pPr algn="l" indent="0" marL="0">
-              <a:spcAft>
-                <a:spcPts val="800"/>
-              </a:spcAft>
-              <a:buNone/>
-            </a:pPr>
-            <a:r>
-              <a:rPr lang="en-US" sz="3600" dirty="0">
-                <a:solidFill>
-                  <a:srgbClr val="111111"/>
-                </a:solidFill>
-                <a:latin typeface="Times New Roman" pitchFamily="34" charset="0"/>
-                <a:ea typeface="Times New Roman" pitchFamily="34" charset="-122"/>
-                <a:cs typeface="Times New Roman" pitchFamily="34" charset="-120"/>
-              </a:rPr>
-              <a:t>The IQR is not affected by outliers because it ignores the lowest and highest quarters.</a:t>
-            </a:r>
-            <a:endParaRPr lang="en-US" sz="3600" dirty="0"/>
           </a:p>
         </p:txBody>
       </p:sp>
       <p:pic>
         <p:nvPicPr>
-          <p:cNvPr id="5" name="Image 0" descr="/home/claude/f4/img/v2/box_whisker_big.png">    </p:cNvPr>
+          <p:cNvPr id="3" name="Image 0" descr="/home/claude/f4/img/minesec_sheet.png">    </p:cNvPr>
           <p:cNvPicPr>
             <a:picLocks noChangeAspect="1"/>
           </p:cNvPicPr>
@@ -22667,8 +21810,8 @@
         </p:blipFill>
         <p:spPr>
           <a:xfrm>
-            <a:off x="5349240" y="2461422"/>
-            <a:ext cx="6659575" cy="2913564"/>
+            <a:off x="0" y="658368"/>
+            <a:ext cx="5120640" cy="5833872"/>
           </a:xfrm>
           <a:prstGeom prst="rect">
             <a:avLst/>
@@ -22677,14 +21820,14 @@
       </p:pic>
       <p:sp>
         <p:nvSpPr>
-          <p:cNvPr id="6" name="Text 3"/>
+          <p:cNvPr id="4" name="Text 1"/>
           <p:cNvSpPr/>
           <p:nvPr/>
         </p:nvSpPr>
         <p:spPr>
           <a:xfrm>
-            <a:off x="5349240" y="6089904"/>
-            <a:ext cx="6659575" cy="347472"/>
+            <a:off x="5349240" y="1005840"/>
+            <a:ext cx="6522415" cy="731520"/>
           </a:xfrm>
           <a:prstGeom prst="rect">
             <a:avLst/>
@@ -22693,24 +21836,68 @@
           <a:ln/>
         </p:spPr>
         <p:txBody>
-          <a:bodyPr wrap="square" lIns="0" tIns="0" rIns="0" bIns="0" rtlCol="0" anchor="ctr"/>
+          <a:bodyPr wrap="square" lIns="0" tIns="0" rIns="0" bIns="0" rtlCol="0" anchor="ctr">
+            <a:normAutofit/>
+          </a:bodyPr>
           <a:lstStyle/>
           <a:p>
             <a:pPr algn="ctr" indent="0" marL="0">
               <a:buNone/>
             </a:pPr>
             <a:r>
-              <a:rPr lang="en-US" sz="1600" i="1" dirty="0">
-                <a:solidFill>
-                  <a:srgbClr val="555555"/>
+              <a:rPr lang="en-US" sz="3600" b="1" dirty="0">
+                <a:solidFill>
+                  <a:srgbClr val="990011"/>
                 </a:solidFill>
                 <a:latin typeface="Times New Roman" pitchFamily="34" charset="0"/>
                 <a:ea typeface="Times New Roman" pitchFamily="34" charset="-122"/>
                 <a:cs typeface="Times New Roman" pitchFamily="34" charset="-120"/>
               </a:rPr>
-              <a:t>Illustration: a box-and-whisker plot</a:t>
-            </a:r>
-            <a:endParaRPr lang="en-US" sz="1600" dirty="0"/>
+              <a:t>Expected Answer</a:t>
+            </a:r>
+            <a:endParaRPr lang="en-US" sz="3600" dirty="0"/>
+          </a:p>
+        </p:txBody>
+      </p:sp>
+      <p:sp>
+        <p:nvSpPr>
+          <p:cNvPr id="5" name="Text 2"/>
+          <p:cNvSpPr/>
+          <p:nvPr/>
+        </p:nvSpPr>
+        <p:spPr>
+          <a:xfrm>
+            <a:off x="5349240" y="1783080"/>
+            <a:ext cx="6522415" cy="4663440"/>
+          </a:xfrm>
+          <a:prstGeom prst="rect">
+            <a:avLst/>
+          </a:prstGeom>
+          <a:noFill/>
+          <a:ln/>
+        </p:spPr>
+        <p:txBody>
+          <a:bodyPr wrap="square" lIns="0" tIns="0" rIns="0" bIns="0" rtlCol="0" anchor="t"/>
+          <a:lstStyle/>
+          <a:p>
+            <a:pPr algn="l" indent="0" marL="0">
+              <a:spcAft>
+                <a:spcPts val="800"/>
+              </a:spcAft>
+              <a:buNone/>
+            </a:pPr>
+            <a:r>
+              <a:rPr lang="en-US" sz="4000" dirty="0">
+                <a:solidFill>
+                  <a:srgbClr val="111111"/>
+                </a:solidFill>
+                <a:latin typeface="Times New Roman" pitchFamily="34" charset="0"/>
+                <a:ea typeface="Times New Roman" pitchFamily="34" charset="-122"/>
+                <a:cs typeface="Times New Roman" pitchFamily="34" charset="-120"/>
+              </a:rPr>
+              <a:t>The outlier (45 bags) raises the mean to about 21.3, while the median (19) represents most farms.</a:t>
+            </a:r>
+            <a:endParaRPr lang="en-US" sz="4000" dirty="0"/>
           </a:p>
         </p:txBody>
       </p:sp>
@@ -23151,7 +22338,7 @@
                 <a:ea typeface="Calibri" pitchFamily="34" charset="-122"/>
                 <a:cs typeface="Calibri" pitchFamily="34" charset="-120"/>
               </a:rPr>
-              <a:t>FORMATIVE EVALUATION</a:t>
+              <a:t>REMEDIATION</a:t>
             </a:r>
             <a:endParaRPr lang="en-US" sz="1400" dirty="0"/>
           </a:p>
@@ -23216,7 +22403,7 @@
                 <a:ea typeface="Times New Roman" pitchFamily="34" charset="-122"/>
                 <a:cs typeface="Times New Roman" pitchFamily="34" charset="-120"/>
               </a:rPr>
-              <a:t>Evaluation 1</a:t>
+              <a:t>Remediation</a:t>
             </a:r>
             <a:endParaRPr lang="en-US" sz="3600" dirty="0"/>
           </a:p>
@@ -23250,7 +22437,7 @@
               <a:buNone/>
             </a:pPr>
             <a:r>
-              <a:rPr lang="en-US" sz="4000" dirty="0">
+              <a:rPr lang="en-US" sz="4000" b="1" dirty="0">
                 <a:solidFill>
                   <a:srgbClr val="111111"/>
                 </a:solidFill>
@@ -23258,7 +22445,73 @@
                 <a:ea typeface="Times New Roman" pitchFamily="34" charset="-122"/>
                 <a:cs typeface="Times New Roman" pitchFamily="34" charset="-120"/>
               </a:rPr>
-              <a:t>Find the mean, median and mode of 4, 7, 7, 9, 13.</a:t>
+              <a:t>Fill in the blanks:</a:t>
+            </a:r>
+            <a:endParaRPr lang="en-US" sz="4000" dirty="0"/>
+          </a:p>
+          <a:p>
+            <a:pPr algn="l" marL="342900" indent="-342900">
+              <a:spcAft>
+                <a:spcPts val="800"/>
+              </a:spcAft>
+              <a:buSzPct val="100000"/>
+              <a:buFont typeface="+mj-lt"/>
+              <a:buAutoNum type="arabicPeriod" startAt="1"/>
+            </a:pPr>
+            <a:r>
+              <a:rPr lang="en-US" sz="4000" dirty="0">
+                <a:solidFill>
+                  <a:srgbClr val="111111"/>
+                </a:solidFill>
+                <a:latin typeface="Times New Roman" pitchFamily="34" charset="0"/>
+                <a:ea typeface="Times New Roman" pitchFamily="34" charset="-122"/>
+                <a:cs typeface="Times New Roman" pitchFamily="34" charset="-120"/>
+              </a:rPr>
+              <a:t>Mean = Σx ÷ ______.</a:t>
+            </a:r>
+            <a:endParaRPr lang="en-US" sz="4000" dirty="0"/>
+          </a:p>
+          <a:p>
+            <a:pPr algn="l" marL="342900" indent="-342900">
+              <a:spcAft>
+                <a:spcPts val="800"/>
+              </a:spcAft>
+              <a:buSzPct val="100000"/>
+              <a:buFont typeface="+mj-lt"/>
+              <a:buAutoNum type="arabicPeriod" startAt="1"/>
+            </a:pPr>
+            <a:r>
+              <a:rPr lang="en-US" sz="4000" dirty="0">
+                <a:solidFill>
+                  <a:srgbClr val="111111"/>
+                </a:solidFill>
+                <a:latin typeface="Times New Roman" pitchFamily="34" charset="0"/>
+                <a:ea typeface="Times New Roman" pitchFamily="34" charset="-122"/>
+                <a:cs typeface="Times New Roman" pitchFamily="34" charset="-120"/>
+              </a:rPr>
+              <a:t>The most frequent value is the ______.</a:t>
+            </a:r>
+            <a:endParaRPr lang="en-US" sz="4000" dirty="0"/>
+          </a:p>
+          <a:p>
+            <a:pPr algn="l" marL="342900" indent="-342900">
+              <a:spcAft>
+                <a:spcPts val="800"/>
+              </a:spcAft>
+              <a:buSzPct val="100000"/>
+              <a:buFont typeface="+mj-lt"/>
+              <a:buAutoNum type="arabicPeriod" startAt="1"/>
+            </a:pPr>
+            <a:r>
+              <a:rPr lang="en-US" sz="4000" dirty="0">
+                <a:solidFill>
+                  <a:srgbClr val="111111"/>
+                </a:solidFill>
+                <a:latin typeface="Times New Roman" pitchFamily="34" charset="0"/>
+                <a:ea typeface="Times New Roman" pitchFamily="34" charset="-122"/>
+                <a:cs typeface="Times New Roman" pitchFamily="34" charset="-120"/>
+              </a:rPr>
+              <a:t>IQR = Q3 − ______.</a:t>
             </a:r>
             <a:endParaRPr lang="en-US" sz="4000" dirty="0"/>
           </a:p>
@@ -23370,7 +22623,7 @@
                 <a:ea typeface="Calibri" pitchFamily="34" charset="-122"/>
                 <a:cs typeface="Calibri" pitchFamily="34" charset="-120"/>
               </a:rPr>
-              <a:t>FORMATIVE EVALUATION</a:t>
+              <a:t>HOMEWORK</a:t>
             </a:r>
             <a:endParaRPr lang="en-US" sz="1400" dirty="0"/>
           </a:p>
@@ -23435,7 +22688,7 @@
                 <a:ea typeface="Times New Roman" pitchFamily="34" charset="-122"/>
                 <a:cs typeface="Times New Roman" pitchFamily="34" charset="-120"/>
               </a:rPr>
-              <a:t>Expected Answer</a:t>
+              <a:t>Homework</a:t>
             </a:r>
             <a:endParaRPr lang="en-US" sz="3600" dirty="0"/>
           </a:p>
@@ -23477,7 +22730,7 @@
                 <a:ea typeface="Times New Roman" pitchFamily="34" charset="-122"/>
                 <a:cs typeface="Times New Roman" pitchFamily="34" charset="-120"/>
               </a:rPr>
-              <a:t>Mean = 40 ÷ 5 = 8; median = 7; mode = 7.</a:t>
+              <a:t>Calculate the mean of 3, 5, 7 and 9.</a:t>
             </a:r>
             <a:endParaRPr lang="en-US" sz="4000" dirty="0"/>
           </a:p>
@@ -23589,7 +22842,7 @@
                 <a:ea typeface="Calibri" pitchFamily="34" charset="-122"/>
                 <a:cs typeface="Calibri" pitchFamily="34" charset="-120"/>
               </a:rPr>
-              <a:t>FORMATIVE EVALUATION</a:t>
+              <a:t>NEXT LESSON</a:t>
             </a:r>
             <a:endParaRPr lang="en-US" sz="1400" dirty="0"/>
           </a:p>
@@ -23654,7 +22907,7 @@
                 <a:ea typeface="Times New Roman" pitchFamily="34" charset="-122"/>
                 <a:cs typeface="Times New Roman" pitchFamily="34" charset="-120"/>
               </a:rPr>
-              <a:t>Evaluation 2</a:t>
+              <a:t>Next Lesson</a:t>
             </a:r>
             <a:endParaRPr lang="en-US" sz="3600" dirty="0"/>
           </a:p>
@@ -23678,17 +22931,17 @@
           <a:ln/>
         </p:spPr>
         <p:txBody>
-          <a:bodyPr wrap="square" lIns="0" tIns="0" rIns="0" bIns="0" rtlCol="0" anchor="t"/>
-          <a:lstStyle/>
-          <a:p>
-            <a:pPr algn="l" indent="0" marL="0">
+          <a:bodyPr wrap="square" lIns="0" tIns="0" rIns="0" bIns="0" rtlCol="0" anchor="ctr"/>
+          <a:lstStyle/>
+          <a:p>
+            <a:pPr algn="ctr" indent="0" marL="0">
               <a:spcAft>
                 <a:spcPts val="800"/>
               </a:spcAft>
               <a:buNone/>
             </a:pPr>
             <a:r>
-              <a:rPr lang="en-US" sz="4000" dirty="0">
+              <a:rPr lang="en-US" sz="4000" b="1" dirty="0">
                 <a:solidFill>
                   <a:srgbClr val="111111"/>
                 </a:solidFill>
@@ -23696,7 +22949,27 @@
                 <a:ea typeface="Times New Roman" pitchFamily="34" charset="-122"/>
                 <a:cs typeface="Times New Roman" pitchFamily="34" charset="-120"/>
               </a:rPr>
-              <a:t>Why is the median better than the mean for Oumarou's farms?</a:t>
+              <a:t>Our next lesson will be on:</a:t>
+            </a:r>
+            <a:endParaRPr lang="en-US" sz="4000" dirty="0"/>
+          </a:p>
+          <a:p>
+            <a:pPr algn="ctr" indent="0" marL="0">
+              <a:spcAft>
+                <a:spcPts val="800"/>
+              </a:spcAft>
+              <a:buNone/>
+            </a:pPr>
+            <a:r>
+              <a:rPr lang="en-US" sz="4000" b="1" dirty="0">
+                <a:solidFill>
+                  <a:srgbClr val="990011"/>
+                </a:solidFill>
+                <a:latin typeface="Times New Roman" pitchFamily="34" charset="0"/>
+                <a:ea typeface="Times New Roman" pitchFamily="34" charset="-122"/>
+                <a:cs typeface="Times New Roman" pitchFamily="34" charset="-120"/>
+              </a:rPr>
+              <a:t>Quantitative Techniques 3 (Part 2): Measures of Dispersion: Variance, Standard Deviation and Coefficient of Variation</a:t>
             </a:r>
             <a:endParaRPr lang="en-US" sz="4000" dirty="0"/>
           </a:p>
@@ -23808,46 +23081,22 @@
                 <a:ea typeface="Calibri" pitchFamily="34" charset="-122"/>
                 <a:cs typeface="Calibri" pitchFamily="34" charset="-120"/>
               </a:rPr>
-              <a:t>FORMATIVE EVALUATION</a:t>
+              <a:t>BILINGUAL GAME</a:t>
             </a:r>
             <a:endParaRPr lang="en-US" sz="1400" dirty="0"/>
           </a:p>
         </p:txBody>
       </p:sp>
-      <p:pic>
-        <p:nvPicPr>
-          <p:cNvPr id="3" name="Image 0" descr="/home/claude/f4/img/minesec_sheet.png">    </p:cNvPr>
-          <p:cNvPicPr>
-            <a:picLocks noChangeAspect="1"/>
-          </p:cNvPicPr>
-          <p:nvPr/>
-        </p:nvPicPr>
-        <p:blipFill>
-          <a:blip r:embed="rId1"/>
-          <a:stretch>
-            <a:fillRect/>
-          </a:stretch>
-        </p:blipFill>
-        <p:spPr>
-          <a:xfrm>
-            <a:off x="0" y="658368"/>
-            <a:ext cx="5120640" cy="5833872"/>
-          </a:xfrm>
-          <a:prstGeom prst="rect">
-            <a:avLst/>
-          </a:prstGeom>
-        </p:spPr>
-      </p:pic>
-      <p:sp>
-        <p:nvSpPr>
-          <p:cNvPr id="4" name="Text 1"/>
+      <p:sp>
+        <p:nvSpPr>
+          <p:cNvPr id="3" name="Text 1"/>
           <p:cNvSpPr/>
           <p:nvPr/>
         </p:nvSpPr>
         <p:spPr>
           <a:xfrm>
-            <a:off x="5349240" y="1005840"/>
-            <a:ext cx="6522415" cy="731520"/>
+            <a:off x="457200" y="1005840"/>
+            <a:ext cx="11277295" cy="731520"/>
           </a:xfrm>
           <a:prstGeom prst="rect">
             <a:avLst/>
@@ -23856,9 +23105,7 @@
           <a:ln/>
         </p:spPr>
         <p:txBody>
-          <a:bodyPr wrap="square" lIns="0" tIns="0" rIns="0" bIns="0" rtlCol="0" anchor="ctr">
-            <a:normAutofit/>
-          </a:bodyPr>
+          <a:bodyPr wrap="square" lIns="0" tIns="0" rIns="0" bIns="0" rtlCol="0" anchor="ctr"/>
           <a:lstStyle/>
           <a:p>
             <a:pPr algn="ctr" indent="0" marL="0">
@@ -23873,942 +23120,6 @@
                 <a:ea typeface="Times New Roman" pitchFamily="34" charset="-122"/>
                 <a:cs typeface="Times New Roman" pitchFamily="34" charset="-120"/>
               </a:rPr>
-              <a:t>Expected Answer</a:t>
-            </a:r>
-            <a:endParaRPr lang="en-US" sz="3600" dirty="0"/>
-          </a:p>
-        </p:txBody>
-      </p:sp>
-      <p:sp>
-        <p:nvSpPr>
-          <p:cNvPr id="5" name="Text 2"/>
-          <p:cNvSpPr/>
-          <p:nvPr/>
-        </p:nvSpPr>
-        <p:spPr>
-          <a:xfrm>
-            <a:off x="5349240" y="1783080"/>
-            <a:ext cx="6522415" cy="4663440"/>
-          </a:xfrm>
-          <a:prstGeom prst="rect">
-            <a:avLst/>
-          </a:prstGeom>
-          <a:noFill/>
-          <a:ln/>
-        </p:spPr>
-        <p:txBody>
-          <a:bodyPr wrap="square" lIns="0" tIns="0" rIns="0" bIns="0" rtlCol="0" anchor="t"/>
-          <a:lstStyle/>
-          <a:p>
-            <a:pPr algn="l" indent="0" marL="0">
-              <a:spcAft>
-                <a:spcPts val="800"/>
-              </a:spcAft>
-              <a:buNone/>
-            </a:pPr>
-            <a:r>
-              <a:rPr lang="en-US" sz="4000" dirty="0">
-                <a:solidFill>
-                  <a:srgbClr val="111111"/>
-                </a:solidFill>
-                <a:latin typeface="Times New Roman" pitchFamily="34" charset="0"/>
-                <a:ea typeface="Times New Roman" pitchFamily="34" charset="-122"/>
-                <a:cs typeface="Times New Roman" pitchFamily="34" charset="-120"/>
-              </a:rPr>
-              <a:t>The outlier (45 bags) raises the mean to about 21.3, while the median (19) represents most farms.</a:t>
-            </a:r>
-            <a:endParaRPr lang="en-US" sz="4000" dirty="0"/>
-          </a:p>
-        </p:txBody>
-      </p:sp>
-      <p:sp>
-        <p:nvSpPr>
-          <p:cNvPr id="25" name="Slide Number Placeholder 0"/>
-          <p:cNvSpPr>
-            <a:spLocks noGrp="1"/>
-          </p:cNvSpPr>
-          <p:nvPr>
-            <p:ph type="sldNum" sz="quarter" idx="4294967295"/>
-          </p:nvPr>
-        </p:nvSpPr>
-        <p:spPr>
-          <a:xfrm>
-            <a:off x="27432" y="91440"/>
-            <a:ext cx="585216" cy="475488"/>
-          </a:xfrm>
-          <a:prstGeom prst="rect">
-            <a:avLst/>
-          </a:prstGeom>
-          <a:extLst>
-            <a:ext uri="{C572A759-6A51-4108-AA02-DFA0A04FC94B}">
-              <ma14:wrappingTextBoxFlag xmlns:ma14="http://schemas.microsoft.com/office/mac/drawingml/2011/main" val="0"/>
-            </a:ext>
-          </a:extLst>
-        </p:spPr>
-        <p:txBody>
-          <a:bodyPr/>
-          <a:lstStyle>
-            <a:lvl1pPr>
-              <a:defRPr sz="2000">
-                <a:solidFill>
-                  <a:srgbClr val="FFFFFF"/>
-                </a:solidFill>
-                <a:latin typeface="Calibri"/>
-                <a:ea typeface="Calibri"/>
-                <a:cs typeface="Calibri"/>
-              </a:defRPr>
-            </a:lvl1pPr>
-          </a:lstStyle>
-          <a:p>
-            <a:pPr algn="ctr"/>
-            <a:fld id="{F7021451-1387-4CA6-816F-3879F97B5CBC}" type="slidenum">
-              <a:rPr b="1" lang="en-US"/>
-              <a:t>63</a:t>
-            </a:fld>
-            <a:endParaRPr lang="en-US"/>
-          </a:p>
-        </p:txBody>
-      </p:sp>
-    </p:spTree>
-  </p:cSld>
-  <p:clrMapOvr>
-    <a:masterClrMapping/>
-  </p:clrMapOvr>
-</p:sld>
-</file>
-
-<file path=ppt/slides/slide64.xml><?xml version="1.0" encoding="utf-8"?>
-<p:sld xmlns:a="http://schemas.openxmlformats.org/drawingml/2006/main" xmlns:r="http://schemas.openxmlformats.org/officeDocument/2006/relationships" xmlns:p="http://schemas.openxmlformats.org/presentationml/2006/main">
-  <p:cSld name="Slide 64">
-    <p:spTree>
-      <p:nvGrpSpPr>
-        <p:cNvPr id="1" name=""/>
-        <p:cNvGrpSpPr/>
-        <p:nvPr/>
-      </p:nvGrpSpPr>
-      <p:grpSpPr>
-        <a:xfrm>
-          <a:off x="0" y="0"/>
-          <a:ext cx="0" cy="0"/>
-          <a:chOff x="0" y="0"/>
-          <a:chExt cx="0" cy="0"/>
-        </a:xfrm>
-      </p:grpSpPr>
-      <p:sp>
-        <p:nvSpPr>
-          <p:cNvPr id="2" name="Text 0"/>
-          <p:cNvSpPr/>
-          <p:nvPr/>
-        </p:nvSpPr>
-        <p:spPr>
-          <a:xfrm>
-            <a:off x="457200" y="713232"/>
-            <a:ext cx="11368735" cy="274320"/>
-          </a:xfrm>
-          <a:prstGeom prst="rect">
-            <a:avLst/>
-          </a:prstGeom>
-          <a:noFill/>
-          <a:ln/>
-        </p:spPr>
-        <p:txBody>
-          <a:bodyPr wrap="square" lIns="0" tIns="0" rIns="0" bIns="0" rtlCol="0" anchor="ctr"/>
-          <a:lstStyle/>
-          <a:p>
-            <a:pPr algn="r" indent="0" marL="0">
-              <a:buNone/>
-            </a:pPr>
-            <a:r>
-              <a:rPr lang="en-US" sz="1400" b="1" dirty="0">
-                <a:solidFill>
-                  <a:srgbClr val="1C3F6E"/>
-                </a:solidFill>
-                <a:latin typeface="Calibri" pitchFamily="34" charset="0"/>
-                <a:ea typeface="Calibri" pitchFamily="34" charset="-122"/>
-                <a:cs typeface="Calibri" pitchFamily="34" charset="-120"/>
-              </a:rPr>
-              <a:t>REMEDIATION</a:t>
-            </a:r>
-            <a:endParaRPr lang="en-US" sz="1400" dirty="0"/>
-          </a:p>
-        </p:txBody>
-      </p:sp>
-      <p:pic>
-        <p:nvPicPr>
-          <p:cNvPr id="3" name="Image 0" descr="/home/claude/f4/img/minesec_sheet.png">    </p:cNvPr>
-          <p:cNvPicPr>
-            <a:picLocks noChangeAspect="1"/>
-          </p:cNvPicPr>
-          <p:nvPr/>
-        </p:nvPicPr>
-        <p:blipFill>
-          <a:blip r:embed="rId1"/>
-          <a:stretch>
-            <a:fillRect/>
-          </a:stretch>
-        </p:blipFill>
-        <p:spPr>
-          <a:xfrm>
-            <a:off x="0" y="658368"/>
-            <a:ext cx="5120640" cy="5833872"/>
-          </a:xfrm>
-          <a:prstGeom prst="rect">
-            <a:avLst/>
-          </a:prstGeom>
-        </p:spPr>
-      </p:pic>
-      <p:sp>
-        <p:nvSpPr>
-          <p:cNvPr id="4" name="Text 1"/>
-          <p:cNvSpPr/>
-          <p:nvPr/>
-        </p:nvSpPr>
-        <p:spPr>
-          <a:xfrm>
-            <a:off x="5349240" y="1005840"/>
-            <a:ext cx="6522415" cy="731520"/>
-          </a:xfrm>
-          <a:prstGeom prst="rect">
-            <a:avLst/>
-          </a:prstGeom>
-          <a:noFill/>
-          <a:ln/>
-        </p:spPr>
-        <p:txBody>
-          <a:bodyPr wrap="square" lIns="0" tIns="0" rIns="0" bIns="0" rtlCol="0" anchor="ctr">
-            <a:normAutofit/>
-          </a:bodyPr>
-          <a:lstStyle/>
-          <a:p>
-            <a:pPr algn="ctr" indent="0" marL="0">
-              <a:buNone/>
-            </a:pPr>
-            <a:r>
-              <a:rPr lang="en-US" sz="3600" b="1" dirty="0">
-                <a:solidFill>
-                  <a:srgbClr val="990011"/>
-                </a:solidFill>
-                <a:latin typeface="Times New Roman" pitchFamily="34" charset="0"/>
-                <a:ea typeface="Times New Roman" pitchFamily="34" charset="-122"/>
-                <a:cs typeface="Times New Roman" pitchFamily="34" charset="-120"/>
-              </a:rPr>
-              <a:t>Remediation</a:t>
-            </a:r>
-            <a:endParaRPr lang="en-US" sz="3600" dirty="0"/>
-          </a:p>
-        </p:txBody>
-      </p:sp>
-      <p:sp>
-        <p:nvSpPr>
-          <p:cNvPr id="5" name="Text 2"/>
-          <p:cNvSpPr/>
-          <p:nvPr/>
-        </p:nvSpPr>
-        <p:spPr>
-          <a:xfrm>
-            <a:off x="5349240" y="1783080"/>
-            <a:ext cx="6522415" cy="4663440"/>
-          </a:xfrm>
-          <a:prstGeom prst="rect">
-            <a:avLst/>
-          </a:prstGeom>
-          <a:noFill/>
-          <a:ln/>
-        </p:spPr>
-        <p:txBody>
-          <a:bodyPr wrap="square" lIns="0" tIns="0" rIns="0" bIns="0" rtlCol="0" anchor="t"/>
-          <a:lstStyle/>
-          <a:p>
-            <a:pPr algn="l" indent="0" marL="0">
-              <a:spcAft>
-                <a:spcPts val="800"/>
-              </a:spcAft>
-              <a:buNone/>
-            </a:pPr>
-            <a:r>
-              <a:rPr lang="en-US" sz="4000" b="1" dirty="0">
-                <a:solidFill>
-                  <a:srgbClr val="111111"/>
-                </a:solidFill>
-                <a:latin typeface="Times New Roman" pitchFamily="34" charset="0"/>
-                <a:ea typeface="Times New Roman" pitchFamily="34" charset="-122"/>
-                <a:cs typeface="Times New Roman" pitchFamily="34" charset="-120"/>
-              </a:rPr>
-              <a:t>Fill in the blanks:</a:t>
-            </a:r>
-            <a:endParaRPr lang="en-US" sz="4000" dirty="0"/>
-          </a:p>
-          <a:p>
-            <a:pPr algn="l" marL="342900" indent="-342900">
-              <a:spcAft>
-                <a:spcPts val="800"/>
-              </a:spcAft>
-              <a:buSzPct val="100000"/>
-              <a:buFont typeface="+mj-lt"/>
-              <a:buAutoNum type="arabicPeriod" startAt="1"/>
-            </a:pPr>
-            <a:r>
-              <a:rPr lang="en-US" sz="4000" dirty="0">
-                <a:solidFill>
-                  <a:srgbClr val="111111"/>
-                </a:solidFill>
-                <a:latin typeface="Times New Roman" pitchFamily="34" charset="0"/>
-                <a:ea typeface="Times New Roman" pitchFamily="34" charset="-122"/>
-                <a:cs typeface="Times New Roman" pitchFamily="34" charset="-120"/>
-              </a:rPr>
-              <a:t>Mean = Σx ÷ ______.</a:t>
-            </a:r>
-            <a:endParaRPr lang="en-US" sz="4000" dirty="0"/>
-          </a:p>
-          <a:p>
-            <a:pPr algn="l" marL="342900" indent="-342900">
-              <a:spcAft>
-                <a:spcPts val="800"/>
-              </a:spcAft>
-              <a:buSzPct val="100000"/>
-              <a:buFont typeface="+mj-lt"/>
-              <a:buAutoNum type="arabicPeriod" startAt="1"/>
-            </a:pPr>
-            <a:r>
-              <a:rPr lang="en-US" sz="4000" dirty="0">
-                <a:solidFill>
-                  <a:srgbClr val="111111"/>
-                </a:solidFill>
-                <a:latin typeface="Times New Roman" pitchFamily="34" charset="0"/>
-                <a:ea typeface="Times New Roman" pitchFamily="34" charset="-122"/>
-                <a:cs typeface="Times New Roman" pitchFamily="34" charset="-120"/>
-              </a:rPr>
-              <a:t>The most frequent value is the ______.</a:t>
-            </a:r>
-            <a:endParaRPr lang="en-US" sz="4000" dirty="0"/>
-          </a:p>
-          <a:p>
-            <a:pPr algn="l" marL="342900" indent="-342900">
-              <a:spcAft>
-                <a:spcPts val="800"/>
-              </a:spcAft>
-              <a:buSzPct val="100000"/>
-              <a:buFont typeface="+mj-lt"/>
-              <a:buAutoNum type="arabicPeriod" startAt="1"/>
-            </a:pPr>
-            <a:r>
-              <a:rPr lang="en-US" sz="4000" dirty="0">
-                <a:solidFill>
-                  <a:srgbClr val="111111"/>
-                </a:solidFill>
-                <a:latin typeface="Times New Roman" pitchFamily="34" charset="0"/>
-                <a:ea typeface="Times New Roman" pitchFamily="34" charset="-122"/>
-                <a:cs typeface="Times New Roman" pitchFamily="34" charset="-120"/>
-              </a:rPr>
-              <a:t>IQR = Q3 − ______.</a:t>
-            </a:r>
-            <a:endParaRPr lang="en-US" sz="4000" dirty="0"/>
-          </a:p>
-        </p:txBody>
-      </p:sp>
-      <p:sp>
-        <p:nvSpPr>
-          <p:cNvPr id="25" name="Slide Number Placeholder 0"/>
-          <p:cNvSpPr>
-            <a:spLocks noGrp="1"/>
-          </p:cNvSpPr>
-          <p:nvPr>
-            <p:ph type="sldNum" sz="quarter" idx="4294967295"/>
-          </p:nvPr>
-        </p:nvSpPr>
-        <p:spPr>
-          <a:xfrm>
-            <a:off x="27432" y="91440"/>
-            <a:ext cx="585216" cy="475488"/>
-          </a:xfrm>
-          <a:prstGeom prst="rect">
-            <a:avLst/>
-          </a:prstGeom>
-          <a:extLst>
-            <a:ext uri="{C572A759-6A51-4108-AA02-DFA0A04FC94B}">
-              <ma14:wrappingTextBoxFlag xmlns:ma14="http://schemas.microsoft.com/office/mac/drawingml/2011/main" val="0"/>
-            </a:ext>
-          </a:extLst>
-        </p:spPr>
-        <p:txBody>
-          <a:bodyPr/>
-          <a:lstStyle>
-            <a:lvl1pPr>
-              <a:defRPr sz="2000">
-                <a:solidFill>
-                  <a:srgbClr val="FFFFFF"/>
-                </a:solidFill>
-                <a:latin typeface="Calibri"/>
-                <a:ea typeface="Calibri"/>
-                <a:cs typeface="Calibri"/>
-              </a:defRPr>
-            </a:lvl1pPr>
-          </a:lstStyle>
-          <a:p>
-            <a:pPr algn="ctr"/>
-            <a:fld id="{F7021451-1387-4CA6-816F-3879F97B5CBC}" type="slidenum">
-              <a:rPr b="1" lang="en-US"/>
-              <a:t>64</a:t>
-            </a:fld>
-            <a:endParaRPr lang="en-US"/>
-          </a:p>
-        </p:txBody>
-      </p:sp>
-    </p:spTree>
-  </p:cSld>
-  <p:clrMapOvr>
-    <a:masterClrMapping/>
-  </p:clrMapOvr>
-</p:sld>
-</file>
-
-<file path=ppt/slides/slide65.xml><?xml version="1.0" encoding="utf-8"?>
-<p:sld xmlns:a="http://schemas.openxmlformats.org/drawingml/2006/main" xmlns:r="http://schemas.openxmlformats.org/officeDocument/2006/relationships" xmlns:p="http://schemas.openxmlformats.org/presentationml/2006/main">
-  <p:cSld name="Slide 65">
-    <p:spTree>
-      <p:nvGrpSpPr>
-        <p:cNvPr id="1" name=""/>
-        <p:cNvGrpSpPr/>
-        <p:nvPr/>
-      </p:nvGrpSpPr>
-      <p:grpSpPr>
-        <a:xfrm>
-          <a:off x="0" y="0"/>
-          <a:ext cx="0" cy="0"/>
-          <a:chOff x="0" y="0"/>
-          <a:chExt cx="0" cy="0"/>
-        </a:xfrm>
-      </p:grpSpPr>
-      <p:sp>
-        <p:nvSpPr>
-          <p:cNvPr id="2" name="Text 0"/>
-          <p:cNvSpPr/>
-          <p:nvPr/>
-        </p:nvSpPr>
-        <p:spPr>
-          <a:xfrm>
-            <a:off x="457200" y="713232"/>
-            <a:ext cx="11368735" cy="274320"/>
-          </a:xfrm>
-          <a:prstGeom prst="rect">
-            <a:avLst/>
-          </a:prstGeom>
-          <a:noFill/>
-          <a:ln/>
-        </p:spPr>
-        <p:txBody>
-          <a:bodyPr wrap="square" lIns="0" tIns="0" rIns="0" bIns="0" rtlCol="0" anchor="ctr"/>
-          <a:lstStyle/>
-          <a:p>
-            <a:pPr algn="r" indent="0" marL="0">
-              <a:buNone/>
-            </a:pPr>
-            <a:r>
-              <a:rPr lang="en-US" sz="1400" b="1" dirty="0">
-                <a:solidFill>
-                  <a:srgbClr val="1C3F6E"/>
-                </a:solidFill>
-                <a:latin typeface="Calibri" pitchFamily="34" charset="0"/>
-                <a:ea typeface="Calibri" pitchFamily="34" charset="-122"/>
-                <a:cs typeface="Calibri" pitchFamily="34" charset="-120"/>
-              </a:rPr>
-              <a:t>HOMEWORK</a:t>
-            </a:r>
-            <a:endParaRPr lang="en-US" sz="1400" dirty="0"/>
-          </a:p>
-        </p:txBody>
-      </p:sp>
-      <p:pic>
-        <p:nvPicPr>
-          <p:cNvPr id="3" name="Image 0" descr="/home/claude/f4/img/minesec_sheet.png">    </p:cNvPr>
-          <p:cNvPicPr>
-            <a:picLocks noChangeAspect="1"/>
-          </p:cNvPicPr>
-          <p:nvPr/>
-        </p:nvPicPr>
-        <p:blipFill>
-          <a:blip r:embed="rId1"/>
-          <a:stretch>
-            <a:fillRect/>
-          </a:stretch>
-        </p:blipFill>
-        <p:spPr>
-          <a:xfrm>
-            <a:off x="0" y="658368"/>
-            <a:ext cx="5120640" cy="5833872"/>
-          </a:xfrm>
-          <a:prstGeom prst="rect">
-            <a:avLst/>
-          </a:prstGeom>
-        </p:spPr>
-      </p:pic>
-      <p:sp>
-        <p:nvSpPr>
-          <p:cNvPr id="4" name="Text 1"/>
-          <p:cNvSpPr/>
-          <p:nvPr/>
-        </p:nvSpPr>
-        <p:spPr>
-          <a:xfrm>
-            <a:off x="5349240" y="1005840"/>
-            <a:ext cx="6522415" cy="731520"/>
-          </a:xfrm>
-          <a:prstGeom prst="rect">
-            <a:avLst/>
-          </a:prstGeom>
-          <a:noFill/>
-          <a:ln/>
-        </p:spPr>
-        <p:txBody>
-          <a:bodyPr wrap="square" lIns="0" tIns="0" rIns="0" bIns="0" rtlCol="0" anchor="ctr">
-            <a:normAutofit/>
-          </a:bodyPr>
-          <a:lstStyle/>
-          <a:p>
-            <a:pPr algn="ctr" indent="0" marL="0">
-              <a:buNone/>
-            </a:pPr>
-            <a:r>
-              <a:rPr lang="en-US" sz="3600" b="1" dirty="0">
-                <a:solidFill>
-                  <a:srgbClr val="990011"/>
-                </a:solidFill>
-                <a:latin typeface="Times New Roman" pitchFamily="34" charset="0"/>
-                <a:ea typeface="Times New Roman" pitchFamily="34" charset="-122"/>
-                <a:cs typeface="Times New Roman" pitchFamily="34" charset="-120"/>
-              </a:rPr>
-              <a:t>Homework</a:t>
-            </a:r>
-            <a:endParaRPr lang="en-US" sz="3600" dirty="0"/>
-          </a:p>
-        </p:txBody>
-      </p:sp>
-      <p:sp>
-        <p:nvSpPr>
-          <p:cNvPr id="5" name="Text 2"/>
-          <p:cNvSpPr/>
-          <p:nvPr/>
-        </p:nvSpPr>
-        <p:spPr>
-          <a:xfrm>
-            <a:off x="5349240" y="1783080"/>
-            <a:ext cx="6522415" cy="4663440"/>
-          </a:xfrm>
-          <a:prstGeom prst="rect">
-            <a:avLst/>
-          </a:prstGeom>
-          <a:noFill/>
-          <a:ln/>
-        </p:spPr>
-        <p:txBody>
-          <a:bodyPr wrap="square" lIns="0" tIns="0" rIns="0" bIns="0" rtlCol="0" anchor="t"/>
-          <a:lstStyle/>
-          <a:p>
-            <a:pPr algn="l" indent="0" marL="0">
-              <a:spcAft>
-                <a:spcPts val="800"/>
-              </a:spcAft>
-              <a:buNone/>
-            </a:pPr>
-            <a:r>
-              <a:rPr lang="en-US" sz="4000" dirty="0">
-                <a:solidFill>
-                  <a:srgbClr val="111111"/>
-                </a:solidFill>
-                <a:latin typeface="Times New Roman" pitchFamily="34" charset="0"/>
-                <a:ea typeface="Times New Roman" pitchFamily="34" charset="-122"/>
-                <a:cs typeface="Times New Roman" pitchFamily="34" charset="-120"/>
-              </a:rPr>
-              <a:t>Calculate the mean of 3, 5, 7 and 9.</a:t>
-            </a:r>
-            <a:endParaRPr lang="en-US" sz="4000" dirty="0"/>
-          </a:p>
-        </p:txBody>
-      </p:sp>
-      <p:sp>
-        <p:nvSpPr>
-          <p:cNvPr id="25" name="Slide Number Placeholder 0"/>
-          <p:cNvSpPr>
-            <a:spLocks noGrp="1"/>
-          </p:cNvSpPr>
-          <p:nvPr>
-            <p:ph type="sldNum" sz="quarter" idx="4294967295"/>
-          </p:nvPr>
-        </p:nvSpPr>
-        <p:spPr>
-          <a:xfrm>
-            <a:off x="27432" y="91440"/>
-            <a:ext cx="585216" cy="475488"/>
-          </a:xfrm>
-          <a:prstGeom prst="rect">
-            <a:avLst/>
-          </a:prstGeom>
-          <a:extLst>
-            <a:ext uri="{C572A759-6A51-4108-AA02-DFA0A04FC94B}">
-              <ma14:wrappingTextBoxFlag xmlns:ma14="http://schemas.microsoft.com/office/mac/drawingml/2011/main" val="0"/>
-            </a:ext>
-          </a:extLst>
-        </p:spPr>
-        <p:txBody>
-          <a:bodyPr/>
-          <a:lstStyle>
-            <a:lvl1pPr>
-              <a:defRPr sz="2000">
-                <a:solidFill>
-                  <a:srgbClr val="FFFFFF"/>
-                </a:solidFill>
-                <a:latin typeface="Calibri"/>
-                <a:ea typeface="Calibri"/>
-                <a:cs typeface="Calibri"/>
-              </a:defRPr>
-            </a:lvl1pPr>
-          </a:lstStyle>
-          <a:p>
-            <a:pPr algn="ctr"/>
-            <a:fld id="{F7021451-1387-4CA6-816F-3879F97B5CBC}" type="slidenum">
-              <a:rPr b="1" lang="en-US"/>
-              <a:t>65</a:t>
-            </a:fld>
-            <a:endParaRPr lang="en-US"/>
-          </a:p>
-        </p:txBody>
-      </p:sp>
-    </p:spTree>
-  </p:cSld>
-  <p:clrMapOvr>
-    <a:masterClrMapping/>
-  </p:clrMapOvr>
-</p:sld>
-</file>
-
-<file path=ppt/slides/slide66.xml><?xml version="1.0" encoding="utf-8"?>
-<p:sld xmlns:a="http://schemas.openxmlformats.org/drawingml/2006/main" xmlns:r="http://schemas.openxmlformats.org/officeDocument/2006/relationships" xmlns:p="http://schemas.openxmlformats.org/presentationml/2006/main">
-  <p:cSld name="Slide 66">
-    <p:spTree>
-      <p:nvGrpSpPr>
-        <p:cNvPr id="1" name=""/>
-        <p:cNvGrpSpPr/>
-        <p:nvPr/>
-      </p:nvGrpSpPr>
-      <p:grpSpPr>
-        <a:xfrm>
-          <a:off x="0" y="0"/>
-          <a:ext cx="0" cy="0"/>
-          <a:chOff x="0" y="0"/>
-          <a:chExt cx="0" cy="0"/>
-        </a:xfrm>
-      </p:grpSpPr>
-      <p:sp>
-        <p:nvSpPr>
-          <p:cNvPr id="2" name="Text 0"/>
-          <p:cNvSpPr/>
-          <p:nvPr/>
-        </p:nvSpPr>
-        <p:spPr>
-          <a:xfrm>
-            <a:off x="457200" y="713232"/>
-            <a:ext cx="11368735" cy="274320"/>
-          </a:xfrm>
-          <a:prstGeom prst="rect">
-            <a:avLst/>
-          </a:prstGeom>
-          <a:noFill/>
-          <a:ln/>
-        </p:spPr>
-        <p:txBody>
-          <a:bodyPr wrap="square" lIns="0" tIns="0" rIns="0" bIns="0" rtlCol="0" anchor="ctr"/>
-          <a:lstStyle/>
-          <a:p>
-            <a:pPr algn="r" indent="0" marL="0">
-              <a:buNone/>
-            </a:pPr>
-            <a:r>
-              <a:rPr lang="en-US" sz="1400" b="1" dirty="0">
-                <a:solidFill>
-                  <a:srgbClr val="1C3F6E"/>
-                </a:solidFill>
-                <a:latin typeface="Calibri" pitchFamily="34" charset="0"/>
-                <a:ea typeface="Calibri" pitchFamily="34" charset="-122"/>
-                <a:cs typeface="Calibri" pitchFamily="34" charset="-120"/>
-              </a:rPr>
-              <a:t>NEXT LESSON</a:t>
-            </a:r>
-            <a:endParaRPr lang="en-US" sz="1400" dirty="0"/>
-          </a:p>
-        </p:txBody>
-      </p:sp>
-      <p:pic>
-        <p:nvPicPr>
-          <p:cNvPr id="3" name="Image 0" descr="/home/claude/f4/img/minesec_sheet.png">    </p:cNvPr>
-          <p:cNvPicPr>
-            <a:picLocks noChangeAspect="1"/>
-          </p:cNvPicPr>
-          <p:nvPr/>
-        </p:nvPicPr>
-        <p:blipFill>
-          <a:blip r:embed="rId1"/>
-          <a:stretch>
-            <a:fillRect/>
-          </a:stretch>
-        </p:blipFill>
-        <p:spPr>
-          <a:xfrm>
-            <a:off x="0" y="658368"/>
-            <a:ext cx="5120640" cy="5833872"/>
-          </a:xfrm>
-          <a:prstGeom prst="rect">
-            <a:avLst/>
-          </a:prstGeom>
-        </p:spPr>
-      </p:pic>
-      <p:sp>
-        <p:nvSpPr>
-          <p:cNvPr id="4" name="Text 1"/>
-          <p:cNvSpPr/>
-          <p:nvPr/>
-        </p:nvSpPr>
-        <p:spPr>
-          <a:xfrm>
-            <a:off x="5349240" y="1005840"/>
-            <a:ext cx="6522415" cy="731520"/>
-          </a:xfrm>
-          <a:prstGeom prst="rect">
-            <a:avLst/>
-          </a:prstGeom>
-          <a:noFill/>
-          <a:ln/>
-        </p:spPr>
-        <p:txBody>
-          <a:bodyPr wrap="square" lIns="0" tIns="0" rIns="0" bIns="0" rtlCol="0" anchor="ctr">
-            <a:normAutofit/>
-          </a:bodyPr>
-          <a:lstStyle/>
-          <a:p>
-            <a:pPr algn="ctr" indent="0" marL="0">
-              <a:buNone/>
-            </a:pPr>
-            <a:r>
-              <a:rPr lang="en-US" sz="3600" b="1" dirty="0">
-                <a:solidFill>
-                  <a:srgbClr val="990011"/>
-                </a:solidFill>
-                <a:latin typeface="Times New Roman" pitchFamily="34" charset="0"/>
-                <a:ea typeface="Times New Roman" pitchFamily="34" charset="-122"/>
-                <a:cs typeface="Times New Roman" pitchFamily="34" charset="-120"/>
-              </a:rPr>
-              <a:t>Next Lesson</a:t>
-            </a:r>
-            <a:endParaRPr lang="en-US" sz="3600" dirty="0"/>
-          </a:p>
-        </p:txBody>
-      </p:sp>
-      <p:sp>
-        <p:nvSpPr>
-          <p:cNvPr id="5" name="Text 2"/>
-          <p:cNvSpPr/>
-          <p:nvPr/>
-        </p:nvSpPr>
-        <p:spPr>
-          <a:xfrm>
-            <a:off x="5349240" y="1783080"/>
-            <a:ext cx="6522415" cy="4663440"/>
-          </a:xfrm>
-          <a:prstGeom prst="rect">
-            <a:avLst/>
-          </a:prstGeom>
-          <a:noFill/>
-          <a:ln/>
-        </p:spPr>
-        <p:txBody>
-          <a:bodyPr wrap="square" lIns="0" tIns="0" rIns="0" bIns="0" rtlCol="0" anchor="ctr"/>
-          <a:lstStyle/>
-          <a:p>
-            <a:pPr algn="ctr" indent="0" marL="0">
-              <a:spcAft>
-                <a:spcPts val="800"/>
-              </a:spcAft>
-              <a:buNone/>
-            </a:pPr>
-            <a:r>
-              <a:rPr lang="en-US" sz="4000" b="1" dirty="0">
-                <a:solidFill>
-                  <a:srgbClr val="111111"/>
-                </a:solidFill>
-                <a:latin typeface="Times New Roman" pitchFamily="34" charset="0"/>
-                <a:ea typeface="Times New Roman" pitchFamily="34" charset="-122"/>
-                <a:cs typeface="Times New Roman" pitchFamily="34" charset="-120"/>
-              </a:rPr>
-              <a:t>Our next lesson will be on:</a:t>
-            </a:r>
-            <a:endParaRPr lang="en-US" sz="4000" dirty="0"/>
-          </a:p>
-          <a:p>
-            <a:pPr algn="ctr" indent="0" marL="0">
-              <a:spcAft>
-                <a:spcPts val="800"/>
-              </a:spcAft>
-              <a:buNone/>
-            </a:pPr>
-            <a:r>
-              <a:rPr lang="en-US" sz="4000" b="1" dirty="0">
-                <a:solidFill>
-                  <a:srgbClr val="990011"/>
-                </a:solidFill>
-                <a:latin typeface="Times New Roman" pitchFamily="34" charset="0"/>
-                <a:ea typeface="Times New Roman" pitchFamily="34" charset="-122"/>
-                <a:cs typeface="Times New Roman" pitchFamily="34" charset="-120"/>
-              </a:rPr>
-              <a:t>Quantitative Techniques 3 (Part 2): Measures of Dispersion: Variance, Standard Deviation and Coefficient of Variation</a:t>
-            </a:r>
-            <a:endParaRPr lang="en-US" sz="4000" dirty="0"/>
-          </a:p>
-        </p:txBody>
-      </p:sp>
-      <p:sp>
-        <p:nvSpPr>
-          <p:cNvPr id="25" name="Slide Number Placeholder 0"/>
-          <p:cNvSpPr>
-            <a:spLocks noGrp="1"/>
-          </p:cNvSpPr>
-          <p:nvPr>
-            <p:ph type="sldNum" sz="quarter" idx="4294967295"/>
-          </p:nvPr>
-        </p:nvSpPr>
-        <p:spPr>
-          <a:xfrm>
-            <a:off x="27432" y="91440"/>
-            <a:ext cx="585216" cy="475488"/>
-          </a:xfrm>
-          <a:prstGeom prst="rect">
-            <a:avLst/>
-          </a:prstGeom>
-          <a:extLst>
-            <a:ext uri="{C572A759-6A51-4108-AA02-DFA0A04FC94B}">
-              <ma14:wrappingTextBoxFlag xmlns:ma14="http://schemas.microsoft.com/office/mac/drawingml/2011/main" val="0"/>
-            </a:ext>
-          </a:extLst>
-        </p:spPr>
-        <p:txBody>
-          <a:bodyPr/>
-          <a:lstStyle>
-            <a:lvl1pPr>
-              <a:defRPr sz="2000">
-                <a:solidFill>
-                  <a:srgbClr val="FFFFFF"/>
-                </a:solidFill>
-                <a:latin typeface="Calibri"/>
-                <a:ea typeface="Calibri"/>
-                <a:cs typeface="Calibri"/>
-              </a:defRPr>
-            </a:lvl1pPr>
-          </a:lstStyle>
-          <a:p>
-            <a:pPr algn="ctr"/>
-            <a:fld id="{F7021451-1387-4CA6-816F-3879F97B5CBC}" type="slidenum">
-              <a:rPr b="1" lang="en-US"/>
-              <a:t>66</a:t>
-            </a:fld>
-            <a:endParaRPr lang="en-US"/>
-          </a:p>
-        </p:txBody>
-      </p:sp>
-    </p:spTree>
-  </p:cSld>
-  <p:clrMapOvr>
-    <a:masterClrMapping/>
-  </p:clrMapOvr>
-</p:sld>
-</file>
-
-<file path=ppt/slides/slide67.xml><?xml version="1.0" encoding="utf-8"?>
-<p:sld xmlns:a="http://schemas.openxmlformats.org/drawingml/2006/main" xmlns:r="http://schemas.openxmlformats.org/officeDocument/2006/relationships" xmlns:p="http://schemas.openxmlformats.org/presentationml/2006/main">
-  <p:cSld name="Slide 67">
-    <p:spTree>
-      <p:nvGrpSpPr>
-        <p:cNvPr id="1" name=""/>
-        <p:cNvGrpSpPr/>
-        <p:nvPr/>
-      </p:nvGrpSpPr>
-      <p:grpSpPr>
-        <a:xfrm>
-          <a:off x="0" y="0"/>
-          <a:ext cx="0" cy="0"/>
-          <a:chOff x="0" y="0"/>
-          <a:chExt cx="0" cy="0"/>
-        </a:xfrm>
-      </p:grpSpPr>
-      <p:sp>
-        <p:nvSpPr>
-          <p:cNvPr id="2" name="Text 0"/>
-          <p:cNvSpPr/>
-          <p:nvPr/>
-        </p:nvSpPr>
-        <p:spPr>
-          <a:xfrm>
-            <a:off x="457200" y="713232"/>
-            <a:ext cx="11368735" cy="274320"/>
-          </a:xfrm>
-          <a:prstGeom prst="rect">
-            <a:avLst/>
-          </a:prstGeom>
-          <a:noFill/>
-          <a:ln/>
-        </p:spPr>
-        <p:txBody>
-          <a:bodyPr wrap="square" lIns="0" tIns="0" rIns="0" bIns="0" rtlCol="0" anchor="ctr"/>
-          <a:lstStyle/>
-          <a:p>
-            <a:pPr algn="r" indent="0" marL="0">
-              <a:buNone/>
-            </a:pPr>
-            <a:r>
-              <a:rPr lang="en-US" sz="1400" b="1" dirty="0">
-                <a:solidFill>
-                  <a:srgbClr val="1C3F6E"/>
-                </a:solidFill>
-                <a:latin typeface="Calibri" pitchFamily="34" charset="0"/>
-                <a:ea typeface="Calibri" pitchFamily="34" charset="-122"/>
-                <a:cs typeface="Calibri" pitchFamily="34" charset="-120"/>
-              </a:rPr>
-              <a:t>BILINGUAL GAME</a:t>
-            </a:r>
-            <a:endParaRPr lang="en-US" sz="1400" dirty="0"/>
-          </a:p>
-        </p:txBody>
-      </p:sp>
-      <p:sp>
-        <p:nvSpPr>
-          <p:cNvPr id="3" name="Text 1"/>
-          <p:cNvSpPr/>
-          <p:nvPr/>
-        </p:nvSpPr>
-        <p:spPr>
-          <a:xfrm>
-            <a:off x="457200" y="1005840"/>
-            <a:ext cx="11277295" cy="731520"/>
-          </a:xfrm>
-          <a:prstGeom prst="rect">
-            <a:avLst/>
-          </a:prstGeom>
-          <a:noFill/>
-          <a:ln/>
-        </p:spPr>
-        <p:txBody>
-          <a:bodyPr wrap="square" lIns="0" tIns="0" rIns="0" bIns="0" rtlCol="0" anchor="ctr"/>
-          <a:lstStyle/>
-          <a:p>
-            <a:pPr algn="ctr" indent="0" marL="0">
-              <a:buNone/>
-            </a:pPr>
-            <a:r>
-              <a:rPr lang="en-US" sz="3600" b="1" dirty="0">
-                <a:solidFill>
-                  <a:srgbClr val="990011"/>
-                </a:solidFill>
-                <a:latin typeface="Times New Roman" pitchFamily="34" charset="0"/>
-                <a:ea typeface="Times New Roman" pitchFamily="34" charset="-122"/>
-                <a:cs typeface="Times New Roman" pitchFamily="34" charset="-120"/>
-              </a:rPr>
               <a:t>Bilingual Game (Jeu Bilingue)</a:t>
             </a:r>
             <a:endParaRPr lang="en-US" sz="3600" dirty="0"/>
@@ -24817,7 +23128,7 @@
       </p:sp>
       <p:graphicFrame>
         <p:nvGraphicFramePr>
-          <p:cNvPr id="68" name="Table 0"/>
+          <p:cNvPr id="64" name="Table 0"/>
           <p:cNvGraphicFramePr>
             <a:graphicFrameLocks noGrp="1"/>
           </p:cNvGraphicFramePr>
@@ -25853,7 +24164,7 @@
             <a:pPr algn="ctr"/>
             <a:fld id="{F7021451-1387-4CA6-816F-3879F97B5CBC}" type="slidenum">
               <a:rPr b="1" lang="en-US"/>
-              <a:t>67</a:t>
+              <a:t>63</a:t>
             </a:fld>
             <a:endParaRPr lang="en-US"/>
           </a:p>
@@ -25867,9 +24178,9 @@
 </p:sld>
 </file>
 
-<file path=ppt/slides/slide68.xml><?xml version="1.0" encoding="utf-8"?>
+<file path=ppt/slides/slide64.xml><?xml version="1.0" encoding="utf-8"?>
 <p:sld xmlns:a="http://schemas.openxmlformats.org/drawingml/2006/main" xmlns:r="http://schemas.openxmlformats.org/officeDocument/2006/relationships" xmlns:p="http://schemas.openxmlformats.org/presentationml/2006/main">
-  <p:cSld name="Slide 68">
+  <p:cSld name="Slide 64">
     <p:spTree>
       <p:nvGrpSpPr>
         <p:cNvPr id="1" name=""/>
@@ -25964,7 +24275,7 @@
       </p:sp>
       <p:graphicFrame>
         <p:nvGraphicFramePr>
-          <p:cNvPr id="69" name="Table 0"/>
+          <p:cNvPr id="65" name="Table 0"/>
           <p:cNvGraphicFramePr>
             <a:graphicFrameLocks noGrp="1"/>
           </p:cNvGraphicFramePr>
@@ -26586,7 +24897,7 @@
             <a:pPr algn="ctr"/>
             <a:fld id="{F7021451-1387-4CA6-816F-3879F97B5CBC}" type="slidenum">
               <a:rPr b="1" lang="en-US"/>
-              <a:t>68</a:t>
+              <a:t>64</a:t>
             </a:fld>
             <a:endParaRPr lang="en-US"/>
           </a:p>
@@ -26600,9 +24911,9 @@
 </p:sld>
 </file>
 
-<file path=ppt/slides/slide69.xml><?xml version="1.0" encoding="utf-8"?>
+<file path=ppt/slides/slide65.xml><?xml version="1.0" encoding="utf-8"?>
 <p:sld xmlns:a="http://schemas.openxmlformats.org/drawingml/2006/main" xmlns:r="http://schemas.openxmlformats.org/officeDocument/2006/relationships" xmlns:p="http://schemas.openxmlformats.org/presentationml/2006/main">
-  <p:cSld name="Slide 69">
+  <p:cSld name="Slide 65">
     <p:spTree>
       <p:nvGrpSpPr>
         <p:cNvPr id="1" name=""/>
@@ -26697,7 +25008,7 @@
       </p:sp>
       <p:graphicFrame>
         <p:nvGraphicFramePr>
-          <p:cNvPr id="70" name="Table 0"/>
+          <p:cNvPr id="66" name="Table 0"/>
           <p:cNvGraphicFramePr>
             <a:graphicFrameLocks noGrp="1"/>
           </p:cNvGraphicFramePr>
@@ -27457,7 +25768,615 @@
             <a:pPr algn="ctr"/>
             <a:fld id="{F7021451-1387-4CA6-816F-3879F97B5CBC}" type="slidenum">
               <a:rPr b="1" lang="en-US"/>
-              <a:t>69</a:t>
+              <a:t>65</a:t>
+            </a:fld>
+            <a:endParaRPr lang="en-US"/>
+          </a:p>
+        </p:txBody>
+      </p:sp>
+    </p:spTree>
+  </p:cSld>
+  <p:clrMapOvr>
+    <a:masterClrMapping/>
+  </p:clrMapOvr>
+</p:sld>
+</file>
+
+<file path=ppt/slides/slide66.xml><?xml version="1.0" encoding="utf-8"?>
+<p:sld xmlns:a="http://schemas.openxmlformats.org/drawingml/2006/main" xmlns:r="http://schemas.openxmlformats.org/officeDocument/2006/relationships" xmlns:p="http://schemas.openxmlformats.org/presentationml/2006/main">
+  <p:cSld name="Slide 66">
+    <p:spTree>
+      <p:nvGrpSpPr>
+        <p:cNvPr id="1" name=""/>
+        <p:cNvGrpSpPr/>
+        <p:nvPr/>
+      </p:nvGrpSpPr>
+      <p:grpSpPr>
+        <a:xfrm>
+          <a:off x="0" y="0"/>
+          <a:ext cx="0" cy="0"/>
+          <a:chOff x="0" y="0"/>
+          <a:chExt cx="0" cy="0"/>
+        </a:xfrm>
+      </p:grpSpPr>
+      <p:sp>
+        <p:nvSpPr>
+          <p:cNvPr id="2" name="Text 0"/>
+          <p:cNvSpPr/>
+          <p:nvPr/>
+        </p:nvSpPr>
+        <p:spPr>
+          <a:xfrm>
+            <a:off x="457200" y="713232"/>
+            <a:ext cx="11368735" cy="274320"/>
+          </a:xfrm>
+          <a:prstGeom prst="rect">
+            <a:avLst/>
+          </a:prstGeom>
+          <a:noFill/>
+          <a:ln/>
+        </p:spPr>
+        <p:txBody>
+          <a:bodyPr wrap="square" lIns="0" tIns="0" rIns="0" bIns="0" rtlCol="0" anchor="ctr"/>
+          <a:lstStyle/>
+          <a:p>
+            <a:pPr algn="r" indent="0" marL="0">
+              <a:buNone/>
+            </a:pPr>
+            <a:r>
+              <a:rPr lang="en-US" sz="1400" b="1" dirty="0">
+                <a:solidFill>
+                  <a:srgbClr val="1C3F6E"/>
+                </a:solidFill>
+                <a:latin typeface="Calibri" pitchFamily="34" charset="0"/>
+                <a:ea typeface="Calibri" pitchFamily="34" charset="-122"/>
+                <a:cs typeface="Calibri" pitchFamily="34" charset="-120"/>
+              </a:rPr>
+              <a:t>TEACHER'S NOTE</a:t>
+            </a:r>
+            <a:endParaRPr lang="en-US" sz="1400" dirty="0"/>
+          </a:p>
+        </p:txBody>
+      </p:sp>
+      <p:pic>
+        <p:nvPicPr>
+          <p:cNvPr id="3" name="Image 0" descr="/home/claude/f4/img/minesec_sheet.png">    </p:cNvPr>
+          <p:cNvPicPr>
+            <a:picLocks noChangeAspect="1"/>
+          </p:cNvPicPr>
+          <p:nvPr/>
+        </p:nvPicPr>
+        <p:blipFill>
+          <a:blip r:embed="rId1"/>
+          <a:stretch>
+            <a:fillRect/>
+          </a:stretch>
+        </p:blipFill>
+        <p:spPr>
+          <a:xfrm>
+            <a:off x="0" y="658368"/>
+            <a:ext cx="3840480" cy="5833872"/>
+          </a:xfrm>
+          <a:prstGeom prst="rect">
+            <a:avLst/>
+          </a:prstGeom>
+        </p:spPr>
+      </p:pic>
+      <p:sp>
+        <p:nvSpPr>
+          <p:cNvPr id="4" name="Text 1"/>
+          <p:cNvSpPr/>
+          <p:nvPr/>
+        </p:nvSpPr>
+        <p:spPr>
+          <a:xfrm>
+            <a:off x="4069080" y="1005840"/>
+            <a:ext cx="7802575" cy="731520"/>
+          </a:xfrm>
+          <a:prstGeom prst="rect">
+            <a:avLst/>
+          </a:prstGeom>
+          <a:noFill/>
+          <a:ln/>
+        </p:spPr>
+        <p:txBody>
+          <a:bodyPr wrap="square" lIns="0" tIns="0" rIns="0" bIns="0" rtlCol="0" anchor="ctr">
+            <a:normAutofit/>
+          </a:bodyPr>
+          <a:lstStyle/>
+          <a:p>
+            <a:pPr algn="ctr" indent="0" marL="0">
+              <a:buNone/>
+            </a:pPr>
+            <a:r>
+              <a:rPr lang="en-US" sz="3600" b="1" dirty="0">
+                <a:solidFill>
+                  <a:srgbClr val="990011"/>
+                </a:solidFill>
+                <a:latin typeface="Times New Roman" pitchFamily="34" charset="0"/>
+                <a:ea typeface="Times New Roman" pitchFamily="34" charset="-122"/>
+                <a:cs typeface="Times New Roman" pitchFamily="34" charset="-120"/>
+              </a:rPr>
+              <a:t>Teacher's Note</a:t>
+            </a:r>
+            <a:endParaRPr lang="en-US" sz="3600" dirty="0"/>
+          </a:p>
+        </p:txBody>
+      </p:sp>
+      <p:sp>
+        <p:nvSpPr>
+          <p:cNvPr id="5" name="Text 2"/>
+          <p:cNvSpPr/>
+          <p:nvPr/>
+        </p:nvSpPr>
+        <p:spPr>
+          <a:xfrm>
+            <a:off x="4069080" y="1783080"/>
+            <a:ext cx="7802575" cy="4663440"/>
+          </a:xfrm>
+          <a:prstGeom prst="rect">
+            <a:avLst/>
+          </a:prstGeom>
+          <a:noFill/>
+          <a:ln/>
+        </p:spPr>
+        <p:txBody>
+          <a:bodyPr wrap="square" lIns="0" tIns="0" rIns="0" bIns="0" rtlCol="0" anchor="t"/>
+          <a:lstStyle/>
+          <a:p>
+            <a:pPr algn="l" marL="342900" indent="-342900">
+              <a:spcAft>
+                <a:spcPts val="800"/>
+              </a:spcAft>
+              <a:buSzPct val="100000"/>
+              <a:buChar char="•"/>
+            </a:pPr>
+            <a:r>
+              <a:rPr lang="en-US" sz="2000" dirty="0">
+                <a:solidFill>
+                  <a:srgbClr val="111111"/>
+                </a:solidFill>
+                <a:latin typeface="Calibri" pitchFamily="34" charset="0"/>
+                <a:ea typeface="Calibri" pitchFamily="34" charset="-122"/>
+                <a:cs typeface="Calibri" pitchFamily="34" charset="-120"/>
+              </a:rPr>
+              <a:t>Timing: Homework correction, plan, objectives 8 min | Recall, situation, action 10 min | 5 activities 30 min | Board summary (copying) 30 min | Evaluation, remediation 10 min | Homework, next lesson 5 min | Logbook 7 min</a:t>
+            </a:r>
+            <a:endParaRPr lang="en-US" sz="2000" dirty="0"/>
+          </a:p>
+          <a:p>
+            <a:pPr algn="l" marL="342900" indent="-342900">
+              <a:spcAft>
+                <a:spcPts val="800"/>
+              </a:spcAft>
+              <a:buSzPct val="100000"/>
+              <a:buChar char="•"/>
+            </a:pPr>
+            <a:r>
+              <a:rPr lang="en-US" sz="2000" dirty="0">
+                <a:solidFill>
+                  <a:srgbClr val="111111"/>
+                </a:solidFill>
+                <a:latin typeface="Calibri" pitchFamily="34" charset="0"/>
+                <a:ea typeface="Calibri" pitchFamily="34" charset="-122"/>
+                <a:cs typeface="Calibri" pitchFamily="34" charset="-120"/>
+              </a:rPr>
+              <a:t>Without the projector (Activity 1): add the values on the board.</a:t>
+            </a:r>
+            <a:endParaRPr lang="en-US" sz="2000" dirty="0"/>
+          </a:p>
+          <a:p>
+            <a:pPr algn="l" marL="342900" indent="-342900">
+              <a:spcAft>
+                <a:spcPts val="800"/>
+              </a:spcAft>
+              <a:buSzPct val="100000"/>
+              <a:buChar char="•"/>
+            </a:pPr>
+            <a:r>
+              <a:rPr lang="en-US" sz="2000" dirty="0">
+                <a:solidFill>
+                  <a:srgbClr val="111111"/>
+                </a:solidFill>
+                <a:latin typeface="Calibri" pitchFamily="34" charset="0"/>
+                <a:ea typeface="Calibri" pitchFamily="34" charset="-122"/>
+                <a:cs typeface="Calibri" pitchFamily="34" charset="-120"/>
+              </a:rPr>
+              <a:t>Without the projector (Activity 2): order the values.</a:t>
+            </a:r>
+            <a:endParaRPr lang="en-US" sz="2000" dirty="0"/>
+          </a:p>
+          <a:p>
+            <a:pPr algn="l" marL="342900" indent="-342900">
+              <a:spcAft>
+                <a:spcPts val="800"/>
+              </a:spcAft>
+              <a:buSzPct val="100000"/>
+              <a:buChar char="•"/>
+            </a:pPr>
+            <a:r>
+              <a:rPr lang="en-US" sz="2000" dirty="0">
+                <a:solidFill>
+                  <a:srgbClr val="111111"/>
+                </a:solidFill>
+                <a:latin typeface="Calibri" pitchFamily="34" charset="0"/>
+                <a:ea typeface="Calibri" pitchFamily="34" charset="-122"/>
+                <a:cs typeface="Calibri" pitchFamily="34" charset="-120"/>
+              </a:rPr>
+              <a:t>Without the projector (Activity 3): make a tally table.</a:t>
+            </a:r>
+            <a:endParaRPr lang="en-US" sz="2000" dirty="0"/>
+          </a:p>
+          <a:p>
+            <a:pPr algn="l" marL="342900" indent="-342900">
+              <a:spcAft>
+                <a:spcPts val="800"/>
+              </a:spcAft>
+              <a:buSzPct val="100000"/>
+              <a:buChar char="•"/>
+            </a:pPr>
+            <a:r>
+              <a:rPr lang="en-US" sz="2000" dirty="0">
+                <a:solidFill>
+                  <a:srgbClr val="111111"/>
+                </a:solidFill>
+                <a:latin typeface="Calibri" pitchFamily="34" charset="0"/>
+                <a:ea typeface="Calibri" pitchFamily="34" charset="-122"/>
+                <a:cs typeface="Calibri" pitchFamily="34" charset="-120"/>
+              </a:rPr>
+              <a:t>Without the projector (Activity 4): find the highest and lowest.</a:t>
+            </a:r>
+            <a:endParaRPr lang="en-US" sz="2000" dirty="0"/>
+          </a:p>
+          <a:p>
+            <a:pPr algn="l" marL="342900" indent="-342900">
+              <a:spcAft>
+                <a:spcPts val="800"/>
+              </a:spcAft>
+              <a:buSzPct val="100000"/>
+              <a:buChar char="•"/>
+            </a:pPr>
+            <a:r>
+              <a:rPr lang="en-US" sz="2000" dirty="0">
+                <a:solidFill>
+                  <a:srgbClr val="111111"/>
+                </a:solidFill>
+                <a:latin typeface="Calibri" pitchFamily="34" charset="0"/>
+                <a:ea typeface="Calibri" pitchFamily="34" charset="-122"/>
+                <a:cs typeface="Calibri" pitchFamily="34" charset="-120"/>
+              </a:rPr>
+              <a:t>Without the projector (Activity 5): split the ordered data in halves.</a:t>
+            </a:r>
+            <a:endParaRPr lang="en-US" sz="2000" dirty="0"/>
+          </a:p>
+        </p:txBody>
+      </p:sp>
+      <p:sp>
+        <p:nvSpPr>
+          <p:cNvPr id="25" name="Slide Number Placeholder 0"/>
+          <p:cNvSpPr>
+            <a:spLocks noGrp="1"/>
+          </p:cNvSpPr>
+          <p:nvPr>
+            <p:ph type="sldNum" sz="quarter" idx="4294967295"/>
+          </p:nvPr>
+        </p:nvSpPr>
+        <p:spPr>
+          <a:xfrm>
+            <a:off x="27432" y="91440"/>
+            <a:ext cx="585216" cy="475488"/>
+          </a:xfrm>
+          <a:prstGeom prst="rect">
+            <a:avLst/>
+          </a:prstGeom>
+          <a:extLst>
+            <a:ext uri="{C572A759-6A51-4108-AA02-DFA0A04FC94B}">
+              <ma14:wrappingTextBoxFlag xmlns:ma14="http://schemas.microsoft.com/office/mac/drawingml/2011/main" val="0"/>
+            </a:ext>
+          </a:extLst>
+        </p:spPr>
+        <p:txBody>
+          <a:bodyPr/>
+          <a:lstStyle>
+            <a:lvl1pPr>
+              <a:defRPr sz="2000">
+                <a:solidFill>
+                  <a:srgbClr val="FFFFFF"/>
+                </a:solidFill>
+                <a:latin typeface="Calibri"/>
+                <a:ea typeface="Calibri"/>
+                <a:cs typeface="Calibri"/>
+              </a:defRPr>
+            </a:lvl1pPr>
+          </a:lstStyle>
+          <a:p>
+            <a:pPr algn="ctr"/>
+            <a:fld id="{F7021451-1387-4CA6-816F-3879F97B5CBC}" type="slidenum">
+              <a:rPr b="1" lang="en-US"/>
+              <a:t>66</a:t>
+            </a:fld>
+            <a:endParaRPr lang="en-US"/>
+          </a:p>
+        </p:txBody>
+      </p:sp>
+    </p:spTree>
+  </p:cSld>
+  <p:clrMapOvr>
+    <a:masterClrMapping/>
+  </p:clrMapOvr>
+</p:sld>
+</file>
+
+<file path=ppt/slides/slide67.xml><?xml version="1.0" encoding="utf-8"?>
+<p:sld xmlns:a="http://schemas.openxmlformats.org/drawingml/2006/main" xmlns:r="http://schemas.openxmlformats.org/officeDocument/2006/relationships" xmlns:p="http://schemas.openxmlformats.org/presentationml/2006/main">
+  <p:cSld name="Slide 67">
+    <p:spTree>
+      <p:nvGrpSpPr>
+        <p:cNvPr id="1" name=""/>
+        <p:cNvGrpSpPr/>
+        <p:nvPr/>
+      </p:nvGrpSpPr>
+      <p:grpSpPr>
+        <a:xfrm>
+          <a:off x="0" y="0"/>
+          <a:ext cx="0" cy="0"/>
+          <a:chOff x="0" y="0"/>
+          <a:chExt cx="0" cy="0"/>
+        </a:xfrm>
+      </p:grpSpPr>
+      <p:sp>
+        <p:nvSpPr>
+          <p:cNvPr id="2" name="Text 0"/>
+          <p:cNvSpPr/>
+          <p:nvPr/>
+        </p:nvSpPr>
+        <p:spPr>
+          <a:xfrm>
+            <a:off x="457200" y="713232"/>
+            <a:ext cx="11368735" cy="274320"/>
+          </a:xfrm>
+          <a:prstGeom prst="rect">
+            <a:avLst/>
+          </a:prstGeom>
+          <a:noFill/>
+          <a:ln/>
+        </p:spPr>
+        <p:txBody>
+          <a:bodyPr wrap="square" lIns="0" tIns="0" rIns="0" bIns="0" rtlCol="0" anchor="ctr"/>
+          <a:lstStyle/>
+          <a:p>
+            <a:pPr algn="r" indent="0" marL="0">
+              <a:buNone/>
+            </a:pPr>
+            <a:r>
+              <a:rPr lang="en-US" sz="1400" b="1" dirty="0">
+                <a:solidFill>
+                  <a:srgbClr val="1C3F6E"/>
+                </a:solidFill>
+                <a:latin typeface="Calibri" pitchFamily="34" charset="0"/>
+                <a:ea typeface="Calibri" pitchFamily="34" charset="-122"/>
+                <a:cs typeface="Calibri" pitchFamily="34" charset="-120"/>
+              </a:rPr>
+              <a:t>REFERENCES</a:t>
+            </a:r>
+            <a:endParaRPr lang="en-US" sz="1400" dirty="0"/>
+          </a:p>
+        </p:txBody>
+      </p:sp>
+      <p:pic>
+        <p:nvPicPr>
+          <p:cNvPr id="3" name="Image 0" descr="/home/claude/f4/img/minesec_sheet.png">    </p:cNvPr>
+          <p:cNvPicPr>
+            <a:picLocks noChangeAspect="1"/>
+          </p:cNvPicPr>
+          <p:nvPr/>
+        </p:nvPicPr>
+        <p:blipFill>
+          <a:blip r:embed="rId1"/>
+          <a:stretch>
+            <a:fillRect/>
+          </a:stretch>
+        </p:blipFill>
+        <p:spPr>
+          <a:xfrm>
+            <a:off x="0" y="658368"/>
+            <a:ext cx="5120640" cy="5833872"/>
+          </a:xfrm>
+          <a:prstGeom prst="rect">
+            <a:avLst/>
+          </a:prstGeom>
+        </p:spPr>
+      </p:pic>
+      <p:sp>
+        <p:nvSpPr>
+          <p:cNvPr id="4" name="Text 1"/>
+          <p:cNvSpPr/>
+          <p:nvPr/>
+        </p:nvSpPr>
+        <p:spPr>
+          <a:xfrm>
+            <a:off x="5349240" y="1005840"/>
+            <a:ext cx="6522415" cy="731520"/>
+          </a:xfrm>
+          <a:prstGeom prst="rect">
+            <a:avLst/>
+          </a:prstGeom>
+          <a:noFill/>
+          <a:ln/>
+        </p:spPr>
+        <p:txBody>
+          <a:bodyPr wrap="square" lIns="0" tIns="0" rIns="0" bIns="0" rtlCol="0" anchor="ctr">
+            <a:normAutofit/>
+          </a:bodyPr>
+          <a:lstStyle/>
+          <a:p>
+            <a:pPr algn="ctr" indent="0" marL="0">
+              <a:buNone/>
+            </a:pPr>
+            <a:r>
+              <a:rPr lang="en-US" sz="3600" b="1" dirty="0">
+                <a:solidFill>
+                  <a:srgbClr val="990011"/>
+                </a:solidFill>
+                <a:latin typeface="Times New Roman" pitchFamily="34" charset="0"/>
+                <a:ea typeface="Times New Roman" pitchFamily="34" charset="-122"/>
+                <a:cs typeface="Times New Roman" pitchFamily="34" charset="-120"/>
+              </a:rPr>
+              <a:t>References</a:t>
+            </a:r>
+            <a:endParaRPr lang="en-US" sz="3600" dirty="0"/>
+          </a:p>
+        </p:txBody>
+      </p:sp>
+      <p:sp>
+        <p:nvSpPr>
+          <p:cNvPr id="5" name="Text 2"/>
+          <p:cNvSpPr/>
+          <p:nvPr/>
+        </p:nvSpPr>
+        <p:spPr>
+          <a:xfrm>
+            <a:off x="5349240" y="1783080"/>
+            <a:ext cx="6522415" cy="4663440"/>
+          </a:xfrm>
+          <a:prstGeom prst="rect">
+            <a:avLst/>
+          </a:prstGeom>
+          <a:noFill/>
+          <a:ln/>
+        </p:spPr>
+        <p:txBody>
+          <a:bodyPr wrap="square" lIns="0" tIns="0" rIns="0" bIns="0" rtlCol="0" anchor="t"/>
+          <a:lstStyle/>
+          <a:p>
+            <a:pPr algn="l" marL="342900" indent="-342900">
+              <a:spcAft>
+                <a:spcPts val="800"/>
+              </a:spcAft>
+              <a:buSzPct val="100000"/>
+              <a:buChar char="•"/>
+            </a:pPr>
+            <a:r>
+              <a:rPr lang="en-US" sz="1800" dirty="0">
+                <a:solidFill>
+                  <a:srgbClr val="111111"/>
+                </a:solidFill>
+                <a:latin typeface="Calibri" pitchFamily="34" charset="0"/>
+                <a:ea typeface="Calibri" pitchFamily="34" charset="-122"/>
+                <a:cs typeface="Calibri" pitchFamily="34" charset="-120"/>
+              </a:rPr>
+              <a:t>Geography Syllabus for Sixth Forms (Lower and Upper Sixth), MINESEC, 2019 — Module 8 (Practical Geography).</a:t>
+            </a:r>
+            <a:endParaRPr lang="en-US" sz="1800" dirty="0"/>
+          </a:p>
+          <a:p>
+            <a:pPr algn="l" marL="342900" indent="-342900">
+              <a:spcAft>
+                <a:spcPts val="800"/>
+              </a:spcAft>
+              <a:buSzPct val="100000"/>
+              <a:buChar char="•"/>
+            </a:pPr>
+            <a:r>
+              <a:rPr lang="en-US" sz="1800" dirty="0">
+                <a:solidFill>
+                  <a:srgbClr val="111111"/>
+                </a:solidFill>
+                <a:latin typeface="Calibri" pitchFamily="34" charset="0"/>
+                <a:ea typeface="Calibri" pitchFamily="34" charset="-122"/>
+                <a:cs typeface="Calibri" pitchFamily="34" charset="-120"/>
+              </a:rPr>
+              <a:t>Teacher's course notes: Mr KAMDEM E., Statistical Techniques in Geographical Analysis (USA), GBHS Garoua, 2026.</a:t>
+            </a:r>
+            <a:endParaRPr lang="en-US" sz="1800" dirty="0"/>
+          </a:p>
+          <a:p>
+            <a:pPr algn="l" marL="342900" indent="-342900">
+              <a:spcAft>
+                <a:spcPts val="800"/>
+              </a:spcAft>
+              <a:buSzPct val="100000"/>
+              <a:buChar char="•"/>
+            </a:pPr>
+            <a:r>
+              <a:rPr lang="en-US" sz="1800" dirty="0">
+                <a:solidFill>
+                  <a:srgbClr val="111111"/>
+                </a:solidFill>
+                <a:latin typeface="Calibri" pitchFamily="34" charset="0"/>
+                <a:ea typeface="Calibri" pitchFamily="34" charset="-122"/>
+                <a:cs typeface="Calibri" pitchFamily="34" charset="-120"/>
+              </a:rPr>
+              <a:t>Photo, Activity 4: “maximum minimum thermometer” by Leo Reynolds, CC BY-NC-SA 2.0, via Flickr (https://www.flickr.com/photos/49968232@N00/7928521796)</a:t>
+            </a:r>
+            <a:endParaRPr lang="en-US" sz="1800" dirty="0"/>
+          </a:p>
+          <a:p>
+            <a:pPr algn="l" marL="342900" indent="-342900">
+              <a:spcAft>
+                <a:spcPts val="800"/>
+              </a:spcAft>
+              <a:buSzPct val="100000"/>
+              <a:buChar char="•"/>
+            </a:pPr>
+            <a:r>
+              <a:rPr lang="en-US" sz="1800" dirty="0">
+                <a:solidFill>
+                  <a:srgbClr val="111111"/>
+                </a:solidFill>
+                <a:latin typeface="Calibri" pitchFamily="34" charset="0"/>
+                <a:ea typeface="Calibri" pitchFamily="34" charset="-122"/>
+                <a:cs typeface="Calibri" pitchFamily="34" charset="-120"/>
+              </a:rPr>
+              <a:t>Diagrams and animations: drawn for this lesson (Geography Department).</a:t>
+            </a:r>
+            <a:endParaRPr lang="en-US" sz="1800" dirty="0"/>
+          </a:p>
+        </p:txBody>
+      </p:sp>
+      <p:sp>
+        <p:nvSpPr>
+          <p:cNvPr id="25" name="Slide Number Placeholder 0"/>
+          <p:cNvSpPr>
+            <a:spLocks noGrp="1"/>
+          </p:cNvSpPr>
+          <p:nvPr>
+            <p:ph type="sldNum" sz="quarter" idx="4294967295"/>
+          </p:nvPr>
+        </p:nvSpPr>
+        <p:spPr>
+          <a:xfrm>
+            <a:off x="27432" y="91440"/>
+            <a:ext cx="585216" cy="475488"/>
+          </a:xfrm>
+          <a:prstGeom prst="rect">
+            <a:avLst/>
+          </a:prstGeom>
+          <a:extLst>
+            <a:ext uri="{C572A759-6A51-4108-AA02-DFA0A04FC94B}">
+              <ma14:wrappingTextBoxFlag xmlns:ma14="http://schemas.microsoft.com/office/mac/drawingml/2011/main" val="0"/>
+            </a:ext>
+          </a:extLst>
+        </p:spPr>
+        <p:txBody>
+          <a:bodyPr/>
+          <a:lstStyle>
+            <a:lvl1pPr>
+              <a:defRPr sz="2000">
+                <a:solidFill>
+                  <a:srgbClr val="FFFFFF"/>
+                </a:solidFill>
+                <a:latin typeface="Calibri"/>
+                <a:ea typeface="Calibri"/>
+                <a:cs typeface="Calibri"/>
+              </a:defRPr>
+            </a:lvl1pPr>
+          </a:lstStyle>
+          <a:p>
+            <a:pPr algn="ctr"/>
+            <a:fld id="{F7021451-1387-4CA6-816F-3879F97B5CBC}" type="slidenum">
+              <a:rPr b="1" lang="en-US"/>
+              <a:t>67</a:t>
             </a:fld>
             <a:endParaRPr lang="en-US"/>
           </a:p>
@@ -27721,614 +26640,6 @@
             <a:fld id="{F7021451-1387-4CA6-816F-3879F97B5CBC}" type="slidenum">
               <a:rPr b="1" lang="en-US"/>
               <a:t>7</a:t>
-            </a:fld>
-            <a:endParaRPr lang="en-US"/>
-          </a:p>
-        </p:txBody>
-      </p:sp>
-    </p:spTree>
-  </p:cSld>
-  <p:clrMapOvr>
-    <a:masterClrMapping/>
-  </p:clrMapOvr>
-</p:sld>
-</file>
-
-<file path=ppt/slides/slide70.xml><?xml version="1.0" encoding="utf-8"?>
-<p:sld xmlns:a="http://schemas.openxmlformats.org/drawingml/2006/main" xmlns:r="http://schemas.openxmlformats.org/officeDocument/2006/relationships" xmlns:p="http://schemas.openxmlformats.org/presentationml/2006/main">
-  <p:cSld name="Slide 70">
-    <p:spTree>
-      <p:nvGrpSpPr>
-        <p:cNvPr id="1" name=""/>
-        <p:cNvGrpSpPr/>
-        <p:nvPr/>
-      </p:nvGrpSpPr>
-      <p:grpSpPr>
-        <a:xfrm>
-          <a:off x="0" y="0"/>
-          <a:ext cx="0" cy="0"/>
-          <a:chOff x="0" y="0"/>
-          <a:chExt cx="0" cy="0"/>
-        </a:xfrm>
-      </p:grpSpPr>
-      <p:sp>
-        <p:nvSpPr>
-          <p:cNvPr id="2" name="Text 0"/>
-          <p:cNvSpPr/>
-          <p:nvPr/>
-        </p:nvSpPr>
-        <p:spPr>
-          <a:xfrm>
-            <a:off x="457200" y="713232"/>
-            <a:ext cx="11368735" cy="274320"/>
-          </a:xfrm>
-          <a:prstGeom prst="rect">
-            <a:avLst/>
-          </a:prstGeom>
-          <a:noFill/>
-          <a:ln/>
-        </p:spPr>
-        <p:txBody>
-          <a:bodyPr wrap="square" lIns="0" tIns="0" rIns="0" bIns="0" rtlCol="0" anchor="ctr"/>
-          <a:lstStyle/>
-          <a:p>
-            <a:pPr algn="r" indent="0" marL="0">
-              <a:buNone/>
-            </a:pPr>
-            <a:r>
-              <a:rPr lang="en-US" sz="1400" b="1" dirty="0">
-                <a:solidFill>
-                  <a:srgbClr val="1C3F6E"/>
-                </a:solidFill>
-                <a:latin typeface="Calibri" pitchFamily="34" charset="0"/>
-                <a:ea typeface="Calibri" pitchFamily="34" charset="-122"/>
-                <a:cs typeface="Calibri" pitchFamily="34" charset="-120"/>
-              </a:rPr>
-              <a:t>TEACHER'S NOTE</a:t>
-            </a:r>
-            <a:endParaRPr lang="en-US" sz="1400" dirty="0"/>
-          </a:p>
-        </p:txBody>
-      </p:sp>
-      <p:pic>
-        <p:nvPicPr>
-          <p:cNvPr id="3" name="Image 0" descr="/home/claude/f4/img/minesec_sheet.png">    </p:cNvPr>
-          <p:cNvPicPr>
-            <a:picLocks noChangeAspect="1"/>
-          </p:cNvPicPr>
-          <p:nvPr/>
-        </p:nvPicPr>
-        <p:blipFill>
-          <a:blip r:embed="rId1"/>
-          <a:stretch>
-            <a:fillRect/>
-          </a:stretch>
-        </p:blipFill>
-        <p:spPr>
-          <a:xfrm>
-            <a:off x="0" y="658368"/>
-            <a:ext cx="3840480" cy="5833872"/>
-          </a:xfrm>
-          <a:prstGeom prst="rect">
-            <a:avLst/>
-          </a:prstGeom>
-        </p:spPr>
-      </p:pic>
-      <p:sp>
-        <p:nvSpPr>
-          <p:cNvPr id="4" name="Text 1"/>
-          <p:cNvSpPr/>
-          <p:nvPr/>
-        </p:nvSpPr>
-        <p:spPr>
-          <a:xfrm>
-            <a:off x="4069080" y="1005840"/>
-            <a:ext cx="7802575" cy="731520"/>
-          </a:xfrm>
-          <a:prstGeom prst="rect">
-            <a:avLst/>
-          </a:prstGeom>
-          <a:noFill/>
-          <a:ln/>
-        </p:spPr>
-        <p:txBody>
-          <a:bodyPr wrap="square" lIns="0" tIns="0" rIns="0" bIns="0" rtlCol="0" anchor="ctr">
-            <a:normAutofit/>
-          </a:bodyPr>
-          <a:lstStyle/>
-          <a:p>
-            <a:pPr algn="ctr" indent="0" marL="0">
-              <a:buNone/>
-            </a:pPr>
-            <a:r>
-              <a:rPr lang="en-US" sz="3600" b="1" dirty="0">
-                <a:solidFill>
-                  <a:srgbClr val="990011"/>
-                </a:solidFill>
-                <a:latin typeface="Times New Roman" pitchFamily="34" charset="0"/>
-                <a:ea typeface="Times New Roman" pitchFamily="34" charset="-122"/>
-                <a:cs typeface="Times New Roman" pitchFamily="34" charset="-120"/>
-              </a:rPr>
-              <a:t>Teacher's Note</a:t>
-            </a:r>
-            <a:endParaRPr lang="en-US" sz="3600" dirty="0"/>
-          </a:p>
-        </p:txBody>
-      </p:sp>
-      <p:sp>
-        <p:nvSpPr>
-          <p:cNvPr id="5" name="Text 2"/>
-          <p:cNvSpPr/>
-          <p:nvPr/>
-        </p:nvSpPr>
-        <p:spPr>
-          <a:xfrm>
-            <a:off x="4069080" y="1783080"/>
-            <a:ext cx="7802575" cy="4663440"/>
-          </a:xfrm>
-          <a:prstGeom prst="rect">
-            <a:avLst/>
-          </a:prstGeom>
-          <a:noFill/>
-          <a:ln/>
-        </p:spPr>
-        <p:txBody>
-          <a:bodyPr wrap="square" lIns="0" tIns="0" rIns="0" bIns="0" rtlCol="0" anchor="t"/>
-          <a:lstStyle/>
-          <a:p>
-            <a:pPr algn="l" marL="342900" indent="-342900">
-              <a:spcAft>
-                <a:spcPts val="800"/>
-              </a:spcAft>
-              <a:buSzPct val="100000"/>
-              <a:buChar char="•"/>
-            </a:pPr>
-            <a:r>
-              <a:rPr lang="en-US" sz="2000" dirty="0">
-                <a:solidFill>
-                  <a:srgbClr val="111111"/>
-                </a:solidFill>
-                <a:latin typeface="Calibri" pitchFamily="34" charset="0"/>
-                <a:ea typeface="Calibri" pitchFamily="34" charset="-122"/>
-                <a:cs typeface="Calibri" pitchFamily="34" charset="-120"/>
-              </a:rPr>
-              <a:t>Timing: Homework correction, plan, objectives 8 min | Recall, situation, action 10 min | 5 activities 30 min | Board summary (copying) 30 min | Evaluation, remediation 10 min | Homework, next lesson 5 min | Logbook 7 min</a:t>
-            </a:r>
-            <a:endParaRPr lang="en-US" sz="2000" dirty="0"/>
-          </a:p>
-          <a:p>
-            <a:pPr algn="l" marL="342900" indent="-342900">
-              <a:spcAft>
-                <a:spcPts val="800"/>
-              </a:spcAft>
-              <a:buSzPct val="100000"/>
-              <a:buChar char="•"/>
-            </a:pPr>
-            <a:r>
-              <a:rPr lang="en-US" sz="2000" dirty="0">
-                <a:solidFill>
-                  <a:srgbClr val="111111"/>
-                </a:solidFill>
-                <a:latin typeface="Calibri" pitchFamily="34" charset="0"/>
-                <a:ea typeface="Calibri" pitchFamily="34" charset="-122"/>
-                <a:cs typeface="Calibri" pitchFamily="34" charset="-120"/>
-              </a:rPr>
-              <a:t>Without the projector (Activity 1): add the values on the board.</a:t>
-            </a:r>
-            <a:endParaRPr lang="en-US" sz="2000" dirty="0"/>
-          </a:p>
-          <a:p>
-            <a:pPr algn="l" marL="342900" indent="-342900">
-              <a:spcAft>
-                <a:spcPts val="800"/>
-              </a:spcAft>
-              <a:buSzPct val="100000"/>
-              <a:buChar char="•"/>
-            </a:pPr>
-            <a:r>
-              <a:rPr lang="en-US" sz="2000" dirty="0">
-                <a:solidFill>
-                  <a:srgbClr val="111111"/>
-                </a:solidFill>
-                <a:latin typeface="Calibri" pitchFamily="34" charset="0"/>
-                <a:ea typeface="Calibri" pitchFamily="34" charset="-122"/>
-                <a:cs typeface="Calibri" pitchFamily="34" charset="-120"/>
-              </a:rPr>
-              <a:t>Without the projector (Activity 2): order the values.</a:t>
-            </a:r>
-            <a:endParaRPr lang="en-US" sz="2000" dirty="0"/>
-          </a:p>
-          <a:p>
-            <a:pPr algn="l" marL="342900" indent="-342900">
-              <a:spcAft>
-                <a:spcPts val="800"/>
-              </a:spcAft>
-              <a:buSzPct val="100000"/>
-              <a:buChar char="•"/>
-            </a:pPr>
-            <a:r>
-              <a:rPr lang="en-US" sz="2000" dirty="0">
-                <a:solidFill>
-                  <a:srgbClr val="111111"/>
-                </a:solidFill>
-                <a:latin typeface="Calibri" pitchFamily="34" charset="0"/>
-                <a:ea typeface="Calibri" pitchFamily="34" charset="-122"/>
-                <a:cs typeface="Calibri" pitchFamily="34" charset="-120"/>
-              </a:rPr>
-              <a:t>Without the projector (Activity 3): make a tally table.</a:t>
-            </a:r>
-            <a:endParaRPr lang="en-US" sz="2000" dirty="0"/>
-          </a:p>
-          <a:p>
-            <a:pPr algn="l" marL="342900" indent="-342900">
-              <a:spcAft>
-                <a:spcPts val="800"/>
-              </a:spcAft>
-              <a:buSzPct val="100000"/>
-              <a:buChar char="•"/>
-            </a:pPr>
-            <a:r>
-              <a:rPr lang="en-US" sz="2000" dirty="0">
-                <a:solidFill>
-                  <a:srgbClr val="111111"/>
-                </a:solidFill>
-                <a:latin typeface="Calibri" pitchFamily="34" charset="0"/>
-                <a:ea typeface="Calibri" pitchFamily="34" charset="-122"/>
-                <a:cs typeface="Calibri" pitchFamily="34" charset="-120"/>
-              </a:rPr>
-              <a:t>Without the projector (Activity 4): find the highest and lowest.</a:t>
-            </a:r>
-            <a:endParaRPr lang="en-US" sz="2000" dirty="0"/>
-          </a:p>
-          <a:p>
-            <a:pPr algn="l" marL="342900" indent="-342900">
-              <a:spcAft>
-                <a:spcPts val="800"/>
-              </a:spcAft>
-              <a:buSzPct val="100000"/>
-              <a:buChar char="•"/>
-            </a:pPr>
-            <a:r>
-              <a:rPr lang="en-US" sz="2000" dirty="0">
-                <a:solidFill>
-                  <a:srgbClr val="111111"/>
-                </a:solidFill>
-                <a:latin typeface="Calibri" pitchFamily="34" charset="0"/>
-                <a:ea typeface="Calibri" pitchFamily="34" charset="-122"/>
-                <a:cs typeface="Calibri" pitchFamily="34" charset="-120"/>
-              </a:rPr>
-              <a:t>Without the projector (Activity 5): split the ordered data in halves.</a:t>
-            </a:r>
-            <a:endParaRPr lang="en-US" sz="2000" dirty="0"/>
-          </a:p>
-        </p:txBody>
-      </p:sp>
-      <p:sp>
-        <p:nvSpPr>
-          <p:cNvPr id="25" name="Slide Number Placeholder 0"/>
-          <p:cNvSpPr>
-            <a:spLocks noGrp="1"/>
-          </p:cNvSpPr>
-          <p:nvPr>
-            <p:ph type="sldNum" sz="quarter" idx="4294967295"/>
-          </p:nvPr>
-        </p:nvSpPr>
-        <p:spPr>
-          <a:xfrm>
-            <a:off x="27432" y="91440"/>
-            <a:ext cx="585216" cy="475488"/>
-          </a:xfrm>
-          <a:prstGeom prst="rect">
-            <a:avLst/>
-          </a:prstGeom>
-          <a:extLst>
-            <a:ext uri="{C572A759-6A51-4108-AA02-DFA0A04FC94B}">
-              <ma14:wrappingTextBoxFlag xmlns:ma14="http://schemas.microsoft.com/office/mac/drawingml/2011/main" val="0"/>
-            </a:ext>
-          </a:extLst>
-        </p:spPr>
-        <p:txBody>
-          <a:bodyPr/>
-          <a:lstStyle>
-            <a:lvl1pPr>
-              <a:defRPr sz="2000">
-                <a:solidFill>
-                  <a:srgbClr val="FFFFFF"/>
-                </a:solidFill>
-                <a:latin typeface="Calibri"/>
-                <a:ea typeface="Calibri"/>
-                <a:cs typeface="Calibri"/>
-              </a:defRPr>
-            </a:lvl1pPr>
-          </a:lstStyle>
-          <a:p>
-            <a:pPr algn="ctr"/>
-            <a:fld id="{F7021451-1387-4CA6-816F-3879F97B5CBC}" type="slidenum">
-              <a:rPr b="1" lang="en-US"/>
-              <a:t>70</a:t>
-            </a:fld>
-            <a:endParaRPr lang="en-US"/>
-          </a:p>
-        </p:txBody>
-      </p:sp>
-    </p:spTree>
-  </p:cSld>
-  <p:clrMapOvr>
-    <a:masterClrMapping/>
-  </p:clrMapOvr>
-</p:sld>
-</file>
-
-<file path=ppt/slides/slide71.xml><?xml version="1.0" encoding="utf-8"?>
-<p:sld xmlns:a="http://schemas.openxmlformats.org/drawingml/2006/main" xmlns:r="http://schemas.openxmlformats.org/officeDocument/2006/relationships" xmlns:p="http://schemas.openxmlformats.org/presentationml/2006/main">
-  <p:cSld name="Slide 71">
-    <p:spTree>
-      <p:nvGrpSpPr>
-        <p:cNvPr id="1" name=""/>
-        <p:cNvGrpSpPr/>
-        <p:nvPr/>
-      </p:nvGrpSpPr>
-      <p:grpSpPr>
-        <a:xfrm>
-          <a:off x="0" y="0"/>
-          <a:ext cx="0" cy="0"/>
-          <a:chOff x="0" y="0"/>
-          <a:chExt cx="0" cy="0"/>
-        </a:xfrm>
-      </p:grpSpPr>
-      <p:sp>
-        <p:nvSpPr>
-          <p:cNvPr id="2" name="Text 0"/>
-          <p:cNvSpPr/>
-          <p:nvPr/>
-        </p:nvSpPr>
-        <p:spPr>
-          <a:xfrm>
-            <a:off x="457200" y="713232"/>
-            <a:ext cx="11368735" cy="274320"/>
-          </a:xfrm>
-          <a:prstGeom prst="rect">
-            <a:avLst/>
-          </a:prstGeom>
-          <a:noFill/>
-          <a:ln/>
-        </p:spPr>
-        <p:txBody>
-          <a:bodyPr wrap="square" lIns="0" tIns="0" rIns="0" bIns="0" rtlCol="0" anchor="ctr"/>
-          <a:lstStyle/>
-          <a:p>
-            <a:pPr algn="r" indent="0" marL="0">
-              <a:buNone/>
-            </a:pPr>
-            <a:r>
-              <a:rPr lang="en-US" sz="1400" b="1" dirty="0">
-                <a:solidFill>
-                  <a:srgbClr val="1C3F6E"/>
-                </a:solidFill>
-                <a:latin typeface="Calibri" pitchFamily="34" charset="0"/>
-                <a:ea typeface="Calibri" pitchFamily="34" charset="-122"/>
-                <a:cs typeface="Calibri" pitchFamily="34" charset="-120"/>
-              </a:rPr>
-              <a:t>REFERENCES</a:t>
-            </a:r>
-            <a:endParaRPr lang="en-US" sz="1400" dirty="0"/>
-          </a:p>
-        </p:txBody>
-      </p:sp>
-      <p:pic>
-        <p:nvPicPr>
-          <p:cNvPr id="3" name="Image 0" descr="/home/claude/f4/img/minesec_sheet.png">    </p:cNvPr>
-          <p:cNvPicPr>
-            <a:picLocks noChangeAspect="1"/>
-          </p:cNvPicPr>
-          <p:nvPr/>
-        </p:nvPicPr>
-        <p:blipFill>
-          <a:blip r:embed="rId1"/>
-          <a:stretch>
-            <a:fillRect/>
-          </a:stretch>
-        </p:blipFill>
-        <p:spPr>
-          <a:xfrm>
-            <a:off x="0" y="658368"/>
-            <a:ext cx="5120640" cy="5833872"/>
-          </a:xfrm>
-          <a:prstGeom prst="rect">
-            <a:avLst/>
-          </a:prstGeom>
-        </p:spPr>
-      </p:pic>
-      <p:sp>
-        <p:nvSpPr>
-          <p:cNvPr id="4" name="Text 1"/>
-          <p:cNvSpPr/>
-          <p:nvPr/>
-        </p:nvSpPr>
-        <p:spPr>
-          <a:xfrm>
-            <a:off x="5349240" y="1005840"/>
-            <a:ext cx="6522415" cy="731520"/>
-          </a:xfrm>
-          <a:prstGeom prst="rect">
-            <a:avLst/>
-          </a:prstGeom>
-          <a:noFill/>
-          <a:ln/>
-        </p:spPr>
-        <p:txBody>
-          <a:bodyPr wrap="square" lIns="0" tIns="0" rIns="0" bIns="0" rtlCol="0" anchor="ctr">
-            <a:normAutofit/>
-          </a:bodyPr>
-          <a:lstStyle/>
-          <a:p>
-            <a:pPr algn="ctr" indent="0" marL="0">
-              <a:buNone/>
-            </a:pPr>
-            <a:r>
-              <a:rPr lang="en-US" sz="3600" b="1" dirty="0">
-                <a:solidFill>
-                  <a:srgbClr val="990011"/>
-                </a:solidFill>
-                <a:latin typeface="Times New Roman" pitchFamily="34" charset="0"/>
-                <a:ea typeface="Times New Roman" pitchFamily="34" charset="-122"/>
-                <a:cs typeface="Times New Roman" pitchFamily="34" charset="-120"/>
-              </a:rPr>
-              <a:t>References</a:t>
-            </a:r>
-            <a:endParaRPr lang="en-US" sz="3600" dirty="0"/>
-          </a:p>
-        </p:txBody>
-      </p:sp>
-      <p:sp>
-        <p:nvSpPr>
-          <p:cNvPr id="5" name="Text 2"/>
-          <p:cNvSpPr/>
-          <p:nvPr/>
-        </p:nvSpPr>
-        <p:spPr>
-          <a:xfrm>
-            <a:off x="5349240" y="1783080"/>
-            <a:ext cx="6522415" cy="4663440"/>
-          </a:xfrm>
-          <a:prstGeom prst="rect">
-            <a:avLst/>
-          </a:prstGeom>
-          <a:noFill/>
-          <a:ln/>
-        </p:spPr>
-        <p:txBody>
-          <a:bodyPr wrap="square" lIns="0" tIns="0" rIns="0" bIns="0" rtlCol="0" anchor="t"/>
-          <a:lstStyle/>
-          <a:p>
-            <a:pPr algn="l" marL="342900" indent="-342900">
-              <a:spcAft>
-                <a:spcPts val="800"/>
-              </a:spcAft>
-              <a:buSzPct val="100000"/>
-              <a:buChar char="•"/>
-            </a:pPr>
-            <a:r>
-              <a:rPr lang="en-US" sz="1800" dirty="0">
-                <a:solidFill>
-                  <a:srgbClr val="111111"/>
-                </a:solidFill>
-                <a:latin typeface="Calibri" pitchFamily="34" charset="0"/>
-                <a:ea typeface="Calibri" pitchFamily="34" charset="-122"/>
-                <a:cs typeface="Calibri" pitchFamily="34" charset="-120"/>
-              </a:rPr>
-              <a:t>Geography Syllabus for Sixth Forms (Lower and Upper Sixth), MINESEC, 2019 — Module 8 (Practical Geography).</a:t>
-            </a:r>
-            <a:endParaRPr lang="en-US" sz="1800" dirty="0"/>
-          </a:p>
-          <a:p>
-            <a:pPr algn="l" marL="342900" indent="-342900">
-              <a:spcAft>
-                <a:spcPts val="800"/>
-              </a:spcAft>
-              <a:buSzPct val="100000"/>
-              <a:buChar char="•"/>
-            </a:pPr>
-            <a:r>
-              <a:rPr lang="en-US" sz="1800" dirty="0">
-                <a:solidFill>
-                  <a:srgbClr val="111111"/>
-                </a:solidFill>
-                <a:latin typeface="Calibri" pitchFamily="34" charset="0"/>
-                <a:ea typeface="Calibri" pitchFamily="34" charset="-122"/>
-                <a:cs typeface="Calibri" pitchFamily="34" charset="-120"/>
-              </a:rPr>
-              <a:t>Teacher's course notes: Mr KAMDEM E., Statistical Techniques in Geographical Analysis (USA), GBHS Garoua, 2026.</a:t>
-            </a:r>
-            <a:endParaRPr lang="en-US" sz="1800" dirty="0"/>
-          </a:p>
-          <a:p>
-            <a:pPr algn="l" marL="342900" indent="-342900">
-              <a:spcAft>
-                <a:spcPts val="800"/>
-              </a:spcAft>
-              <a:buSzPct val="100000"/>
-              <a:buChar char="•"/>
-            </a:pPr>
-            <a:r>
-              <a:rPr lang="en-US" sz="1800" dirty="0">
-                <a:solidFill>
-                  <a:srgbClr val="111111"/>
-                </a:solidFill>
-                <a:latin typeface="Calibri" pitchFamily="34" charset="0"/>
-                <a:ea typeface="Calibri" pitchFamily="34" charset="-122"/>
-                <a:cs typeface="Calibri" pitchFamily="34" charset="-120"/>
-              </a:rPr>
-              <a:t>Photo, Activity 4: “maximum minimum thermometer” by Leo Reynolds, CC BY-NC-SA 2.0, via Flickr (https://www.flickr.com/photos/49968232@N00/7928521796)</a:t>
-            </a:r>
-            <a:endParaRPr lang="en-US" sz="1800" dirty="0"/>
-          </a:p>
-          <a:p>
-            <a:pPr algn="l" marL="342900" indent="-342900">
-              <a:spcAft>
-                <a:spcPts val="800"/>
-              </a:spcAft>
-              <a:buSzPct val="100000"/>
-              <a:buChar char="•"/>
-            </a:pPr>
-            <a:r>
-              <a:rPr lang="en-US" sz="1800" dirty="0">
-                <a:solidFill>
-                  <a:srgbClr val="111111"/>
-                </a:solidFill>
-                <a:latin typeface="Calibri" pitchFamily="34" charset="0"/>
-                <a:ea typeface="Calibri" pitchFamily="34" charset="-122"/>
-                <a:cs typeface="Calibri" pitchFamily="34" charset="-120"/>
-              </a:rPr>
-              <a:t>Diagrams and animations: drawn for this lesson (Geography Department).</a:t>
-            </a:r>
-            <a:endParaRPr lang="en-US" sz="1800" dirty="0"/>
-          </a:p>
-        </p:txBody>
-      </p:sp>
-      <p:sp>
-        <p:nvSpPr>
-          <p:cNvPr id="25" name="Slide Number Placeholder 0"/>
-          <p:cNvSpPr>
-            <a:spLocks noGrp="1"/>
-          </p:cNvSpPr>
-          <p:nvPr>
-            <p:ph type="sldNum" sz="quarter" idx="4294967295"/>
-          </p:nvPr>
-        </p:nvSpPr>
-        <p:spPr>
-          <a:xfrm>
-            <a:off x="27432" y="91440"/>
-            <a:ext cx="585216" cy="475488"/>
-          </a:xfrm>
-          <a:prstGeom prst="rect">
-            <a:avLst/>
-          </a:prstGeom>
-          <a:extLst>
-            <a:ext uri="{C572A759-6A51-4108-AA02-DFA0A04FC94B}">
-              <ma14:wrappingTextBoxFlag xmlns:ma14="http://schemas.microsoft.com/office/mac/drawingml/2011/main" val="0"/>
-            </a:ext>
-          </a:extLst>
-        </p:spPr>
-        <p:txBody>
-          <a:bodyPr/>
-          <a:lstStyle>
-            <a:lvl1pPr>
-              <a:defRPr sz="2000">
-                <a:solidFill>
-                  <a:srgbClr val="FFFFFF"/>
-                </a:solidFill>
-                <a:latin typeface="Calibri"/>
-                <a:ea typeface="Calibri"/>
-                <a:cs typeface="Calibri"/>
-              </a:defRPr>
-            </a:lvl1pPr>
-          </a:lstStyle>
-          <a:p>
-            <a:pPr algn="ctr"/>
-            <a:fld id="{F7021451-1387-4CA6-816F-3879F97B5CBC}" type="slidenum">
-              <a:rPr b="1" lang="en-US"/>
-              <a:t>71</a:t>
             </a:fld>
             <a:endParaRPr lang="en-US"/>
           </a:p>

--- a/lecons/USA/Practical Geography/12_USA_PRA_QT03a_Measures_of_Central_Tendency_Range_and_Quartiles.pptx
+++ b/lecons/USA/Practical Geography/12_USA_PRA_QT03a_Measures_of_Central_Tendency_Range_and_Quartiles.pptx
@@ -72,9 +72,21 @@
     <p:sldId id="320" r:id="rId66"/>
     <p:sldId id="321" r:id="rId67"/>
     <p:sldId id="322" r:id="rId68"/>
+    <p:sldId id="323" r:id="rId69"/>
+    <p:sldId id="324" r:id="rId70"/>
+    <p:sldId id="325" r:id="rId71"/>
+    <p:sldId id="326" r:id="rId72"/>
+    <p:sldId id="327" r:id="rId73"/>
+    <p:sldId id="328" r:id="rId74"/>
+    <p:sldId id="329" r:id="rId75"/>
+    <p:sldId id="330" r:id="rId76"/>
+    <p:sldId id="331" r:id="rId77"/>
+    <p:sldId id="332" r:id="rId78"/>
+    <p:sldId id="333" r:id="rId79"/>
+    <p:sldId id="334" r:id="rId80"/>
   </p:sldIdLst>
   <p:notesMasterIdLst>
-    <p:notesMasterId r:id="rId69"/>
+    <p:notesMasterId r:id="rId81"/>
   </p:notesMasterIdLst>
   <p:sldSz cx="12192000" cy="6858000"/>
   <p:notesSz cx="6858000" cy="12192000"/>
@@ -3384,7 +3396,7 @@
           <a:p>
             <a:r>
               <a:rPr lang="en-US" dirty="0"/>
-              <a:t>Let us copy The Mean. The mean is calculated and assessed as follows. Copy the point on Formula and example on the left, then draw the diagram on the right: the mean. Give it a title and label it clearly.</a:t>
+              <a:t>Let us copy The Mean: Calculation. The mean is calculated as follows. Copy the point on Formula on the left, then draw the diagram on the right: the mean. Give it a title and label it clearly.</a:t>
             </a:r>
             <a:endParaRPr lang="en-US" dirty="0"/>
           </a:p>
@@ -3560,7 +3572,7 @@
           <a:p>
             <a:r>
               <a:rPr lang="en-US" dirty="0"/>
-              <a:t>We continue with The Mean. Copy the point on Example of station A: write the key term first, then its explanation.</a:t>
+              <a:t>We continue with The Mean: Calculation. Copy the point on Example of the villages: write the key term first, then its explanation.</a:t>
             </a:r>
             <a:endParaRPr lang="en-US" dirty="0"/>
           </a:p>
@@ -3648,7 +3660,7 @@
           <a:p>
             <a:r>
               <a:rPr lang="en-US" dirty="0"/>
-              <a:t>We continue with The Mean. Copy the point on Advantages: write the key term first, then its explanation.</a:t>
+              <a:t>We continue with The Mean: Calculation. Copy the point on Example of station A: write the key term first, then its explanation.</a:t>
             </a:r>
             <a:endParaRPr lang="en-US" dirty="0"/>
           </a:p>
@@ -3736,7 +3748,7 @@
           <a:p>
             <a:r>
               <a:rPr lang="en-US" dirty="0"/>
-              <a:t>We continue with The Mean. Copy the point on Disadvantages: write the key term first, then its explanation.</a:t>
+              <a:t>Let us copy The Mean: Advantages and Disadvantages. The mean has the following advantages and disadvantages. Copy the point on It uses every value: write the key term first, then its explanation.</a:t>
             </a:r>
             <a:endParaRPr lang="en-US" dirty="0"/>
           </a:p>
@@ -3824,7 +3836,7 @@
           <a:p>
             <a:r>
               <a:rPr lang="en-US" dirty="0"/>
-              <a:t>Let us copy The Median. The median is found and assessed as follows. Copy the point on Method on the left, then draw the diagram on the right: the median. Give it a title and label it clearly.</a:t>
+              <a:t>We continue with The Mean: Advantages and Disadvantages. Copy the point on It is needed for other measures: write the key term first, then its explanation.</a:t>
             </a:r>
             <a:endParaRPr lang="en-US" dirty="0"/>
           </a:p>
@@ -3912,7 +3924,7 @@
           <a:p>
             <a:r>
               <a:rPr lang="en-US" dirty="0"/>
-              <a:t>We continue with The Median. Copy the point on Odd and even numbers of values: write the key term first, then its explanation.</a:t>
+              <a:t>We continue with The Mean: Advantages and Disadvantages. Copy the point on It is distorted by outliers: write the key term first, then its explanation.</a:t>
             </a:r>
             <a:endParaRPr lang="en-US" dirty="0"/>
           </a:p>
@@ -4000,7 +4012,7 @@
           <a:p>
             <a:r>
               <a:rPr lang="en-US" dirty="0"/>
-              <a:t>We continue with The Median. Copy the point on Example of Ndu (1963 to 1972): write the key term first, then its explanation.</a:t>
+              <a:t>We continue with The Mean: Advantages and Disadvantages. Copy the point on It may not be a real value: write the key term first, then its explanation.</a:t>
             </a:r>
             <a:endParaRPr lang="en-US" dirty="0"/>
           </a:p>
@@ -4088,7 +4100,7 @@
           <a:p>
             <a:r>
               <a:rPr lang="en-US" dirty="0"/>
-              <a:t>We continue with The Median. Copy the point on Advantages and disadvantages: write the key term first, then its explanation.</a:t>
+              <a:t>Let us copy The Median: Calculation. The median is found as follows. Copy the point on Method on the left, then draw the diagram on the right: the median. Give it a title and label it clearly.</a:t>
             </a:r>
             <a:endParaRPr lang="en-US" dirty="0"/>
           </a:p>
@@ -4176,7 +4188,7 @@
           <a:p>
             <a:r>
               <a:rPr lang="en-US" dirty="0"/>
-              <a:t>Let us copy The Mode. The mode is found and assessed as follows. Copy the point on Method and example on the left, then draw the diagram on the right: the mode. Give it a title and label it clearly.</a:t>
+              <a:t>We continue with The Median: Calculation. Copy the point on An odd number of values: write the key term first, then its explanation.</a:t>
             </a:r>
             <a:endParaRPr lang="en-US" dirty="0"/>
           </a:p>
@@ -4264,7 +4276,7 @@
           <a:p>
             <a:r>
               <a:rPr lang="en-US" dirty="0"/>
-              <a:t>We continue with The Mode. Copy the point on Special cases: write the key term first, then its explanation.</a:t>
+              <a:t>We continue with The Median: Calculation. Copy the point on An even number of values: write the key term first, then its explanation.</a:t>
             </a:r>
             <a:endParaRPr lang="en-US" dirty="0"/>
           </a:p>
@@ -4352,7 +4364,7 @@
           <a:p>
             <a:r>
               <a:rPr lang="en-US" dirty="0"/>
-              <a:t>Copy the point on Advantages and disadvantages on the left, then draw the diagram on the right: comparing the three measures. Give it a title and label it clearly.</a:t>
+              <a:t>We continue with The Median: Calculation. Copy the point on Example of Ndu (1963 to 1972): write the key term first, then its explanation.</a:t>
             </a:r>
             <a:endParaRPr lang="en-US" dirty="0"/>
           </a:p>
@@ -4528,7 +4540,7 @@
           <a:p>
             <a:r>
               <a:rPr lang="en-US" dirty="0"/>
-              <a:t>Let us copy The Range. The range is calculated and assessed as follows. Copy the point on Formula and example on the left, then draw the diagram on the right: a maximum and minimum thermometer. Give it a title and label it clearly.</a:t>
+              <a:t>Let us copy The Median: Advantages and Disadvantages. The median has the following advantages and disadvantages. Copy the point on It is not affected by outliers: write the key term first, then its explanation.</a:t>
             </a:r>
             <a:endParaRPr lang="en-US" dirty="0"/>
           </a:p>
@@ -4616,7 +4628,7 @@
           <a:p>
             <a:r>
               <a:rPr lang="en-US" dirty="0"/>
-              <a:t>We continue with The Range. Copy the point on Interpretation and assessment: write the key term first, then its explanation.</a:t>
+              <a:t>We continue with The Median: Advantages and Disadvantages. Copy the point on It is easy to find: write the key term first, then its explanation.</a:t>
             </a:r>
             <a:endParaRPr lang="en-US" dirty="0"/>
           </a:p>
@@ -4704,7 +4716,7 @@
           <a:p>
             <a:r>
               <a:rPr lang="en-US" dirty="0"/>
-              <a:t>Let us copy Quartiles and the Interquartile Range. The quartiles and the interquartile range are calculated as follows. Copy the point on Steps on the left, then draw the diagram on the right: quartiles. Give it a title and label it clearly.</a:t>
+              <a:t>We continue with The Median: Advantages and Disadvantages. Copy the point on It ignores most values: write the key term first, then its explanation.</a:t>
             </a:r>
             <a:endParaRPr lang="en-US" dirty="0"/>
           </a:p>
@@ -4792,7 +4804,7 @@
           <a:p>
             <a:r>
               <a:rPr lang="en-US" dirty="0"/>
-              <a:t>We continue with Quartiles and the Interquartile Range. Copy the point on Example 1 (n = 11): write the key term first, then its explanation.</a:t>
+              <a:t>Let us copy The Mode: Calculation. The mode is found as follows. Copy the point on Method on the left, then draw the diagram on the right: the mode. Give it a title and label it clearly.</a:t>
             </a:r>
             <a:endParaRPr lang="en-US" dirty="0"/>
           </a:p>
@@ -4880,7 +4892,7 @@
           <a:p>
             <a:r>
               <a:rPr lang="en-US" dirty="0"/>
-              <a:t>We continue with Quartiles and the Interquartile Range. Copy the point on Example 2 (n = 13): write the key term first, then its explanation.</a:t>
+              <a:t>We continue with The Mode: Calculation. Copy the point on A set with no mode: write the key term first, then its explanation.</a:t>
             </a:r>
             <a:endParaRPr lang="en-US" dirty="0"/>
           </a:p>
@@ -4968,7 +4980,7 @@
           <a:p>
             <a:r>
               <a:rPr lang="en-US" dirty="0"/>
-              <a:t>Copy the point on Advantage on the left, then draw the diagram on the right: a box and whisker plot. Give it a title and label it clearly.</a:t>
+              <a:t>We continue with The Mode: Calculation. Copy the point on A bimodal set: write the key term first, then its explanation.</a:t>
             </a:r>
             <a:endParaRPr lang="en-US" dirty="0"/>
           </a:p>
@@ -5056,7 +5068,7 @@
           <a:p>
             <a:r>
               <a:rPr lang="en-US" dirty="0"/>
-              <a:t>Now let us check what you have understood. Question 1: Find the mean, median and mode of 4, 7, 7, 9, 13. Answer in your exercise book.</a:t>
+              <a:t>Let us copy The Mode: Advantages and Disadvantages. The mode has the following advantages and disadvantages. Copy the point on It can be used for categories on the left, then draw the diagram on the right: comparing the three measures. Give it a title and label it clearly.</a:t>
             </a:r>
             <a:endParaRPr lang="en-US" dirty="0"/>
           </a:p>
@@ -5144,7 +5156,7 @@
           <a:p>
             <a:r>
               <a:rPr lang="en-US" dirty="0"/>
-              <a:t>The expected answer is: mean = 40 ÷ 5 = 8; median = 7; mode = 7. If you got it right, well done.</a:t>
+              <a:t>We continue with The Mode: Advantages and Disadvantages. Copy the point on It is not affected by outliers: write the key term first, then its explanation.</a:t>
             </a:r>
             <a:endParaRPr lang="en-US" dirty="0"/>
           </a:p>
@@ -5232,7 +5244,7 @@
           <a:p>
             <a:r>
               <a:rPr lang="en-US" dirty="0"/>
-              <a:t>Now let us check what you have understood. Question 2: Why is the median better than the mean for Oumarou's farms? Answer in your exercise book.</a:t>
+              <a:t>We continue with The Mode: Advantages and Disadvantages. Copy the point on There may be no mode or several: write the key term first, then its explanation.</a:t>
             </a:r>
             <a:endParaRPr lang="en-US" dirty="0"/>
           </a:p>
@@ -5320,7 +5332,7 @@
           <a:p>
             <a:r>
               <a:rPr lang="en-US" dirty="0"/>
-              <a:t>The expected answer is: the outlier (45 bags) raises the mean to about 21.3, while the median (19) represents most farms. If you got it right, well done.</a:t>
+              <a:t>Let us copy Calculation and Interpretation. The range is calculated and interpreted as follows. Copy the point on Formula on the left, then draw the diagram on the right: a maximum and minimum thermometer. Give it a title and label it clearly.</a:t>
             </a:r>
             <a:endParaRPr lang="en-US" dirty="0"/>
           </a:p>
@@ -5496,7 +5508,7 @@
           <a:p>
             <a:r>
               <a:rPr lang="en-US" dirty="0"/>
-              <a:t>For those who need more practice, fill in the blanks in your exercise book. The answers are: number 1, n; number 2, mode; number 3, Q1.</a:t>
+              <a:t>We continue with Calculation and Interpretation. Copy the point on Example of Garoua: write the key term first, then its explanation.</a:t>
             </a:r>
             <a:endParaRPr lang="en-US" dirty="0"/>
           </a:p>
@@ -5584,7 +5596,7 @@
           <a:p>
             <a:r>
               <a:rPr lang="en-US" dirty="0"/>
-              <a:t>For your homework: Calculate the mean of 3, 5, 7 and 9. We shall correct it at the beginning of our next lesson.</a:t>
+              <a:t>We continue with Calculation and Interpretation. Copy the point on Interpretation: write the key term first, then its explanation.</a:t>
             </a:r>
             <a:endParaRPr lang="en-US" dirty="0"/>
           </a:p>
@@ -5672,7 +5684,7 @@
           <a:p>
             <a:r>
               <a:rPr lang="en-US" dirty="0"/>
-              <a:t>Our next lesson will be on Quantitative Techniques 3 (Part 2): Measures of Dispersion: Variance, Standard Deviation and Coefficient of Variation. Thank you for your attention, and see you next time.</a:t>
+              <a:t>Let us copy Advantages and Disadvantages. The range has the following advantages and disadvantages. Copy the point on It is simple and quick: write the key term first, then its explanation.</a:t>
             </a:r>
             <a:endParaRPr lang="en-US" dirty="0"/>
           </a:p>
@@ -5760,7 +5772,7 @@
           <a:p>
             <a:r>
               <a:rPr lang="en-US" dirty="0"/>
-              <a:t>Let us play the bilingual game. I say a word in English, and you give me the French word. Then we do the reverse.</a:t>
+              <a:t>We continue with Advantages and Disadvantages. Copy the point on It is misled by outliers: write the key term first, then its explanation.</a:t>
             </a:r>
             <a:endParaRPr lang="en-US" dirty="0"/>
           </a:p>
@@ -5848,7 +5860,7 @@
           <a:p>
             <a:r>
               <a:rPr lang="en-US" dirty="0"/>
-              <a:t>I record this information in the official logbook of the class after the lesson.</a:t>
+              <a:t>Let us copy Quartiles and the Interquartile Range. The quartiles and the interquartile range are calculated as follows. Copy the point on Steps on the left, then draw the diagram on the right: quartiles. Give it a title and label it clearly.</a:t>
             </a:r>
             <a:endParaRPr lang="en-US" dirty="0"/>
           </a:p>
@@ -5936,7 +5948,7 @@
           <a:p>
             <a:r>
               <a:rPr lang="en-US" dirty="0"/>
-              <a:t>I complete the second page of the logbook: the matter taught, the evaluation, the homework and the attendance.</a:t>
+              <a:t>We continue with Quartiles and the Interquartile Range. Copy the point on Example 1 (n = 11): write the key term first, then its explanation.</a:t>
             </a:r>
             <a:endParaRPr lang="en-US" dirty="0"/>
           </a:p>
@@ -6024,7 +6036,7 @@
           <a:p>
             <a:r>
               <a:rPr lang="en-US" dirty="0"/>
-              <a:t>This slide is for me, the teacher: it gives the timing of the lesson and what to do if the projector is not available.</a:t>
+              <a:t>We continue with Quartiles and the Interquartile Range. Copy the point on Example 2 (n = 13): write the key term first, then its explanation.</a:t>
             </a:r>
             <a:endParaRPr lang="en-US" dirty="0"/>
           </a:p>
@@ -6112,7 +6124,7 @@
           <a:p>
             <a:r>
               <a:rPr lang="en-US" dirty="0"/>
-              <a:t>These are the references and picture credits used to prepare this lesson.</a:t>
+              <a:t>Copy the point on Advantage on the left, then draw the diagram on the right: a box and whisker plot. Give it a title and label it clearly.</a:t>
             </a:r>
             <a:endParaRPr lang="en-US" dirty="0"/>
           </a:p>
@@ -6136,6 +6148,182 @@
             <a:fld id="{F7021451-1387-4CA6-816F-3879F97B5CBC}" type="slidenum">
               <a:rPr lang="en-US"/>
               <a:t>67</a:t>
+            </a:fld>
+            <a:endParaRPr lang="en-US"/>
+          </a:p>
+        </p:txBody>
+      </p:sp>
+    </p:spTree>
+    <p:extLst>
+      <p:ext uri="{BB962C8B-B14F-4D97-AF65-F5344CB8AC3E}">
+        <p14:creationId xmlns:p14="http://schemas.microsoft.com/office/powerpoint/2010/main" val="1024086991"/>
+      </p:ext>
+    </p:extLst>
+  </p:cSld>
+  <p:clrMapOvr>
+    <a:masterClrMapping/>
+  </p:clrMapOvr>
+</p:notes>
+</file>
+
+<file path=ppt/notesSlides/notesSlide68.xml><?xml version="1.0" encoding="utf-8"?>
+<p:notes xmlns:a="http://schemas.openxmlformats.org/drawingml/2006/main" xmlns:r="http://schemas.openxmlformats.org/officeDocument/2006/relationships" xmlns:p="http://schemas.openxmlformats.org/presentationml/2006/main">
+  <p:cSld>
+    <p:spTree>
+      <p:nvGrpSpPr>
+        <p:cNvPr id="1" name=""/>
+        <p:cNvGrpSpPr/>
+        <p:nvPr/>
+      </p:nvGrpSpPr>
+      <p:grpSpPr>
+        <a:xfrm>
+          <a:off x="0" y="0"/>
+          <a:ext cx="0" cy="0"/>
+          <a:chOff x="0" y="0"/>
+          <a:chExt cx="0" cy="0"/>
+        </a:xfrm>
+      </p:grpSpPr>
+      <p:sp>
+        <p:nvSpPr>
+          <p:cNvPr id="2" name="Slide Image Placeholder 1"/>
+          <p:cNvSpPr>
+            <a:spLocks noGrp="1" noRot="1" noChangeAspect="1"/>
+          </p:cNvSpPr>
+          <p:nvPr>
+            <p:ph type="sldImg"/>
+          </p:nvPr>
+        </p:nvSpPr>
+        <p:spPr/>
+      </p:sp>
+      <p:sp>
+        <p:nvSpPr>
+          <p:cNvPr id="3" name="Notes Placeholder 2"/>
+          <p:cNvSpPr>
+            <a:spLocks noGrp="1"/>
+          </p:cNvSpPr>
+          <p:nvPr>
+            <p:ph type="body" idx="1"/>
+          </p:nvPr>
+        </p:nvSpPr>
+        <p:spPr/>
+        <p:txBody>
+          <a:bodyPr/>
+          <a:lstStyle/>
+          <a:p>
+            <a:r>
+              <a:rPr lang="en-US" dirty="0"/>
+              <a:t>Now let us check what you have understood. Question 1: Find the mean, median and mode of 4, 7, 7, 9, 13. Answer in your exercise book.</a:t>
+            </a:r>
+            <a:endParaRPr lang="en-US" dirty="0"/>
+          </a:p>
+        </p:txBody>
+      </p:sp>
+      <p:sp>
+        <p:nvSpPr>
+          <p:cNvPr id="4" name="Slide Number Placeholder 3"/>
+          <p:cNvSpPr>
+            <a:spLocks noGrp="1"/>
+          </p:cNvSpPr>
+          <p:nvPr>
+            <p:ph type="sldNum" sz="quarter" idx="10"/>
+          </p:nvPr>
+        </p:nvSpPr>
+        <p:spPr/>
+        <p:txBody>
+          <a:bodyPr/>
+          <a:lstStyle/>
+          <a:p>
+            <a:fld id="{F7021451-1387-4CA6-816F-3879F97B5CBC}" type="slidenum">
+              <a:rPr lang="en-US"/>
+              <a:t>68</a:t>
+            </a:fld>
+            <a:endParaRPr lang="en-US"/>
+          </a:p>
+        </p:txBody>
+      </p:sp>
+    </p:spTree>
+    <p:extLst>
+      <p:ext uri="{BB962C8B-B14F-4D97-AF65-F5344CB8AC3E}">
+        <p14:creationId xmlns:p14="http://schemas.microsoft.com/office/powerpoint/2010/main" val="1024086991"/>
+      </p:ext>
+    </p:extLst>
+  </p:cSld>
+  <p:clrMapOvr>
+    <a:masterClrMapping/>
+  </p:clrMapOvr>
+</p:notes>
+</file>
+
+<file path=ppt/notesSlides/notesSlide69.xml><?xml version="1.0" encoding="utf-8"?>
+<p:notes xmlns:a="http://schemas.openxmlformats.org/drawingml/2006/main" xmlns:r="http://schemas.openxmlformats.org/officeDocument/2006/relationships" xmlns:p="http://schemas.openxmlformats.org/presentationml/2006/main">
+  <p:cSld>
+    <p:spTree>
+      <p:nvGrpSpPr>
+        <p:cNvPr id="1" name=""/>
+        <p:cNvGrpSpPr/>
+        <p:nvPr/>
+      </p:nvGrpSpPr>
+      <p:grpSpPr>
+        <a:xfrm>
+          <a:off x="0" y="0"/>
+          <a:ext cx="0" cy="0"/>
+          <a:chOff x="0" y="0"/>
+          <a:chExt cx="0" cy="0"/>
+        </a:xfrm>
+      </p:grpSpPr>
+      <p:sp>
+        <p:nvSpPr>
+          <p:cNvPr id="2" name="Slide Image Placeholder 1"/>
+          <p:cNvSpPr>
+            <a:spLocks noGrp="1" noRot="1" noChangeAspect="1"/>
+          </p:cNvSpPr>
+          <p:nvPr>
+            <p:ph type="sldImg"/>
+          </p:nvPr>
+        </p:nvSpPr>
+        <p:spPr/>
+      </p:sp>
+      <p:sp>
+        <p:nvSpPr>
+          <p:cNvPr id="3" name="Notes Placeholder 2"/>
+          <p:cNvSpPr>
+            <a:spLocks noGrp="1"/>
+          </p:cNvSpPr>
+          <p:nvPr>
+            <p:ph type="body" idx="1"/>
+          </p:nvPr>
+        </p:nvSpPr>
+        <p:spPr/>
+        <p:txBody>
+          <a:bodyPr/>
+          <a:lstStyle/>
+          <a:p>
+            <a:r>
+              <a:rPr lang="en-US" dirty="0"/>
+              <a:t>The expected answer is: mean = 40 ÷ 5 = 8; median = 7; mode = 7. If you got it right, well done.</a:t>
+            </a:r>
+            <a:endParaRPr lang="en-US" dirty="0"/>
+          </a:p>
+        </p:txBody>
+      </p:sp>
+      <p:sp>
+        <p:nvSpPr>
+          <p:cNvPr id="4" name="Slide Number Placeholder 3"/>
+          <p:cNvSpPr>
+            <a:spLocks noGrp="1"/>
+          </p:cNvSpPr>
+          <p:nvPr>
+            <p:ph type="sldNum" sz="quarter" idx="10"/>
+          </p:nvPr>
+        </p:nvSpPr>
+        <p:spPr/>
+        <p:txBody>
+          <a:bodyPr/>
+          <a:lstStyle/>
+          <a:p>
+            <a:fld id="{F7021451-1387-4CA6-816F-3879F97B5CBC}" type="slidenum">
+              <a:rPr lang="en-US"/>
+              <a:t>69</a:t>
             </a:fld>
             <a:endParaRPr lang="en-US"/>
           </a:p>
@@ -6224,6 +6412,886 @@
             <a:fld id="{F7021451-1387-4CA6-816F-3879F97B5CBC}" type="slidenum">
               <a:rPr lang="en-US"/>
               <a:t>7</a:t>
+            </a:fld>
+            <a:endParaRPr lang="en-US"/>
+          </a:p>
+        </p:txBody>
+      </p:sp>
+    </p:spTree>
+    <p:extLst>
+      <p:ext uri="{BB962C8B-B14F-4D97-AF65-F5344CB8AC3E}">
+        <p14:creationId xmlns:p14="http://schemas.microsoft.com/office/powerpoint/2010/main" val="1024086991"/>
+      </p:ext>
+    </p:extLst>
+  </p:cSld>
+  <p:clrMapOvr>
+    <a:masterClrMapping/>
+  </p:clrMapOvr>
+</p:notes>
+</file>
+
+<file path=ppt/notesSlides/notesSlide70.xml><?xml version="1.0" encoding="utf-8"?>
+<p:notes xmlns:a="http://schemas.openxmlformats.org/drawingml/2006/main" xmlns:r="http://schemas.openxmlformats.org/officeDocument/2006/relationships" xmlns:p="http://schemas.openxmlformats.org/presentationml/2006/main">
+  <p:cSld>
+    <p:spTree>
+      <p:nvGrpSpPr>
+        <p:cNvPr id="1" name=""/>
+        <p:cNvGrpSpPr/>
+        <p:nvPr/>
+      </p:nvGrpSpPr>
+      <p:grpSpPr>
+        <a:xfrm>
+          <a:off x="0" y="0"/>
+          <a:ext cx="0" cy="0"/>
+          <a:chOff x="0" y="0"/>
+          <a:chExt cx="0" cy="0"/>
+        </a:xfrm>
+      </p:grpSpPr>
+      <p:sp>
+        <p:nvSpPr>
+          <p:cNvPr id="2" name="Slide Image Placeholder 1"/>
+          <p:cNvSpPr>
+            <a:spLocks noGrp="1" noRot="1" noChangeAspect="1"/>
+          </p:cNvSpPr>
+          <p:nvPr>
+            <p:ph type="sldImg"/>
+          </p:nvPr>
+        </p:nvSpPr>
+        <p:spPr/>
+      </p:sp>
+      <p:sp>
+        <p:nvSpPr>
+          <p:cNvPr id="3" name="Notes Placeholder 2"/>
+          <p:cNvSpPr>
+            <a:spLocks noGrp="1"/>
+          </p:cNvSpPr>
+          <p:nvPr>
+            <p:ph type="body" idx="1"/>
+          </p:nvPr>
+        </p:nvSpPr>
+        <p:spPr/>
+        <p:txBody>
+          <a:bodyPr/>
+          <a:lstStyle/>
+          <a:p>
+            <a:r>
+              <a:rPr lang="en-US" dirty="0"/>
+              <a:t>Now let us check what you have understood. Question 2: Why is the median better than the mean for Oumarou's farms? Answer in your exercise book.</a:t>
+            </a:r>
+            <a:endParaRPr lang="en-US" dirty="0"/>
+          </a:p>
+        </p:txBody>
+      </p:sp>
+      <p:sp>
+        <p:nvSpPr>
+          <p:cNvPr id="4" name="Slide Number Placeholder 3"/>
+          <p:cNvSpPr>
+            <a:spLocks noGrp="1"/>
+          </p:cNvSpPr>
+          <p:nvPr>
+            <p:ph type="sldNum" sz="quarter" idx="10"/>
+          </p:nvPr>
+        </p:nvSpPr>
+        <p:spPr/>
+        <p:txBody>
+          <a:bodyPr/>
+          <a:lstStyle/>
+          <a:p>
+            <a:fld id="{F7021451-1387-4CA6-816F-3879F97B5CBC}" type="slidenum">
+              <a:rPr lang="en-US"/>
+              <a:t>70</a:t>
+            </a:fld>
+            <a:endParaRPr lang="en-US"/>
+          </a:p>
+        </p:txBody>
+      </p:sp>
+    </p:spTree>
+    <p:extLst>
+      <p:ext uri="{BB962C8B-B14F-4D97-AF65-F5344CB8AC3E}">
+        <p14:creationId xmlns:p14="http://schemas.microsoft.com/office/powerpoint/2010/main" val="1024086991"/>
+      </p:ext>
+    </p:extLst>
+  </p:cSld>
+  <p:clrMapOvr>
+    <a:masterClrMapping/>
+  </p:clrMapOvr>
+</p:notes>
+</file>
+
+<file path=ppt/notesSlides/notesSlide71.xml><?xml version="1.0" encoding="utf-8"?>
+<p:notes xmlns:a="http://schemas.openxmlformats.org/drawingml/2006/main" xmlns:r="http://schemas.openxmlformats.org/officeDocument/2006/relationships" xmlns:p="http://schemas.openxmlformats.org/presentationml/2006/main">
+  <p:cSld>
+    <p:spTree>
+      <p:nvGrpSpPr>
+        <p:cNvPr id="1" name=""/>
+        <p:cNvGrpSpPr/>
+        <p:nvPr/>
+      </p:nvGrpSpPr>
+      <p:grpSpPr>
+        <a:xfrm>
+          <a:off x="0" y="0"/>
+          <a:ext cx="0" cy="0"/>
+          <a:chOff x="0" y="0"/>
+          <a:chExt cx="0" cy="0"/>
+        </a:xfrm>
+      </p:grpSpPr>
+      <p:sp>
+        <p:nvSpPr>
+          <p:cNvPr id="2" name="Slide Image Placeholder 1"/>
+          <p:cNvSpPr>
+            <a:spLocks noGrp="1" noRot="1" noChangeAspect="1"/>
+          </p:cNvSpPr>
+          <p:nvPr>
+            <p:ph type="sldImg"/>
+          </p:nvPr>
+        </p:nvSpPr>
+        <p:spPr/>
+      </p:sp>
+      <p:sp>
+        <p:nvSpPr>
+          <p:cNvPr id="3" name="Notes Placeholder 2"/>
+          <p:cNvSpPr>
+            <a:spLocks noGrp="1"/>
+          </p:cNvSpPr>
+          <p:nvPr>
+            <p:ph type="body" idx="1"/>
+          </p:nvPr>
+        </p:nvSpPr>
+        <p:spPr/>
+        <p:txBody>
+          <a:bodyPr/>
+          <a:lstStyle/>
+          <a:p>
+            <a:r>
+              <a:rPr lang="en-US" dirty="0"/>
+              <a:t>The expected answer is: the outlier (45 bags) raises the mean to about 21.3, while the median (19) represents most farms. If you got it right, well done.</a:t>
+            </a:r>
+            <a:endParaRPr lang="en-US" dirty="0"/>
+          </a:p>
+        </p:txBody>
+      </p:sp>
+      <p:sp>
+        <p:nvSpPr>
+          <p:cNvPr id="4" name="Slide Number Placeholder 3"/>
+          <p:cNvSpPr>
+            <a:spLocks noGrp="1"/>
+          </p:cNvSpPr>
+          <p:nvPr>
+            <p:ph type="sldNum" sz="quarter" idx="10"/>
+          </p:nvPr>
+        </p:nvSpPr>
+        <p:spPr/>
+        <p:txBody>
+          <a:bodyPr/>
+          <a:lstStyle/>
+          <a:p>
+            <a:fld id="{F7021451-1387-4CA6-816F-3879F97B5CBC}" type="slidenum">
+              <a:rPr lang="en-US"/>
+              <a:t>71</a:t>
+            </a:fld>
+            <a:endParaRPr lang="en-US"/>
+          </a:p>
+        </p:txBody>
+      </p:sp>
+    </p:spTree>
+    <p:extLst>
+      <p:ext uri="{BB962C8B-B14F-4D97-AF65-F5344CB8AC3E}">
+        <p14:creationId xmlns:p14="http://schemas.microsoft.com/office/powerpoint/2010/main" val="1024086991"/>
+      </p:ext>
+    </p:extLst>
+  </p:cSld>
+  <p:clrMapOvr>
+    <a:masterClrMapping/>
+  </p:clrMapOvr>
+</p:notes>
+</file>
+
+<file path=ppt/notesSlides/notesSlide72.xml><?xml version="1.0" encoding="utf-8"?>
+<p:notes xmlns:a="http://schemas.openxmlformats.org/drawingml/2006/main" xmlns:r="http://schemas.openxmlformats.org/officeDocument/2006/relationships" xmlns:p="http://schemas.openxmlformats.org/presentationml/2006/main">
+  <p:cSld>
+    <p:spTree>
+      <p:nvGrpSpPr>
+        <p:cNvPr id="1" name=""/>
+        <p:cNvGrpSpPr/>
+        <p:nvPr/>
+      </p:nvGrpSpPr>
+      <p:grpSpPr>
+        <a:xfrm>
+          <a:off x="0" y="0"/>
+          <a:ext cx="0" cy="0"/>
+          <a:chOff x="0" y="0"/>
+          <a:chExt cx="0" cy="0"/>
+        </a:xfrm>
+      </p:grpSpPr>
+      <p:sp>
+        <p:nvSpPr>
+          <p:cNvPr id="2" name="Slide Image Placeholder 1"/>
+          <p:cNvSpPr>
+            <a:spLocks noGrp="1" noRot="1" noChangeAspect="1"/>
+          </p:cNvSpPr>
+          <p:nvPr>
+            <p:ph type="sldImg"/>
+          </p:nvPr>
+        </p:nvSpPr>
+        <p:spPr/>
+      </p:sp>
+      <p:sp>
+        <p:nvSpPr>
+          <p:cNvPr id="3" name="Notes Placeholder 2"/>
+          <p:cNvSpPr>
+            <a:spLocks noGrp="1"/>
+          </p:cNvSpPr>
+          <p:nvPr>
+            <p:ph type="body" idx="1"/>
+          </p:nvPr>
+        </p:nvSpPr>
+        <p:spPr/>
+        <p:txBody>
+          <a:bodyPr/>
+          <a:lstStyle/>
+          <a:p>
+            <a:r>
+              <a:rPr lang="en-US" dirty="0"/>
+              <a:t>For those who need more practice, fill in the blanks in your exercise book. The answers are: number 1, n; number 2, mode; number 3, Q1.</a:t>
+            </a:r>
+            <a:endParaRPr lang="en-US" dirty="0"/>
+          </a:p>
+        </p:txBody>
+      </p:sp>
+      <p:sp>
+        <p:nvSpPr>
+          <p:cNvPr id="4" name="Slide Number Placeholder 3"/>
+          <p:cNvSpPr>
+            <a:spLocks noGrp="1"/>
+          </p:cNvSpPr>
+          <p:nvPr>
+            <p:ph type="sldNum" sz="quarter" idx="10"/>
+          </p:nvPr>
+        </p:nvSpPr>
+        <p:spPr/>
+        <p:txBody>
+          <a:bodyPr/>
+          <a:lstStyle/>
+          <a:p>
+            <a:fld id="{F7021451-1387-4CA6-816F-3879F97B5CBC}" type="slidenum">
+              <a:rPr lang="en-US"/>
+              <a:t>72</a:t>
+            </a:fld>
+            <a:endParaRPr lang="en-US"/>
+          </a:p>
+        </p:txBody>
+      </p:sp>
+    </p:spTree>
+    <p:extLst>
+      <p:ext uri="{BB962C8B-B14F-4D97-AF65-F5344CB8AC3E}">
+        <p14:creationId xmlns:p14="http://schemas.microsoft.com/office/powerpoint/2010/main" val="1024086991"/>
+      </p:ext>
+    </p:extLst>
+  </p:cSld>
+  <p:clrMapOvr>
+    <a:masterClrMapping/>
+  </p:clrMapOvr>
+</p:notes>
+</file>
+
+<file path=ppt/notesSlides/notesSlide73.xml><?xml version="1.0" encoding="utf-8"?>
+<p:notes xmlns:a="http://schemas.openxmlformats.org/drawingml/2006/main" xmlns:r="http://schemas.openxmlformats.org/officeDocument/2006/relationships" xmlns:p="http://schemas.openxmlformats.org/presentationml/2006/main">
+  <p:cSld>
+    <p:spTree>
+      <p:nvGrpSpPr>
+        <p:cNvPr id="1" name=""/>
+        <p:cNvGrpSpPr/>
+        <p:nvPr/>
+      </p:nvGrpSpPr>
+      <p:grpSpPr>
+        <a:xfrm>
+          <a:off x="0" y="0"/>
+          <a:ext cx="0" cy="0"/>
+          <a:chOff x="0" y="0"/>
+          <a:chExt cx="0" cy="0"/>
+        </a:xfrm>
+      </p:grpSpPr>
+      <p:sp>
+        <p:nvSpPr>
+          <p:cNvPr id="2" name="Slide Image Placeholder 1"/>
+          <p:cNvSpPr>
+            <a:spLocks noGrp="1" noRot="1" noChangeAspect="1"/>
+          </p:cNvSpPr>
+          <p:nvPr>
+            <p:ph type="sldImg"/>
+          </p:nvPr>
+        </p:nvSpPr>
+        <p:spPr/>
+      </p:sp>
+      <p:sp>
+        <p:nvSpPr>
+          <p:cNvPr id="3" name="Notes Placeholder 2"/>
+          <p:cNvSpPr>
+            <a:spLocks noGrp="1"/>
+          </p:cNvSpPr>
+          <p:nvPr>
+            <p:ph type="body" idx="1"/>
+          </p:nvPr>
+        </p:nvSpPr>
+        <p:spPr/>
+        <p:txBody>
+          <a:bodyPr/>
+          <a:lstStyle/>
+          <a:p>
+            <a:r>
+              <a:rPr lang="en-US" dirty="0"/>
+              <a:t>For your homework: Calculate the mean of 3, 5, 7 and 9. We shall correct it at the beginning of our next lesson.</a:t>
+            </a:r>
+            <a:endParaRPr lang="en-US" dirty="0"/>
+          </a:p>
+        </p:txBody>
+      </p:sp>
+      <p:sp>
+        <p:nvSpPr>
+          <p:cNvPr id="4" name="Slide Number Placeholder 3"/>
+          <p:cNvSpPr>
+            <a:spLocks noGrp="1"/>
+          </p:cNvSpPr>
+          <p:nvPr>
+            <p:ph type="sldNum" sz="quarter" idx="10"/>
+          </p:nvPr>
+        </p:nvSpPr>
+        <p:spPr/>
+        <p:txBody>
+          <a:bodyPr/>
+          <a:lstStyle/>
+          <a:p>
+            <a:fld id="{F7021451-1387-4CA6-816F-3879F97B5CBC}" type="slidenum">
+              <a:rPr lang="en-US"/>
+              <a:t>73</a:t>
+            </a:fld>
+            <a:endParaRPr lang="en-US"/>
+          </a:p>
+        </p:txBody>
+      </p:sp>
+    </p:spTree>
+    <p:extLst>
+      <p:ext uri="{BB962C8B-B14F-4D97-AF65-F5344CB8AC3E}">
+        <p14:creationId xmlns:p14="http://schemas.microsoft.com/office/powerpoint/2010/main" val="1024086991"/>
+      </p:ext>
+    </p:extLst>
+  </p:cSld>
+  <p:clrMapOvr>
+    <a:masterClrMapping/>
+  </p:clrMapOvr>
+</p:notes>
+</file>
+
+<file path=ppt/notesSlides/notesSlide74.xml><?xml version="1.0" encoding="utf-8"?>
+<p:notes xmlns:a="http://schemas.openxmlformats.org/drawingml/2006/main" xmlns:r="http://schemas.openxmlformats.org/officeDocument/2006/relationships" xmlns:p="http://schemas.openxmlformats.org/presentationml/2006/main">
+  <p:cSld>
+    <p:spTree>
+      <p:nvGrpSpPr>
+        <p:cNvPr id="1" name=""/>
+        <p:cNvGrpSpPr/>
+        <p:nvPr/>
+      </p:nvGrpSpPr>
+      <p:grpSpPr>
+        <a:xfrm>
+          <a:off x="0" y="0"/>
+          <a:ext cx="0" cy="0"/>
+          <a:chOff x="0" y="0"/>
+          <a:chExt cx="0" cy="0"/>
+        </a:xfrm>
+      </p:grpSpPr>
+      <p:sp>
+        <p:nvSpPr>
+          <p:cNvPr id="2" name="Slide Image Placeholder 1"/>
+          <p:cNvSpPr>
+            <a:spLocks noGrp="1" noRot="1" noChangeAspect="1"/>
+          </p:cNvSpPr>
+          <p:nvPr>
+            <p:ph type="sldImg"/>
+          </p:nvPr>
+        </p:nvSpPr>
+        <p:spPr/>
+      </p:sp>
+      <p:sp>
+        <p:nvSpPr>
+          <p:cNvPr id="3" name="Notes Placeholder 2"/>
+          <p:cNvSpPr>
+            <a:spLocks noGrp="1"/>
+          </p:cNvSpPr>
+          <p:nvPr>
+            <p:ph type="body" idx="1"/>
+          </p:nvPr>
+        </p:nvSpPr>
+        <p:spPr/>
+        <p:txBody>
+          <a:bodyPr/>
+          <a:lstStyle/>
+          <a:p>
+            <a:r>
+              <a:rPr lang="en-US" dirty="0"/>
+              <a:t>Our next lesson will be on Quantitative Techniques 3 (Part 2): Measures of Dispersion: Variance, Standard Deviation and Coefficient of Variation. Thank you for your attention, and see you next time.</a:t>
+            </a:r>
+            <a:endParaRPr lang="en-US" dirty="0"/>
+          </a:p>
+        </p:txBody>
+      </p:sp>
+      <p:sp>
+        <p:nvSpPr>
+          <p:cNvPr id="4" name="Slide Number Placeholder 3"/>
+          <p:cNvSpPr>
+            <a:spLocks noGrp="1"/>
+          </p:cNvSpPr>
+          <p:nvPr>
+            <p:ph type="sldNum" sz="quarter" idx="10"/>
+          </p:nvPr>
+        </p:nvSpPr>
+        <p:spPr/>
+        <p:txBody>
+          <a:bodyPr/>
+          <a:lstStyle/>
+          <a:p>
+            <a:fld id="{F7021451-1387-4CA6-816F-3879F97B5CBC}" type="slidenum">
+              <a:rPr lang="en-US"/>
+              <a:t>74</a:t>
+            </a:fld>
+            <a:endParaRPr lang="en-US"/>
+          </a:p>
+        </p:txBody>
+      </p:sp>
+    </p:spTree>
+    <p:extLst>
+      <p:ext uri="{BB962C8B-B14F-4D97-AF65-F5344CB8AC3E}">
+        <p14:creationId xmlns:p14="http://schemas.microsoft.com/office/powerpoint/2010/main" val="1024086991"/>
+      </p:ext>
+    </p:extLst>
+  </p:cSld>
+  <p:clrMapOvr>
+    <a:masterClrMapping/>
+  </p:clrMapOvr>
+</p:notes>
+</file>
+
+<file path=ppt/notesSlides/notesSlide75.xml><?xml version="1.0" encoding="utf-8"?>
+<p:notes xmlns:a="http://schemas.openxmlformats.org/drawingml/2006/main" xmlns:r="http://schemas.openxmlformats.org/officeDocument/2006/relationships" xmlns:p="http://schemas.openxmlformats.org/presentationml/2006/main">
+  <p:cSld>
+    <p:spTree>
+      <p:nvGrpSpPr>
+        <p:cNvPr id="1" name=""/>
+        <p:cNvGrpSpPr/>
+        <p:nvPr/>
+      </p:nvGrpSpPr>
+      <p:grpSpPr>
+        <a:xfrm>
+          <a:off x="0" y="0"/>
+          <a:ext cx="0" cy="0"/>
+          <a:chOff x="0" y="0"/>
+          <a:chExt cx="0" cy="0"/>
+        </a:xfrm>
+      </p:grpSpPr>
+      <p:sp>
+        <p:nvSpPr>
+          <p:cNvPr id="2" name="Slide Image Placeholder 1"/>
+          <p:cNvSpPr>
+            <a:spLocks noGrp="1" noRot="1" noChangeAspect="1"/>
+          </p:cNvSpPr>
+          <p:nvPr>
+            <p:ph type="sldImg"/>
+          </p:nvPr>
+        </p:nvSpPr>
+        <p:spPr/>
+      </p:sp>
+      <p:sp>
+        <p:nvSpPr>
+          <p:cNvPr id="3" name="Notes Placeholder 2"/>
+          <p:cNvSpPr>
+            <a:spLocks noGrp="1"/>
+          </p:cNvSpPr>
+          <p:nvPr>
+            <p:ph type="body" idx="1"/>
+          </p:nvPr>
+        </p:nvSpPr>
+        <p:spPr/>
+        <p:txBody>
+          <a:bodyPr/>
+          <a:lstStyle/>
+          <a:p>
+            <a:r>
+              <a:rPr lang="en-US" dirty="0"/>
+              <a:t>Let us play the bilingual game. I say a word in English, and you give me the French word. Then we do the reverse.</a:t>
+            </a:r>
+            <a:endParaRPr lang="en-US" dirty="0"/>
+          </a:p>
+        </p:txBody>
+      </p:sp>
+      <p:sp>
+        <p:nvSpPr>
+          <p:cNvPr id="4" name="Slide Number Placeholder 3"/>
+          <p:cNvSpPr>
+            <a:spLocks noGrp="1"/>
+          </p:cNvSpPr>
+          <p:nvPr>
+            <p:ph type="sldNum" sz="quarter" idx="10"/>
+          </p:nvPr>
+        </p:nvSpPr>
+        <p:spPr/>
+        <p:txBody>
+          <a:bodyPr/>
+          <a:lstStyle/>
+          <a:p>
+            <a:fld id="{F7021451-1387-4CA6-816F-3879F97B5CBC}" type="slidenum">
+              <a:rPr lang="en-US"/>
+              <a:t>75</a:t>
+            </a:fld>
+            <a:endParaRPr lang="en-US"/>
+          </a:p>
+        </p:txBody>
+      </p:sp>
+    </p:spTree>
+    <p:extLst>
+      <p:ext uri="{BB962C8B-B14F-4D97-AF65-F5344CB8AC3E}">
+        <p14:creationId xmlns:p14="http://schemas.microsoft.com/office/powerpoint/2010/main" val="1024086991"/>
+      </p:ext>
+    </p:extLst>
+  </p:cSld>
+  <p:clrMapOvr>
+    <a:masterClrMapping/>
+  </p:clrMapOvr>
+</p:notes>
+</file>
+
+<file path=ppt/notesSlides/notesSlide76.xml><?xml version="1.0" encoding="utf-8"?>
+<p:notes xmlns:a="http://schemas.openxmlformats.org/drawingml/2006/main" xmlns:r="http://schemas.openxmlformats.org/officeDocument/2006/relationships" xmlns:p="http://schemas.openxmlformats.org/presentationml/2006/main">
+  <p:cSld>
+    <p:spTree>
+      <p:nvGrpSpPr>
+        <p:cNvPr id="1" name=""/>
+        <p:cNvGrpSpPr/>
+        <p:nvPr/>
+      </p:nvGrpSpPr>
+      <p:grpSpPr>
+        <a:xfrm>
+          <a:off x="0" y="0"/>
+          <a:ext cx="0" cy="0"/>
+          <a:chOff x="0" y="0"/>
+          <a:chExt cx="0" cy="0"/>
+        </a:xfrm>
+      </p:grpSpPr>
+      <p:sp>
+        <p:nvSpPr>
+          <p:cNvPr id="2" name="Slide Image Placeholder 1"/>
+          <p:cNvSpPr>
+            <a:spLocks noGrp="1" noRot="1" noChangeAspect="1"/>
+          </p:cNvSpPr>
+          <p:nvPr>
+            <p:ph type="sldImg"/>
+          </p:nvPr>
+        </p:nvSpPr>
+        <p:spPr/>
+      </p:sp>
+      <p:sp>
+        <p:nvSpPr>
+          <p:cNvPr id="3" name="Notes Placeholder 2"/>
+          <p:cNvSpPr>
+            <a:spLocks noGrp="1"/>
+          </p:cNvSpPr>
+          <p:nvPr>
+            <p:ph type="body" idx="1"/>
+          </p:nvPr>
+        </p:nvSpPr>
+        <p:spPr/>
+        <p:txBody>
+          <a:bodyPr/>
+          <a:lstStyle/>
+          <a:p>
+            <a:r>
+              <a:rPr lang="en-US" dirty="0"/>
+              <a:t>I record this information in the official logbook of the class after the lesson.</a:t>
+            </a:r>
+            <a:endParaRPr lang="en-US" dirty="0"/>
+          </a:p>
+        </p:txBody>
+      </p:sp>
+      <p:sp>
+        <p:nvSpPr>
+          <p:cNvPr id="4" name="Slide Number Placeholder 3"/>
+          <p:cNvSpPr>
+            <a:spLocks noGrp="1"/>
+          </p:cNvSpPr>
+          <p:nvPr>
+            <p:ph type="sldNum" sz="quarter" idx="10"/>
+          </p:nvPr>
+        </p:nvSpPr>
+        <p:spPr/>
+        <p:txBody>
+          <a:bodyPr/>
+          <a:lstStyle/>
+          <a:p>
+            <a:fld id="{F7021451-1387-4CA6-816F-3879F97B5CBC}" type="slidenum">
+              <a:rPr lang="en-US"/>
+              <a:t>76</a:t>
+            </a:fld>
+            <a:endParaRPr lang="en-US"/>
+          </a:p>
+        </p:txBody>
+      </p:sp>
+    </p:spTree>
+    <p:extLst>
+      <p:ext uri="{BB962C8B-B14F-4D97-AF65-F5344CB8AC3E}">
+        <p14:creationId xmlns:p14="http://schemas.microsoft.com/office/powerpoint/2010/main" val="1024086991"/>
+      </p:ext>
+    </p:extLst>
+  </p:cSld>
+  <p:clrMapOvr>
+    <a:masterClrMapping/>
+  </p:clrMapOvr>
+</p:notes>
+</file>
+
+<file path=ppt/notesSlides/notesSlide77.xml><?xml version="1.0" encoding="utf-8"?>
+<p:notes xmlns:a="http://schemas.openxmlformats.org/drawingml/2006/main" xmlns:r="http://schemas.openxmlformats.org/officeDocument/2006/relationships" xmlns:p="http://schemas.openxmlformats.org/presentationml/2006/main">
+  <p:cSld>
+    <p:spTree>
+      <p:nvGrpSpPr>
+        <p:cNvPr id="1" name=""/>
+        <p:cNvGrpSpPr/>
+        <p:nvPr/>
+      </p:nvGrpSpPr>
+      <p:grpSpPr>
+        <a:xfrm>
+          <a:off x="0" y="0"/>
+          <a:ext cx="0" cy="0"/>
+          <a:chOff x="0" y="0"/>
+          <a:chExt cx="0" cy="0"/>
+        </a:xfrm>
+      </p:grpSpPr>
+      <p:sp>
+        <p:nvSpPr>
+          <p:cNvPr id="2" name="Slide Image Placeholder 1"/>
+          <p:cNvSpPr>
+            <a:spLocks noGrp="1" noRot="1" noChangeAspect="1"/>
+          </p:cNvSpPr>
+          <p:nvPr>
+            <p:ph type="sldImg"/>
+          </p:nvPr>
+        </p:nvSpPr>
+        <p:spPr/>
+      </p:sp>
+      <p:sp>
+        <p:nvSpPr>
+          <p:cNvPr id="3" name="Notes Placeholder 2"/>
+          <p:cNvSpPr>
+            <a:spLocks noGrp="1"/>
+          </p:cNvSpPr>
+          <p:nvPr>
+            <p:ph type="body" idx="1"/>
+          </p:nvPr>
+        </p:nvSpPr>
+        <p:spPr/>
+        <p:txBody>
+          <a:bodyPr/>
+          <a:lstStyle/>
+          <a:p>
+            <a:r>
+              <a:rPr lang="en-US" dirty="0"/>
+              <a:t>I complete the second page of the logbook: the matter taught, the evaluation, the homework and the attendance.</a:t>
+            </a:r>
+            <a:endParaRPr lang="en-US" dirty="0"/>
+          </a:p>
+        </p:txBody>
+      </p:sp>
+      <p:sp>
+        <p:nvSpPr>
+          <p:cNvPr id="4" name="Slide Number Placeholder 3"/>
+          <p:cNvSpPr>
+            <a:spLocks noGrp="1"/>
+          </p:cNvSpPr>
+          <p:nvPr>
+            <p:ph type="sldNum" sz="quarter" idx="10"/>
+          </p:nvPr>
+        </p:nvSpPr>
+        <p:spPr/>
+        <p:txBody>
+          <a:bodyPr/>
+          <a:lstStyle/>
+          <a:p>
+            <a:fld id="{F7021451-1387-4CA6-816F-3879F97B5CBC}" type="slidenum">
+              <a:rPr lang="en-US"/>
+              <a:t>77</a:t>
+            </a:fld>
+            <a:endParaRPr lang="en-US"/>
+          </a:p>
+        </p:txBody>
+      </p:sp>
+    </p:spTree>
+    <p:extLst>
+      <p:ext uri="{BB962C8B-B14F-4D97-AF65-F5344CB8AC3E}">
+        <p14:creationId xmlns:p14="http://schemas.microsoft.com/office/powerpoint/2010/main" val="1024086991"/>
+      </p:ext>
+    </p:extLst>
+  </p:cSld>
+  <p:clrMapOvr>
+    <a:masterClrMapping/>
+  </p:clrMapOvr>
+</p:notes>
+</file>
+
+<file path=ppt/notesSlides/notesSlide78.xml><?xml version="1.0" encoding="utf-8"?>
+<p:notes xmlns:a="http://schemas.openxmlformats.org/drawingml/2006/main" xmlns:r="http://schemas.openxmlformats.org/officeDocument/2006/relationships" xmlns:p="http://schemas.openxmlformats.org/presentationml/2006/main">
+  <p:cSld>
+    <p:spTree>
+      <p:nvGrpSpPr>
+        <p:cNvPr id="1" name=""/>
+        <p:cNvGrpSpPr/>
+        <p:nvPr/>
+      </p:nvGrpSpPr>
+      <p:grpSpPr>
+        <a:xfrm>
+          <a:off x="0" y="0"/>
+          <a:ext cx="0" cy="0"/>
+          <a:chOff x="0" y="0"/>
+          <a:chExt cx="0" cy="0"/>
+        </a:xfrm>
+      </p:grpSpPr>
+      <p:sp>
+        <p:nvSpPr>
+          <p:cNvPr id="2" name="Slide Image Placeholder 1"/>
+          <p:cNvSpPr>
+            <a:spLocks noGrp="1" noRot="1" noChangeAspect="1"/>
+          </p:cNvSpPr>
+          <p:nvPr>
+            <p:ph type="sldImg"/>
+          </p:nvPr>
+        </p:nvSpPr>
+        <p:spPr/>
+      </p:sp>
+      <p:sp>
+        <p:nvSpPr>
+          <p:cNvPr id="3" name="Notes Placeholder 2"/>
+          <p:cNvSpPr>
+            <a:spLocks noGrp="1"/>
+          </p:cNvSpPr>
+          <p:nvPr>
+            <p:ph type="body" idx="1"/>
+          </p:nvPr>
+        </p:nvSpPr>
+        <p:spPr/>
+        <p:txBody>
+          <a:bodyPr/>
+          <a:lstStyle/>
+          <a:p>
+            <a:r>
+              <a:rPr lang="en-US" dirty="0"/>
+              <a:t>This slide is for me, the teacher: it gives the timing of the lesson and what to do if the projector is not available.</a:t>
+            </a:r>
+            <a:endParaRPr lang="en-US" dirty="0"/>
+          </a:p>
+        </p:txBody>
+      </p:sp>
+      <p:sp>
+        <p:nvSpPr>
+          <p:cNvPr id="4" name="Slide Number Placeholder 3"/>
+          <p:cNvSpPr>
+            <a:spLocks noGrp="1"/>
+          </p:cNvSpPr>
+          <p:nvPr>
+            <p:ph type="sldNum" sz="quarter" idx="10"/>
+          </p:nvPr>
+        </p:nvSpPr>
+        <p:spPr/>
+        <p:txBody>
+          <a:bodyPr/>
+          <a:lstStyle/>
+          <a:p>
+            <a:fld id="{F7021451-1387-4CA6-816F-3879F97B5CBC}" type="slidenum">
+              <a:rPr lang="en-US"/>
+              <a:t>78</a:t>
+            </a:fld>
+            <a:endParaRPr lang="en-US"/>
+          </a:p>
+        </p:txBody>
+      </p:sp>
+    </p:spTree>
+    <p:extLst>
+      <p:ext uri="{BB962C8B-B14F-4D97-AF65-F5344CB8AC3E}">
+        <p14:creationId xmlns:p14="http://schemas.microsoft.com/office/powerpoint/2010/main" val="1024086991"/>
+      </p:ext>
+    </p:extLst>
+  </p:cSld>
+  <p:clrMapOvr>
+    <a:masterClrMapping/>
+  </p:clrMapOvr>
+</p:notes>
+</file>
+
+<file path=ppt/notesSlides/notesSlide79.xml><?xml version="1.0" encoding="utf-8"?>
+<p:notes xmlns:a="http://schemas.openxmlformats.org/drawingml/2006/main" xmlns:r="http://schemas.openxmlformats.org/officeDocument/2006/relationships" xmlns:p="http://schemas.openxmlformats.org/presentationml/2006/main">
+  <p:cSld>
+    <p:spTree>
+      <p:nvGrpSpPr>
+        <p:cNvPr id="1" name=""/>
+        <p:cNvGrpSpPr/>
+        <p:nvPr/>
+      </p:nvGrpSpPr>
+      <p:grpSpPr>
+        <a:xfrm>
+          <a:off x="0" y="0"/>
+          <a:ext cx="0" cy="0"/>
+          <a:chOff x="0" y="0"/>
+          <a:chExt cx="0" cy="0"/>
+        </a:xfrm>
+      </p:grpSpPr>
+      <p:sp>
+        <p:nvSpPr>
+          <p:cNvPr id="2" name="Slide Image Placeholder 1"/>
+          <p:cNvSpPr>
+            <a:spLocks noGrp="1" noRot="1" noChangeAspect="1"/>
+          </p:cNvSpPr>
+          <p:nvPr>
+            <p:ph type="sldImg"/>
+          </p:nvPr>
+        </p:nvSpPr>
+        <p:spPr/>
+      </p:sp>
+      <p:sp>
+        <p:nvSpPr>
+          <p:cNvPr id="3" name="Notes Placeholder 2"/>
+          <p:cNvSpPr>
+            <a:spLocks noGrp="1"/>
+          </p:cNvSpPr>
+          <p:nvPr>
+            <p:ph type="body" idx="1"/>
+          </p:nvPr>
+        </p:nvSpPr>
+        <p:spPr/>
+        <p:txBody>
+          <a:bodyPr/>
+          <a:lstStyle/>
+          <a:p>
+            <a:r>
+              <a:rPr lang="en-US" dirty="0"/>
+              <a:t>These are the references and picture credits used to prepare this lesson.</a:t>
+            </a:r>
+            <a:endParaRPr lang="en-US" dirty="0"/>
+          </a:p>
+        </p:txBody>
+      </p:sp>
+      <p:sp>
+        <p:nvSpPr>
+          <p:cNvPr id="4" name="Slide Number Placeholder 3"/>
+          <p:cNvSpPr>
+            <a:spLocks noGrp="1"/>
+          </p:cNvSpPr>
+          <p:nvPr>
+            <p:ph type="sldNum" sz="quarter" idx="10"/>
+          </p:nvPr>
+        </p:nvSpPr>
+        <p:spPr/>
+        <p:txBody>
+          <a:bodyPr/>
+          <a:lstStyle/>
+          <a:p>
+            <a:fld id="{F7021451-1387-4CA6-816F-3879F97B5CBC}" type="slidenum">
+              <a:rPr lang="en-US"/>
+              <a:t>79</a:t>
             </a:fld>
             <a:endParaRPr lang="en-US"/>
           </a:p>
@@ -15933,7 +17001,7 @@
                 <a:ea typeface="Times New Roman" pitchFamily="34" charset="-122"/>
                 <a:cs typeface="Times New Roman" pitchFamily="34" charset="-120"/>
               </a:rPr>
-              <a:t>A) The Mean</a:t>
+              <a:t>A) The Mean: Calculation</a:t>
             </a:r>
             <a:endParaRPr lang="en-US" sz="3000" dirty="0"/>
           </a:p>
@@ -15967,7 +17035,7 @@
               <a:buNone/>
             </a:pPr>
             <a:r>
-              <a:rPr lang="en-US" sz="3000" i="1" dirty="0">
+              <a:rPr lang="en-US" sz="3600" i="1" dirty="0">
                 <a:solidFill>
                   <a:srgbClr val="111111"/>
                 </a:solidFill>
@@ -15975,9 +17043,9 @@
                 <a:ea typeface="Times New Roman" pitchFamily="34" charset="-122"/>
                 <a:cs typeface="Times New Roman" pitchFamily="34" charset="-120"/>
               </a:rPr>
-              <a:t>The mean is calculated and assessed as follows:</a:t>
-            </a:r>
-            <a:endParaRPr lang="en-US" sz="3000" dirty="0"/>
+              <a:t>The mean is calculated as follows:</a:t>
+            </a:r>
+            <a:endParaRPr lang="en-US" sz="3600" dirty="0"/>
           </a:p>
           <a:p>
             <a:pPr algn="l" indent="0" marL="0">
@@ -15987,7 +17055,7 @@
               <a:buNone/>
             </a:pPr>
             <a:r>
-              <a:rPr lang="en-US" sz="3000" b="1" dirty="0">
+              <a:rPr lang="en-US" sz="3600" b="1" dirty="0">
                 <a:solidFill>
                   <a:srgbClr val="111111"/>
                 </a:solidFill>
@@ -15995,7 +17063,7 @@
                 <a:ea typeface="Times New Roman" pitchFamily="34" charset="-122"/>
                 <a:cs typeface="Times New Roman" pitchFamily="34" charset="-120"/>
               </a:rPr>
-              <a:t>Formula and example: </a:t>
+              <a:t>Formula: </a:t>
             </a:r>
             <a:pPr algn="l" indent="0" marL="0">
               <a:spcAft>
@@ -16004,7 +17072,7 @@
               <a:buNone/>
             </a:pPr>
             <a:r>
-              <a:rPr lang="en-US" sz="3000" dirty="0">
+              <a:rPr lang="en-US" sz="3600" dirty="0">
                 <a:solidFill>
                   <a:srgbClr val="111111"/>
                 </a:solidFill>
@@ -16012,9 +17080,9 @@
                 <a:ea typeface="Times New Roman" pitchFamily="34" charset="-122"/>
                 <a:cs typeface="Times New Roman" pitchFamily="34" charset="-120"/>
               </a:rPr>
-              <a:t>Mean (x̄) = Σx ÷ n, where Σx is the sum of the values and n the number of values. For the services of 10 villages (3, 10, 6, 8, 4, 5, 7, 18, 2, 1), the mean is 64 ÷ 10 = 6.4 services.</a:t>
-            </a:r>
-            <a:endParaRPr lang="en-US" sz="3000" dirty="0"/>
+              <a:t>Mean (x̄) = Σx ÷ n, where Σx is the sum of the values and n the number of values. The mean is the average of all the values.</a:t>
+            </a:r>
+            <a:endParaRPr lang="en-US" sz="3600" dirty="0"/>
           </a:p>
         </p:txBody>
       </p:sp>
@@ -16530,7 +17598,7 @@
                 <a:ea typeface="Times New Roman" pitchFamily="34" charset="-122"/>
                 <a:cs typeface="Times New Roman" pitchFamily="34" charset="-120"/>
               </a:rPr>
-              <a:t>A) The Mean</a:t>
+              <a:t>A) The Mean: Calculation</a:t>
             </a:r>
             <a:endParaRPr lang="en-US" sz="3200" dirty="0"/>
           </a:p>
@@ -16572,7 +17640,7 @@
                 <a:ea typeface="Times New Roman" pitchFamily="34" charset="-122"/>
                 <a:cs typeface="Times New Roman" pitchFamily="34" charset="-120"/>
               </a:rPr>
-              <a:t>Example of station A: </a:t>
+              <a:t>Example of the villages: </a:t>
             </a:r>
             <a:pPr algn="l" indent="0" marL="0">
               <a:spcAft>
@@ -16589,7 +17657,7 @@
                 <a:ea typeface="Times New Roman" pitchFamily="34" charset="-122"/>
                 <a:cs typeface="Times New Roman" pitchFamily="34" charset="-120"/>
               </a:rPr>
-              <a:t>The twelve monthly temperatures of station A add up to Σx = 322. The mean temperature is therefore 322 ÷ 12 ≈ 26.8 °C.</a:t>
+              <a:t>The services of 10 villages are 3, 10, 6, 8, 4, 5, 7, 18, 2 and 1, which add up to 64. The mean is therefore 64 ÷ 10 = 6.4 services.</a:t>
             </a:r>
             <a:endParaRPr lang="en-US" sz="4000" dirty="0"/>
           </a:p>
@@ -16805,7 +17873,7 @@
                 <a:ea typeface="Times New Roman" pitchFamily="34" charset="-122"/>
                 <a:cs typeface="Times New Roman" pitchFamily="34" charset="-120"/>
               </a:rPr>
-              <a:t>A) The Mean</a:t>
+              <a:t>A) The Mean: Calculation</a:t>
             </a:r>
             <a:endParaRPr lang="en-US" sz="3200" dirty="0"/>
           </a:p>
@@ -16847,7 +17915,7 @@
                 <a:ea typeface="Times New Roman" pitchFamily="34" charset="-122"/>
                 <a:cs typeface="Times New Roman" pitchFamily="34" charset="-120"/>
               </a:rPr>
-              <a:t>Advantages: </a:t>
+              <a:t>Example of station A: </a:t>
             </a:r>
             <a:pPr algn="l" indent="0" marL="0">
               <a:spcAft>
@@ -16864,7 +17932,7 @@
                 <a:ea typeface="Times New Roman" pitchFamily="34" charset="-122"/>
                 <a:cs typeface="Times New Roman" pitchFamily="34" charset="-120"/>
               </a:rPr>
-              <a:t>The mean is familiar, easy to understand and uses every value of the set. It is also needed to calculate the standard deviation.</a:t>
+              <a:t>The twelve monthly temperatures of station A add up to Σx = 322. The mean temperature is therefore 322 ÷ 12 ≈ 26.8 °C.</a:t>
             </a:r>
             <a:endParaRPr lang="en-US" sz="4000" dirty="0"/>
           </a:p>
@@ -16999,7 +18067,7 @@
         <p:spPr>
           <a:xfrm>
             <a:off x="0" y="658368"/>
-            <a:ext cx="3840480" cy="5833872"/>
+            <a:ext cx="1463040" cy="5833872"/>
           </a:xfrm>
           <a:prstGeom prst="rect">
             <a:avLst/>
@@ -17014,8 +18082,8 @@
         </p:nvSpPr>
         <p:spPr>
           <a:xfrm>
-            <a:off x="4069080" y="1005840"/>
-            <a:ext cx="7802575" cy="731520"/>
+            <a:off x="1691640" y="1005840"/>
+            <a:ext cx="10180015" cy="731520"/>
           </a:xfrm>
           <a:prstGeom prst="rect">
             <a:avLst/>
@@ -17055,8 +18123,8 @@
         </p:nvSpPr>
         <p:spPr>
           <a:xfrm>
-            <a:off x="4069080" y="1737360"/>
-            <a:ext cx="7802575" cy="457200"/>
+            <a:off x="1691640" y="1737360"/>
+            <a:ext cx="10180015" cy="457200"/>
           </a:xfrm>
           <a:prstGeom prst="rect">
             <a:avLst/>
@@ -17080,7 +18148,7 @@
                 <a:ea typeface="Times New Roman" pitchFamily="34" charset="-122"/>
                 <a:cs typeface="Times New Roman" pitchFamily="34" charset="-120"/>
               </a:rPr>
-              <a:t>A) The Mean</a:t>
+              <a:t>B) The Mean: Advantages and Disadvantages</a:t>
             </a:r>
             <a:endParaRPr lang="en-US" sz="3200" dirty="0"/>
           </a:p>
@@ -17094,8 +18162,8 @@
         </p:nvSpPr>
         <p:spPr>
           <a:xfrm>
-            <a:off x="4069080" y="2240280"/>
-            <a:ext cx="7802575" cy="4206240"/>
+            <a:off x="1691640" y="2240280"/>
+            <a:ext cx="10180015" cy="4206240"/>
           </a:xfrm>
           <a:prstGeom prst="rect">
             <a:avLst/>
@@ -17114,7 +18182,7 @@
               <a:buNone/>
             </a:pPr>
             <a:r>
-              <a:rPr lang="en-US" sz="4000" b="1" dirty="0">
+              <a:rPr lang="en-US" sz="4000" i="1" dirty="0">
                 <a:solidFill>
                   <a:srgbClr val="111111"/>
                 </a:solidFill>
@@ -17122,8 +18190,11 @@
                 <a:ea typeface="Times New Roman" pitchFamily="34" charset="-122"/>
                 <a:cs typeface="Times New Roman" pitchFamily="34" charset="-120"/>
               </a:rPr>
-              <a:t>Disadvantages: </a:t>
-            </a:r>
+              <a:t>The mean has the following advantages and disadvantages:</a:t>
+            </a:r>
+            <a:endParaRPr lang="en-US" sz="4000" dirty="0"/>
+          </a:p>
+          <a:p>
             <a:pPr algn="l" indent="0" marL="0">
               <a:spcAft>
                 <a:spcPts val="800"/>
@@ -17131,7 +18202,7 @@
               <a:buNone/>
             </a:pPr>
             <a:r>
-              <a:rPr lang="en-US" sz="4000" dirty="0">
+              <a:rPr lang="en-US" sz="4000" b="1" dirty="0">
                 <a:solidFill>
                   <a:srgbClr val="111111"/>
                 </a:solidFill>
@@ -17139,7 +18210,24 @@
                 <a:ea typeface="Times New Roman" pitchFamily="34" charset="-122"/>
                 <a:cs typeface="Times New Roman" pitchFamily="34" charset="-120"/>
               </a:rPr>
-              <a:t>It is distorted by outliers: for 3, 4, 5, 6 and 45 bags, the mean of 12.6 bags does not represent most farms. It may also not be an actual value and cannot be used for categories.</a:t>
+              <a:t>It uses every value: </a:t>
+            </a:r>
+            <a:pPr algn="l" indent="0" marL="0">
+              <a:spcAft>
+                <a:spcPts val="800"/>
+              </a:spcAft>
+              <a:buNone/>
+            </a:pPr>
+            <a:r>
+              <a:rPr lang="en-US" sz="4000" dirty="0">
+                <a:solidFill>
+                  <a:srgbClr val="111111"/>
+                </a:solidFill>
+                <a:latin typeface="Times New Roman" pitchFamily="34" charset="0"/>
+                <a:ea typeface="Times New Roman" pitchFamily="34" charset="-122"/>
+                <a:cs typeface="Times New Roman" pitchFamily="34" charset="-120"/>
+              </a:rPr>
+              <a:t>The mean is familiar and easy to understand, and every value of the set is included in it. It is therefore a complete summary of the data.</a:t>
             </a:r>
             <a:endParaRPr lang="en-US" sz="4000" dirty="0"/>
           </a:p>
@@ -17257,170 +18345,9 @@
           </a:p>
         </p:txBody>
       </p:sp>
-      <p:sp>
-        <p:nvSpPr>
-          <p:cNvPr id="3" name="Text 1"/>
-          <p:cNvSpPr/>
-          <p:nvPr/>
-        </p:nvSpPr>
-        <p:spPr>
-          <a:xfrm>
-            <a:off x="365760" y="1005840"/>
-            <a:ext cx="11460175" cy="731520"/>
-          </a:xfrm>
-          <a:prstGeom prst="rect">
-            <a:avLst/>
-          </a:prstGeom>
-          <a:noFill/>
-          <a:ln/>
-        </p:spPr>
-        <p:txBody>
-          <a:bodyPr wrap="square" lIns="0" tIns="0" rIns="0" bIns="0" rtlCol="0" anchor="ctr">
-            <a:normAutofit/>
-          </a:bodyPr>
-          <a:lstStyle/>
-          <a:p>
-            <a:pPr algn="ctr" indent="0" marL="0">
-              <a:buNone/>
-            </a:pPr>
-            <a:r>
-              <a:rPr lang="en-US" sz="3600" b="1" dirty="0">
-                <a:solidFill>
-                  <a:srgbClr val="990011"/>
-                </a:solidFill>
-                <a:latin typeface="Times New Roman" pitchFamily="34" charset="0"/>
-                <a:ea typeface="Times New Roman" pitchFamily="34" charset="-122"/>
-                <a:cs typeface="Times New Roman" pitchFamily="34" charset="-120"/>
-              </a:rPr>
-              <a:t>1. Measures of Central Tendency</a:t>
-            </a:r>
-            <a:endParaRPr lang="en-US" sz="3600" dirty="0"/>
-          </a:p>
-        </p:txBody>
-      </p:sp>
-      <p:sp>
-        <p:nvSpPr>
-          <p:cNvPr id="4" name="Text 2"/>
-          <p:cNvSpPr/>
-          <p:nvPr/>
-        </p:nvSpPr>
-        <p:spPr>
-          <a:xfrm>
-            <a:off x="365760" y="1737360"/>
-            <a:ext cx="6035040" cy="457200"/>
-          </a:xfrm>
-          <a:prstGeom prst="rect">
-            <a:avLst/>
-          </a:prstGeom>
-          <a:noFill/>
-          <a:ln/>
-        </p:spPr>
-        <p:txBody>
-          <a:bodyPr wrap="square" lIns="0" tIns="0" rIns="0" bIns="0" rtlCol="0" anchor="ctr">
-            <a:normAutofit/>
-          </a:bodyPr>
-          <a:lstStyle/>
-          <a:p>
-            <a:pPr algn="l" indent="0" marL="0">
-              <a:buNone/>
-            </a:pPr>
-            <a:r>
-              <a:rPr lang="en-US" sz="3000" b="1" dirty="0">
-                <a:solidFill>
-                  <a:srgbClr val="990011"/>
-                </a:solidFill>
-                <a:latin typeface="Times New Roman" pitchFamily="34" charset="0"/>
-                <a:ea typeface="Times New Roman" pitchFamily="34" charset="-122"/>
-                <a:cs typeface="Times New Roman" pitchFamily="34" charset="-120"/>
-              </a:rPr>
-              <a:t>B) The Median</a:t>
-            </a:r>
-            <a:endParaRPr lang="en-US" sz="3000" dirty="0"/>
-          </a:p>
-        </p:txBody>
-      </p:sp>
-      <p:sp>
-        <p:nvSpPr>
-          <p:cNvPr id="5" name="Text 3"/>
-          <p:cNvSpPr/>
-          <p:nvPr/>
-        </p:nvSpPr>
-        <p:spPr>
-          <a:xfrm>
-            <a:off x="365760" y="2240280"/>
-            <a:ext cx="6035040" cy="4160520"/>
-          </a:xfrm>
-          <a:prstGeom prst="rect">
-            <a:avLst/>
-          </a:prstGeom>
-          <a:noFill/>
-          <a:ln/>
-        </p:spPr>
-        <p:txBody>
-          <a:bodyPr wrap="square" lIns="0" tIns="0" rIns="0" bIns="0" rtlCol="0" anchor="t"/>
-          <a:lstStyle/>
-          <a:p>
-            <a:pPr algn="l" indent="0" marL="0">
-              <a:spcAft>
-                <a:spcPts val="800"/>
-              </a:spcAft>
-              <a:buNone/>
-            </a:pPr>
-            <a:r>
-              <a:rPr lang="en-US" sz="3600" i="1" dirty="0">
-                <a:solidFill>
-                  <a:srgbClr val="111111"/>
-                </a:solidFill>
-                <a:latin typeface="Times New Roman" pitchFamily="34" charset="0"/>
-                <a:ea typeface="Times New Roman" pitchFamily="34" charset="-122"/>
-                <a:cs typeface="Times New Roman" pitchFamily="34" charset="-120"/>
-              </a:rPr>
-              <a:t>The median is found and assessed as follows:</a:t>
-            </a:r>
-            <a:endParaRPr lang="en-US" sz="3600" dirty="0"/>
-          </a:p>
-          <a:p>
-            <a:pPr algn="l" indent="0" marL="0">
-              <a:spcAft>
-                <a:spcPts val="800"/>
-              </a:spcAft>
-              <a:buNone/>
-            </a:pPr>
-            <a:r>
-              <a:rPr lang="en-US" sz="3600" b="1" dirty="0">
-                <a:solidFill>
-                  <a:srgbClr val="111111"/>
-                </a:solidFill>
-                <a:latin typeface="Times New Roman" pitchFamily="34" charset="0"/>
-                <a:ea typeface="Times New Roman" pitchFamily="34" charset="-122"/>
-                <a:cs typeface="Times New Roman" pitchFamily="34" charset="-120"/>
-              </a:rPr>
-              <a:t>Method: </a:t>
-            </a:r>
-            <a:pPr algn="l" indent="0" marL="0">
-              <a:spcAft>
-                <a:spcPts val="800"/>
-              </a:spcAft>
-              <a:buNone/>
-            </a:pPr>
-            <a:r>
-              <a:rPr lang="en-US" sz="3600" dirty="0">
-                <a:solidFill>
-                  <a:srgbClr val="111111"/>
-                </a:solidFill>
-                <a:latin typeface="Times New Roman" pitchFamily="34" charset="0"/>
-                <a:ea typeface="Times New Roman" pitchFamily="34" charset="-122"/>
-                <a:cs typeface="Times New Roman" pitchFamily="34" charset="-120"/>
-              </a:rPr>
-              <a:t>Put the values in order, then take the value in position (n + 1) ÷ 2. The median is the middle value of the set.</a:t>
-            </a:r>
-            <a:endParaRPr lang="en-US" sz="3600" dirty="0"/>
-          </a:p>
-        </p:txBody>
-      </p:sp>
       <p:pic>
         <p:nvPicPr>
-          <p:cNvPr id="6" name="Image 0" descr="/home/claude/f4/img/v2/stat2_median.png">    </p:cNvPr>
+          <p:cNvPr id="3" name="Image 0" descr="/home/claude/f4/img/minesec_sheet.png">    </p:cNvPr>
           <p:cNvPicPr>
             <a:picLocks noChangeAspect="1"/>
           </p:cNvPicPr>
@@ -17434,8 +18361,8 @@
         </p:blipFill>
         <p:spPr>
           <a:xfrm>
-            <a:off x="6537960" y="2849678"/>
-            <a:ext cx="5470855" cy="2137053"/>
+            <a:off x="0" y="658368"/>
+            <a:ext cx="3840480" cy="5833872"/>
           </a:xfrm>
           <a:prstGeom prst="rect">
             <a:avLst/>
@@ -17444,14 +18371,14 @@
       </p:pic>
       <p:sp>
         <p:nvSpPr>
-          <p:cNvPr id="7" name="Text 4"/>
+          <p:cNvPr id="4" name="Text 1"/>
           <p:cNvSpPr/>
           <p:nvPr/>
         </p:nvSpPr>
         <p:spPr>
           <a:xfrm>
-            <a:off x="6537960" y="6089904"/>
-            <a:ext cx="5470855" cy="347472"/>
+            <a:off x="4069080" y="1005840"/>
+            <a:ext cx="7802575" cy="731520"/>
           </a:xfrm>
           <a:prstGeom prst="rect">
             <a:avLst/>
@@ -17460,24 +18387,124 @@
           <a:ln/>
         </p:spPr>
         <p:txBody>
-          <a:bodyPr wrap="square" lIns="0" tIns="0" rIns="0" bIns="0" rtlCol="0" anchor="ctr"/>
+          <a:bodyPr wrap="square" lIns="0" tIns="0" rIns="0" bIns="0" rtlCol="0" anchor="ctr">
+            <a:normAutofit/>
+          </a:bodyPr>
           <a:lstStyle/>
           <a:p>
             <a:pPr algn="ctr" indent="0" marL="0">
               <a:buNone/>
             </a:pPr>
             <a:r>
-              <a:rPr lang="en-US" sz="1600" i="1" dirty="0">
-                <a:solidFill>
-                  <a:srgbClr val="555555"/>
+              <a:rPr lang="en-US" sz="3600" b="1" dirty="0">
+                <a:solidFill>
+                  <a:srgbClr val="990011"/>
                 </a:solidFill>
                 <a:latin typeface="Times New Roman" pitchFamily="34" charset="0"/>
                 <a:ea typeface="Times New Roman" pitchFamily="34" charset="-122"/>
                 <a:cs typeface="Times New Roman" pitchFamily="34" charset="-120"/>
               </a:rPr>
-              <a:t>Illustration: the median</a:t>
-            </a:r>
-            <a:endParaRPr lang="en-US" sz="1600" dirty="0"/>
+              <a:t>1. Measures of Central Tendency</a:t>
+            </a:r>
+            <a:endParaRPr lang="en-US" sz="3600" dirty="0"/>
+          </a:p>
+        </p:txBody>
+      </p:sp>
+      <p:sp>
+        <p:nvSpPr>
+          <p:cNvPr id="5" name="Text 2"/>
+          <p:cNvSpPr/>
+          <p:nvPr/>
+        </p:nvSpPr>
+        <p:spPr>
+          <a:xfrm>
+            <a:off x="4069080" y="1737360"/>
+            <a:ext cx="7802575" cy="457200"/>
+          </a:xfrm>
+          <a:prstGeom prst="rect">
+            <a:avLst/>
+          </a:prstGeom>
+          <a:noFill/>
+          <a:ln/>
+        </p:spPr>
+        <p:txBody>
+          <a:bodyPr wrap="square" lIns="0" tIns="0" rIns="0" bIns="0" rtlCol="0" anchor="ctr"/>
+          <a:lstStyle/>
+          <a:p>
+            <a:pPr algn="l" indent="0" marL="0">
+              <a:buNone/>
+            </a:pPr>
+            <a:r>
+              <a:rPr lang="en-US" sz="2900" b="1" dirty="0">
+                <a:solidFill>
+                  <a:srgbClr val="990011"/>
+                </a:solidFill>
+                <a:latin typeface="Times New Roman" pitchFamily="34" charset="0"/>
+                <a:ea typeface="Times New Roman" pitchFamily="34" charset="-122"/>
+                <a:cs typeface="Times New Roman" pitchFamily="34" charset="-120"/>
+              </a:rPr>
+              <a:t>B) The Mean: Advantages and Disadvantages</a:t>
+            </a:r>
+            <a:endParaRPr lang="en-US" sz="2900" dirty="0"/>
+          </a:p>
+        </p:txBody>
+      </p:sp>
+      <p:sp>
+        <p:nvSpPr>
+          <p:cNvPr id="6" name="Text 3"/>
+          <p:cNvSpPr/>
+          <p:nvPr/>
+        </p:nvSpPr>
+        <p:spPr>
+          <a:xfrm>
+            <a:off x="4069080" y="2240280"/>
+            <a:ext cx="7802575" cy="4206240"/>
+          </a:xfrm>
+          <a:prstGeom prst="rect">
+            <a:avLst/>
+          </a:prstGeom>
+          <a:noFill/>
+          <a:ln/>
+        </p:spPr>
+        <p:txBody>
+          <a:bodyPr wrap="square" lIns="0" tIns="0" rIns="0" bIns="0" rtlCol="0" anchor="t"/>
+          <a:lstStyle/>
+          <a:p>
+            <a:pPr algn="l" indent="0" marL="0">
+              <a:spcAft>
+                <a:spcPts val="800"/>
+              </a:spcAft>
+              <a:buNone/>
+            </a:pPr>
+            <a:r>
+              <a:rPr lang="en-US" sz="4000" b="1" dirty="0">
+                <a:solidFill>
+                  <a:srgbClr val="111111"/>
+                </a:solidFill>
+                <a:latin typeface="Times New Roman" pitchFamily="34" charset="0"/>
+                <a:ea typeface="Times New Roman" pitchFamily="34" charset="-122"/>
+                <a:cs typeface="Times New Roman" pitchFamily="34" charset="-120"/>
+              </a:rPr>
+              <a:t>It is needed for other measures: </a:t>
+            </a:r>
+            <a:pPr algn="l" indent="0" marL="0">
+              <a:spcAft>
+                <a:spcPts val="800"/>
+              </a:spcAft>
+              <a:buNone/>
+            </a:pPr>
+            <a:r>
+              <a:rPr lang="en-US" sz="4000" dirty="0">
+                <a:solidFill>
+                  <a:srgbClr val="111111"/>
+                </a:solidFill>
+                <a:latin typeface="Times New Roman" pitchFamily="34" charset="0"/>
+                <a:ea typeface="Times New Roman" pitchFamily="34" charset="-122"/>
+                <a:cs typeface="Times New Roman" pitchFamily="34" charset="-120"/>
+              </a:rPr>
+              <a:t>The mean is used to calculate the variance and the standard deviation. Without it, dispersion cannot be measured precisely.</a:t>
+            </a:r>
+            <a:endParaRPr lang="en-US" sz="4000" dirty="0"/>
           </a:p>
         </p:txBody>
       </p:sp>
@@ -17610,7 +18637,7 @@
         <p:spPr>
           <a:xfrm>
             <a:off x="0" y="658368"/>
-            <a:ext cx="2468880" cy="5833872"/>
+            <a:ext cx="3840480" cy="5833872"/>
           </a:xfrm>
           <a:prstGeom prst="rect">
             <a:avLst/>
@@ -17625,8 +18652,8 @@
         </p:nvSpPr>
         <p:spPr>
           <a:xfrm>
-            <a:off x="2697480" y="1005840"/>
-            <a:ext cx="9174175" cy="731520"/>
+            <a:off x="4069080" y="1005840"/>
+            <a:ext cx="7802575" cy="731520"/>
           </a:xfrm>
           <a:prstGeom prst="rect">
             <a:avLst/>
@@ -17666,8 +18693,8 @@
         </p:nvSpPr>
         <p:spPr>
           <a:xfrm>
-            <a:off x="2697480" y="1737360"/>
-            <a:ext cx="9174175" cy="457200"/>
+            <a:off x="4069080" y="1737360"/>
+            <a:ext cx="7802575" cy="457200"/>
           </a:xfrm>
           <a:prstGeom prst="rect">
             <a:avLst/>
@@ -17683,7 +18710,7 @@
               <a:buNone/>
             </a:pPr>
             <a:r>
-              <a:rPr lang="en-US" sz="3200" b="1" dirty="0">
+              <a:rPr lang="en-US" sz="2900" b="1" dirty="0">
                 <a:solidFill>
                   <a:srgbClr val="990011"/>
                 </a:solidFill>
@@ -17691,9 +18718,9 @@
                 <a:ea typeface="Times New Roman" pitchFamily="34" charset="-122"/>
                 <a:cs typeface="Times New Roman" pitchFamily="34" charset="-120"/>
               </a:rPr>
-              <a:t>B) The Median</a:t>
-            </a:r>
-            <a:endParaRPr lang="en-US" sz="3200" dirty="0"/>
+              <a:t>B) The Mean: Advantages and Disadvantages</a:t>
+            </a:r>
+            <a:endParaRPr lang="en-US" sz="2900" dirty="0"/>
           </a:p>
         </p:txBody>
       </p:sp>
@@ -17705,8 +18732,8 @@
         </p:nvSpPr>
         <p:spPr>
           <a:xfrm>
-            <a:off x="2697480" y="2240280"/>
-            <a:ext cx="9174175" cy="4206240"/>
+            <a:off x="4069080" y="2240280"/>
+            <a:ext cx="7802575" cy="4206240"/>
           </a:xfrm>
           <a:prstGeom prst="rect">
             <a:avLst/>
@@ -17733,7 +18760,7 @@
                 <a:ea typeface="Times New Roman" pitchFamily="34" charset="-122"/>
                 <a:cs typeface="Times New Roman" pitchFamily="34" charset="-120"/>
               </a:rPr>
-              <a:t>Odd and even numbers of values: </a:t>
+              <a:t>It is distorted by outliers: </a:t>
             </a:r>
             <a:pPr algn="l" indent="0" marL="0">
               <a:spcAft>
@@ -17750,7 +18777,7 @@
                 <a:ea typeface="Times New Roman" pitchFamily="34" charset="-122"/>
                 <a:cs typeface="Times New Roman" pitchFamily="34" charset="-120"/>
               </a:rPr>
-              <a:t>For 3, 4, 5, 6, 8, 8, 10, the position is (7 + 1) ÷ 2 = 4th, so the median is 6. For 2, 3, 4, 5, 6, 7, 9, 12, the median is the mean of the 4th and 5th values, (5 + 6) ÷ 2 = 5.5.</a:t>
+              <a:t>One extreme value can pull the mean far from most values. For 3, 4, 5, 6 and 45 bags, the mean of 12.6 bags does not represent most farms.</a:t>
             </a:r>
             <a:endParaRPr lang="en-US" sz="4000" dirty="0"/>
           </a:p>
@@ -17958,7 +18985,7 @@
               <a:buNone/>
             </a:pPr>
             <a:r>
-              <a:rPr lang="en-US" sz="3200" b="1" dirty="0">
+              <a:rPr lang="en-US" sz="2900" b="1" dirty="0">
                 <a:solidFill>
                   <a:srgbClr val="990011"/>
                 </a:solidFill>
@@ -17966,9 +18993,9 @@
                 <a:ea typeface="Times New Roman" pitchFamily="34" charset="-122"/>
                 <a:cs typeface="Times New Roman" pitchFamily="34" charset="-120"/>
               </a:rPr>
-              <a:t>B) The Median</a:t>
-            </a:r>
-            <a:endParaRPr lang="en-US" sz="3200" dirty="0"/>
+              <a:t>B) The Mean: Advantages and Disadvantages</a:t>
+            </a:r>
+            <a:endParaRPr lang="en-US" sz="2900" dirty="0"/>
           </a:p>
         </p:txBody>
       </p:sp>
@@ -18008,7 +19035,7 @@
                 <a:ea typeface="Times New Roman" pitchFamily="34" charset="-122"/>
                 <a:cs typeface="Times New Roman" pitchFamily="34" charset="-120"/>
               </a:rPr>
-              <a:t>Example of Ndu (1963 to 1972): </a:t>
+              <a:t>It may not be a real value: </a:t>
             </a:r>
             <a:pPr algn="l" indent="0" marL="0">
               <a:spcAft>
@@ -18025,7 +19052,7 @@
                 <a:ea typeface="Times New Roman" pitchFamily="34" charset="-122"/>
                 <a:cs typeface="Times New Roman" pitchFamily="34" charset="-120"/>
               </a:rPr>
-              <a:t>The annual rainfalls of the ten years are put in order. The 5th and 6th values are 1,942 and 1,904 mm, so the median is 1,923 mm.</a:t>
+              <a:t>The mean is often a value that does not exist in the set, such as 6.4 services. It also cannot be used for categories such as soil types.</a:t>
             </a:r>
             <a:endParaRPr lang="en-US" sz="4000" dirty="0"/>
           </a:p>
@@ -18143,9 +19170,170 @@
           </a:p>
         </p:txBody>
       </p:sp>
+      <p:sp>
+        <p:nvSpPr>
+          <p:cNvPr id="3" name="Text 1"/>
+          <p:cNvSpPr/>
+          <p:nvPr/>
+        </p:nvSpPr>
+        <p:spPr>
+          <a:xfrm>
+            <a:off x="365760" y="1005840"/>
+            <a:ext cx="11460175" cy="731520"/>
+          </a:xfrm>
+          <a:prstGeom prst="rect">
+            <a:avLst/>
+          </a:prstGeom>
+          <a:noFill/>
+          <a:ln/>
+        </p:spPr>
+        <p:txBody>
+          <a:bodyPr wrap="square" lIns="0" tIns="0" rIns="0" bIns="0" rtlCol="0" anchor="ctr">
+            <a:normAutofit/>
+          </a:bodyPr>
+          <a:lstStyle/>
+          <a:p>
+            <a:pPr algn="ctr" indent="0" marL="0">
+              <a:buNone/>
+            </a:pPr>
+            <a:r>
+              <a:rPr lang="en-US" sz="3600" b="1" dirty="0">
+                <a:solidFill>
+                  <a:srgbClr val="990011"/>
+                </a:solidFill>
+                <a:latin typeface="Times New Roman" pitchFamily="34" charset="0"/>
+                <a:ea typeface="Times New Roman" pitchFamily="34" charset="-122"/>
+                <a:cs typeface="Times New Roman" pitchFamily="34" charset="-120"/>
+              </a:rPr>
+              <a:t>1. Measures of Central Tendency</a:t>
+            </a:r>
+            <a:endParaRPr lang="en-US" sz="3600" dirty="0"/>
+          </a:p>
+        </p:txBody>
+      </p:sp>
+      <p:sp>
+        <p:nvSpPr>
+          <p:cNvPr id="4" name="Text 2"/>
+          <p:cNvSpPr/>
+          <p:nvPr/>
+        </p:nvSpPr>
+        <p:spPr>
+          <a:xfrm>
+            <a:off x="365760" y="1737360"/>
+            <a:ext cx="6035040" cy="457200"/>
+          </a:xfrm>
+          <a:prstGeom prst="rect">
+            <a:avLst/>
+          </a:prstGeom>
+          <a:noFill/>
+          <a:ln/>
+        </p:spPr>
+        <p:txBody>
+          <a:bodyPr wrap="square" lIns="0" tIns="0" rIns="0" bIns="0" rtlCol="0" anchor="ctr">
+            <a:normAutofit/>
+          </a:bodyPr>
+          <a:lstStyle/>
+          <a:p>
+            <a:pPr algn="l" indent="0" marL="0">
+              <a:buNone/>
+            </a:pPr>
+            <a:r>
+              <a:rPr lang="en-US" sz="3000" b="1" dirty="0">
+                <a:solidFill>
+                  <a:srgbClr val="990011"/>
+                </a:solidFill>
+                <a:latin typeface="Times New Roman" pitchFamily="34" charset="0"/>
+                <a:ea typeface="Times New Roman" pitchFamily="34" charset="-122"/>
+                <a:cs typeface="Times New Roman" pitchFamily="34" charset="-120"/>
+              </a:rPr>
+              <a:t>C) The Median: Calculation</a:t>
+            </a:r>
+            <a:endParaRPr lang="en-US" sz="3000" dirty="0"/>
+          </a:p>
+        </p:txBody>
+      </p:sp>
+      <p:sp>
+        <p:nvSpPr>
+          <p:cNvPr id="5" name="Text 3"/>
+          <p:cNvSpPr/>
+          <p:nvPr/>
+        </p:nvSpPr>
+        <p:spPr>
+          <a:xfrm>
+            <a:off x="365760" y="2240280"/>
+            <a:ext cx="6035040" cy="4160520"/>
+          </a:xfrm>
+          <a:prstGeom prst="rect">
+            <a:avLst/>
+          </a:prstGeom>
+          <a:noFill/>
+          <a:ln/>
+        </p:spPr>
+        <p:txBody>
+          <a:bodyPr wrap="square" lIns="0" tIns="0" rIns="0" bIns="0" rtlCol="0" anchor="t"/>
+          <a:lstStyle/>
+          <a:p>
+            <a:pPr algn="l" indent="0" marL="0">
+              <a:spcAft>
+                <a:spcPts val="800"/>
+              </a:spcAft>
+              <a:buNone/>
+            </a:pPr>
+            <a:r>
+              <a:rPr lang="en-US" sz="3600" i="1" dirty="0">
+                <a:solidFill>
+                  <a:srgbClr val="111111"/>
+                </a:solidFill>
+                <a:latin typeface="Times New Roman" pitchFamily="34" charset="0"/>
+                <a:ea typeface="Times New Roman" pitchFamily="34" charset="-122"/>
+                <a:cs typeface="Times New Roman" pitchFamily="34" charset="-120"/>
+              </a:rPr>
+              <a:t>The median is found as follows:</a:t>
+            </a:r>
+            <a:endParaRPr lang="en-US" sz="3600" dirty="0"/>
+          </a:p>
+          <a:p>
+            <a:pPr algn="l" indent="0" marL="0">
+              <a:spcAft>
+                <a:spcPts val="800"/>
+              </a:spcAft>
+              <a:buNone/>
+            </a:pPr>
+            <a:r>
+              <a:rPr lang="en-US" sz="3600" b="1" dirty="0">
+                <a:solidFill>
+                  <a:srgbClr val="111111"/>
+                </a:solidFill>
+                <a:latin typeface="Times New Roman" pitchFamily="34" charset="0"/>
+                <a:ea typeface="Times New Roman" pitchFamily="34" charset="-122"/>
+                <a:cs typeface="Times New Roman" pitchFamily="34" charset="-120"/>
+              </a:rPr>
+              <a:t>Method: </a:t>
+            </a:r>
+            <a:pPr algn="l" indent="0" marL="0">
+              <a:spcAft>
+                <a:spcPts val="800"/>
+              </a:spcAft>
+              <a:buNone/>
+            </a:pPr>
+            <a:r>
+              <a:rPr lang="en-US" sz="3600" dirty="0">
+                <a:solidFill>
+                  <a:srgbClr val="111111"/>
+                </a:solidFill>
+                <a:latin typeface="Times New Roman" pitchFamily="34" charset="0"/>
+                <a:ea typeface="Times New Roman" pitchFamily="34" charset="-122"/>
+                <a:cs typeface="Times New Roman" pitchFamily="34" charset="-120"/>
+              </a:rPr>
+              <a:t>Put the values in order, then take the value in position (n + 1) ÷ 2. The median is the middle value of the set.</a:t>
+            </a:r>
+            <a:endParaRPr lang="en-US" sz="3600" dirty="0"/>
+          </a:p>
+        </p:txBody>
+      </p:sp>
       <p:pic>
         <p:nvPicPr>
-          <p:cNvPr id="3" name="Image 0" descr="/home/claude/f4/img/minesec_sheet.png">    </p:cNvPr>
+          <p:cNvPr id="6" name="Image 0" descr="/home/claude/f4/img/v2/stat2_median.png">    </p:cNvPr>
           <p:cNvPicPr>
             <a:picLocks noChangeAspect="1"/>
           </p:cNvPicPr>
@@ -18159,8 +19347,8 @@
         </p:blipFill>
         <p:spPr>
           <a:xfrm>
-            <a:off x="0" y="658368"/>
-            <a:ext cx="3840480" cy="5833872"/>
+            <a:off x="6537960" y="2849678"/>
+            <a:ext cx="5470855" cy="2137053"/>
           </a:xfrm>
           <a:prstGeom prst="rect">
             <a:avLst/>
@@ -18169,14 +19357,14 @@
       </p:pic>
       <p:sp>
         <p:nvSpPr>
-          <p:cNvPr id="4" name="Text 1"/>
+          <p:cNvPr id="7" name="Text 4"/>
           <p:cNvSpPr/>
           <p:nvPr/>
         </p:nvSpPr>
         <p:spPr>
           <a:xfrm>
-            <a:off x="4069080" y="1005840"/>
-            <a:ext cx="7802575" cy="731520"/>
+            <a:off x="6537960" y="6089904"/>
+            <a:ext cx="5470855" cy="347472"/>
           </a:xfrm>
           <a:prstGeom prst="rect">
             <a:avLst/>
@@ -18185,124 +19373,24 @@
           <a:ln/>
         </p:spPr>
         <p:txBody>
-          <a:bodyPr wrap="square" lIns="0" tIns="0" rIns="0" bIns="0" rtlCol="0" anchor="ctr">
-            <a:normAutofit/>
-          </a:bodyPr>
+          <a:bodyPr wrap="square" lIns="0" tIns="0" rIns="0" bIns="0" rtlCol="0" anchor="ctr"/>
           <a:lstStyle/>
           <a:p>
             <a:pPr algn="ctr" indent="0" marL="0">
               <a:buNone/>
             </a:pPr>
             <a:r>
-              <a:rPr lang="en-US" sz="3600" b="1" dirty="0">
-                <a:solidFill>
-                  <a:srgbClr val="990011"/>
+              <a:rPr lang="en-US" sz="1600" i="1" dirty="0">
+                <a:solidFill>
+                  <a:srgbClr val="555555"/>
                 </a:solidFill>
                 <a:latin typeface="Times New Roman" pitchFamily="34" charset="0"/>
                 <a:ea typeface="Times New Roman" pitchFamily="34" charset="-122"/>
                 <a:cs typeface="Times New Roman" pitchFamily="34" charset="-120"/>
               </a:rPr>
-              <a:t>1. Measures of Central Tendency</a:t>
-            </a:r>
-            <a:endParaRPr lang="en-US" sz="3600" dirty="0"/>
-          </a:p>
-        </p:txBody>
-      </p:sp>
-      <p:sp>
-        <p:nvSpPr>
-          <p:cNvPr id="5" name="Text 2"/>
-          <p:cNvSpPr/>
-          <p:nvPr/>
-        </p:nvSpPr>
-        <p:spPr>
-          <a:xfrm>
-            <a:off x="4069080" y="1737360"/>
-            <a:ext cx="7802575" cy="457200"/>
-          </a:xfrm>
-          <a:prstGeom prst="rect">
-            <a:avLst/>
-          </a:prstGeom>
-          <a:noFill/>
-          <a:ln/>
-        </p:spPr>
-        <p:txBody>
-          <a:bodyPr wrap="square" lIns="0" tIns="0" rIns="0" bIns="0" rtlCol="0" anchor="ctr"/>
-          <a:lstStyle/>
-          <a:p>
-            <a:pPr algn="l" indent="0" marL="0">
-              <a:buNone/>
-            </a:pPr>
-            <a:r>
-              <a:rPr lang="en-US" sz="3200" b="1" dirty="0">
-                <a:solidFill>
-                  <a:srgbClr val="990011"/>
-                </a:solidFill>
-                <a:latin typeface="Times New Roman" pitchFamily="34" charset="0"/>
-                <a:ea typeface="Times New Roman" pitchFamily="34" charset="-122"/>
-                <a:cs typeface="Times New Roman" pitchFamily="34" charset="-120"/>
-              </a:rPr>
-              <a:t>B) The Median</a:t>
-            </a:r>
-            <a:endParaRPr lang="en-US" sz="3200" dirty="0"/>
-          </a:p>
-        </p:txBody>
-      </p:sp>
-      <p:sp>
-        <p:nvSpPr>
-          <p:cNvPr id="6" name="Text 3"/>
-          <p:cNvSpPr/>
-          <p:nvPr/>
-        </p:nvSpPr>
-        <p:spPr>
-          <a:xfrm>
-            <a:off x="4069080" y="2240280"/>
-            <a:ext cx="7802575" cy="4206240"/>
-          </a:xfrm>
-          <a:prstGeom prst="rect">
-            <a:avLst/>
-          </a:prstGeom>
-          <a:noFill/>
-          <a:ln/>
-        </p:spPr>
-        <p:txBody>
-          <a:bodyPr wrap="square" lIns="0" tIns="0" rIns="0" bIns="0" rtlCol="0" anchor="t"/>
-          <a:lstStyle/>
-          <a:p>
-            <a:pPr algn="l" indent="0" marL="0">
-              <a:spcAft>
-                <a:spcPts val="800"/>
-              </a:spcAft>
-              <a:buNone/>
-            </a:pPr>
-            <a:r>
-              <a:rPr lang="en-US" sz="4000" b="1" dirty="0">
-                <a:solidFill>
-                  <a:srgbClr val="111111"/>
-                </a:solidFill>
-                <a:latin typeface="Times New Roman" pitchFamily="34" charset="0"/>
-                <a:ea typeface="Times New Roman" pitchFamily="34" charset="-122"/>
-                <a:cs typeface="Times New Roman" pitchFamily="34" charset="-120"/>
-              </a:rPr>
-              <a:t>Advantages and disadvantages: </a:t>
-            </a:r>
-            <a:pPr algn="l" indent="0" marL="0">
-              <a:spcAft>
-                <a:spcPts val="800"/>
-              </a:spcAft>
-              <a:buNone/>
-            </a:pPr>
-            <a:r>
-              <a:rPr lang="en-US" sz="4000" dirty="0">
-                <a:solidFill>
-                  <a:srgbClr val="111111"/>
-                </a:solidFill>
-                <a:latin typeface="Times New Roman" pitchFamily="34" charset="0"/>
-                <a:ea typeface="Times New Roman" pitchFamily="34" charset="-122"/>
-                <a:cs typeface="Times New Roman" pitchFamily="34" charset="-120"/>
-              </a:rPr>
-              <a:t>The median is easy to find and is not affected by outliers. However, it ignores most values and is slow to find for large sets.</a:t>
-            </a:r>
-            <a:endParaRPr lang="en-US" sz="4000" dirty="0"/>
+              <a:t>Illustration: the median</a:t>
+            </a:r>
+            <a:endParaRPr lang="en-US" sz="1600" dirty="0"/>
           </a:p>
         </p:txBody>
       </p:sp>
@@ -18418,170 +19506,9 @@
           </a:p>
         </p:txBody>
       </p:sp>
-      <p:sp>
-        <p:nvSpPr>
-          <p:cNvPr id="3" name="Text 1"/>
-          <p:cNvSpPr/>
-          <p:nvPr/>
-        </p:nvSpPr>
-        <p:spPr>
-          <a:xfrm>
-            <a:off x="365760" y="1005840"/>
-            <a:ext cx="11460175" cy="731520"/>
-          </a:xfrm>
-          <a:prstGeom prst="rect">
-            <a:avLst/>
-          </a:prstGeom>
-          <a:noFill/>
-          <a:ln/>
-        </p:spPr>
-        <p:txBody>
-          <a:bodyPr wrap="square" lIns="0" tIns="0" rIns="0" bIns="0" rtlCol="0" anchor="ctr">
-            <a:normAutofit/>
-          </a:bodyPr>
-          <a:lstStyle/>
-          <a:p>
-            <a:pPr algn="ctr" indent="0" marL="0">
-              <a:buNone/>
-            </a:pPr>
-            <a:r>
-              <a:rPr lang="en-US" sz="3600" b="1" dirty="0">
-                <a:solidFill>
-                  <a:srgbClr val="990011"/>
-                </a:solidFill>
-                <a:latin typeface="Times New Roman" pitchFamily="34" charset="0"/>
-                <a:ea typeface="Times New Roman" pitchFamily="34" charset="-122"/>
-                <a:cs typeface="Times New Roman" pitchFamily="34" charset="-120"/>
-              </a:rPr>
-              <a:t>1. Measures of Central Tendency</a:t>
-            </a:r>
-            <a:endParaRPr lang="en-US" sz="3600" dirty="0"/>
-          </a:p>
-        </p:txBody>
-      </p:sp>
-      <p:sp>
-        <p:nvSpPr>
-          <p:cNvPr id="4" name="Text 2"/>
-          <p:cNvSpPr/>
-          <p:nvPr/>
-        </p:nvSpPr>
-        <p:spPr>
-          <a:xfrm>
-            <a:off x="365760" y="1737360"/>
-            <a:ext cx="6035040" cy="457200"/>
-          </a:xfrm>
-          <a:prstGeom prst="rect">
-            <a:avLst/>
-          </a:prstGeom>
-          <a:noFill/>
-          <a:ln/>
-        </p:spPr>
-        <p:txBody>
-          <a:bodyPr wrap="square" lIns="0" tIns="0" rIns="0" bIns="0" rtlCol="0" anchor="ctr">
-            <a:normAutofit/>
-          </a:bodyPr>
-          <a:lstStyle/>
-          <a:p>
-            <a:pPr algn="l" indent="0" marL="0">
-              <a:buNone/>
-            </a:pPr>
-            <a:r>
-              <a:rPr lang="en-US" sz="3000" b="1" dirty="0">
-                <a:solidFill>
-                  <a:srgbClr val="990011"/>
-                </a:solidFill>
-                <a:latin typeface="Times New Roman" pitchFamily="34" charset="0"/>
-                <a:ea typeface="Times New Roman" pitchFamily="34" charset="-122"/>
-                <a:cs typeface="Times New Roman" pitchFamily="34" charset="-120"/>
-              </a:rPr>
-              <a:t>C) The Mode</a:t>
-            </a:r>
-            <a:endParaRPr lang="en-US" sz="3000" dirty="0"/>
-          </a:p>
-        </p:txBody>
-      </p:sp>
-      <p:sp>
-        <p:nvSpPr>
-          <p:cNvPr id="5" name="Text 3"/>
-          <p:cNvSpPr/>
-          <p:nvPr/>
-        </p:nvSpPr>
-        <p:spPr>
-          <a:xfrm>
-            <a:off x="365760" y="2240280"/>
-            <a:ext cx="6035040" cy="4160520"/>
-          </a:xfrm>
-          <a:prstGeom prst="rect">
-            <a:avLst/>
-          </a:prstGeom>
-          <a:noFill/>
-          <a:ln/>
-        </p:spPr>
-        <p:txBody>
-          <a:bodyPr wrap="square" lIns="0" tIns="0" rIns="0" bIns="0" rtlCol="0" anchor="t"/>
-          <a:lstStyle/>
-          <a:p>
-            <a:pPr algn="l" indent="0" marL="0">
-              <a:spcAft>
-                <a:spcPts val="800"/>
-              </a:spcAft>
-              <a:buNone/>
-            </a:pPr>
-            <a:r>
-              <a:rPr lang="en-US" sz="3200" i="1" dirty="0">
-                <a:solidFill>
-                  <a:srgbClr val="111111"/>
-                </a:solidFill>
-                <a:latin typeface="Times New Roman" pitchFamily="34" charset="0"/>
-                <a:ea typeface="Times New Roman" pitchFamily="34" charset="-122"/>
-                <a:cs typeface="Times New Roman" pitchFamily="34" charset="-120"/>
-              </a:rPr>
-              <a:t>The mode is found and assessed as follows:</a:t>
-            </a:r>
-            <a:endParaRPr lang="en-US" sz="3200" dirty="0"/>
-          </a:p>
-          <a:p>
-            <a:pPr algn="l" indent="0" marL="0">
-              <a:spcAft>
-                <a:spcPts val="800"/>
-              </a:spcAft>
-              <a:buNone/>
-            </a:pPr>
-            <a:r>
-              <a:rPr lang="en-US" sz="3200" b="1" dirty="0">
-                <a:solidFill>
-                  <a:srgbClr val="111111"/>
-                </a:solidFill>
-                <a:latin typeface="Times New Roman" pitchFamily="34" charset="0"/>
-                <a:ea typeface="Times New Roman" pitchFamily="34" charset="-122"/>
-                <a:cs typeface="Times New Roman" pitchFamily="34" charset="-120"/>
-              </a:rPr>
-              <a:t>Method and example: </a:t>
-            </a:r>
-            <a:pPr algn="l" indent="0" marL="0">
-              <a:spcAft>
-                <a:spcPts val="800"/>
-              </a:spcAft>
-              <a:buNone/>
-            </a:pPr>
-            <a:r>
-              <a:rPr lang="en-US" sz="3200" dirty="0">
-                <a:solidFill>
-                  <a:srgbClr val="111111"/>
-                </a:solidFill>
-                <a:latin typeface="Times New Roman" pitchFamily="34" charset="0"/>
-                <a:ea typeface="Times New Roman" pitchFamily="34" charset="-122"/>
-                <a:cs typeface="Times New Roman" pitchFamily="34" charset="-120"/>
-              </a:rPr>
-              <a:t>The mode is the most frequent value, found by counting with a frequency table. At station A, 28 °C occurs in 6 months, so the mode is 28 °C.</a:t>
-            </a:r>
-            <a:endParaRPr lang="en-US" sz="3200" dirty="0"/>
-          </a:p>
-        </p:txBody>
-      </p:sp>
       <p:pic>
         <p:nvPicPr>
-          <p:cNvPr id="6" name="Image 0" descr="/home/claude/f4/img/v2/stat2_mode.png">    </p:cNvPr>
+          <p:cNvPr id="3" name="Image 0" descr="/home/claude/f4/img/minesec_sheet.png">    </p:cNvPr>
           <p:cNvPicPr>
             <a:picLocks noChangeAspect="1"/>
           </p:cNvPicPr>
@@ -18595,8 +19522,8 @@
         </p:blipFill>
         <p:spPr>
           <a:xfrm>
-            <a:off x="6537960" y="2849678"/>
-            <a:ext cx="5470855" cy="2137053"/>
+            <a:off x="0" y="658368"/>
+            <a:ext cx="5120640" cy="5833872"/>
           </a:xfrm>
           <a:prstGeom prst="rect">
             <a:avLst/>
@@ -18605,14 +19532,14 @@
       </p:pic>
       <p:sp>
         <p:nvSpPr>
-          <p:cNvPr id="7" name="Text 4"/>
+          <p:cNvPr id="4" name="Text 1"/>
           <p:cNvSpPr/>
           <p:nvPr/>
         </p:nvSpPr>
         <p:spPr>
           <a:xfrm>
-            <a:off x="6537960" y="6089904"/>
-            <a:ext cx="5470855" cy="347472"/>
+            <a:off x="5349240" y="1005840"/>
+            <a:ext cx="6522415" cy="731520"/>
           </a:xfrm>
           <a:prstGeom prst="rect">
             <a:avLst/>
@@ -18621,24 +19548,124 @@
           <a:ln/>
         </p:spPr>
         <p:txBody>
-          <a:bodyPr wrap="square" lIns="0" tIns="0" rIns="0" bIns="0" rtlCol="0" anchor="ctr"/>
+          <a:bodyPr wrap="square" lIns="0" tIns="0" rIns="0" bIns="0" rtlCol="0" anchor="ctr">
+            <a:normAutofit/>
+          </a:bodyPr>
           <a:lstStyle/>
           <a:p>
             <a:pPr algn="ctr" indent="0" marL="0">
               <a:buNone/>
             </a:pPr>
             <a:r>
-              <a:rPr lang="en-US" sz="1600" i="1" dirty="0">
-                <a:solidFill>
-                  <a:srgbClr val="555555"/>
+              <a:rPr lang="en-US" sz="3600" b="1" dirty="0">
+                <a:solidFill>
+                  <a:srgbClr val="990011"/>
                 </a:solidFill>
                 <a:latin typeface="Times New Roman" pitchFamily="34" charset="0"/>
                 <a:ea typeface="Times New Roman" pitchFamily="34" charset="-122"/>
                 <a:cs typeface="Times New Roman" pitchFamily="34" charset="-120"/>
               </a:rPr>
-              <a:t>Illustration: the mode</a:t>
-            </a:r>
-            <a:endParaRPr lang="en-US" sz="1600" dirty="0"/>
+              <a:t>1. Measures of Central Tendency</a:t>
+            </a:r>
+            <a:endParaRPr lang="en-US" sz="3600" dirty="0"/>
+          </a:p>
+        </p:txBody>
+      </p:sp>
+      <p:sp>
+        <p:nvSpPr>
+          <p:cNvPr id="5" name="Text 2"/>
+          <p:cNvSpPr/>
+          <p:nvPr/>
+        </p:nvSpPr>
+        <p:spPr>
+          <a:xfrm>
+            <a:off x="5349240" y="1737360"/>
+            <a:ext cx="6522415" cy="457200"/>
+          </a:xfrm>
+          <a:prstGeom prst="rect">
+            <a:avLst/>
+          </a:prstGeom>
+          <a:noFill/>
+          <a:ln/>
+        </p:spPr>
+        <p:txBody>
+          <a:bodyPr wrap="square" lIns="0" tIns="0" rIns="0" bIns="0" rtlCol="0" anchor="ctr"/>
+          <a:lstStyle/>
+          <a:p>
+            <a:pPr algn="l" indent="0" marL="0">
+              <a:buNone/>
+            </a:pPr>
+            <a:r>
+              <a:rPr lang="en-US" sz="3200" b="1" dirty="0">
+                <a:solidFill>
+                  <a:srgbClr val="990011"/>
+                </a:solidFill>
+                <a:latin typeface="Times New Roman" pitchFamily="34" charset="0"/>
+                <a:ea typeface="Times New Roman" pitchFamily="34" charset="-122"/>
+                <a:cs typeface="Times New Roman" pitchFamily="34" charset="-120"/>
+              </a:rPr>
+              <a:t>C) The Median: Calculation</a:t>
+            </a:r>
+            <a:endParaRPr lang="en-US" sz="3200" dirty="0"/>
+          </a:p>
+        </p:txBody>
+      </p:sp>
+      <p:sp>
+        <p:nvSpPr>
+          <p:cNvPr id="6" name="Text 3"/>
+          <p:cNvSpPr/>
+          <p:nvPr/>
+        </p:nvSpPr>
+        <p:spPr>
+          <a:xfrm>
+            <a:off x="5349240" y="2240280"/>
+            <a:ext cx="6522415" cy="4206240"/>
+          </a:xfrm>
+          <a:prstGeom prst="rect">
+            <a:avLst/>
+          </a:prstGeom>
+          <a:noFill/>
+          <a:ln/>
+        </p:spPr>
+        <p:txBody>
+          <a:bodyPr wrap="square" lIns="0" tIns="0" rIns="0" bIns="0" rtlCol="0" anchor="t"/>
+          <a:lstStyle/>
+          <a:p>
+            <a:pPr algn="l" indent="0" marL="0">
+              <a:spcAft>
+                <a:spcPts val="800"/>
+              </a:spcAft>
+              <a:buNone/>
+            </a:pPr>
+            <a:r>
+              <a:rPr lang="en-US" sz="4000" b="1" dirty="0">
+                <a:solidFill>
+                  <a:srgbClr val="111111"/>
+                </a:solidFill>
+                <a:latin typeface="Times New Roman" pitchFamily="34" charset="0"/>
+                <a:ea typeface="Times New Roman" pitchFamily="34" charset="-122"/>
+                <a:cs typeface="Times New Roman" pitchFamily="34" charset="-120"/>
+              </a:rPr>
+              <a:t>An odd number of values: </a:t>
+            </a:r>
+            <a:pPr algn="l" indent="0" marL="0">
+              <a:spcAft>
+                <a:spcPts val="800"/>
+              </a:spcAft>
+              <a:buNone/>
+            </a:pPr>
+            <a:r>
+              <a:rPr lang="en-US" sz="4000" dirty="0">
+                <a:solidFill>
+                  <a:srgbClr val="111111"/>
+                </a:solidFill>
+                <a:latin typeface="Times New Roman" pitchFamily="34" charset="0"/>
+                <a:ea typeface="Times New Roman" pitchFamily="34" charset="-122"/>
+                <a:cs typeface="Times New Roman" pitchFamily="34" charset="-120"/>
+              </a:rPr>
+              <a:t>For 3, 4, 5, 6, 8, 8 and 10, the position is (7 + 1) ÷ 2 = 4th. The median is therefore 6.</a:t>
+            </a:r>
+            <a:endParaRPr lang="en-US" sz="4000" dirty="0"/>
           </a:p>
         </p:txBody>
       </p:sp>
@@ -18771,7 +19798,7 @@
         <p:spPr>
           <a:xfrm>
             <a:off x="0" y="658368"/>
-            <a:ext cx="3840480" cy="5833872"/>
+            <a:ext cx="5120640" cy="5833872"/>
           </a:xfrm>
           <a:prstGeom prst="rect">
             <a:avLst/>
@@ -18786,8 +19813,8 @@
         </p:nvSpPr>
         <p:spPr>
           <a:xfrm>
-            <a:off x="4069080" y="1005840"/>
-            <a:ext cx="7802575" cy="731520"/>
+            <a:off x="5349240" y="1005840"/>
+            <a:ext cx="6522415" cy="731520"/>
           </a:xfrm>
           <a:prstGeom prst="rect">
             <a:avLst/>
@@ -18827,8 +19854,8 @@
         </p:nvSpPr>
         <p:spPr>
           <a:xfrm>
-            <a:off x="4069080" y="1737360"/>
-            <a:ext cx="7802575" cy="457200"/>
+            <a:off x="5349240" y="1737360"/>
+            <a:ext cx="6522415" cy="457200"/>
           </a:xfrm>
           <a:prstGeom prst="rect">
             <a:avLst/>
@@ -18852,7 +19879,7 @@
                 <a:ea typeface="Times New Roman" pitchFamily="34" charset="-122"/>
                 <a:cs typeface="Times New Roman" pitchFamily="34" charset="-120"/>
               </a:rPr>
-              <a:t>C) The Mode</a:t>
+              <a:t>C) The Median: Calculation</a:t>
             </a:r>
             <a:endParaRPr lang="en-US" sz="3200" dirty="0"/>
           </a:p>
@@ -18866,8 +19893,8 @@
         </p:nvSpPr>
         <p:spPr>
           <a:xfrm>
-            <a:off x="4069080" y="2240280"/>
-            <a:ext cx="7802575" cy="4206240"/>
+            <a:off x="5349240" y="2240280"/>
+            <a:ext cx="6522415" cy="4206240"/>
           </a:xfrm>
           <a:prstGeom prst="rect">
             <a:avLst/>
@@ -18894,7 +19921,7 @@
                 <a:ea typeface="Times New Roman" pitchFamily="34" charset="-122"/>
                 <a:cs typeface="Times New Roman" pitchFamily="34" charset="-120"/>
               </a:rPr>
-              <a:t>Special cases: </a:t>
+              <a:t>An even number of values: </a:t>
             </a:r>
             <a:pPr algn="l" indent="0" marL="0">
               <a:spcAft>
@@ -18911,7 +19938,7 @@
                 <a:ea typeface="Times New Roman" pitchFamily="34" charset="-122"/>
                 <a:cs typeface="Times New Roman" pitchFamily="34" charset="-120"/>
               </a:rPr>
-              <a:t>The set 2, 5, 8, 3, 7, 4, 11 has no mode, because no value is repeated. The set 1, 8, 7, 8, 5, 9, 11, 5 has two modes, 5 and 8, and is called bimodal.</a:t>
+              <a:t>For 2, 3, 4, 5, 6, 7, 9 and 12, the middle falls between the 4th and 5th values. The median is their mean, (5 + 6) ÷ 2 = 5.5.</a:t>
             </a:r>
             <a:endParaRPr lang="en-US" sz="4000" dirty="0"/>
           </a:p>
@@ -19029,150 +20056,9 @@
           </a:p>
         </p:txBody>
       </p:sp>
-      <p:sp>
-        <p:nvSpPr>
-          <p:cNvPr id="3" name="Text 1"/>
-          <p:cNvSpPr/>
-          <p:nvPr/>
-        </p:nvSpPr>
-        <p:spPr>
-          <a:xfrm>
-            <a:off x="365760" y="1005840"/>
-            <a:ext cx="11460175" cy="731520"/>
-          </a:xfrm>
-          <a:prstGeom prst="rect">
-            <a:avLst/>
-          </a:prstGeom>
-          <a:noFill/>
-          <a:ln/>
-        </p:spPr>
-        <p:txBody>
-          <a:bodyPr wrap="square" lIns="0" tIns="0" rIns="0" bIns="0" rtlCol="0" anchor="ctr">
-            <a:normAutofit/>
-          </a:bodyPr>
-          <a:lstStyle/>
-          <a:p>
-            <a:pPr algn="ctr" indent="0" marL="0">
-              <a:buNone/>
-            </a:pPr>
-            <a:r>
-              <a:rPr lang="en-US" sz="3600" b="1" dirty="0">
-                <a:solidFill>
-                  <a:srgbClr val="990011"/>
-                </a:solidFill>
-                <a:latin typeface="Times New Roman" pitchFamily="34" charset="0"/>
-                <a:ea typeface="Times New Roman" pitchFamily="34" charset="-122"/>
-                <a:cs typeface="Times New Roman" pitchFamily="34" charset="-120"/>
-              </a:rPr>
-              <a:t>1. Measures of Central Tendency</a:t>
-            </a:r>
-            <a:endParaRPr lang="en-US" sz="3600" dirty="0"/>
-          </a:p>
-        </p:txBody>
-      </p:sp>
-      <p:sp>
-        <p:nvSpPr>
-          <p:cNvPr id="4" name="Text 2"/>
-          <p:cNvSpPr/>
-          <p:nvPr/>
-        </p:nvSpPr>
-        <p:spPr>
-          <a:xfrm>
-            <a:off x="365760" y="1737360"/>
-            <a:ext cx="6035040" cy="457200"/>
-          </a:xfrm>
-          <a:prstGeom prst="rect">
-            <a:avLst/>
-          </a:prstGeom>
-          <a:noFill/>
-          <a:ln/>
-        </p:spPr>
-        <p:txBody>
-          <a:bodyPr wrap="square" lIns="0" tIns="0" rIns="0" bIns="0" rtlCol="0" anchor="ctr">
-            <a:normAutofit/>
-          </a:bodyPr>
-          <a:lstStyle/>
-          <a:p>
-            <a:pPr algn="l" indent="0" marL="0">
-              <a:buNone/>
-            </a:pPr>
-            <a:r>
-              <a:rPr lang="en-US" sz="3000" b="1" dirty="0">
-                <a:solidFill>
-                  <a:srgbClr val="990011"/>
-                </a:solidFill>
-                <a:latin typeface="Times New Roman" pitchFamily="34" charset="0"/>
-                <a:ea typeface="Times New Roman" pitchFamily="34" charset="-122"/>
-                <a:cs typeface="Times New Roman" pitchFamily="34" charset="-120"/>
-              </a:rPr>
-              <a:t>C) The Mode</a:t>
-            </a:r>
-            <a:endParaRPr lang="en-US" sz="3000" dirty="0"/>
-          </a:p>
-        </p:txBody>
-      </p:sp>
-      <p:sp>
-        <p:nvSpPr>
-          <p:cNvPr id="5" name="Text 3"/>
-          <p:cNvSpPr/>
-          <p:nvPr/>
-        </p:nvSpPr>
-        <p:spPr>
-          <a:xfrm>
-            <a:off x="365760" y="2240280"/>
-            <a:ext cx="6035040" cy="4160520"/>
-          </a:xfrm>
-          <a:prstGeom prst="rect">
-            <a:avLst/>
-          </a:prstGeom>
-          <a:noFill/>
-          <a:ln/>
-        </p:spPr>
-        <p:txBody>
-          <a:bodyPr wrap="square" lIns="0" tIns="0" rIns="0" bIns="0" rtlCol="0" anchor="t"/>
-          <a:lstStyle/>
-          <a:p>
-            <a:pPr algn="l" indent="0" marL="0">
-              <a:spcAft>
-                <a:spcPts val="800"/>
-              </a:spcAft>
-              <a:buNone/>
-            </a:pPr>
-            <a:r>
-              <a:rPr lang="en-US" sz="3200" b="1" dirty="0">
-                <a:solidFill>
-                  <a:srgbClr val="111111"/>
-                </a:solidFill>
-                <a:latin typeface="Times New Roman" pitchFamily="34" charset="0"/>
-                <a:ea typeface="Times New Roman" pitchFamily="34" charset="-122"/>
-                <a:cs typeface="Times New Roman" pitchFamily="34" charset="-120"/>
-              </a:rPr>
-              <a:t>Advantages and disadvantages: </a:t>
-            </a:r>
-            <a:pPr algn="l" indent="0" marL="0">
-              <a:spcAft>
-                <a:spcPts val="800"/>
-              </a:spcAft>
-              <a:buNone/>
-            </a:pPr>
-            <a:r>
-              <a:rPr lang="en-US" sz="3200" dirty="0">
-                <a:solidFill>
-                  <a:srgbClr val="111111"/>
-                </a:solidFill>
-                <a:latin typeface="Times New Roman" pitchFamily="34" charset="0"/>
-                <a:ea typeface="Times New Roman" pitchFamily="34" charset="-122"/>
-                <a:cs typeface="Times New Roman" pitchFamily="34" charset="-120"/>
-              </a:rPr>
-              <a:t>The mode can be used for categories, such as soil types or means of transport, and is not affected by outliers. However, there may be no mode or several, and it ignores the other values.</a:t>
-            </a:r>
-            <a:endParaRPr lang="en-US" sz="3200" dirty="0"/>
-          </a:p>
-        </p:txBody>
-      </p:sp>
       <p:pic>
         <p:nvPicPr>
-          <p:cNvPr id="6" name="Image 0" descr="/home/claude/f4/img/v2/stat2_central_compare.png">    </p:cNvPr>
+          <p:cNvPr id="3" name="Image 0" descr="/home/claude/f4/img/minesec_sheet.png">    </p:cNvPr>
           <p:cNvPicPr>
             <a:picLocks noChangeAspect="1"/>
           </p:cNvPicPr>
@@ -19186,8 +20072,8 @@
         </p:blipFill>
         <p:spPr>
           <a:xfrm>
-            <a:off x="6537960" y="2849678"/>
-            <a:ext cx="5470855" cy="2137053"/>
+            <a:off x="0" y="658368"/>
+            <a:ext cx="3840480" cy="5833872"/>
           </a:xfrm>
           <a:prstGeom prst="rect">
             <a:avLst/>
@@ -19196,14 +20082,14 @@
       </p:pic>
       <p:sp>
         <p:nvSpPr>
-          <p:cNvPr id="7" name="Text 4"/>
+          <p:cNvPr id="4" name="Text 1"/>
           <p:cNvSpPr/>
           <p:nvPr/>
         </p:nvSpPr>
         <p:spPr>
           <a:xfrm>
-            <a:off x="6537960" y="6089904"/>
-            <a:ext cx="5470855" cy="347472"/>
+            <a:off x="4069080" y="1005840"/>
+            <a:ext cx="7802575" cy="731520"/>
           </a:xfrm>
           <a:prstGeom prst="rect">
             <a:avLst/>
@@ -19212,24 +20098,124 @@
           <a:ln/>
         </p:spPr>
         <p:txBody>
-          <a:bodyPr wrap="square" lIns="0" tIns="0" rIns="0" bIns="0" rtlCol="0" anchor="ctr"/>
+          <a:bodyPr wrap="square" lIns="0" tIns="0" rIns="0" bIns="0" rtlCol="0" anchor="ctr">
+            <a:normAutofit/>
+          </a:bodyPr>
           <a:lstStyle/>
           <a:p>
             <a:pPr algn="ctr" indent="0" marL="0">
               <a:buNone/>
             </a:pPr>
             <a:r>
-              <a:rPr lang="en-US" sz="1600" i="1" dirty="0">
-                <a:solidFill>
-                  <a:srgbClr val="555555"/>
+              <a:rPr lang="en-US" sz="3600" b="1" dirty="0">
+                <a:solidFill>
+                  <a:srgbClr val="990011"/>
                 </a:solidFill>
                 <a:latin typeface="Times New Roman" pitchFamily="34" charset="0"/>
                 <a:ea typeface="Times New Roman" pitchFamily="34" charset="-122"/>
                 <a:cs typeface="Times New Roman" pitchFamily="34" charset="-120"/>
               </a:rPr>
-              <a:t>Illustration: comparing the three measures</a:t>
-            </a:r>
-            <a:endParaRPr lang="en-US" sz="1600" dirty="0"/>
+              <a:t>1. Measures of Central Tendency</a:t>
+            </a:r>
+            <a:endParaRPr lang="en-US" sz="3600" dirty="0"/>
+          </a:p>
+        </p:txBody>
+      </p:sp>
+      <p:sp>
+        <p:nvSpPr>
+          <p:cNvPr id="5" name="Text 2"/>
+          <p:cNvSpPr/>
+          <p:nvPr/>
+        </p:nvSpPr>
+        <p:spPr>
+          <a:xfrm>
+            <a:off x="4069080" y="1737360"/>
+            <a:ext cx="7802575" cy="457200"/>
+          </a:xfrm>
+          <a:prstGeom prst="rect">
+            <a:avLst/>
+          </a:prstGeom>
+          <a:noFill/>
+          <a:ln/>
+        </p:spPr>
+        <p:txBody>
+          <a:bodyPr wrap="square" lIns="0" tIns="0" rIns="0" bIns="0" rtlCol="0" anchor="ctr"/>
+          <a:lstStyle/>
+          <a:p>
+            <a:pPr algn="l" indent="0" marL="0">
+              <a:buNone/>
+            </a:pPr>
+            <a:r>
+              <a:rPr lang="en-US" sz="3200" b="1" dirty="0">
+                <a:solidFill>
+                  <a:srgbClr val="990011"/>
+                </a:solidFill>
+                <a:latin typeface="Times New Roman" pitchFamily="34" charset="0"/>
+                <a:ea typeface="Times New Roman" pitchFamily="34" charset="-122"/>
+                <a:cs typeface="Times New Roman" pitchFamily="34" charset="-120"/>
+              </a:rPr>
+              <a:t>C) The Median: Calculation</a:t>
+            </a:r>
+            <a:endParaRPr lang="en-US" sz="3200" dirty="0"/>
+          </a:p>
+        </p:txBody>
+      </p:sp>
+      <p:sp>
+        <p:nvSpPr>
+          <p:cNvPr id="6" name="Text 3"/>
+          <p:cNvSpPr/>
+          <p:nvPr/>
+        </p:nvSpPr>
+        <p:spPr>
+          <a:xfrm>
+            <a:off x="4069080" y="2240280"/>
+            <a:ext cx="7802575" cy="4206240"/>
+          </a:xfrm>
+          <a:prstGeom prst="rect">
+            <a:avLst/>
+          </a:prstGeom>
+          <a:noFill/>
+          <a:ln/>
+        </p:spPr>
+        <p:txBody>
+          <a:bodyPr wrap="square" lIns="0" tIns="0" rIns="0" bIns="0" rtlCol="0" anchor="t"/>
+          <a:lstStyle/>
+          <a:p>
+            <a:pPr algn="l" indent="0" marL="0">
+              <a:spcAft>
+                <a:spcPts val="800"/>
+              </a:spcAft>
+              <a:buNone/>
+            </a:pPr>
+            <a:r>
+              <a:rPr lang="en-US" sz="4000" b="1" dirty="0">
+                <a:solidFill>
+                  <a:srgbClr val="111111"/>
+                </a:solidFill>
+                <a:latin typeface="Times New Roman" pitchFamily="34" charset="0"/>
+                <a:ea typeface="Times New Roman" pitchFamily="34" charset="-122"/>
+                <a:cs typeface="Times New Roman" pitchFamily="34" charset="-120"/>
+              </a:rPr>
+              <a:t>Example of Ndu (1963 to 1972): </a:t>
+            </a:r>
+            <a:pPr algn="l" indent="0" marL="0">
+              <a:spcAft>
+                <a:spcPts val="800"/>
+              </a:spcAft>
+              <a:buNone/>
+            </a:pPr>
+            <a:r>
+              <a:rPr lang="en-US" sz="4000" dirty="0">
+                <a:solidFill>
+                  <a:srgbClr val="111111"/>
+                </a:solidFill>
+                <a:latin typeface="Times New Roman" pitchFamily="34" charset="0"/>
+                <a:ea typeface="Times New Roman" pitchFamily="34" charset="-122"/>
+                <a:cs typeface="Times New Roman" pitchFamily="34" charset="-120"/>
+              </a:rPr>
+              <a:t>The annual rainfalls of the ten years are put in order. The 5th and 6th values are 1,942 and 1,904 mm, so the median is 1,923 mm.</a:t>
+            </a:r>
+            <a:endParaRPr lang="en-US" sz="4000" dirty="0"/>
           </a:p>
         </p:txBody>
       </p:sp>
@@ -19564,129 +20550,9 @@
           </a:p>
         </p:txBody>
       </p:sp>
-      <p:sp>
-        <p:nvSpPr>
-          <p:cNvPr id="3" name="Text 1"/>
-          <p:cNvSpPr/>
-          <p:nvPr/>
-        </p:nvSpPr>
-        <p:spPr>
-          <a:xfrm>
-            <a:off x="365760" y="1005840"/>
-            <a:ext cx="11460175" cy="731520"/>
-          </a:xfrm>
-          <a:prstGeom prst="rect">
-            <a:avLst/>
-          </a:prstGeom>
-          <a:noFill/>
-          <a:ln/>
-        </p:spPr>
-        <p:txBody>
-          <a:bodyPr wrap="square" lIns="0" tIns="0" rIns="0" bIns="0" rtlCol="0" anchor="ctr">
-            <a:normAutofit/>
-          </a:bodyPr>
-          <a:lstStyle/>
-          <a:p>
-            <a:pPr algn="ctr" indent="0" marL="0">
-              <a:buNone/>
-            </a:pPr>
-            <a:r>
-              <a:rPr lang="en-US" sz="3600" b="1" dirty="0">
-                <a:solidFill>
-                  <a:srgbClr val="990011"/>
-                </a:solidFill>
-                <a:latin typeface="Times New Roman" pitchFamily="34" charset="0"/>
-                <a:ea typeface="Times New Roman" pitchFamily="34" charset="-122"/>
-                <a:cs typeface="Times New Roman" pitchFamily="34" charset="-120"/>
-              </a:rPr>
-              <a:t>2. The Range</a:t>
-            </a:r>
-            <a:endParaRPr lang="en-US" sz="3600" dirty="0"/>
-          </a:p>
-        </p:txBody>
-      </p:sp>
-      <p:sp>
-        <p:nvSpPr>
-          <p:cNvPr id="4" name="Text 2"/>
-          <p:cNvSpPr/>
-          <p:nvPr/>
-        </p:nvSpPr>
-        <p:spPr>
-          <a:xfrm>
-            <a:off x="365760" y="1783080"/>
-            <a:ext cx="6035040" cy="4617720"/>
-          </a:xfrm>
-          <a:prstGeom prst="rect">
-            <a:avLst/>
-          </a:prstGeom>
-          <a:noFill/>
-          <a:ln/>
-        </p:spPr>
-        <p:txBody>
-          <a:bodyPr wrap="square" lIns="0" tIns="0" rIns="0" bIns="0" rtlCol="0" anchor="t"/>
-          <a:lstStyle/>
-          <a:p>
-            <a:pPr algn="l" indent="0" marL="0">
-              <a:spcAft>
-                <a:spcPts val="800"/>
-              </a:spcAft>
-              <a:buNone/>
-            </a:pPr>
-            <a:r>
-              <a:rPr lang="en-US" sz="3600" i="1" dirty="0">
-                <a:solidFill>
-                  <a:srgbClr val="111111"/>
-                </a:solidFill>
-                <a:latin typeface="Times New Roman" pitchFamily="34" charset="0"/>
-                <a:ea typeface="Times New Roman" pitchFamily="34" charset="-122"/>
-                <a:cs typeface="Times New Roman" pitchFamily="34" charset="-120"/>
-              </a:rPr>
-              <a:t>The range is calculated and assessed as follows:</a:t>
-            </a:r>
-            <a:endParaRPr lang="en-US" sz="3600" dirty="0"/>
-          </a:p>
-          <a:p>
-            <a:pPr algn="l" indent="0" marL="0">
-              <a:spcAft>
-                <a:spcPts val="800"/>
-              </a:spcAft>
-              <a:buNone/>
-            </a:pPr>
-            <a:r>
-              <a:rPr lang="en-US" sz="3600" b="1" dirty="0">
-                <a:solidFill>
-                  <a:srgbClr val="111111"/>
-                </a:solidFill>
-                <a:latin typeface="Times New Roman" pitchFamily="34" charset="0"/>
-                <a:ea typeface="Times New Roman" pitchFamily="34" charset="-122"/>
-                <a:cs typeface="Times New Roman" pitchFamily="34" charset="-120"/>
-              </a:rPr>
-              <a:t>Formula and example: </a:t>
-            </a:r>
-            <a:pPr algn="l" indent="0" marL="0">
-              <a:spcAft>
-                <a:spcPts val="800"/>
-              </a:spcAft>
-              <a:buNone/>
-            </a:pPr>
-            <a:r>
-              <a:rPr lang="en-US" sz="3600" dirty="0">
-                <a:solidFill>
-                  <a:srgbClr val="111111"/>
-                </a:solidFill>
-                <a:latin typeface="Times New Roman" pitchFamily="34" charset="0"/>
-                <a:ea typeface="Times New Roman" pitchFamily="34" charset="-122"/>
-                <a:cs typeface="Times New Roman" pitchFamily="34" charset="-120"/>
-              </a:rPr>
-              <a:t>Range = highest value − lowest value. For the maximum temperatures of Garoua in a week (38, 40, 42, 37, 44, 41, 39 °C), the range is 44 − 37 = 7 °C.</a:t>
-            </a:r>
-            <a:endParaRPr lang="en-US" sz="3600" dirty="0"/>
-          </a:p>
-        </p:txBody>
-      </p:sp>
       <p:pic>
         <p:nvPicPr>
-          <p:cNvPr id="5" name="Image 0" descr="/home/claude/f4/img/v2/f4_maxmin.jpg">    </p:cNvPr>
+          <p:cNvPr id="3" name="Image 0" descr="/home/claude/f4/img/minesec_sheet.png">    </p:cNvPr>
           <p:cNvPicPr>
             <a:picLocks noChangeAspect="1"/>
           </p:cNvPicPr>
@@ -19700,8 +20566,8 @@
         </p:blipFill>
         <p:spPr>
           <a:xfrm>
-            <a:off x="6537960" y="2400897"/>
-            <a:ext cx="5470855" cy="3034615"/>
+            <a:off x="0" y="658368"/>
+            <a:ext cx="1463040" cy="5833872"/>
           </a:xfrm>
           <a:prstGeom prst="rect">
             <a:avLst/>
@@ -19710,14 +20576,14 @@
       </p:pic>
       <p:sp>
         <p:nvSpPr>
-          <p:cNvPr id="6" name="Text 3"/>
+          <p:cNvPr id="4" name="Text 1"/>
           <p:cNvSpPr/>
           <p:nvPr/>
         </p:nvSpPr>
         <p:spPr>
           <a:xfrm>
-            <a:off x="6537960" y="6089904"/>
-            <a:ext cx="5470855" cy="347472"/>
+            <a:off x="1691640" y="1005840"/>
+            <a:ext cx="10180015" cy="731520"/>
           </a:xfrm>
           <a:prstGeom prst="rect">
             <a:avLst/>
@@ -19726,24 +20592,144 @@
           <a:ln/>
         </p:spPr>
         <p:txBody>
-          <a:bodyPr wrap="square" lIns="0" tIns="0" rIns="0" bIns="0" rtlCol="0" anchor="ctr"/>
+          <a:bodyPr wrap="square" lIns="0" tIns="0" rIns="0" bIns="0" rtlCol="0" anchor="ctr">
+            <a:normAutofit/>
+          </a:bodyPr>
           <a:lstStyle/>
           <a:p>
             <a:pPr algn="ctr" indent="0" marL="0">
               <a:buNone/>
             </a:pPr>
             <a:r>
-              <a:rPr lang="en-US" sz="1600" i="1" dirty="0">
-                <a:solidFill>
-                  <a:srgbClr val="555555"/>
+              <a:rPr lang="en-US" sz="3600" b="1" dirty="0">
+                <a:solidFill>
+                  <a:srgbClr val="990011"/>
                 </a:solidFill>
                 <a:latin typeface="Times New Roman" pitchFamily="34" charset="0"/>
                 <a:ea typeface="Times New Roman" pitchFamily="34" charset="-122"/>
                 <a:cs typeface="Times New Roman" pitchFamily="34" charset="-120"/>
               </a:rPr>
-              <a:t>Illustration: a maximum and minimum thermometer</a:t>
-            </a:r>
-            <a:endParaRPr lang="en-US" sz="1600" dirty="0"/>
+              <a:t>1. Measures of Central Tendency</a:t>
+            </a:r>
+            <a:endParaRPr lang="en-US" sz="3600" dirty="0"/>
+          </a:p>
+        </p:txBody>
+      </p:sp>
+      <p:sp>
+        <p:nvSpPr>
+          <p:cNvPr id="5" name="Text 2"/>
+          <p:cNvSpPr/>
+          <p:nvPr/>
+        </p:nvSpPr>
+        <p:spPr>
+          <a:xfrm>
+            <a:off x="1691640" y="1737360"/>
+            <a:ext cx="10180015" cy="457200"/>
+          </a:xfrm>
+          <a:prstGeom prst="rect">
+            <a:avLst/>
+          </a:prstGeom>
+          <a:noFill/>
+          <a:ln/>
+        </p:spPr>
+        <p:txBody>
+          <a:bodyPr wrap="square" lIns="0" tIns="0" rIns="0" bIns="0" rtlCol="0" anchor="ctr"/>
+          <a:lstStyle/>
+          <a:p>
+            <a:pPr algn="l" indent="0" marL="0">
+              <a:buNone/>
+            </a:pPr>
+            <a:r>
+              <a:rPr lang="en-US" sz="3200" b="1" dirty="0">
+                <a:solidFill>
+                  <a:srgbClr val="990011"/>
+                </a:solidFill>
+                <a:latin typeface="Times New Roman" pitchFamily="34" charset="0"/>
+                <a:ea typeface="Times New Roman" pitchFamily="34" charset="-122"/>
+                <a:cs typeface="Times New Roman" pitchFamily="34" charset="-120"/>
+              </a:rPr>
+              <a:t>D) The Median: Advantages and Disadvantages</a:t>
+            </a:r>
+            <a:endParaRPr lang="en-US" sz="3200" dirty="0"/>
+          </a:p>
+        </p:txBody>
+      </p:sp>
+      <p:sp>
+        <p:nvSpPr>
+          <p:cNvPr id="6" name="Text 3"/>
+          <p:cNvSpPr/>
+          <p:nvPr/>
+        </p:nvSpPr>
+        <p:spPr>
+          <a:xfrm>
+            <a:off x="1691640" y="2240280"/>
+            <a:ext cx="10180015" cy="4206240"/>
+          </a:xfrm>
+          <a:prstGeom prst="rect">
+            <a:avLst/>
+          </a:prstGeom>
+          <a:noFill/>
+          <a:ln/>
+        </p:spPr>
+        <p:txBody>
+          <a:bodyPr wrap="square" lIns="0" tIns="0" rIns="0" bIns="0" rtlCol="0" anchor="t"/>
+          <a:lstStyle/>
+          <a:p>
+            <a:pPr algn="l" indent="0" marL="0">
+              <a:spcAft>
+                <a:spcPts val="800"/>
+              </a:spcAft>
+              <a:buNone/>
+            </a:pPr>
+            <a:r>
+              <a:rPr lang="en-US" sz="4000" i="1" dirty="0">
+                <a:solidFill>
+                  <a:srgbClr val="111111"/>
+                </a:solidFill>
+                <a:latin typeface="Times New Roman" pitchFamily="34" charset="0"/>
+                <a:ea typeface="Times New Roman" pitchFamily="34" charset="-122"/>
+                <a:cs typeface="Times New Roman" pitchFamily="34" charset="-120"/>
+              </a:rPr>
+              <a:t>The median has the following advantages and disadvantages:</a:t>
+            </a:r>
+            <a:endParaRPr lang="en-US" sz="4000" dirty="0"/>
+          </a:p>
+          <a:p>
+            <a:pPr algn="l" indent="0" marL="0">
+              <a:spcAft>
+                <a:spcPts val="800"/>
+              </a:spcAft>
+              <a:buNone/>
+            </a:pPr>
+            <a:r>
+              <a:rPr lang="en-US" sz="4000" b="1" dirty="0">
+                <a:solidFill>
+                  <a:srgbClr val="111111"/>
+                </a:solidFill>
+                <a:latin typeface="Times New Roman" pitchFamily="34" charset="0"/>
+                <a:ea typeface="Times New Roman" pitchFamily="34" charset="-122"/>
+                <a:cs typeface="Times New Roman" pitchFamily="34" charset="-120"/>
+              </a:rPr>
+              <a:t>It is not affected by outliers: </a:t>
+            </a:r>
+            <a:pPr algn="l" indent="0" marL="0">
+              <a:spcAft>
+                <a:spcPts val="800"/>
+              </a:spcAft>
+              <a:buNone/>
+            </a:pPr>
+            <a:r>
+              <a:rPr lang="en-US" sz="4000" dirty="0">
+                <a:solidFill>
+                  <a:srgbClr val="111111"/>
+                </a:solidFill>
+                <a:latin typeface="Times New Roman" pitchFamily="34" charset="0"/>
+                <a:ea typeface="Times New Roman" pitchFamily="34" charset="-122"/>
+                <a:cs typeface="Times New Roman" pitchFamily="34" charset="-120"/>
+              </a:rPr>
+              <a:t>An extreme value at either end does not change the middle value. The median therefore represents skewed data better than the mean.</a:t>
+            </a:r>
+            <a:endParaRPr lang="en-US" sz="4000" dirty="0"/>
           </a:p>
         </p:txBody>
       </p:sp>
@@ -19876,7 +20862,7 @@
         <p:spPr>
           <a:xfrm>
             <a:off x="0" y="658368"/>
-            <a:ext cx="2468880" cy="5833872"/>
+            <a:ext cx="5120640" cy="5833872"/>
           </a:xfrm>
           <a:prstGeom prst="rect">
             <a:avLst/>
@@ -19891,8 +20877,8 @@
         </p:nvSpPr>
         <p:spPr>
           <a:xfrm>
-            <a:off x="2697480" y="1005840"/>
-            <a:ext cx="9174175" cy="731520"/>
+            <a:off x="5349240" y="1005840"/>
+            <a:ext cx="6522415" cy="731520"/>
           </a:xfrm>
           <a:prstGeom prst="rect">
             <a:avLst/>
@@ -19918,7 +20904,7 @@
                 <a:ea typeface="Times New Roman" pitchFamily="34" charset="-122"/>
                 <a:cs typeface="Times New Roman" pitchFamily="34" charset="-120"/>
               </a:rPr>
-              <a:t>2. The Range</a:t>
+              <a:t>1. Measures of Central Tendency</a:t>
             </a:r>
             <a:endParaRPr lang="en-US" sz="3600" dirty="0"/>
           </a:p>
@@ -19932,8 +20918,47 @@
         </p:nvSpPr>
         <p:spPr>
           <a:xfrm>
-            <a:off x="2697480" y="1783080"/>
-            <a:ext cx="9174175" cy="4663440"/>
+            <a:off x="5349240" y="1737360"/>
+            <a:ext cx="6522415" cy="457200"/>
+          </a:xfrm>
+          <a:prstGeom prst="rect">
+            <a:avLst/>
+          </a:prstGeom>
+          <a:noFill/>
+          <a:ln/>
+        </p:spPr>
+        <p:txBody>
+          <a:bodyPr wrap="square" lIns="0" tIns="0" rIns="0" bIns="0" rtlCol="0" anchor="ctr"/>
+          <a:lstStyle/>
+          <a:p>
+            <a:pPr algn="l" indent="0" marL="0">
+              <a:buNone/>
+            </a:pPr>
+            <a:r>
+              <a:rPr lang="en-US" sz="2300" b="1" dirty="0">
+                <a:solidFill>
+                  <a:srgbClr val="990011"/>
+                </a:solidFill>
+                <a:latin typeface="Times New Roman" pitchFamily="34" charset="0"/>
+                <a:ea typeface="Times New Roman" pitchFamily="34" charset="-122"/>
+                <a:cs typeface="Times New Roman" pitchFamily="34" charset="-120"/>
+              </a:rPr>
+              <a:t>D) The Median: Advantages and Disadvantages</a:t>
+            </a:r>
+            <a:endParaRPr lang="en-US" sz="2300" dirty="0"/>
+          </a:p>
+        </p:txBody>
+      </p:sp>
+      <p:sp>
+        <p:nvSpPr>
+          <p:cNvPr id="6" name="Text 3"/>
+          <p:cNvSpPr/>
+          <p:nvPr/>
+        </p:nvSpPr>
+        <p:spPr>
+          <a:xfrm>
+            <a:off x="5349240" y="2240280"/>
+            <a:ext cx="6522415" cy="4206240"/>
           </a:xfrm>
           <a:prstGeom prst="rect">
             <a:avLst/>
@@ -19960,7 +20985,7 @@
                 <a:ea typeface="Times New Roman" pitchFamily="34" charset="-122"/>
                 <a:cs typeface="Times New Roman" pitchFamily="34" charset="-120"/>
               </a:rPr>
-              <a:t>Interpretation and assessment: </a:t>
+              <a:t>It is easy to find: </a:t>
             </a:r>
             <a:pPr algn="l" indent="0" marL="0">
               <a:spcAft>
@@ -19977,7 +21002,7 @@
                 <a:ea typeface="Times New Roman" pitchFamily="34" charset="-122"/>
                 <a:cs typeface="Times New Roman" pitchFamily="34" charset="-120"/>
               </a:rPr>
-              <a:t>A large range shows widely spread data, while a small range, such as 28 − 23 = 5 °C at station A, shows clustered data. The range is simple and quick, but it uses only the two extreme values and is misled by outliers.</a:t>
+              <a:t>For a small set, the values only need to be put in order. No long calculation is needed.</a:t>
             </a:r>
             <a:endParaRPr lang="en-US" sz="4000" dirty="0"/>
           </a:p>
@@ -20095,129 +21120,9 @@
           </a:p>
         </p:txBody>
       </p:sp>
-      <p:sp>
-        <p:nvSpPr>
-          <p:cNvPr id="3" name="Text 1"/>
-          <p:cNvSpPr/>
-          <p:nvPr/>
-        </p:nvSpPr>
-        <p:spPr>
-          <a:xfrm>
-            <a:off x="365760" y="1005840"/>
-            <a:ext cx="11460175" cy="731520"/>
-          </a:xfrm>
-          <a:prstGeom prst="rect">
-            <a:avLst/>
-          </a:prstGeom>
-          <a:noFill/>
-          <a:ln/>
-        </p:spPr>
-        <p:txBody>
-          <a:bodyPr wrap="square" lIns="0" tIns="0" rIns="0" bIns="0" rtlCol="0" anchor="ctr">
-            <a:normAutofit/>
-          </a:bodyPr>
-          <a:lstStyle/>
-          <a:p>
-            <a:pPr algn="ctr" indent="0" marL="0">
-              <a:buNone/>
-            </a:pPr>
-            <a:r>
-              <a:rPr lang="en-US" sz="3600" b="1" dirty="0">
-                <a:solidFill>
-                  <a:srgbClr val="990011"/>
-                </a:solidFill>
-                <a:latin typeface="Times New Roman" pitchFamily="34" charset="0"/>
-                <a:ea typeface="Times New Roman" pitchFamily="34" charset="-122"/>
-                <a:cs typeface="Times New Roman" pitchFamily="34" charset="-120"/>
-              </a:rPr>
-              <a:t>3. Quartiles and the Interquartile Range</a:t>
-            </a:r>
-            <a:endParaRPr lang="en-US" sz="3600" dirty="0"/>
-          </a:p>
-        </p:txBody>
-      </p:sp>
-      <p:sp>
-        <p:nvSpPr>
-          <p:cNvPr id="4" name="Text 2"/>
-          <p:cNvSpPr/>
-          <p:nvPr/>
-        </p:nvSpPr>
-        <p:spPr>
-          <a:xfrm>
-            <a:off x="365760" y="1783080"/>
-            <a:ext cx="6035040" cy="4617720"/>
-          </a:xfrm>
-          <a:prstGeom prst="rect">
-            <a:avLst/>
-          </a:prstGeom>
-          <a:noFill/>
-          <a:ln/>
-        </p:spPr>
-        <p:txBody>
-          <a:bodyPr wrap="square" lIns="0" tIns="0" rIns="0" bIns="0" rtlCol="0" anchor="t"/>
-          <a:lstStyle/>
-          <a:p>
-            <a:pPr algn="l" indent="0" marL="0">
-              <a:spcAft>
-                <a:spcPts val="800"/>
-              </a:spcAft>
-              <a:buNone/>
-            </a:pPr>
-            <a:r>
-              <a:rPr lang="en-US" sz="3000" i="1" dirty="0">
-                <a:solidFill>
-                  <a:srgbClr val="111111"/>
-                </a:solidFill>
-                <a:latin typeface="Times New Roman" pitchFamily="34" charset="0"/>
-                <a:ea typeface="Times New Roman" pitchFamily="34" charset="-122"/>
-                <a:cs typeface="Times New Roman" pitchFamily="34" charset="-120"/>
-              </a:rPr>
-              <a:t>The quartiles and the interquartile range are calculated as follows:</a:t>
-            </a:r>
-            <a:endParaRPr lang="en-US" sz="3000" dirty="0"/>
-          </a:p>
-          <a:p>
-            <a:pPr algn="l" indent="0" marL="0">
-              <a:spcAft>
-                <a:spcPts val="800"/>
-              </a:spcAft>
-              <a:buNone/>
-            </a:pPr>
-            <a:r>
-              <a:rPr lang="en-US" sz="3000" b="1" dirty="0">
-                <a:solidFill>
-                  <a:srgbClr val="111111"/>
-                </a:solidFill>
-                <a:latin typeface="Times New Roman" pitchFamily="34" charset="0"/>
-                <a:ea typeface="Times New Roman" pitchFamily="34" charset="-122"/>
-                <a:cs typeface="Times New Roman" pitchFamily="34" charset="-120"/>
-              </a:rPr>
-              <a:t>Steps: </a:t>
-            </a:r>
-            <a:pPr algn="l" indent="0" marL="0">
-              <a:spcAft>
-                <a:spcPts val="800"/>
-              </a:spcAft>
-              <a:buNone/>
-            </a:pPr>
-            <a:r>
-              <a:rPr lang="en-US" sz="3000" dirty="0">
-                <a:solidFill>
-                  <a:srgbClr val="111111"/>
-                </a:solidFill>
-                <a:latin typeface="Times New Roman" pitchFamily="34" charset="0"/>
-                <a:ea typeface="Times New Roman" pitchFamily="34" charset="-122"/>
-                <a:cs typeface="Times New Roman" pitchFamily="34" charset="-120"/>
-              </a:rPr>
-              <a:t>Put the data in order and find the median (Q2). The lower quartile (Q1) is the median of the lower half, the upper quartile (Q3) is the median of the upper half, and IQR = Q3 − Q1.</a:t>
-            </a:r>
-            <a:endParaRPr lang="en-US" sz="3000" dirty="0"/>
-          </a:p>
-        </p:txBody>
-      </p:sp>
       <p:pic>
         <p:nvPicPr>
-          <p:cNvPr id="5" name="Image 0" descr="/home/claude/f4/img/v2/stat2_iqr.png">    </p:cNvPr>
+          <p:cNvPr id="3" name="Image 0" descr="/home/claude/f4/img/minesec_sheet.png">    </p:cNvPr>
           <p:cNvPicPr>
             <a:picLocks noChangeAspect="1"/>
           </p:cNvPicPr>
@@ -20231,8 +21136,8 @@
         </p:blipFill>
         <p:spPr>
           <a:xfrm>
-            <a:off x="6537960" y="2849678"/>
-            <a:ext cx="5470855" cy="2137053"/>
+            <a:off x="0" y="658368"/>
+            <a:ext cx="5120640" cy="5833872"/>
           </a:xfrm>
           <a:prstGeom prst="rect">
             <a:avLst/>
@@ -20241,14 +21146,14 @@
       </p:pic>
       <p:sp>
         <p:nvSpPr>
-          <p:cNvPr id="6" name="Text 3"/>
+          <p:cNvPr id="4" name="Text 1"/>
           <p:cNvSpPr/>
           <p:nvPr/>
         </p:nvSpPr>
         <p:spPr>
           <a:xfrm>
-            <a:off x="6537960" y="6089904"/>
-            <a:ext cx="5470855" cy="347472"/>
+            <a:off x="5349240" y="1005840"/>
+            <a:ext cx="6522415" cy="731520"/>
           </a:xfrm>
           <a:prstGeom prst="rect">
             <a:avLst/>
@@ -20257,24 +21162,124 @@
           <a:ln/>
         </p:spPr>
         <p:txBody>
-          <a:bodyPr wrap="square" lIns="0" tIns="0" rIns="0" bIns="0" rtlCol="0" anchor="ctr"/>
+          <a:bodyPr wrap="square" lIns="0" tIns="0" rIns="0" bIns="0" rtlCol="0" anchor="ctr">
+            <a:normAutofit/>
+          </a:bodyPr>
           <a:lstStyle/>
           <a:p>
             <a:pPr algn="ctr" indent="0" marL="0">
               <a:buNone/>
             </a:pPr>
             <a:r>
-              <a:rPr lang="en-US" sz="1600" i="1" dirty="0">
-                <a:solidFill>
-                  <a:srgbClr val="555555"/>
+              <a:rPr lang="en-US" sz="3600" b="1" dirty="0">
+                <a:solidFill>
+                  <a:srgbClr val="990011"/>
                 </a:solidFill>
                 <a:latin typeface="Times New Roman" pitchFamily="34" charset="0"/>
                 <a:ea typeface="Times New Roman" pitchFamily="34" charset="-122"/>
                 <a:cs typeface="Times New Roman" pitchFamily="34" charset="-120"/>
               </a:rPr>
-              <a:t>Illustration: quartiles</a:t>
-            </a:r>
-            <a:endParaRPr lang="en-US" sz="1600" dirty="0"/>
+              <a:t>1. Measures of Central Tendency</a:t>
+            </a:r>
+            <a:endParaRPr lang="en-US" sz="3600" dirty="0"/>
+          </a:p>
+        </p:txBody>
+      </p:sp>
+      <p:sp>
+        <p:nvSpPr>
+          <p:cNvPr id="5" name="Text 2"/>
+          <p:cNvSpPr/>
+          <p:nvPr/>
+        </p:nvSpPr>
+        <p:spPr>
+          <a:xfrm>
+            <a:off x="5349240" y="1737360"/>
+            <a:ext cx="6522415" cy="457200"/>
+          </a:xfrm>
+          <a:prstGeom prst="rect">
+            <a:avLst/>
+          </a:prstGeom>
+          <a:noFill/>
+          <a:ln/>
+        </p:spPr>
+        <p:txBody>
+          <a:bodyPr wrap="square" lIns="0" tIns="0" rIns="0" bIns="0" rtlCol="0" anchor="ctr"/>
+          <a:lstStyle/>
+          <a:p>
+            <a:pPr algn="l" indent="0" marL="0">
+              <a:buNone/>
+            </a:pPr>
+            <a:r>
+              <a:rPr lang="en-US" sz="2300" b="1" dirty="0">
+                <a:solidFill>
+                  <a:srgbClr val="990011"/>
+                </a:solidFill>
+                <a:latin typeface="Times New Roman" pitchFamily="34" charset="0"/>
+                <a:ea typeface="Times New Roman" pitchFamily="34" charset="-122"/>
+                <a:cs typeface="Times New Roman" pitchFamily="34" charset="-120"/>
+              </a:rPr>
+              <a:t>D) The Median: Advantages and Disadvantages</a:t>
+            </a:r>
+            <a:endParaRPr lang="en-US" sz="2300" dirty="0"/>
+          </a:p>
+        </p:txBody>
+      </p:sp>
+      <p:sp>
+        <p:nvSpPr>
+          <p:cNvPr id="6" name="Text 3"/>
+          <p:cNvSpPr/>
+          <p:nvPr/>
+        </p:nvSpPr>
+        <p:spPr>
+          <a:xfrm>
+            <a:off x="5349240" y="2240280"/>
+            <a:ext cx="6522415" cy="4206240"/>
+          </a:xfrm>
+          <a:prstGeom prst="rect">
+            <a:avLst/>
+          </a:prstGeom>
+          <a:noFill/>
+          <a:ln/>
+        </p:spPr>
+        <p:txBody>
+          <a:bodyPr wrap="square" lIns="0" tIns="0" rIns="0" bIns="0" rtlCol="0" anchor="t"/>
+          <a:lstStyle/>
+          <a:p>
+            <a:pPr algn="l" indent="0" marL="0">
+              <a:spcAft>
+                <a:spcPts val="800"/>
+              </a:spcAft>
+              <a:buNone/>
+            </a:pPr>
+            <a:r>
+              <a:rPr lang="en-US" sz="4000" b="1" dirty="0">
+                <a:solidFill>
+                  <a:srgbClr val="111111"/>
+                </a:solidFill>
+                <a:latin typeface="Times New Roman" pitchFamily="34" charset="0"/>
+                <a:ea typeface="Times New Roman" pitchFamily="34" charset="-122"/>
+                <a:cs typeface="Times New Roman" pitchFamily="34" charset="-120"/>
+              </a:rPr>
+              <a:t>It ignores most values: </a:t>
+            </a:r>
+            <a:pPr algn="l" indent="0" marL="0">
+              <a:spcAft>
+                <a:spcPts val="800"/>
+              </a:spcAft>
+              <a:buNone/>
+            </a:pPr>
+            <a:r>
+              <a:rPr lang="en-US" sz="4000" dirty="0">
+                <a:solidFill>
+                  <a:srgbClr val="111111"/>
+                </a:solidFill>
+                <a:latin typeface="Times New Roman" pitchFamily="34" charset="0"/>
+                <a:ea typeface="Times New Roman" pitchFamily="34" charset="-122"/>
+                <a:cs typeface="Times New Roman" pitchFamily="34" charset="-120"/>
+              </a:rPr>
+              <a:t>Only the middle value or the two middle values are used. For large sets, putting all the values in order is also slow.</a:t>
+            </a:r>
+            <a:endParaRPr lang="en-US" sz="4000" dirty="0"/>
           </a:p>
         </p:txBody>
       </p:sp>
@@ -20390,9 +21395,170 @@
           </a:p>
         </p:txBody>
       </p:sp>
+      <p:sp>
+        <p:nvSpPr>
+          <p:cNvPr id="3" name="Text 1"/>
+          <p:cNvSpPr/>
+          <p:nvPr/>
+        </p:nvSpPr>
+        <p:spPr>
+          <a:xfrm>
+            <a:off x="365760" y="1005840"/>
+            <a:ext cx="11460175" cy="731520"/>
+          </a:xfrm>
+          <a:prstGeom prst="rect">
+            <a:avLst/>
+          </a:prstGeom>
+          <a:noFill/>
+          <a:ln/>
+        </p:spPr>
+        <p:txBody>
+          <a:bodyPr wrap="square" lIns="0" tIns="0" rIns="0" bIns="0" rtlCol="0" anchor="ctr">
+            <a:normAutofit/>
+          </a:bodyPr>
+          <a:lstStyle/>
+          <a:p>
+            <a:pPr algn="ctr" indent="0" marL="0">
+              <a:buNone/>
+            </a:pPr>
+            <a:r>
+              <a:rPr lang="en-US" sz="3600" b="1" dirty="0">
+                <a:solidFill>
+                  <a:srgbClr val="990011"/>
+                </a:solidFill>
+                <a:latin typeface="Times New Roman" pitchFamily="34" charset="0"/>
+                <a:ea typeface="Times New Roman" pitchFamily="34" charset="-122"/>
+                <a:cs typeface="Times New Roman" pitchFamily="34" charset="-120"/>
+              </a:rPr>
+              <a:t>1. Measures of Central Tendency</a:t>
+            </a:r>
+            <a:endParaRPr lang="en-US" sz="3600" dirty="0"/>
+          </a:p>
+        </p:txBody>
+      </p:sp>
+      <p:sp>
+        <p:nvSpPr>
+          <p:cNvPr id="4" name="Text 2"/>
+          <p:cNvSpPr/>
+          <p:nvPr/>
+        </p:nvSpPr>
+        <p:spPr>
+          <a:xfrm>
+            <a:off x="365760" y="1737360"/>
+            <a:ext cx="6035040" cy="457200"/>
+          </a:xfrm>
+          <a:prstGeom prst="rect">
+            <a:avLst/>
+          </a:prstGeom>
+          <a:noFill/>
+          <a:ln/>
+        </p:spPr>
+        <p:txBody>
+          <a:bodyPr wrap="square" lIns="0" tIns="0" rIns="0" bIns="0" rtlCol="0" anchor="ctr">
+            <a:normAutofit/>
+          </a:bodyPr>
+          <a:lstStyle/>
+          <a:p>
+            <a:pPr algn="l" indent="0" marL="0">
+              <a:buNone/>
+            </a:pPr>
+            <a:r>
+              <a:rPr lang="en-US" sz="3000" b="1" dirty="0">
+                <a:solidFill>
+                  <a:srgbClr val="990011"/>
+                </a:solidFill>
+                <a:latin typeface="Times New Roman" pitchFamily="34" charset="0"/>
+                <a:ea typeface="Times New Roman" pitchFamily="34" charset="-122"/>
+                <a:cs typeface="Times New Roman" pitchFamily="34" charset="-120"/>
+              </a:rPr>
+              <a:t>E) The Mode: Calculation</a:t>
+            </a:r>
+            <a:endParaRPr lang="en-US" sz="3000" dirty="0"/>
+          </a:p>
+        </p:txBody>
+      </p:sp>
+      <p:sp>
+        <p:nvSpPr>
+          <p:cNvPr id="5" name="Text 3"/>
+          <p:cNvSpPr/>
+          <p:nvPr/>
+        </p:nvSpPr>
+        <p:spPr>
+          <a:xfrm>
+            <a:off x="365760" y="2240280"/>
+            <a:ext cx="6035040" cy="4160520"/>
+          </a:xfrm>
+          <a:prstGeom prst="rect">
+            <a:avLst/>
+          </a:prstGeom>
+          <a:noFill/>
+          <a:ln/>
+        </p:spPr>
+        <p:txBody>
+          <a:bodyPr wrap="square" lIns="0" tIns="0" rIns="0" bIns="0" rtlCol="0" anchor="t"/>
+          <a:lstStyle/>
+          <a:p>
+            <a:pPr algn="l" indent="0" marL="0">
+              <a:spcAft>
+                <a:spcPts val="800"/>
+              </a:spcAft>
+              <a:buNone/>
+            </a:pPr>
+            <a:r>
+              <a:rPr lang="en-US" sz="3600" i="1" dirty="0">
+                <a:solidFill>
+                  <a:srgbClr val="111111"/>
+                </a:solidFill>
+                <a:latin typeface="Times New Roman" pitchFamily="34" charset="0"/>
+                <a:ea typeface="Times New Roman" pitchFamily="34" charset="-122"/>
+                <a:cs typeface="Times New Roman" pitchFamily="34" charset="-120"/>
+              </a:rPr>
+              <a:t>The mode is found as follows:</a:t>
+            </a:r>
+            <a:endParaRPr lang="en-US" sz="3600" dirty="0"/>
+          </a:p>
+          <a:p>
+            <a:pPr algn="l" indent="0" marL="0">
+              <a:spcAft>
+                <a:spcPts val="800"/>
+              </a:spcAft>
+              <a:buNone/>
+            </a:pPr>
+            <a:r>
+              <a:rPr lang="en-US" sz="3600" b="1" dirty="0">
+                <a:solidFill>
+                  <a:srgbClr val="111111"/>
+                </a:solidFill>
+                <a:latin typeface="Times New Roman" pitchFamily="34" charset="0"/>
+                <a:ea typeface="Times New Roman" pitchFamily="34" charset="-122"/>
+                <a:cs typeface="Times New Roman" pitchFamily="34" charset="-120"/>
+              </a:rPr>
+              <a:t>Method: </a:t>
+            </a:r>
+            <a:pPr algn="l" indent="0" marL="0">
+              <a:spcAft>
+                <a:spcPts val="800"/>
+              </a:spcAft>
+              <a:buNone/>
+            </a:pPr>
+            <a:r>
+              <a:rPr lang="en-US" sz="3600" dirty="0">
+                <a:solidFill>
+                  <a:srgbClr val="111111"/>
+                </a:solidFill>
+                <a:latin typeface="Times New Roman" pitchFamily="34" charset="0"/>
+                <a:ea typeface="Times New Roman" pitchFamily="34" charset="-122"/>
+                <a:cs typeface="Times New Roman" pitchFamily="34" charset="-120"/>
+              </a:rPr>
+              <a:t>The mode is the most frequent value, found by counting with a frequency table. At station A, 28 °C occurs in 6 months, so the mode is 28 °C.</a:t>
+            </a:r>
+            <a:endParaRPr lang="en-US" sz="3600" dirty="0"/>
+          </a:p>
+        </p:txBody>
+      </p:sp>
       <p:pic>
         <p:nvPicPr>
-          <p:cNvPr id="3" name="Image 0" descr="/home/claude/f4/img/minesec_sheet.png">    </p:cNvPr>
+          <p:cNvPr id="6" name="Image 0" descr="/home/claude/f4/img/v2/stat2_mode.png">    </p:cNvPr>
           <p:cNvPicPr>
             <a:picLocks noChangeAspect="1"/>
           </p:cNvPicPr>
@@ -20406,8 +21572,8 @@
         </p:blipFill>
         <p:spPr>
           <a:xfrm>
-            <a:off x="0" y="658368"/>
-            <a:ext cx="5120640" cy="5833872"/>
+            <a:off x="6537960" y="2849678"/>
+            <a:ext cx="5470855" cy="2137053"/>
           </a:xfrm>
           <a:prstGeom prst="rect">
             <a:avLst/>
@@ -20416,14 +21582,14 @@
       </p:pic>
       <p:sp>
         <p:nvSpPr>
-          <p:cNvPr id="4" name="Text 1"/>
+          <p:cNvPr id="7" name="Text 4"/>
           <p:cNvSpPr/>
           <p:nvPr/>
         </p:nvSpPr>
         <p:spPr>
           <a:xfrm>
-            <a:off x="5349240" y="1005840"/>
-            <a:ext cx="6522415" cy="731520"/>
+            <a:off x="6537960" y="6089904"/>
+            <a:ext cx="5470855" cy="347472"/>
           </a:xfrm>
           <a:prstGeom prst="rect">
             <a:avLst/>
@@ -20432,85 +21598,24 @@
           <a:ln/>
         </p:spPr>
         <p:txBody>
-          <a:bodyPr wrap="square" lIns="0" tIns="0" rIns="0" bIns="0" rtlCol="0" anchor="ctr">
-            <a:normAutofit/>
-          </a:bodyPr>
+          <a:bodyPr wrap="square" lIns="0" tIns="0" rIns="0" bIns="0" rtlCol="0" anchor="ctr"/>
           <a:lstStyle/>
           <a:p>
             <a:pPr algn="ctr" indent="0" marL="0">
               <a:buNone/>
             </a:pPr>
             <a:r>
-              <a:rPr lang="en-US" sz="3600" b="1" dirty="0">
-                <a:solidFill>
-                  <a:srgbClr val="990011"/>
+              <a:rPr lang="en-US" sz="1600" i="1" dirty="0">
+                <a:solidFill>
+                  <a:srgbClr val="555555"/>
                 </a:solidFill>
                 <a:latin typeface="Times New Roman" pitchFamily="34" charset="0"/>
                 <a:ea typeface="Times New Roman" pitchFamily="34" charset="-122"/>
                 <a:cs typeface="Times New Roman" pitchFamily="34" charset="-120"/>
               </a:rPr>
-              <a:t>3. Quartiles and the Interquartile Range</a:t>
-            </a:r>
-            <a:endParaRPr lang="en-US" sz="3600" dirty="0"/>
-          </a:p>
-        </p:txBody>
-      </p:sp>
-      <p:sp>
-        <p:nvSpPr>
-          <p:cNvPr id="5" name="Text 2"/>
-          <p:cNvSpPr/>
-          <p:nvPr/>
-        </p:nvSpPr>
-        <p:spPr>
-          <a:xfrm>
-            <a:off x="5349240" y="1783080"/>
-            <a:ext cx="6522415" cy="4663440"/>
-          </a:xfrm>
-          <a:prstGeom prst="rect">
-            <a:avLst/>
-          </a:prstGeom>
-          <a:noFill/>
-          <a:ln/>
-        </p:spPr>
-        <p:txBody>
-          <a:bodyPr wrap="square" lIns="0" tIns="0" rIns="0" bIns="0" rtlCol="0" anchor="t"/>
-          <a:lstStyle/>
-          <a:p>
-            <a:pPr algn="l" indent="0" marL="0">
-              <a:spcAft>
-                <a:spcPts val="800"/>
-              </a:spcAft>
-              <a:buNone/>
-            </a:pPr>
-            <a:r>
-              <a:rPr lang="en-US" sz="4000" b="1" dirty="0">
-                <a:solidFill>
-                  <a:srgbClr val="111111"/>
-                </a:solidFill>
-                <a:latin typeface="Times New Roman" pitchFamily="34" charset="0"/>
-                <a:ea typeface="Times New Roman" pitchFamily="34" charset="-122"/>
-                <a:cs typeface="Times New Roman" pitchFamily="34" charset="-120"/>
-              </a:rPr>
-              <a:t>Example 1 (n = 11): </a:t>
-            </a:r>
-            <a:pPr algn="l" indent="0" marL="0">
-              <a:spcAft>
-                <a:spcPts val="800"/>
-              </a:spcAft>
-              <a:buNone/>
-            </a:pPr>
-            <a:r>
-              <a:rPr lang="en-US" sz="4000" dirty="0">
-                <a:solidFill>
-                  <a:srgbClr val="111111"/>
-                </a:solidFill>
-                <a:latin typeface="Times New Roman" pitchFamily="34" charset="0"/>
-                <a:ea typeface="Times New Roman" pitchFamily="34" charset="-122"/>
-                <a:cs typeface="Times New Roman" pitchFamily="34" charset="-120"/>
-              </a:rPr>
-              <a:t>For eleven values from 102 to 118, the median is 109, Q1 is 105 and Q3 is 115. The interquartile range is 115 − 105 = 10.</a:t>
-            </a:r>
-            <a:endParaRPr lang="en-US" sz="4000" dirty="0"/>
+              <a:t>Illustration: the mode</a:t>
+            </a:r>
+            <a:endParaRPr lang="en-US" sz="1600" dirty="0"/>
           </a:p>
         </p:txBody>
       </p:sp>
@@ -20685,7 +21790,7 @@
                 <a:ea typeface="Times New Roman" pitchFamily="34" charset="-122"/>
                 <a:cs typeface="Times New Roman" pitchFamily="34" charset="-120"/>
               </a:rPr>
-              <a:t>3. Quartiles and the Interquartile Range</a:t>
+              <a:t>1. Measures of Central Tendency</a:t>
             </a:r>
             <a:endParaRPr lang="en-US" sz="3600" dirty="0"/>
           </a:p>
@@ -20699,8 +21804,47 @@
         </p:nvSpPr>
         <p:spPr>
           <a:xfrm>
-            <a:off x="5349240" y="1783080"/>
-            <a:ext cx="6522415" cy="4663440"/>
+            <a:off x="5349240" y="1737360"/>
+            <a:ext cx="6522415" cy="457200"/>
+          </a:xfrm>
+          <a:prstGeom prst="rect">
+            <a:avLst/>
+          </a:prstGeom>
+          <a:noFill/>
+          <a:ln/>
+        </p:spPr>
+        <p:txBody>
+          <a:bodyPr wrap="square" lIns="0" tIns="0" rIns="0" bIns="0" rtlCol="0" anchor="ctr"/>
+          <a:lstStyle/>
+          <a:p>
+            <a:pPr algn="l" indent="0" marL="0">
+              <a:buNone/>
+            </a:pPr>
+            <a:r>
+              <a:rPr lang="en-US" sz="3200" b="1" dirty="0">
+                <a:solidFill>
+                  <a:srgbClr val="990011"/>
+                </a:solidFill>
+                <a:latin typeface="Times New Roman" pitchFamily="34" charset="0"/>
+                <a:ea typeface="Times New Roman" pitchFamily="34" charset="-122"/>
+                <a:cs typeface="Times New Roman" pitchFamily="34" charset="-120"/>
+              </a:rPr>
+              <a:t>E) The Mode: Calculation</a:t>
+            </a:r>
+            <a:endParaRPr lang="en-US" sz="3200" dirty="0"/>
+          </a:p>
+        </p:txBody>
+      </p:sp>
+      <p:sp>
+        <p:nvSpPr>
+          <p:cNvPr id="6" name="Text 3"/>
+          <p:cNvSpPr/>
+          <p:nvPr/>
+        </p:nvSpPr>
+        <p:spPr>
+          <a:xfrm>
+            <a:off x="5349240" y="2240280"/>
+            <a:ext cx="6522415" cy="4206240"/>
           </a:xfrm>
           <a:prstGeom prst="rect">
             <a:avLst/>
@@ -20727,7 +21871,7 @@
                 <a:ea typeface="Times New Roman" pitchFamily="34" charset="-122"/>
                 <a:cs typeface="Times New Roman" pitchFamily="34" charset="-120"/>
               </a:rPr>
-              <a:t>Example 2 (n = 13): </a:t>
+              <a:t>A set with no mode: </a:t>
             </a:r>
             <a:pPr algn="l" indent="0" marL="0">
               <a:spcAft>
@@ -20744,7 +21888,7 @@
                 <a:ea typeface="Times New Roman" pitchFamily="34" charset="-122"/>
                 <a:cs typeface="Times New Roman" pitchFamily="34" charset="-120"/>
               </a:rPr>
-              <a:t>For 10, 25, 30, 30, 40, 41, 42, 50, 55, 70, 101, 110, 111, the median is 42 and Q1 = (30 + 30) ÷ 2 = 30. Q3 = (70 + 101) ÷ 2 = 85.5, so the IQR is 85.5 − 30 = 55.5.</a:t>
+              <a:t>In the set 2, 5, 8, 3, 7, 4 and 11, no value is repeated. This set therefore has no mode.</a:t>
             </a:r>
             <a:endParaRPr lang="en-US" sz="4000" dirty="0"/>
           </a:p>
@@ -20862,109 +22006,9 @@
           </a:p>
         </p:txBody>
       </p:sp>
-      <p:sp>
-        <p:nvSpPr>
-          <p:cNvPr id="3" name="Text 1"/>
-          <p:cNvSpPr/>
-          <p:nvPr/>
-        </p:nvSpPr>
-        <p:spPr>
-          <a:xfrm>
-            <a:off x="365760" y="1005840"/>
-            <a:ext cx="11460175" cy="731520"/>
-          </a:xfrm>
-          <a:prstGeom prst="rect">
-            <a:avLst/>
-          </a:prstGeom>
-          <a:noFill/>
-          <a:ln/>
-        </p:spPr>
-        <p:txBody>
-          <a:bodyPr wrap="square" lIns="0" tIns="0" rIns="0" bIns="0" rtlCol="0" anchor="ctr">
-            <a:normAutofit/>
-          </a:bodyPr>
-          <a:lstStyle/>
-          <a:p>
-            <a:pPr algn="ctr" indent="0" marL="0">
-              <a:buNone/>
-            </a:pPr>
-            <a:r>
-              <a:rPr lang="en-US" sz="3600" b="1" dirty="0">
-                <a:solidFill>
-                  <a:srgbClr val="990011"/>
-                </a:solidFill>
-                <a:latin typeface="Times New Roman" pitchFamily="34" charset="0"/>
-                <a:ea typeface="Times New Roman" pitchFamily="34" charset="-122"/>
-                <a:cs typeface="Times New Roman" pitchFamily="34" charset="-120"/>
-              </a:rPr>
-              <a:t>3. Quartiles and the Interquartile Range</a:t>
-            </a:r>
-            <a:endParaRPr lang="en-US" sz="3600" dirty="0"/>
-          </a:p>
-        </p:txBody>
-      </p:sp>
-      <p:sp>
-        <p:nvSpPr>
-          <p:cNvPr id="4" name="Text 2"/>
-          <p:cNvSpPr/>
-          <p:nvPr/>
-        </p:nvSpPr>
-        <p:spPr>
-          <a:xfrm>
-            <a:off x="365760" y="1783080"/>
-            <a:ext cx="6035040" cy="4617720"/>
-          </a:xfrm>
-          <a:prstGeom prst="rect">
-            <a:avLst/>
-          </a:prstGeom>
-          <a:noFill/>
-          <a:ln/>
-        </p:spPr>
-        <p:txBody>
-          <a:bodyPr wrap="square" lIns="0" tIns="0" rIns="0" bIns="0" rtlCol="0" anchor="t"/>
-          <a:lstStyle/>
-          <a:p>
-            <a:pPr algn="l" indent="0" marL="0">
-              <a:spcAft>
-                <a:spcPts val="800"/>
-              </a:spcAft>
-              <a:buNone/>
-            </a:pPr>
-            <a:r>
-              <a:rPr lang="en-US" sz="3600" b="1" dirty="0">
-                <a:solidFill>
-                  <a:srgbClr val="111111"/>
-                </a:solidFill>
-                <a:latin typeface="Times New Roman" pitchFamily="34" charset="0"/>
-                <a:ea typeface="Times New Roman" pitchFamily="34" charset="-122"/>
-                <a:cs typeface="Times New Roman" pitchFamily="34" charset="-120"/>
-              </a:rPr>
-              <a:t>Advantage: </a:t>
-            </a:r>
-            <a:pPr algn="l" indent="0" marL="0">
-              <a:spcAft>
-                <a:spcPts val="800"/>
-              </a:spcAft>
-              <a:buNone/>
-            </a:pPr>
-            <a:r>
-              <a:rPr lang="en-US" sz="3600" dirty="0">
-                <a:solidFill>
-                  <a:srgbClr val="111111"/>
-                </a:solidFill>
-                <a:latin typeface="Times New Roman" pitchFamily="34" charset="0"/>
-                <a:ea typeface="Times New Roman" pitchFamily="34" charset="-122"/>
-                <a:cs typeface="Times New Roman" pitchFamily="34" charset="-120"/>
-              </a:rPr>
-              <a:t>The IQR covers the middle 50 % of the data and ignores the lowest and highest quarters. It is therefore not affected by outliers, unlike the range.</a:t>
-            </a:r>
-            <a:endParaRPr lang="en-US" sz="3600" dirty="0"/>
-          </a:p>
-        </p:txBody>
-      </p:sp>
       <p:pic>
         <p:nvPicPr>
-          <p:cNvPr id="5" name="Image 0" descr="/home/claude/f4/img/v2/box_whisker_big.png">    </p:cNvPr>
+          <p:cNvPr id="3" name="Image 0" descr="/home/claude/f4/img/minesec_sheet.png">    </p:cNvPr>
           <p:cNvPicPr>
             <a:picLocks noChangeAspect="1"/>
           </p:cNvPicPr>
@@ -20978,8 +22022,8 @@
         </p:blipFill>
         <p:spPr>
           <a:xfrm>
-            <a:off x="6537960" y="2721454"/>
-            <a:ext cx="5470855" cy="2393499"/>
+            <a:off x="0" y="658368"/>
+            <a:ext cx="5120640" cy="5833872"/>
           </a:xfrm>
           <a:prstGeom prst="rect">
             <a:avLst/>
@@ -20988,14 +22032,14 @@
       </p:pic>
       <p:sp>
         <p:nvSpPr>
-          <p:cNvPr id="6" name="Text 3"/>
+          <p:cNvPr id="4" name="Text 1"/>
           <p:cNvSpPr/>
           <p:nvPr/>
         </p:nvSpPr>
         <p:spPr>
           <a:xfrm>
-            <a:off x="6537960" y="6089904"/>
-            <a:ext cx="5470855" cy="347472"/>
+            <a:off x="5349240" y="1005840"/>
+            <a:ext cx="6522415" cy="731520"/>
           </a:xfrm>
           <a:prstGeom prst="rect">
             <a:avLst/>
@@ -21004,24 +22048,124 @@
           <a:ln/>
         </p:spPr>
         <p:txBody>
-          <a:bodyPr wrap="square" lIns="0" tIns="0" rIns="0" bIns="0" rtlCol="0" anchor="ctr"/>
+          <a:bodyPr wrap="square" lIns="0" tIns="0" rIns="0" bIns="0" rtlCol="0" anchor="ctr">
+            <a:normAutofit/>
+          </a:bodyPr>
           <a:lstStyle/>
           <a:p>
             <a:pPr algn="ctr" indent="0" marL="0">
               <a:buNone/>
             </a:pPr>
             <a:r>
-              <a:rPr lang="en-US" sz="1600" i="1" dirty="0">
-                <a:solidFill>
-                  <a:srgbClr val="555555"/>
+              <a:rPr lang="en-US" sz="3600" b="1" dirty="0">
+                <a:solidFill>
+                  <a:srgbClr val="990011"/>
                 </a:solidFill>
                 <a:latin typeface="Times New Roman" pitchFamily="34" charset="0"/>
                 <a:ea typeface="Times New Roman" pitchFamily="34" charset="-122"/>
                 <a:cs typeface="Times New Roman" pitchFamily="34" charset="-120"/>
               </a:rPr>
-              <a:t>Illustration: a box and whisker plot</a:t>
-            </a:r>
-            <a:endParaRPr lang="en-US" sz="1600" dirty="0"/>
+              <a:t>1. Measures of Central Tendency</a:t>
+            </a:r>
+            <a:endParaRPr lang="en-US" sz="3600" dirty="0"/>
+          </a:p>
+        </p:txBody>
+      </p:sp>
+      <p:sp>
+        <p:nvSpPr>
+          <p:cNvPr id="5" name="Text 2"/>
+          <p:cNvSpPr/>
+          <p:nvPr/>
+        </p:nvSpPr>
+        <p:spPr>
+          <a:xfrm>
+            <a:off x="5349240" y="1737360"/>
+            <a:ext cx="6522415" cy="457200"/>
+          </a:xfrm>
+          <a:prstGeom prst="rect">
+            <a:avLst/>
+          </a:prstGeom>
+          <a:noFill/>
+          <a:ln/>
+        </p:spPr>
+        <p:txBody>
+          <a:bodyPr wrap="square" lIns="0" tIns="0" rIns="0" bIns="0" rtlCol="0" anchor="ctr"/>
+          <a:lstStyle/>
+          <a:p>
+            <a:pPr algn="l" indent="0" marL="0">
+              <a:buNone/>
+            </a:pPr>
+            <a:r>
+              <a:rPr lang="en-US" sz="3200" b="1" dirty="0">
+                <a:solidFill>
+                  <a:srgbClr val="990011"/>
+                </a:solidFill>
+                <a:latin typeface="Times New Roman" pitchFamily="34" charset="0"/>
+                <a:ea typeface="Times New Roman" pitchFamily="34" charset="-122"/>
+                <a:cs typeface="Times New Roman" pitchFamily="34" charset="-120"/>
+              </a:rPr>
+              <a:t>E) The Mode: Calculation</a:t>
+            </a:r>
+            <a:endParaRPr lang="en-US" sz="3200" dirty="0"/>
+          </a:p>
+        </p:txBody>
+      </p:sp>
+      <p:sp>
+        <p:nvSpPr>
+          <p:cNvPr id="6" name="Text 3"/>
+          <p:cNvSpPr/>
+          <p:nvPr/>
+        </p:nvSpPr>
+        <p:spPr>
+          <a:xfrm>
+            <a:off x="5349240" y="2240280"/>
+            <a:ext cx="6522415" cy="4206240"/>
+          </a:xfrm>
+          <a:prstGeom prst="rect">
+            <a:avLst/>
+          </a:prstGeom>
+          <a:noFill/>
+          <a:ln/>
+        </p:spPr>
+        <p:txBody>
+          <a:bodyPr wrap="square" lIns="0" tIns="0" rIns="0" bIns="0" rtlCol="0" anchor="t"/>
+          <a:lstStyle/>
+          <a:p>
+            <a:pPr algn="l" indent="0" marL="0">
+              <a:spcAft>
+                <a:spcPts val="800"/>
+              </a:spcAft>
+              <a:buNone/>
+            </a:pPr>
+            <a:r>
+              <a:rPr lang="en-US" sz="4000" b="1" dirty="0">
+                <a:solidFill>
+                  <a:srgbClr val="111111"/>
+                </a:solidFill>
+                <a:latin typeface="Times New Roman" pitchFamily="34" charset="0"/>
+                <a:ea typeface="Times New Roman" pitchFamily="34" charset="-122"/>
+                <a:cs typeface="Times New Roman" pitchFamily="34" charset="-120"/>
+              </a:rPr>
+              <a:t>A bimodal set: </a:t>
+            </a:r>
+            <a:pPr algn="l" indent="0" marL="0">
+              <a:spcAft>
+                <a:spcPts val="800"/>
+              </a:spcAft>
+              <a:buNone/>
+            </a:pPr>
+            <a:r>
+              <a:rPr lang="en-US" sz="4000" dirty="0">
+                <a:solidFill>
+                  <a:srgbClr val="111111"/>
+                </a:solidFill>
+                <a:latin typeface="Times New Roman" pitchFamily="34" charset="0"/>
+                <a:ea typeface="Times New Roman" pitchFamily="34" charset="-122"/>
+                <a:cs typeface="Times New Roman" pitchFamily="34" charset="-120"/>
+              </a:rPr>
+              <a:t>In the set 1, 8, 7, 8, 5, 9, 11 and 5, the values 5 and 8 both occur twice. The set has two modes and is called bimodal.</a:t>
+            </a:r>
+            <a:endParaRPr lang="en-US" sz="4000" dirty="0"/>
           </a:p>
         </p:txBody>
       </p:sp>
@@ -21131,15 +22275,176 @@
                 <a:ea typeface="Calibri" pitchFamily="34" charset="-122"/>
                 <a:cs typeface="Calibri" pitchFamily="34" charset="-120"/>
               </a:rPr>
-              <a:t>FORMATIVE EVALUATION</a:t>
+              <a:t>BOARD SUMMARY</a:t>
             </a:r>
             <a:endParaRPr lang="en-US" sz="1400" dirty="0"/>
+          </a:p>
+        </p:txBody>
+      </p:sp>
+      <p:sp>
+        <p:nvSpPr>
+          <p:cNvPr id="3" name="Text 1"/>
+          <p:cNvSpPr/>
+          <p:nvPr/>
+        </p:nvSpPr>
+        <p:spPr>
+          <a:xfrm>
+            <a:off x="365760" y="1005840"/>
+            <a:ext cx="11460175" cy="731520"/>
+          </a:xfrm>
+          <a:prstGeom prst="rect">
+            <a:avLst/>
+          </a:prstGeom>
+          <a:noFill/>
+          <a:ln/>
+        </p:spPr>
+        <p:txBody>
+          <a:bodyPr wrap="square" lIns="0" tIns="0" rIns="0" bIns="0" rtlCol="0" anchor="ctr">
+            <a:normAutofit/>
+          </a:bodyPr>
+          <a:lstStyle/>
+          <a:p>
+            <a:pPr algn="ctr" indent="0" marL="0">
+              <a:buNone/>
+            </a:pPr>
+            <a:r>
+              <a:rPr lang="en-US" sz="3600" b="1" dirty="0">
+                <a:solidFill>
+                  <a:srgbClr val="990011"/>
+                </a:solidFill>
+                <a:latin typeface="Times New Roman" pitchFamily="34" charset="0"/>
+                <a:ea typeface="Times New Roman" pitchFamily="34" charset="-122"/>
+                <a:cs typeface="Times New Roman" pitchFamily="34" charset="-120"/>
+              </a:rPr>
+              <a:t>1. Measures of Central Tendency</a:t>
+            </a:r>
+            <a:endParaRPr lang="en-US" sz="3600" dirty="0"/>
+          </a:p>
+        </p:txBody>
+      </p:sp>
+      <p:sp>
+        <p:nvSpPr>
+          <p:cNvPr id="4" name="Text 2"/>
+          <p:cNvSpPr/>
+          <p:nvPr/>
+        </p:nvSpPr>
+        <p:spPr>
+          <a:xfrm>
+            <a:off x="365760" y="1737360"/>
+            <a:ext cx="6035040" cy="457200"/>
+          </a:xfrm>
+          <a:prstGeom prst="rect">
+            <a:avLst/>
+          </a:prstGeom>
+          <a:noFill/>
+          <a:ln/>
+        </p:spPr>
+        <p:txBody>
+          <a:bodyPr wrap="square" lIns="0" tIns="0" rIns="0" bIns="0" rtlCol="0" anchor="ctr">
+            <a:normAutofit/>
+          </a:bodyPr>
+          <a:lstStyle/>
+          <a:p>
+            <a:pPr algn="l" indent="0" marL="0">
+              <a:buNone/>
+            </a:pPr>
+            <a:r>
+              <a:rPr lang="en-US" sz="3000" b="1" dirty="0">
+                <a:solidFill>
+                  <a:srgbClr val="990011"/>
+                </a:solidFill>
+                <a:latin typeface="Times New Roman" pitchFamily="34" charset="0"/>
+                <a:ea typeface="Times New Roman" pitchFamily="34" charset="-122"/>
+                <a:cs typeface="Times New Roman" pitchFamily="34" charset="-120"/>
+              </a:rPr>
+              <a:t>F) The Mode: Advantages and Disadvantages</a:t>
+            </a:r>
+            <a:endParaRPr lang="en-US" sz="3000" dirty="0"/>
+          </a:p>
+        </p:txBody>
+      </p:sp>
+      <p:sp>
+        <p:nvSpPr>
+          <p:cNvPr id="5" name="Text 3"/>
+          <p:cNvSpPr/>
+          <p:nvPr/>
+        </p:nvSpPr>
+        <p:spPr>
+          <a:xfrm>
+            <a:off x="365760" y="2240280"/>
+            <a:ext cx="6035040" cy="4160520"/>
+          </a:xfrm>
+          <a:prstGeom prst="rect">
+            <a:avLst/>
+          </a:prstGeom>
+          <a:noFill/>
+          <a:ln/>
+        </p:spPr>
+        <p:txBody>
+          <a:bodyPr wrap="square" lIns="0" tIns="0" rIns="0" bIns="0" rtlCol="0" anchor="t"/>
+          <a:lstStyle/>
+          <a:p>
+            <a:pPr algn="l" indent="0" marL="0">
+              <a:spcAft>
+                <a:spcPts val="800"/>
+              </a:spcAft>
+              <a:buNone/>
+            </a:pPr>
+            <a:r>
+              <a:rPr lang="en-US" sz="3200" i="1" dirty="0">
+                <a:solidFill>
+                  <a:srgbClr val="111111"/>
+                </a:solidFill>
+                <a:latin typeface="Times New Roman" pitchFamily="34" charset="0"/>
+                <a:ea typeface="Times New Roman" pitchFamily="34" charset="-122"/>
+                <a:cs typeface="Times New Roman" pitchFamily="34" charset="-120"/>
+              </a:rPr>
+              <a:t>The mode has the following advantages and disadvantages:</a:t>
+            </a:r>
+            <a:endParaRPr lang="en-US" sz="3200" dirty="0"/>
+          </a:p>
+          <a:p>
+            <a:pPr algn="l" indent="0" marL="0">
+              <a:spcAft>
+                <a:spcPts val="800"/>
+              </a:spcAft>
+              <a:buNone/>
+            </a:pPr>
+            <a:r>
+              <a:rPr lang="en-US" sz="3200" b="1" dirty="0">
+                <a:solidFill>
+                  <a:srgbClr val="111111"/>
+                </a:solidFill>
+                <a:latin typeface="Times New Roman" pitchFamily="34" charset="0"/>
+                <a:ea typeface="Times New Roman" pitchFamily="34" charset="-122"/>
+                <a:cs typeface="Times New Roman" pitchFamily="34" charset="-120"/>
+              </a:rPr>
+              <a:t>It can be used for categories: </a:t>
+            </a:r>
+            <a:pPr algn="l" indent="0" marL="0">
+              <a:spcAft>
+                <a:spcPts val="800"/>
+              </a:spcAft>
+              <a:buNone/>
+            </a:pPr>
+            <a:r>
+              <a:rPr lang="en-US" sz="3200" dirty="0">
+                <a:solidFill>
+                  <a:srgbClr val="111111"/>
+                </a:solidFill>
+                <a:latin typeface="Times New Roman" pitchFamily="34" charset="0"/>
+                <a:ea typeface="Times New Roman" pitchFamily="34" charset="-122"/>
+                <a:cs typeface="Times New Roman" pitchFamily="34" charset="-120"/>
+              </a:rPr>
+              <a:t>The mode is the only measure that works for categories, such as soil types or means of transport. It shows the most common category.</a:t>
+            </a:r>
+            <a:endParaRPr lang="en-US" sz="3200" dirty="0"/>
           </a:p>
         </p:txBody>
       </p:sp>
       <p:pic>
         <p:nvPicPr>
-          <p:cNvPr id="3" name="Image 0" descr="/home/claude/f4/img/minesec_sheet.png">    </p:cNvPr>
+          <p:cNvPr id="6" name="Image 0" descr="/home/claude/f4/img/v2/stat2_central_compare.png">    </p:cNvPr>
           <p:cNvPicPr>
             <a:picLocks noChangeAspect="1"/>
           </p:cNvPicPr>
@@ -21153,8 +22458,8 @@
         </p:blipFill>
         <p:spPr>
           <a:xfrm>
-            <a:off x="0" y="658368"/>
-            <a:ext cx="5120640" cy="5833872"/>
+            <a:off x="6537960" y="2849678"/>
+            <a:ext cx="5470855" cy="2137053"/>
           </a:xfrm>
           <a:prstGeom prst="rect">
             <a:avLst/>
@@ -21163,14 +22468,14 @@
       </p:pic>
       <p:sp>
         <p:nvSpPr>
-          <p:cNvPr id="4" name="Text 1"/>
+          <p:cNvPr id="7" name="Text 4"/>
           <p:cNvSpPr/>
           <p:nvPr/>
         </p:nvSpPr>
         <p:spPr>
           <a:xfrm>
-            <a:off x="5349240" y="1005840"/>
-            <a:ext cx="6522415" cy="731520"/>
+            <a:off x="6537960" y="6089904"/>
+            <a:ext cx="5470855" cy="347472"/>
           </a:xfrm>
           <a:prstGeom prst="rect">
             <a:avLst/>
@@ -21179,68 +22484,24 @@
           <a:ln/>
         </p:spPr>
         <p:txBody>
-          <a:bodyPr wrap="square" lIns="0" tIns="0" rIns="0" bIns="0" rtlCol="0" anchor="ctr">
-            <a:normAutofit/>
-          </a:bodyPr>
+          <a:bodyPr wrap="square" lIns="0" tIns="0" rIns="0" bIns="0" rtlCol="0" anchor="ctr"/>
           <a:lstStyle/>
           <a:p>
             <a:pPr algn="ctr" indent="0" marL="0">
               <a:buNone/>
             </a:pPr>
             <a:r>
-              <a:rPr lang="en-US" sz="3600" b="1" dirty="0">
-                <a:solidFill>
-                  <a:srgbClr val="990011"/>
+              <a:rPr lang="en-US" sz="1600" i="1" dirty="0">
+                <a:solidFill>
+                  <a:srgbClr val="555555"/>
                 </a:solidFill>
                 <a:latin typeface="Times New Roman" pitchFamily="34" charset="0"/>
                 <a:ea typeface="Times New Roman" pitchFamily="34" charset="-122"/>
                 <a:cs typeface="Times New Roman" pitchFamily="34" charset="-120"/>
               </a:rPr>
-              <a:t>Evaluation 1</a:t>
-            </a:r>
-            <a:endParaRPr lang="en-US" sz="3600" dirty="0"/>
-          </a:p>
-        </p:txBody>
-      </p:sp>
-      <p:sp>
-        <p:nvSpPr>
-          <p:cNvPr id="5" name="Text 2"/>
-          <p:cNvSpPr/>
-          <p:nvPr/>
-        </p:nvSpPr>
-        <p:spPr>
-          <a:xfrm>
-            <a:off x="5349240" y="1783080"/>
-            <a:ext cx="6522415" cy="4663440"/>
-          </a:xfrm>
-          <a:prstGeom prst="rect">
-            <a:avLst/>
-          </a:prstGeom>
-          <a:noFill/>
-          <a:ln/>
-        </p:spPr>
-        <p:txBody>
-          <a:bodyPr wrap="square" lIns="0" tIns="0" rIns="0" bIns="0" rtlCol="0" anchor="t"/>
-          <a:lstStyle/>
-          <a:p>
-            <a:pPr algn="l" indent="0" marL="0">
-              <a:spcAft>
-                <a:spcPts val="800"/>
-              </a:spcAft>
-              <a:buNone/>
-            </a:pPr>
-            <a:r>
-              <a:rPr lang="en-US" sz="4000" dirty="0">
-                <a:solidFill>
-                  <a:srgbClr val="111111"/>
-                </a:solidFill>
-                <a:latin typeface="Times New Roman" pitchFamily="34" charset="0"/>
-                <a:ea typeface="Times New Roman" pitchFamily="34" charset="-122"/>
-                <a:cs typeface="Times New Roman" pitchFamily="34" charset="-120"/>
-              </a:rPr>
-              <a:t>Find the mean, median and mode of 4, 7, 7, 9, 13.</a:t>
-            </a:r>
-            <a:endParaRPr lang="en-US" sz="4000" dirty="0"/>
+              <a:t>Illustration: comparing the three measures</a:t>
+            </a:r>
+            <a:endParaRPr lang="en-US" sz="1600" dirty="0"/>
           </a:p>
         </p:txBody>
       </p:sp>
@@ -21350,7 +22611,7 @@
                 <a:ea typeface="Calibri" pitchFamily="34" charset="-122"/>
                 <a:cs typeface="Calibri" pitchFamily="34" charset="-120"/>
               </a:rPr>
-              <a:t>FORMATIVE EVALUATION</a:t>
+              <a:t>BOARD SUMMARY</a:t>
             </a:r>
             <a:endParaRPr lang="en-US" sz="1400" dirty="0"/>
           </a:p>
@@ -21415,7 +22676,7 @@
                 <a:ea typeface="Times New Roman" pitchFamily="34" charset="-122"/>
                 <a:cs typeface="Times New Roman" pitchFamily="34" charset="-120"/>
               </a:rPr>
-              <a:t>Expected Answer</a:t>
+              <a:t>1. Measures of Central Tendency</a:t>
             </a:r>
             <a:endParaRPr lang="en-US" sz="3600" dirty="0"/>
           </a:p>
@@ -21429,8 +22690,47 @@
         </p:nvSpPr>
         <p:spPr>
           <a:xfrm>
-            <a:off x="5349240" y="1783080"/>
-            <a:ext cx="6522415" cy="4663440"/>
+            <a:off x="5349240" y="1737360"/>
+            <a:ext cx="6522415" cy="457200"/>
+          </a:xfrm>
+          <a:prstGeom prst="rect">
+            <a:avLst/>
+          </a:prstGeom>
+          <a:noFill/>
+          <a:ln/>
+        </p:spPr>
+        <p:txBody>
+          <a:bodyPr wrap="square" lIns="0" tIns="0" rIns="0" bIns="0" rtlCol="0" anchor="ctr"/>
+          <a:lstStyle/>
+          <a:p>
+            <a:pPr algn="l" indent="0" marL="0">
+              <a:buNone/>
+            </a:pPr>
+            <a:r>
+              <a:rPr lang="en-US" sz="2500" b="1" dirty="0">
+                <a:solidFill>
+                  <a:srgbClr val="990011"/>
+                </a:solidFill>
+                <a:latin typeface="Times New Roman" pitchFamily="34" charset="0"/>
+                <a:ea typeface="Times New Roman" pitchFamily="34" charset="-122"/>
+                <a:cs typeface="Times New Roman" pitchFamily="34" charset="-120"/>
+              </a:rPr>
+              <a:t>F) The Mode: Advantages and Disadvantages</a:t>
+            </a:r>
+            <a:endParaRPr lang="en-US" sz="2500" dirty="0"/>
+          </a:p>
+        </p:txBody>
+      </p:sp>
+      <p:sp>
+        <p:nvSpPr>
+          <p:cNvPr id="6" name="Text 3"/>
+          <p:cNvSpPr/>
+          <p:nvPr/>
+        </p:nvSpPr>
+        <p:spPr>
+          <a:xfrm>
+            <a:off x="5349240" y="2240280"/>
+            <a:ext cx="6522415" cy="4206240"/>
           </a:xfrm>
           <a:prstGeom prst="rect">
             <a:avLst/>
@@ -21449,7 +22749,7 @@
               <a:buNone/>
             </a:pPr>
             <a:r>
-              <a:rPr lang="en-US" sz="4000" dirty="0">
+              <a:rPr lang="en-US" sz="4000" b="1" dirty="0">
                 <a:solidFill>
                   <a:srgbClr val="111111"/>
                 </a:solidFill>
@@ -21457,7 +22757,24 @@
                 <a:ea typeface="Times New Roman" pitchFamily="34" charset="-122"/>
                 <a:cs typeface="Times New Roman" pitchFamily="34" charset="-120"/>
               </a:rPr>
-              <a:t>Mean = 40 ÷ 5 = 8; median = 7; mode = 7.</a:t>
+              <a:t>It is not affected by outliers: </a:t>
+            </a:r>
+            <a:pPr algn="l" indent="0" marL="0">
+              <a:spcAft>
+                <a:spcPts val="800"/>
+              </a:spcAft>
+              <a:buNone/>
+            </a:pPr>
+            <a:r>
+              <a:rPr lang="en-US" sz="4000" dirty="0">
+                <a:solidFill>
+                  <a:srgbClr val="111111"/>
+                </a:solidFill>
+                <a:latin typeface="Times New Roman" pitchFamily="34" charset="0"/>
+                <a:ea typeface="Times New Roman" pitchFamily="34" charset="-122"/>
+                <a:cs typeface="Times New Roman" pitchFamily="34" charset="-120"/>
+              </a:rPr>
+              <a:t>Extreme values are rare, so they do not change the most frequent value. The mode remains a typical value.</a:t>
             </a:r>
             <a:endParaRPr lang="en-US" sz="4000" dirty="0"/>
           </a:p>
@@ -21569,7 +22886,7 @@
                 <a:ea typeface="Calibri" pitchFamily="34" charset="-122"/>
                 <a:cs typeface="Calibri" pitchFamily="34" charset="-120"/>
               </a:rPr>
-              <a:t>FORMATIVE EVALUATION</a:t>
+              <a:t>BOARD SUMMARY</a:t>
             </a:r>
             <a:endParaRPr lang="en-US" sz="1400" dirty="0"/>
           </a:p>
@@ -21634,7 +22951,7 @@
                 <a:ea typeface="Times New Roman" pitchFamily="34" charset="-122"/>
                 <a:cs typeface="Times New Roman" pitchFamily="34" charset="-120"/>
               </a:rPr>
-              <a:t>Evaluation 2</a:t>
+              <a:t>1. Measures of Central Tendency</a:t>
             </a:r>
             <a:endParaRPr lang="en-US" sz="3600" dirty="0"/>
           </a:p>
@@ -21648,8 +22965,47 @@
         </p:nvSpPr>
         <p:spPr>
           <a:xfrm>
-            <a:off x="5349240" y="1783080"/>
-            <a:ext cx="6522415" cy="4663440"/>
+            <a:off x="5349240" y="1737360"/>
+            <a:ext cx="6522415" cy="457200"/>
+          </a:xfrm>
+          <a:prstGeom prst="rect">
+            <a:avLst/>
+          </a:prstGeom>
+          <a:noFill/>
+          <a:ln/>
+        </p:spPr>
+        <p:txBody>
+          <a:bodyPr wrap="square" lIns="0" tIns="0" rIns="0" bIns="0" rtlCol="0" anchor="ctr"/>
+          <a:lstStyle/>
+          <a:p>
+            <a:pPr algn="l" indent="0" marL="0">
+              <a:buNone/>
+            </a:pPr>
+            <a:r>
+              <a:rPr lang="en-US" sz="2500" b="1" dirty="0">
+                <a:solidFill>
+                  <a:srgbClr val="990011"/>
+                </a:solidFill>
+                <a:latin typeface="Times New Roman" pitchFamily="34" charset="0"/>
+                <a:ea typeface="Times New Roman" pitchFamily="34" charset="-122"/>
+                <a:cs typeface="Times New Roman" pitchFamily="34" charset="-120"/>
+              </a:rPr>
+              <a:t>F) The Mode: Advantages and Disadvantages</a:t>
+            </a:r>
+            <a:endParaRPr lang="en-US" sz="2500" dirty="0"/>
+          </a:p>
+        </p:txBody>
+      </p:sp>
+      <p:sp>
+        <p:nvSpPr>
+          <p:cNvPr id="6" name="Text 3"/>
+          <p:cNvSpPr/>
+          <p:nvPr/>
+        </p:nvSpPr>
+        <p:spPr>
+          <a:xfrm>
+            <a:off x="5349240" y="2240280"/>
+            <a:ext cx="6522415" cy="4206240"/>
           </a:xfrm>
           <a:prstGeom prst="rect">
             <a:avLst/>
@@ -21668,7 +23024,7 @@
               <a:buNone/>
             </a:pPr>
             <a:r>
-              <a:rPr lang="en-US" sz="4000" dirty="0">
+              <a:rPr lang="en-US" sz="4000" b="1" dirty="0">
                 <a:solidFill>
                   <a:srgbClr val="111111"/>
                 </a:solidFill>
@@ -21676,7 +23032,24 @@
                 <a:ea typeface="Times New Roman" pitchFamily="34" charset="-122"/>
                 <a:cs typeface="Times New Roman" pitchFamily="34" charset="-120"/>
               </a:rPr>
-              <a:t>Why is the median better than the mean for Oumarou's farms?</a:t>
+              <a:t>There may be no mode or several: </a:t>
+            </a:r>
+            <a:pPr algn="l" indent="0" marL="0">
+              <a:spcAft>
+                <a:spcPts val="800"/>
+              </a:spcAft>
+              <a:buNone/>
+            </a:pPr>
+            <a:r>
+              <a:rPr lang="en-US" sz="4000" dirty="0">
+                <a:solidFill>
+                  <a:srgbClr val="111111"/>
+                </a:solidFill>
+                <a:latin typeface="Times New Roman" pitchFamily="34" charset="0"/>
+                <a:ea typeface="Times New Roman" pitchFamily="34" charset="-122"/>
+                <a:cs typeface="Times New Roman" pitchFamily="34" charset="-120"/>
+              </a:rPr>
+              <a:t>Some sets have no repeated value, and others have two or more modes. The mode also ignores all the other values.</a:t>
             </a:r>
             <a:endParaRPr lang="en-US" sz="4000" dirty="0"/>
           </a:p>
@@ -21788,15 +23161,176 @@
                 <a:ea typeface="Calibri" pitchFamily="34" charset="-122"/>
                 <a:cs typeface="Calibri" pitchFamily="34" charset="-120"/>
               </a:rPr>
-              <a:t>FORMATIVE EVALUATION</a:t>
+              <a:t>BOARD SUMMARY</a:t>
             </a:r>
             <a:endParaRPr lang="en-US" sz="1400" dirty="0"/>
+          </a:p>
+        </p:txBody>
+      </p:sp>
+      <p:sp>
+        <p:nvSpPr>
+          <p:cNvPr id="3" name="Text 1"/>
+          <p:cNvSpPr/>
+          <p:nvPr/>
+        </p:nvSpPr>
+        <p:spPr>
+          <a:xfrm>
+            <a:off x="365760" y="1005840"/>
+            <a:ext cx="11460175" cy="731520"/>
+          </a:xfrm>
+          <a:prstGeom prst="rect">
+            <a:avLst/>
+          </a:prstGeom>
+          <a:noFill/>
+          <a:ln/>
+        </p:spPr>
+        <p:txBody>
+          <a:bodyPr wrap="square" lIns="0" tIns="0" rIns="0" bIns="0" rtlCol="0" anchor="ctr">
+            <a:normAutofit/>
+          </a:bodyPr>
+          <a:lstStyle/>
+          <a:p>
+            <a:pPr algn="ctr" indent="0" marL="0">
+              <a:buNone/>
+            </a:pPr>
+            <a:r>
+              <a:rPr lang="en-US" sz="3600" b="1" dirty="0">
+                <a:solidFill>
+                  <a:srgbClr val="990011"/>
+                </a:solidFill>
+                <a:latin typeface="Times New Roman" pitchFamily="34" charset="0"/>
+                <a:ea typeface="Times New Roman" pitchFamily="34" charset="-122"/>
+                <a:cs typeface="Times New Roman" pitchFamily="34" charset="-120"/>
+              </a:rPr>
+              <a:t>2. The Range</a:t>
+            </a:r>
+            <a:endParaRPr lang="en-US" sz="3600" dirty="0"/>
+          </a:p>
+        </p:txBody>
+      </p:sp>
+      <p:sp>
+        <p:nvSpPr>
+          <p:cNvPr id="4" name="Text 2"/>
+          <p:cNvSpPr/>
+          <p:nvPr/>
+        </p:nvSpPr>
+        <p:spPr>
+          <a:xfrm>
+            <a:off x="365760" y="1737360"/>
+            <a:ext cx="6035040" cy="457200"/>
+          </a:xfrm>
+          <a:prstGeom prst="rect">
+            <a:avLst/>
+          </a:prstGeom>
+          <a:noFill/>
+          <a:ln/>
+        </p:spPr>
+        <p:txBody>
+          <a:bodyPr wrap="square" lIns="0" tIns="0" rIns="0" bIns="0" rtlCol="0" anchor="ctr">
+            <a:normAutofit/>
+          </a:bodyPr>
+          <a:lstStyle/>
+          <a:p>
+            <a:pPr algn="l" indent="0" marL="0">
+              <a:buNone/>
+            </a:pPr>
+            <a:r>
+              <a:rPr lang="en-US" sz="3000" b="1" dirty="0">
+                <a:solidFill>
+                  <a:srgbClr val="990011"/>
+                </a:solidFill>
+                <a:latin typeface="Times New Roman" pitchFamily="34" charset="0"/>
+                <a:ea typeface="Times New Roman" pitchFamily="34" charset="-122"/>
+                <a:cs typeface="Times New Roman" pitchFamily="34" charset="-120"/>
+              </a:rPr>
+              <a:t>A) Calculation and Interpretation</a:t>
+            </a:r>
+            <a:endParaRPr lang="en-US" sz="3000" dirty="0"/>
+          </a:p>
+        </p:txBody>
+      </p:sp>
+      <p:sp>
+        <p:nvSpPr>
+          <p:cNvPr id="5" name="Text 3"/>
+          <p:cNvSpPr/>
+          <p:nvPr/>
+        </p:nvSpPr>
+        <p:spPr>
+          <a:xfrm>
+            <a:off x="365760" y="2240280"/>
+            <a:ext cx="6035040" cy="4160520"/>
+          </a:xfrm>
+          <a:prstGeom prst="rect">
+            <a:avLst/>
+          </a:prstGeom>
+          <a:noFill/>
+          <a:ln/>
+        </p:spPr>
+        <p:txBody>
+          <a:bodyPr wrap="square" lIns="0" tIns="0" rIns="0" bIns="0" rtlCol="0" anchor="t"/>
+          <a:lstStyle/>
+          <a:p>
+            <a:pPr algn="l" indent="0" marL="0">
+              <a:spcAft>
+                <a:spcPts val="800"/>
+              </a:spcAft>
+              <a:buNone/>
+            </a:pPr>
+            <a:r>
+              <a:rPr lang="en-US" sz="3600" i="1" dirty="0">
+                <a:solidFill>
+                  <a:srgbClr val="111111"/>
+                </a:solidFill>
+                <a:latin typeface="Times New Roman" pitchFamily="34" charset="0"/>
+                <a:ea typeface="Times New Roman" pitchFamily="34" charset="-122"/>
+                <a:cs typeface="Times New Roman" pitchFamily="34" charset="-120"/>
+              </a:rPr>
+              <a:t>The range is calculated and interpreted as follows:</a:t>
+            </a:r>
+            <a:endParaRPr lang="en-US" sz="3600" dirty="0"/>
+          </a:p>
+          <a:p>
+            <a:pPr algn="l" indent="0" marL="0">
+              <a:spcAft>
+                <a:spcPts val="800"/>
+              </a:spcAft>
+              <a:buNone/>
+            </a:pPr>
+            <a:r>
+              <a:rPr lang="en-US" sz="3600" b="1" dirty="0">
+                <a:solidFill>
+                  <a:srgbClr val="111111"/>
+                </a:solidFill>
+                <a:latin typeface="Times New Roman" pitchFamily="34" charset="0"/>
+                <a:ea typeface="Times New Roman" pitchFamily="34" charset="-122"/>
+                <a:cs typeface="Times New Roman" pitchFamily="34" charset="-120"/>
+              </a:rPr>
+              <a:t>Formula: </a:t>
+            </a:r>
+            <a:pPr algn="l" indent="0" marL="0">
+              <a:spcAft>
+                <a:spcPts val="800"/>
+              </a:spcAft>
+              <a:buNone/>
+            </a:pPr>
+            <a:r>
+              <a:rPr lang="en-US" sz="3600" dirty="0">
+                <a:solidFill>
+                  <a:srgbClr val="111111"/>
+                </a:solidFill>
+                <a:latin typeface="Times New Roman" pitchFamily="34" charset="0"/>
+                <a:ea typeface="Times New Roman" pitchFamily="34" charset="-122"/>
+                <a:cs typeface="Times New Roman" pitchFamily="34" charset="-120"/>
+              </a:rPr>
+              <a:t>Range = highest value − lowest value. It measures the spread between the two extreme values.</a:t>
+            </a:r>
+            <a:endParaRPr lang="en-US" sz="3600" dirty="0"/>
           </a:p>
         </p:txBody>
       </p:sp>
       <p:pic>
         <p:nvPicPr>
-          <p:cNvPr id="3" name="Image 0" descr="/home/claude/f4/img/minesec_sheet.png">    </p:cNvPr>
+          <p:cNvPr id="6" name="Image 0" descr="/home/claude/f4/img/v2/f4_maxmin.jpg">    </p:cNvPr>
           <p:cNvPicPr>
             <a:picLocks noChangeAspect="1"/>
           </p:cNvPicPr>
@@ -21810,8 +23344,8 @@
         </p:blipFill>
         <p:spPr>
           <a:xfrm>
-            <a:off x="0" y="658368"/>
-            <a:ext cx="5120640" cy="5833872"/>
+            <a:off x="6537960" y="2400897"/>
+            <a:ext cx="5470855" cy="3034615"/>
           </a:xfrm>
           <a:prstGeom prst="rect">
             <a:avLst/>
@@ -21820,14 +23354,14 @@
       </p:pic>
       <p:sp>
         <p:nvSpPr>
-          <p:cNvPr id="4" name="Text 1"/>
+          <p:cNvPr id="7" name="Text 4"/>
           <p:cNvSpPr/>
           <p:nvPr/>
         </p:nvSpPr>
         <p:spPr>
           <a:xfrm>
-            <a:off x="5349240" y="1005840"/>
-            <a:ext cx="6522415" cy="731520"/>
+            <a:off x="6537960" y="6089904"/>
+            <a:ext cx="5470855" cy="347472"/>
           </a:xfrm>
           <a:prstGeom prst="rect">
             <a:avLst/>
@@ -21836,68 +23370,24 @@
           <a:ln/>
         </p:spPr>
         <p:txBody>
-          <a:bodyPr wrap="square" lIns="0" tIns="0" rIns="0" bIns="0" rtlCol="0" anchor="ctr">
-            <a:normAutofit/>
-          </a:bodyPr>
+          <a:bodyPr wrap="square" lIns="0" tIns="0" rIns="0" bIns="0" rtlCol="0" anchor="ctr"/>
           <a:lstStyle/>
           <a:p>
             <a:pPr algn="ctr" indent="0" marL="0">
               <a:buNone/>
             </a:pPr>
             <a:r>
-              <a:rPr lang="en-US" sz="3600" b="1" dirty="0">
-                <a:solidFill>
-                  <a:srgbClr val="990011"/>
+              <a:rPr lang="en-US" sz="1600" i="1" dirty="0">
+                <a:solidFill>
+                  <a:srgbClr val="555555"/>
                 </a:solidFill>
                 <a:latin typeface="Times New Roman" pitchFamily="34" charset="0"/>
                 <a:ea typeface="Times New Roman" pitchFamily="34" charset="-122"/>
                 <a:cs typeface="Times New Roman" pitchFamily="34" charset="-120"/>
               </a:rPr>
-              <a:t>Expected Answer</a:t>
-            </a:r>
-            <a:endParaRPr lang="en-US" sz="3600" dirty="0"/>
-          </a:p>
-        </p:txBody>
-      </p:sp>
-      <p:sp>
-        <p:nvSpPr>
-          <p:cNvPr id="5" name="Text 2"/>
-          <p:cNvSpPr/>
-          <p:nvPr/>
-        </p:nvSpPr>
-        <p:spPr>
-          <a:xfrm>
-            <a:off x="5349240" y="1783080"/>
-            <a:ext cx="6522415" cy="4663440"/>
-          </a:xfrm>
-          <a:prstGeom prst="rect">
-            <a:avLst/>
-          </a:prstGeom>
-          <a:noFill/>
-          <a:ln/>
-        </p:spPr>
-        <p:txBody>
-          <a:bodyPr wrap="square" lIns="0" tIns="0" rIns="0" bIns="0" rtlCol="0" anchor="t"/>
-          <a:lstStyle/>
-          <a:p>
-            <a:pPr algn="l" indent="0" marL="0">
-              <a:spcAft>
-                <a:spcPts val="800"/>
-              </a:spcAft>
-              <a:buNone/>
-            </a:pPr>
-            <a:r>
-              <a:rPr lang="en-US" sz="4000" dirty="0">
-                <a:solidFill>
-                  <a:srgbClr val="111111"/>
-                </a:solidFill>
-                <a:latin typeface="Times New Roman" pitchFamily="34" charset="0"/>
-                <a:ea typeface="Times New Roman" pitchFamily="34" charset="-122"/>
-                <a:cs typeface="Times New Roman" pitchFamily="34" charset="-120"/>
-              </a:rPr>
-              <a:t>The outlier (45 bags) raises the mean to about 21.3, while the median (19) represents most farms.</a:t>
-            </a:r>
-            <a:endParaRPr lang="en-US" sz="4000" dirty="0"/>
+              <a:t>Illustration: a maximum and minimum thermometer</a:t>
+            </a:r>
+            <a:endParaRPr lang="en-US" sz="1600" dirty="0"/>
           </a:p>
         </p:txBody>
       </p:sp>
@@ -22338,7 +23828,7 @@
                 <a:ea typeface="Calibri" pitchFamily="34" charset="-122"/>
                 <a:cs typeface="Calibri" pitchFamily="34" charset="-120"/>
               </a:rPr>
-              <a:t>REMEDIATION</a:t>
+              <a:t>BOARD SUMMARY</a:t>
             </a:r>
             <a:endParaRPr lang="en-US" sz="1400" dirty="0"/>
           </a:p>
@@ -22403,7 +23893,7 @@
                 <a:ea typeface="Times New Roman" pitchFamily="34" charset="-122"/>
                 <a:cs typeface="Times New Roman" pitchFamily="34" charset="-120"/>
               </a:rPr>
-              <a:t>Remediation</a:t>
+              <a:t>2. The Range</a:t>
             </a:r>
             <a:endParaRPr lang="en-US" sz="3600" dirty="0"/>
           </a:p>
@@ -22417,8 +23907,47 @@
         </p:nvSpPr>
         <p:spPr>
           <a:xfrm>
-            <a:off x="5349240" y="1783080"/>
-            <a:ext cx="6522415" cy="4663440"/>
+            <a:off x="5349240" y="1737360"/>
+            <a:ext cx="6522415" cy="457200"/>
+          </a:xfrm>
+          <a:prstGeom prst="rect">
+            <a:avLst/>
+          </a:prstGeom>
+          <a:noFill/>
+          <a:ln/>
+        </p:spPr>
+        <p:txBody>
+          <a:bodyPr wrap="square" lIns="0" tIns="0" rIns="0" bIns="0" rtlCol="0" anchor="ctr"/>
+          <a:lstStyle/>
+          <a:p>
+            <a:pPr algn="l" indent="0" marL="0">
+              <a:buNone/>
+            </a:pPr>
+            <a:r>
+              <a:rPr lang="en-US" sz="3100" b="1" dirty="0">
+                <a:solidFill>
+                  <a:srgbClr val="990011"/>
+                </a:solidFill>
+                <a:latin typeface="Times New Roman" pitchFamily="34" charset="0"/>
+                <a:ea typeface="Times New Roman" pitchFamily="34" charset="-122"/>
+                <a:cs typeface="Times New Roman" pitchFamily="34" charset="-120"/>
+              </a:rPr>
+              <a:t>A) Calculation and Interpretation</a:t>
+            </a:r>
+            <a:endParaRPr lang="en-US" sz="3100" dirty="0"/>
+          </a:p>
+        </p:txBody>
+      </p:sp>
+      <p:sp>
+        <p:nvSpPr>
+          <p:cNvPr id="6" name="Text 3"/>
+          <p:cNvSpPr/>
+          <p:nvPr/>
+        </p:nvSpPr>
+        <p:spPr>
+          <a:xfrm>
+            <a:off x="5349240" y="2240280"/>
+            <a:ext cx="6522415" cy="4206240"/>
           </a:xfrm>
           <a:prstGeom prst="rect">
             <a:avLst/>
@@ -22445,18 +23974,13 @@
                 <a:ea typeface="Times New Roman" pitchFamily="34" charset="-122"/>
                 <a:cs typeface="Times New Roman" pitchFamily="34" charset="-120"/>
               </a:rPr>
-              <a:t>Fill in the blanks:</a:t>
-            </a:r>
-            <a:endParaRPr lang="en-US" sz="4000" dirty="0"/>
-          </a:p>
-          <a:p>
-            <a:pPr algn="l" marL="342900" indent="-342900">
+              <a:t>Example of Garoua: </a:t>
+            </a:r>
+            <a:pPr algn="l" indent="0" marL="0">
               <a:spcAft>
                 <a:spcPts val="800"/>
               </a:spcAft>
-              <a:buSzPct val="100000"/>
-              <a:buFont typeface="+mj-lt"/>
-              <a:buAutoNum type="arabicPeriod" startAt="1"/>
+              <a:buNone/>
             </a:pPr>
             <a:r>
               <a:rPr lang="en-US" sz="4000" dirty="0">
@@ -22467,51 +23991,7 @@
                 <a:ea typeface="Times New Roman" pitchFamily="34" charset="-122"/>
                 <a:cs typeface="Times New Roman" pitchFamily="34" charset="-120"/>
               </a:rPr>
-              <a:t>Mean = Σx ÷ ______.</a:t>
-            </a:r>
-            <a:endParaRPr lang="en-US" sz="4000" dirty="0"/>
-          </a:p>
-          <a:p>
-            <a:pPr algn="l" marL="342900" indent="-342900">
-              <a:spcAft>
-                <a:spcPts val="800"/>
-              </a:spcAft>
-              <a:buSzPct val="100000"/>
-              <a:buFont typeface="+mj-lt"/>
-              <a:buAutoNum type="arabicPeriod" startAt="1"/>
-            </a:pPr>
-            <a:r>
-              <a:rPr lang="en-US" sz="4000" dirty="0">
-                <a:solidFill>
-                  <a:srgbClr val="111111"/>
-                </a:solidFill>
-                <a:latin typeface="Times New Roman" pitchFamily="34" charset="0"/>
-                <a:ea typeface="Times New Roman" pitchFamily="34" charset="-122"/>
-                <a:cs typeface="Times New Roman" pitchFamily="34" charset="-120"/>
-              </a:rPr>
-              <a:t>The most frequent value is the ______.</a:t>
-            </a:r>
-            <a:endParaRPr lang="en-US" sz="4000" dirty="0"/>
-          </a:p>
-          <a:p>
-            <a:pPr algn="l" marL="342900" indent="-342900">
-              <a:spcAft>
-                <a:spcPts val="800"/>
-              </a:spcAft>
-              <a:buSzPct val="100000"/>
-              <a:buFont typeface="+mj-lt"/>
-              <a:buAutoNum type="arabicPeriod" startAt="1"/>
-            </a:pPr>
-            <a:r>
-              <a:rPr lang="en-US" sz="4000" dirty="0">
-                <a:solidFill>
-                  <a:srgbClr val="111111"/>
-                </a:solidFill>
-                <a:latin typeface="Times New Roman" pitchFamily="34" charset="0"/>
-                <a:ea typeface="Times New Roman" pitchFamily="34" charset="-122"/>
-                <a:cs typeface="Times New Roman" pitchFamily="34" charset="-120"/>
-              </a:rPr>
-              <a:t>IQR = Q3 − ______.</a:t>
+              <a:t>The maximum temperatures of Garoua in a week are 38, 40, 42, 37, 44, 41 and 39 °C. The range is 44 − 37 = 7 °C.</a:t>
             </a:r>
             <a:endParaRPr lang="en-US" sz="4000" dirty="0"/>
           </a:p>
@@ -22623,7 +24103,7 @@
                 <a:ea typeface="Calibri" pitchFamily="34" charset="-122"/>
                 <a:cs typeface="Calibri" pitchFamily="34" charset="-120"/>
               </a:rPr>
-              <a:t>HOMEWORK</a:t>
+              <a:t>BOARD SUMMARY</a:t>
             </a:r>
             <a:endParaRPr lang="en-US" sz="1400" dirty="0"/>
           </a:p>
@@ -22688,7 +24168,7 @@
                 <a:ea typeface="Times New Roman" pitchFamily="34" charset="-122"/>
                 <a:cs typeface="Times New Roman" pitchFamily="34" charset="-120"/>
               </a:rPr>
-              <a:t>Homework</a:t>
+              <a:t>2. The Range</a:t>
             </a:r>
             <a:endParaRPr lang="en-US" sz="3600" dirty="0"/>
           </a:p>
@@ -22702,8 +24182,47 @@
         </p:nvSpPr>
         <p:spPr>
           <a:xfrm>
-            <a:off x="5349240" y="1783080"/>
-            <a:ext cx="6522415" cy="4663440"/>
+            <a:off x="5349240" y="1737360"/>
+            <a:ext cx="6522415" cy="457200"/>
+          </a:xfrm>
+          <a:prstGeom prst="rect">
+            <a:avLst/>
+          </a:prstGeom>
+          <a:noFill/>
+          <a:ln/>
+        </p:spPr>
+        <p:txBody>
+          <a:bodyPr wrap="square" lIns="0" tIns="0" rIns="0" bIns="0" rtlCol="0" anchor="ctr"/>
+          <a:lstStyle/>
+          <a:p>
+            <a:pPr algn="l" indent="0" marL="0">
+              <a:buNone/>
+            </a:pPr>
+            <a:r>
+              <a:rPr lang="en-US" sz="3100" b="1" dirty="0">
+                <a:solidFill>
+                  <a:srgbClr val="990011"/>
+                </a:solidFill>
+                <a:latin typeface="Times New Roman" pitchFamily="34" charset="0"/>
+                <a:ea typeface="Times New Roman" pitchFamily="34" charset="-122"/>
+                <a:cs typeface="Times New Roman" pitchFamily="34" charset="-120"/>
+              </a:rPr>
+              <a:t>A) Calculation and Interpretation</a:t>
+            </a:r>
+            <a:endParaRPr lang="en-US" sz="3100" dirty="0"/>
+          </a:p>
+        </p:txBody>
+      </p:sp>
+      <p:sp>
+        <p:nvSpPr>
+          <p:cNvPr id="6" name="Text 3"/>
+          <p:cNvSpPr/>
+          <p:nvPr/>
+        </p:nvSpPr>
+        <p:spPr>
+          <a:xfrm>
+            <a:off x="5349240" y="2240280"/>
+            <a:ext cx="6522415" cy="4206240"/>
           </a:xfrm>
           <a:prstGeom prst="rect">
             <a:avLst/>
@@ -22722,7 +24241,7 @@
               <a:buNone/>
             </a:pPr>
             <a:r>
-              <a:rPr lang="en-US" sz="4000" dirty="0">
+              <a:rPr lang="en-US" sz="4000" b="1" dirty="0">
                 <a:solidFill>
                   <a:srgbClr val="111111"/>
                 </a:solidFill>
@@ -22730,7 +24249,24 @@
                 <a:ea typeface="Times New Roman" pitchFamily="34" charset="-122"/>
                 <a:cs typeface="Times New Roman" pitchFamily="34" charset="-120"/>
               </a:rPr>
-              <a:t>Calculate the mean of 3, 5, 7 and 9.</a:t>
+              <a:t>Interpretation: </a:t>
+            </a:r>
+            <a:pPr algn="l" indent="0" marL="0">
+              <a:spcAft>
+                <a:spcPts val="800"/>
+              </a:spcAft>
+              <a:buNone/>
+            </a:pPr>
+            <a:r>
+              <a:rPr lang="en-US" sz="4000" dirty="0">
+                <a:solidFill>
+                  <a:srgbClr val="111111"/>
+                </a:solidFill>
+                <a:latin typeface="Times New Roman" pitchFamily="34" charset="0"/>
+                <a:ea typeface="Times New Roman" pitchFamily="34" charset="-122"/>
+                <a:cs typeface="Times New Roman" pitchFamily="34" charset="-120"/>
+              </a:rPr>
+              <a:t>A large range shows widely spread data. A small range, such as 28 − 23 = 5 °C at station A, shows clustered data.</a:t>
             </a:r>
             <a:endParaRPr lang="en-US" sz="4000" dirty="0"/>
           </a:p>
@@ -22842,7 +24378,7 @@
                 <a:ea typeface="Calibri" pitchFamily="34" charset="-122"/>
                 <a:cs typeface="Calibri" pitchFamily="34" charset="-120"/>
               </a:rPr>
-              <a:t>NEXT LESSON</a:t>
+              <a:t>BOARD SUMMARY</a:t>
             </a:r>
             <a:endParaRPr lang="en-US" sz="1400" dirty="0"/>
           </a:p>
@@ -22865,7 +24401,7 @@
         <p:spPr>
           <a:xfrm>
             <a:off x="0" y="658368"/>
-            <a:ext cx="5120640" cy="5833872"/>
+            <a:ext cx="3840480" cy="5833872"/>
           </a:xfrm>
           <a:prstGeom prst="rect">
             <a:avLst/>
@@ -22880,8 +24416,8 @@
         </p:nvSpPr>
         <p:spPr>
           <a:xfrm>
-            <a:off x="5349240" y="1005840"/>
-            <a:ext cx="6522415" cy="731520"/>
+            <a:off x="4069080" y="1005840"/>
+            <a:ext cx="7802575" cy="731520"/>
           </a:xfrm>
           <a:prstGeom prst="rect">
             <a:avLst/>
@@ -22907,7 +24443,7 @@
                 <a:ea typeface="Times New Roman" pitchFamily="34" charset="-122"/>
                 <a:cs typeface="Times New Roman" pitchFamily="34" charset="-120"/>
               </a:rPr>
-              <a:t>Next Lesson</a:t>
+              <a:t>2. The Range</a:t>
             </a:r>
             <a:endParaRPr lang="en-US" sz="3600" dirty="0"/>
           </a:p>
@@ -22921,8 +24457,8 @@
         </p:nvSpPr>
         <p:spPr>
           <a:xfrm>
-            <a:off x="5349240" y="1783080"/>
-            <a:ext cx="6522415" cy="4663440"/>
+            <a:off x="4069080" y="1737360"/>
+            <a:ext cx="7802575" cy="457200"/>
           </a:xfrm>
           <a:prstGeom prst="rect">
             <a:avLst/>
@@ -22934,14 +24470,53 @@
           <a:bodyPr wrap="square" lIns="0" tIns="0" rIns="0" bIns="0" rtlCol="0" anchor="ctr"/>
           <a:lstStyle/>
           <a:p>
-            <a:pPr algn="ctr" indent="0" marL="0">
+            <a:pPr algn="l" indent="0" marL="0">
+              <a:buNone/>
+            </a:pPr>
+            <a:r>
+              <a:rPr lang="en-US" sz="3200" b="1" dirty="0">
+                <a:solidFill>
+                  <a:srgbClr val="990011"/>
+                </a:solidFill>
+                <a:latin typeface="Times New Roman" pitchFamily="34" charset="0"/>
+                <a:ea typeface="Times New Roman" pitchFamily="34" charset="-122"/>
+                <a:cs typeface="Times New Roman" pitchFamily="34" charset="-120"/>
+              </a:rPr>
+              <a:t>B) Advantages and Disadvantages</a:t>
+            </a:r>
+            <a:endParaRPr lang="en-US" sz="3200" dirty="0"/>
+          </a:p>
+        </p:txBody>
+      </p:sp>
+      <p:sp>
+        <p:nvSpPr>
+          <p:cNvPr id="6" name="Text 3"/>
+          <p:cNvSpPr/>
+          <p:nvPr/>
+        </p:nvSpPr>
+        <p:spPr>
+          <a:xfrm>
+            <a:off x="4069080" y="2240280"/>
+            <a:ext cx="7802575" cy="4206240"/>
+          </a:xfrm>
+          <a:prstGeom prst="rect">
+            <a:avLst/>
+          </a:prstGeom>
+          <a:noFill/>
+          <a:ln/>
+        </p:spPr>
+        <p:txBody>
+          <a:bodyPr wrap="square" lIns="0" tIns="0" rIns="0" bIns="0" rtlCol="0" anchor="t"/>
+          <a:lstStyle/>
+          <a:p>
+            <a:pPr algn="l" indent="0" marL="0">
               <a:spcAft>
                 <a:spcPts val="800"/>
               </a:spcAft>
               <a:buNone/>
             </a:pPr>
             <a:r>
-              <a:rPr lang="en-US" sz="4000" b="1" dirty="0">
+              <a:rPr lang="en-US" sz="4000" i="1" dirty="0">
                 <a:solidFill>
                   <a:srgbClr val="111111"/>
                 </a:solidFill>
@@ -22949,12 +24524,12 @@
                 <a:ea typeface="Times New Roman" pitchFamily="34" charset="-122"/>
                 <a:cs typeface="Times New Roman" pitchFamily="34" charset="-120"/>
               </a:rPr>
-              <a:t>Our next lesson will be on:</a:t>
+              <a:t>The range has the following advantages and disadvantages:</a:t>
             </a:r>
             <a:endParaRPr lang="en-US" sz="4000" dirty="0"/>
           </a:p>
           <a:p>
-            <a:pPr algn="ctr" indent="0" marL="0">
+            <a:pPr algn="l" indent="0" marL="0">
               <a:spcAft>
                 <a:spcPts val="800"/>
               </a:spcAft>
@@ -22963,13 +24538,30 @@
             <a:r>
               <a:rPr lang="en-US" sz="4000" b="1" dirty="0">
                 <a:solidFill>
-                  <a:srgbClr val="990011"/>
+                  <a:srgbClr val="111111"/>
                 </a:solidFill>
                 <a:latin typeface="Times New Roman" pitchFamily="34" charset="0"/>
                 <a:ea typeface="Times New Roman" pitchFamily="34" charset="-122"/>
                 <a:cs typeface="Times New Roman" pitchFamily="34" charset="-120"/>
               </a:rPr>
-              <a:t>Quantitative Techniques 3 (Part 2): Measures of Dispersion: Variance, Standard Deviation and Coefficient of Variation</a:t>
+              <a:t>It is simple and quick: </a:t>
+            </a:r>
+            <a:pPr algn="l" indent="0" marL="0">
+              <a:spcAft>
+                <a:spcPts val="800"/>
+              </a:spcAft>
+              <a:buNone/>
+            </a:pPr>
+            <a:r>
+              <a:rPr lang="en-US" sz="4000" dirty="0">
+                <a:solidFill>
+                  <a:srgbClr val="111111"/>
+                </a:solidFill>
+                <a:latin typeface="Times New Roman" pitchFamily="34" charset="0"/>
+                <a:ea typeface="Times New Roman" pitchFamily="34" charset="-122"/>
+                <a:cs typeface="Times New Roman" pitchFamily="34" charset="-120"/>
+              </a:rPr>
+              <a:t>Only the highest and the lowest values are needed. It gives a first idea of the spread of the data.</a:t>
             </a:r>
             <a:endParaRPr lang="en-US" sz="4000" dirty="0"/>
           </a:p>
@@ -23081,22 +24673,46 @@
                 <a:ea typeface="Calibri" pitchFamily="34" charset="-122"/>
                 <a:cs typeface="Calibri" pitchFamily="34" charset="-120"/>
               </a:rPr>
-              <a:t>BILINGUAL GAME</a:t>
+              <a:t>BOARD SUMMARY</a:t>
             </a:r>
             <a:endParaRPr lang="en-US" sz="1400" dirty="0"/>
           </a:p>
         </p:txBody>
       </p:sp>
-      <p:sp>
-        <p:nvSpPr>
-          <p:cNvPr id="3" name="Text 1"/>
+      <p:pic>
+        <p:nvPicPr>
+          <p:cNvPr id="3" name="Image 0" descr="/home/claude/f4/img/minesec_sheet.png">    </p:cNvPr>
+          <p:cNvPicPr>
+            <a:picLocks noChangeAspect="1"/>
+          </p:cNvPicPr>
+          <p:nvPr/>
+        </p:nvPicPr>
+        <p:blipFill>
+          <a:blip r:embed="rId1"/>
+          <a:stretch>
+            <a:fillRect/>
+          </a:stretch>
+        </p:blipFill>
+        <p:spPr>
+          <a:xfrm>
+            <a:off x="0" y="658368"/>
+            <a:ext cx="5120640" cy="5833872"/>
+          </a:xfrm>
+          <a:prstGeom prst="rect">
+            <a:avLst/>
+          </a:prstGeom>
+        </p:spPr>
+      </p:pic>
+      <p:sp>
+        <p:nvSpPr>
+          <p:cNvPr id="4" name="Text 1"/>
           <p:cNvSpPr/>
           <p:nvPr/>
         </p:nvSpPr>
         <p:spPr>
           <a:xfrm>
-            <a:off x="457200" y="1005840"/>
-            <a:ext cx="11277295" cy="731520"/>
+            <a:off x="5349240" y="1005840"/>
+            <a:ext cx="6522415" cy="731520"/>
           </a:xfrm>
           <a:prstGeom prst="rect">
             <a:avLst/>
@@ -23105,7 +24721,9 @@
           <a:ln/>
         </p:spPr>
         <p:txBody>
-          <a:bodyPr wrap="square" lIns="0" tIns="0" rIns="0" bIns="0" rtlCol="0" anchor="ctr"/>
+          <a:bodyPr wrap="square" lIns="0" tIns="0" rIns="0" bIns="0" rtlCol="0" anchor="ctr">
+            <a:normAutofit/>
+          </a:bodyPr>
           <a:lstStyle/>
           <a:p>
             <a:pPr algn="ctr" indent="0" marL="0">
@@ -23120,6 +24738,3179 @@
                 <a:ea typeface="Times New Roman" pitchFamily="34" charset="-122"/>
                 <a:cs typeface="Times New Roman" pitchFamily="34" charset="-120"/>
               </a:rPr>
+              <a:t>2. The Range</a:t>
+            </a:r>
+            <a:endParaRPr lang="en-US" sz="3600" dirty="0"/>
+          </a:p>
+        </p:txBody>
+      </p:sp>
+      <p:sp>
+        <p:nvSpPr>
+          <p:cNvPr id="5" name="Text 2"/>
+          <p:cNvSpPr/>
+          <p:nvPr/>
+        </p:nvSpPr>
+        <p:spPr>
+          <a:xfrm>
+            <a:off x="5349240" y="1737360"/>
+            <a:ext cx="6522415" cy="457200"/>
+          </a:xfrm>
+          <a:prstGeom prst="rect">
+            <a:avLst/>
+          </a:prstGeom>
+          <a:noFill/>
+          <a:ln/>
+        </p:spPr>
+        <p:txBody>
+          <a:bodyPr wrap="square" lIns="0" tIns="0" rIns="0" bIns="0" rtlCol="0" anchor="ctr"/>
+          <a:lstStyle/>
+          <a:p>
+            <a:pPr algn="l" indent="0" marL="0">
+              <a:buNone/>
+            </a:pPr>
+            <a:r>
+              <a:rPr lang="en-US" sz="3200" b="1" dirty="0">
+                <a:solidFill>
+                  <a:srgbClr val="990011"/>
+                </a:solidFill>
+                <a:latin typeface="Times New Roman" pitchFamily="34" charset="0"/>
+                <a:ea typeface="Times New Roman" pitchFamily="34" charset="-122"/>
+                <a:cs typeface="Times New Roman" pitchFamily="34" charset="-120"/>
+              </a:rPr>
+              <a:t>B) Advantages and Disadvantages</a:t>
+            </a:r>
+            <a:endParaRPr lang="en-US" sz="3200" dirty="0"/>
+          </a:p>
+        </p:txBody>
+      </p:sp>
+      <p:sp>
+        <p:nvSpPr>
+          <p:cNvPr id="6" name="Text 3"/>
+          <p:cNvSpPr/>
+          <p:nvPr/>
+        </p:nvSpPr>
+        <p:spPr>
+          <a:xfrm>
+            <a:off x="5349240" y="2240280"/>
+            <a:ext cx="6522415" cy="4206240"/>
+          </a:xfrm>
+          <a:prstGeom prst="rect">
+            <a:avLst/>
+          </a:prstGeom>
+          <a:noFill/>
+          <a:ln/>
+        </p:spPr>
+        <p:txBody>
+          <a:bodyPr wrap="square" lIns="0" tIns="0" rIns="0" bIns="0" rtlCol="0" anchor="t"/>
+          <a:lstStyle/>
+          <a:p>
+            <a:pPr algn="l" indent="0" marL="0">
+              <a:spcAft>
+                <a:spcPts val="800"/>
+              </a:spcAft>
+              <a:buNone/>
+            </a:pPr>
+            <a:r>
+              <a:rPr lang="en-US" sz="4000" b="1" dirty="0">
+                <a:solidFill>
+                  <a:srgbClr val="111111"/>
+                </a:solidFill>
+                <a:latin typeface="Times New Roman" pitchFamily="34" charset="0"/>
+                <a:ea typeface="Times New Roman" pitchFamily="34" charset="-122"/>
+                <a:cs typeface="Times New Roman" pitchFamily="34" charset="-120"/>
+              </a:rPr>
+              <a:t>It is misled by outliers: </a:t>
+            </a:r>
+            <a:pPr algn="l" indent="0" marL="0">
+              <a:spcAft>
+                <a:spcPts val="800"/>
+              </a:spcAft>
+              <a:buNone/>
+            </a:pPr>
+            <a:r>
+              <a:rPr lang="en-US" sz="4000" dirty="0">
+                <a:solidFill>
+                  <a:srgbClr val="111111"/>
+                </a:solidFill>
+                <a:latin typeface="Times New Roman" pitchFamily="34" charset="0"/>
+                <a:ea typeface="Times New Roman" pitchFamily="34" charset="-122"/>
+                <a:cs typeface="Times New Roman" pitchFamily="34" charset="-120"/>
+              </a:rPr>
+              <a:t>It uses only the two extreme values and ignores all the others. One unusual value can therefore give a very large range.</a:t>
+            </a:r>
+            <a:endParaRPr lang="en-US" sz="4000" dirty="0"/>
+          </a:p>
+        </p:txBody>
+      </p:sp>
+      <p:sp>
+        <p:nvSpPr>
+          <p:cNvPr id="25" name="Slide Number Placeholder 0"/>
+          <p:cNvSpPr>
+            <a:spLocks noGrp="1"/>
+          </p:cNvSpPr>
+          <p:nvPr>
+            <p:ph type="sldNum" sz="quarter" idx="4294967295"/>
+          </p:nvPr>
+        </p:nvSpPr>
+        <p:spPr>
+          <a:xfrm>
+            <a:off x="27432" y="91440"/>
+            <a:ext cx="585216" cy="475488"/>
+          </a:xfrm>
+          <a:prstGeom prst="rect">
+            <a:avLst/>
+          </a:prstGeom>
+          <a:extLst>
+            <a:ext uri="{C572A759-6A51-4108-AA02-DFA0A04FC94B}">
+              <ma14:wrappingTextBoxFlag xmlns:ma14="http://schemas.microsoft.com/office/mac/drawingml/2011/main" val="0"/>
+            </a:ext>
+          </a:extLst>
+        </p:spPr>
+        <p:txBody>
+          <a:bodyPr/>
+          <a:lstStyle>
+            <a:lvl1pPr>
+              <a:defRPr sz="2000">
+                <a:solidFill>
+                  <a:srgbClr val="FFFFFF"/>
+                </a:solidFill>
+                <a:latin typeface="Calibri"/>
+                <a:ea typeface="Calibri"/>
+                <a:cs typeface="Calibri"/>
+              </a:defRPr>
+            </a:lvl1pPr>
+          </a:lstStyle>
+          <a:p>
+            <a:pPr algn="ctr"/>
+            <a:fld id="{F7021451-1387-4CA6-816F-3879F97B5CBC}" type="slidenum">
+              <a:rPr b="1" lang="en-US"/>
+              <a:t>63</a:t>
+            </a:fld>
+            <a:endParaRPr lang="en-US"/>
+          </a:p>
+        </p:txBody>
+      </p:sp>
+    </p:spTree>
+  </p:cSld>
+  <p:clrMapOvr>
+    <a:masterClrMapping/>
+  </p:clrMapOvr>
+</p:sld>
+</file>
+
+<file path=ppt/slides/slide64.xml><?xml version="1.0" encoding="utf-8"?>
+<p:sld xmlns:a="http://schemas.openxmlformats.org/drawingml/2006/main" xmlns:r="http://schemas.openxmlformats.org/officeDocument/2006/relationships" xmlns:p="http://schemas.openxmlformats.org/presentationml/2006/main">
+  <p:cSld name="Slide 64">
+    <p:spTree>
+      <p:nvGrpSpPr>
+        <p:cNvPr id="1" name=""/>
+        <p:cNvGrpSpPr/>
+        <p:nvPr/>
+      </p:nvGrpSpPr>
+      <p:grpSpPr>
+        <a:xfrm>
+          <a:off x="0" y="0"/>
+          <a:ext cx="0" cy="0"/>
+          <a:chOff x="0" y="0"/>
+          <a:chExt cx="0" cy="0"/>
+        </a:xfrm>
+      </p:grpSpPr>
+      <p:sp>
+        <p:nvSpPr>
+          <p:cNvPr id="2" name="Text 0"/>
+          <p:cNvSpPr/>
+          <p:nvPr/>
+        </p:nvSpPr>
+        <p:spPr>
+          <a:xfrm>
+            <a:off x="457200" y="713232"/>
+            <a:ext cx="11368735" cy="274320"/>
+          </a:xfrm>
+          <a:prstGeom prst="rect">
+            <a:avLst/>
+          </a:prstGeom>
+          <a:noFill/>
+          <a:ln/>
+        </p:spPr>
+        <p:txBody>
+          <a:bodyPr wrap="square" lIns="0" tIns="0" rIns="0" bIns="0" rtlCol="0" anchor="ctr"/>
+          <a:lstStyle/>
+          <a:p>
+            <a:pPr algn="r" indent="0" marL="0">
+              <a:buNone/>
+            </a:pPr>
+            <a:r>
+              <a:rPr lang="en-US" sz="1400" b="1" dirty="0">
+                <a:solidFill>
+                  <a:srgbClr val="1C3F6E"/>
+                </a:solidFill>
+                <a:latin typeface="Calibri" pitchFamily="34" charset="0"/>
+                <a:ea typeface="Calibri" pitchFamily="34" charset="-122"/>
+                <a:cs typeface="Calibri" pitchFamily="34" charset="-120"/>
+              </a:rPr>
+              <a:t>BOARD SUMMARY</a:t>
+            </a:r>
+            <a:endParaRPr lang="en-US" sz="1400" dirty="0"/>
+          </a:p>
+        </p:txBody>
+      </p:sp>
+      <p:sp>
+        <p:nvSpPr>
+          <p:cNvPr id="3" name="Text 1"/>
+          <p:cNvSpPr/>
+          <p:nvPr/>
+        </p:nvSpPr>
+        <p:spPr>
+          <a:xfrm>
+            <a:off x="365760" y="1005840"/>
+            <a:ext cx="11460175" cy="731520"/>
+          </a:xfrm>
+          <a:prstGeom prst="rect">
+            <a:avLst/>
+          </a:prstGeom>
+          <a:noFill/>
+          <a:ln/>
+        </p:spPr>
+        <p:txBody>
+          <a:bodyPr wrap="square" lIns="0" tIns="0" rIns="0" bIns="0" rtlCol="0" anchor="ctr">
+            <a:normAutofit/>
+          </a:bodyPr>
+          <a:lstStyle/>
+          <a:p>
+            <a:pPr algn="ctr" indent="0" marL="0">
+              <a:buNone/>
+            </a:pPr>
+            <a:r>
+              <a:rPr lang="en-US" sz="3600" b="1" dirty="0">
+                <a:solidFill>
+                  <a:srgbClr val="990011"/>
+                </a:solidFill>
+                <a:latin typeface="Times New Roman" pitchFamily="34" charset="0"/>
+                <a:ea typeface="Times New Roman" pitchFamily="34" charset="-122"/>
+                <a:cs typeface="Times New Roman" pitchFamily="34" charset="-120"/>
+              </a:rPr>
+              <a:t>3. Quartiles and the Interquartile Range</a:t>
+            </a:r>
+            <a:endParaRPr lang="en-US" sz="3600" dirty="0"/>
+          </a:p>
+        </p:txBody>
+      </p:sp>
+      <p:sp>
+        <p:nvSpPr>
+          <p:cNvPr id="4" name="Text 2"/>
+          <p:cNvSpPr/>
+          <p:nvPr/>
+        </p:nvSpPr>
+        <p:spPr>
+          <a:xfrm>
+            <a:off x="365760" y="1783080"/>
+            <a:ext cx="6035040" cy="4617720"/>
+          </a:xfrm>
+          <a:prstGeom prst="rect">
+            <a:avLst/>
+          </a:prstGeom>
+          <a:noFill/>
+          <a:ln/>
+        </p:spPr>
+        <p:txBody>
+          <a:bodyPr wrap="square" lIns="0" tIns="0" rIns="0" bIns="0" rtlCol="0" anchor="t"/>
+          <a:lstStyle/>
+          <a:p>
+            <a:pPr algn="l" indent="0" marL="0">
+              <a:spcAft>
+                <a:spcPts val="800"/>
+              </a:spcAft>
+              <a:buNone/>
+            </a:pPr>
+            <a:r>
+              <a:rPr lang="en-US" sz="3000" i="1" dirty="0">
+                <a:solidFill>
+                  <a:srgbClr val="111111"/>
+                </a:solidFill>
+                <a:latin typeface="Times New Roman" pitchFamily="34" charset="0"/>
+                <a:ea typeface="Times New Roman" pitchFamily="34" charset="-122"/>
+                <a:cs typeface="Times New Roman" pitchFamily="34" charset="-120"/>
+              </a:rPr>
+              <a:t>The quartiles and the interquartile range are calculated as follows:</a:t>
+            </a:r>
+            <a:endParaRPr lang="en-US" sz="3000" dirty="0"/>
+          </a:p>
+          <a:p>
+            <a:pPr algn="l" indent="0" marL="0">
+              <a:spcAft>
+                <a:spcPts val="800"/>
+              </a:spcAft>
+              <a:buNone/>
+            </a:pPr>
+            <a:r>
+              <a:rPr lang="en-US" sz="3000" b="1" dirty="0">
+                <a:solidFill>
+                  <a:srgbClr val="111111"/>
+                </a:solidFill>
+                <a:latin typeface="Times New Roman" pitchFamily="34" charset="0"/>
+                <a:ea typeface="Times New Roman" pitchFamily="34" charset="-122"/>
+                <a:cs typeface="Times New Roman" pitchFamily="34" charset="-120"/>
+              </a:rPr>
+              <a:t>Steps: </a:t>
+            </a:r>
+            <a:pPr algn="l" indent="0" marL="0">
+              <a:spcAft>
+                <a:spcPts val="800"/>
+              </a:spcAft>
+              <a:buNone/>
+            </a:pPr>
+            <a:r>
+              <a:rPr lang="en-US" sz="3000" dirty="0">
+                <a:solidFill>
+                  <a:srgbClr val="111111"/>
+                </a:solidFill>
+                <a:latin typeface="Times New Roman" pitchFamily="34" charset="0"/>
+                <a:ea typeface="Times New Roman" pitchFamily="34" charset="-122"/>
+                <a:cs typeface="Times New Roman" pitchFamily="34" charset="-120"/>
+              </a:rPr>
+              <a:t>Put the data in order and find the median (Q2). The lower quartile (Q1) is the median of the lower half, the upper quartile (Q3) is the median of the upper half, and IQR = Q3 − Q1.</a:t>
+            </a:r>
+            <a:endParaRPr lang="en-US" sz="3000" dirty="0"/>
+          </a:p>
+        </p:txBody>
+      </p:sp>
+      <p:pic>
+        <p:nvPicPr>
+          <p:cNvPr id="5" name="Image 0" descr="/home/claude/f4/img/v2/stat2_iqr.png">    </p:cNvPr>
+          <p:cNvPicPr>
+            <a:picLocks noChangeAspect="1"/>
+          </p:cNvPicPr>
+          <p:nvPr/>
+        </p:nvPicPr>
+        <p:blipFill>
+          <a:blip r:embed="rId1"/>
+          <a:stretch>
+            <a:fillRect/>
+          </a:stretch>
+        </p:blipFill>
+        <p:spPr>
+          <a:xfrm>
+            <a:off x="6537960" y="2849678"/>
+            <a:ext cx="5470855" cy="2137053"/>
+          </a:xfrm>
+          <a:prstGeom prst="rect">
+            <a:avLst/>
+          </a:prstGeom>
+        </p:spPr>
+      </p:pic>
+      <p:sp>
+        <p:nvSpPr>
+          <p:cNvPr id="6" name="Text 3"/>
+          <p:cNvSpPr/>
+          <p:nvPr/>
+        </p:nvSpPr>
+        <p:spPr>
+          <a:xfrm>
+            <a:off x="6537960" y="6089904"/>
+            <a:ext cx="5470855" cy="347472"/>
+          </a:xfrm>
+          <a:prstGeom prst="rect">
+            <a:avLst/>
+          </a:prstGeom>
+          <a:noFill/>
+          <a:ln/>
+        </p:spPr>
+        <p:txBody>
+          <a:bodyPr wrap="square" lIns="0" tIns="0" rIns="0" bIns="0" rtlCol="0" anchor="ctr"/>
+          <a:lstStyle/>
+          <a:p>
+            <a:pPr algn="ctr" indent="0" marL="0">
+              <a:buNone/>
+            </a:pPr>
+            <a:r>
+              <a:rPr lang="en-US" sz="1600" i="1" dirty="0">
+                <a:solidFill>
+                  <a:srgbClr val="555555"/>
+                </a:solidFill>
+                <a:latin typeface="Times New Roman" pitchFamily="34" charset="0"/>
+                <a:ea typeface="Times New Roman" pitchFamily="34" charset="-122"/>
+                <a:cs typeface="Times New Roman" pitchFamily="34" charset="-120"/>
+              </a:rPr>
+              <a:t>Illustration: quartiles</a:t>
+            </a:r>
+            <a:endParaRPr lang="en-US" sz="1600" dirty="0"/>
+          </a:p>
+        </p:txBody>
+      </p:sp>
+      <p:sp>
+        <p:nvSpPr>
+          <p:cNvPr id="25" name="Slide Number Placeholder 0"/>
+          <p:cNvSpPr>
+            <a:spLocks noGrp="1"/>
+          </p:cNvSpPr>
+          <p:nvPr>
+            <p:ph type="sldNum" sz="quarter" idx="4294967295"/>
+          </p:nvPr>
+        </p:nvSpPr>
+        <p:spPr>
+          <a:xfrm>
+            <a:off x="27432" y="91440"/>
+            <a:ext cx="585216" cy="475488"/>
+          </a:xfrm>
+          <a:prstGeom prst="rect">
+            <a:avLst/>
+          </a:prstGeom>
+          <a:extLst>
+            <a:ext uri="{C572A759-6A51-4108-AA02-DFA0A04FC94B}">
+              <ma14:wrappingTextBoxFlag xmlns:ma14="http://schemas.microsoft.com/office/mac/drawingml/2011/main" val="0"/>
+            </a:ext>
+          </a:extLst>
+        </p:spPr>
+        <p:txBody>
+          <a:bodyPr/>
+          <a:lstStyle>
+            <a:lvl1pPr>
+              <a:defRPr sz="2000">
+                <a:solidFill>
+                  <a:srgbClr val="FFFFFF"/>
+                </a:solidFill>
+                <a:latin typeface="Calibri"/>
+                <a:ea typeface="Calibri"/>
+                <a:cs typeface="Calibri"/>
+              </a:defRPr>
+            </a:lvl1pPr>
+          </a:lstStyle>
+          <a:p>
+            <a:pPr algn="ctr"/>
+            <a:fld id="{F7021451-1387-4CA6-816F-3879F97B5CBC}" type="slidenum">
+              <a:rPr b="1" lang="en-US"/>
+              <a:t>64</a:t>
+            </a:fld>
+            <a:endParaRPr lang="en-US"/>
+          </a:p>
+        </p:txBody>
+      </p:sp>
+    </p:spTree>
+  </p:cSld>
+  <p:clrMapOvr>
+    <a:masterClrMapping/>
+  </p:clrMapOvr>
+</p:sld>
+</file>
+
+<file path=ppt/slides/slide65.xml><?xml version="1.0" encoding="utf-8"?>
+<p:sld xmlns:a="http://schemas.openxmlformats.org/drawingml/2006/main" xmlns:r="http://schemas.openxmlformats.org/officeDocument/2006/relationships" xmlns:p="http://schemas.openxmlformats.org/presentationml/2006/main">
+  <p:cSld name="Slide 65">
+    <p:spTree>
+      <p:nvGrpSpPr>
+        <p:cNvPr id="1" name=""/>
+        <p:cNvGrpSpPr/>
+        <p:nvPr/>
+      </p:nvGrpSpPr>
+      <p:grpSpPr>
+        <a:xfrm>
+          <a:off x="0" y="0"/>
+          <a:ext cx="0" cy="0"/>
+          <a:chOff x="0" y="0"/>
+          <a:chExt cx="0" cy="0"/>
+        </a:xfrm>
+      </p:grpSpPr>
+      <p:sp>
+        <p:nvSpPr>
+          <p:cNvPr id="2" name="Text 0"/>
+          <p:cNvSpPr/>
+          <p:nvPr/>
+        </p:nvSpPr>
+        <p:spPr>
+          <a:xfrm>
+            <a:off x="457200" y="713232"/>
+            <a:ext cx="11368735" cy="274320"/>
+          </a:xfrm>
+          <a:prstGeom prst="rect">
+            <a:avLst/>
+          </a:prstGeom>
+          <a:noFill/>
+          <a:ln/>
+        </p:spPr>
+        <p:txBody>
+          <a:bodyPr wrap="square" lIns="0" tIns="0" rIns="0" bIns="0" rtlCol="0" anchor="ctr"/>
+          <a:lstStyle/>
+          <a:p>
+            <a:pPr algn="r" indent="0" marL="0">
+              <a:buNone/>
+            </a:pPr>
+            <a:r>
+              <a:rPr lang="en-US" sz="1400" b="1" dirty="0">
+                <a:solidFill>
+                  <a:srgbClr val="1C3F6E"/>
+                </a:solidFill>
+                <a:latin typeface="Calibri" pitchFamily="34" charset="0"/>
+                <a:ea typeface="Calibri" pitchFamily="34" charset="-122"/>
+                <a:cs typeface="Calibri" pitchFamily="34" charset="-120"/>
+              </a:rPr>
+              <a:t>BOARD SUMMARY</a:t>
+            </a:r>
+            <a:endParaRPr lang="en-US" sz="1400" dirty="0"/>
+          </a:p>
+        </p:txBody>
+      </p:sp>
+      <p:pic>
+        <p:nvPicPr>
+          <p:cNvPr id="3" name="Image 0" descr="/home/claude/f4/img/minesec_sheet.png">    </p:cNvPr>
+          <p:cNvPicPr>
+            <a:picLocks noChangeAspect="1"/>
+          </p:cNvPicPr>
+          <p:nvPr/>
+        </p:nvPicPr>
+        <p:blipFill>
+          <a:blip r:embed="rId1"/>
+          <a:stretch>
+            <a:fillRect/>
+          </a:stretch>
+        </p:blipFill>
+        <p:spPr>
+          <a:xfrm>
+            <a:off x="0" y="658368"/>
+            <a:ext cx="5120640" cy="5833872"/>
+          </a:xfrm>
+          <a:prstGeom prst="rect">
+            <a:avLst/>
+          </a:prstGeom>
+        </p:spPr>
+      </p:pic>
+      <p:sp>
+        <p:nvSpPr>
+          <p:cNvPr id="4" name="Text 1"/>
+          <p:cNvSpPr/>
+          <p:nvPr/>
+        </p:nvSpPr>
+        <p:spPr>
+          <a:xfrm>
+            <a:off x="5349240" y="1005840"/>
+            <a:ext cx="6522415" cy="731520"/>
+          </a:xfrm>
+          <a:prstGeom prst="rect">
+            <a:avLst/>
+          </a:prstGeom>
+          <a:noFill/>
+          <a:ln/>
+        </p:spPr>
+        <p:txBody>
+          <a:bodyPr wrap="square" lIns="0" tIns="0" rIns="0" bIns="0" rtlCol="0" anchor="ctr">
+            <a:normAutofit/>
+          </a:bodyPr>
+          <a:lstStyle/>
+          <a:p>
+            <a:pPr algn="ctr" indent="0" marL="0">
+              <a:buNone/>
+            </a:pPr>
+            <a:r>
+              <a:rPr lang="en-US" sz="3600" b="1" dirty="0">
+                <a:solidFill>
+                  <a:srgbClr val="990011"/>
+                </a:solidFill>
+                <a:latin typeface="Times New Roman" pitchFamily="34" charset="0"/>
+                <a:ea typeface="Times New Roman" pitchFamily="34" charset="-122"/>
+                <a:cs typeface="Times New Roman" pitchFamily="34" charset="-120"/>
+              </a:rPr>
+              <a:t>3. Quartiles and the Interquartile Range</a:t>
+            </a:r>
+            <a:endParaRPr lang="en-US" sz="3600" dirty="0"/>
+          </a:p>
+        </p:txBody>
+      </p:sp>
+      <p:sp>
+        <p:nvSpPr>
+          <p:cNvPr id="5" name="Text 2"/>
+          <p:cNvSpPr/>
+          <p:nvPr/>
+        </p:nvSpPr>
+        <p:spPr>
+          <a:xfrm>
+            <a:off x="5349240" y="1783080"/>
+            <a:ext cx="6522415" cy="4663440"/>
+          </a:xfrm>
+          <a:prstGeom prst="rect">
+            <a:avLst/>
+          </a:prstGeom>
+          <a:noFill/>
+          <a:ln/>
+        </p:spPr>
+        <p:txBody>
+          <a:bodyPr wrap="square" lIns="0" tIns="0" rIns="0" bIns="0" rtlCol="0" anchor="t"/>
+          <a:lstStyle/>
+          <a:p>
+            <a:pPr algn="l" indent="0" marL="0">
+              <a:spcAft>
+                <a:spcPts val="800"/>
+              </a:spcAft>
+              <a:buNone/>
+            </a:pPr>
+            <a:r>
+              <a:rPr lang="en-US" sz="4000" b="1" dirty="0">
+                <a:solidFill>
+                  <a:srgbClr val="111111"/>
+                </a:solidFill>
+                <a:latin typeface="Times New Roman" pitchFamily="34" charset="0"/>
+                <a:ea typeface="Times New Roman" pitchFamily="34" charset="-122"/>
+                <a:cs typeface="Times New Roman" pitchFamily="34" charset="-120"/>
+              </a:rPr>
+              <a:t>Example 1 (n = 11): </a:t>
+            </a:r>
+            <a:pPr algn="l" indent="0" marL="0">
+              <a:spcAft>
+                <a:spcPts val="800"/>
+              </a:spcAft>
+              <a:buNone/>
+            </a:pPr>
+            <a:r>
+              <a:rPr lang="en-US" sz="4000" dirty="0">
+                <a:solidFill>
+                  <a:srgbClr val="111111"/>
+                </a:solidFill>
+                <a:latin typeface="Times New Roman" pitchFamily="34" charset="0"/>
+                <a:ea typeface="Times New Roman" pitchFamily="34" charset="-122"/>
+                <a:cs typeface="Times New Roman" pitchFamily="34" charset="-120"/>
+              </a:rPr>
+              <a:t>For eleven values from 102 to 118, the median is 109, Q1 is 105 and Q3 is 115. The interquartile range is 115 − 105 = 10.</a:t>
+            </a:r>
+            <a:endParaRPr lang="en-US" sz="4000" dirty="0"/>
+          </a:p>
+        </p:txBody>
+      </p:sp>
+      <p:sp>
+        <p:nvSpPr>
+          <p:cNvPr id="25" name="Slide Number Placeholder 0"/>
+          <p:cNvSpPr>
+            <a:spLocks noGrp="1"/>
+          </p:cNvSpPr>
+          <p:nvPr>
+            <p:ph type="sldNum" sz="quarter" idx="4294967295"/>
+          </p:nvPr>
+        </p:nvSpPr>
+        <p:spPr>
+          <a:xfrm>
+            <a:off x="27432" y="91440"/>
+            <a:ext cx="585216" cy="475488"/>
+          </a:xfrm>
+          <a:prstGeom prst="rect">
+            <a:avLst/>
+          </a:prstGeom>
+          <a:extLst>
+            <a:ext uri="{C572A759-6A51-4108-AA02-DFA0A04FC94B}">
+              <ma14:wrappingTextBoxFlag xmlns:ma14="http://schemas.microsoft.com/office/mac/drawingml/2011/main" val="0"/>
+            </a:ext>
+          </a:extLst>
+        </p:spPr>
+        <p:txBody>
+          <a:bodyPr/>
+          <a:lstStyle>
+            <a:lvl1pPr>
+              <a:defRPr sz="2000">
+                <a:solidFill>
+                  <a:srgbClr val="FFFFFF"/>
+                </a:solidFill>
+                <a:latin typeface="Calibri"/>
+                <a:ea typeface="Calibri"/>
+                <a:cs typeface="Calibri"/>
+              </a:defRPr>
+            </a:lvl1pPr>
+          </a:lstStyle>
+          <a:p>
+            <a:pPr algn="ctr"/>
+            <a:fld id="{F7021451-1387-4CA6-816F-3879F97B5CBC}" type="slidenum">
+              <a:rPr b="1" lang="en-US"/>
+              <a:t>65</a:t>
+            </a:fld>
+            <a:endParaRPr lang="en-US"/>
+          </a:p>
+        </p:txBody>
+      </p:sp>
+    </p:spTree>
+  </p:cSld>
+  <p:clrMapOvr>
+    <a:masterClrMapping/>
+  </p:clrMapOvr>
+</p:sld>
+</file>
+
+<file path=ppt/slides/slide66.xml><?xml version="1.0" encoding="utf-8"?>
+<p:sld xmlns:a="http://schemas.openxmlformats.org/drawingml/2006/main" xmlns:r="http://schemas.openxmlformats.org/officeDocument/2006/relationships" xmlns:p="http://schemas.openxmlformats.org/presentationml/2006/main">
+  <p:cSld name="Slide 66">
+    <p:spTree>
+      <p:nvGrpSpPr>
+        <p:cNvPr id="1" name=""/>
+        <p:cNvGrpSpPr/>
+        <p:nvPr/>
+      </p:nvGrpSpPr>
+      <p:grpSpPr>
+        <a:xfrm>
+          <a:off x="0" y="0"/>
+          <a:ext cx="0" cy="0"/>
+          <a:chOff x="0" y="0"/>
+          <a:chExt cx="0" cy="0"/>
+        </a:xfrm>
+      </p:grpSpPr>
+      <p:sp>
+        <p:nvSpPr>
+          <p:cNvPr id="2" name="Text 0"/>
+          <p:cNvSpPr/>
+          <p:nvPr/>
+        </p:nvSpPr>
+        <p:spPr>
+          <a:xfrm>
+            <a:off x="457200" y="713232"/>
+            <a:ext cx="11368735" cy="274320"/>
+          </a:xfrm>
+          <a:prstGeom prst="rect">
+            <a:avLst/>
+          </a:prstGeom>
+          <a:noFill/>
+          <a:ln/>
+        </p:spPr>
+        <p:txBody>
+          <a:bodyPr wrap="square" lIns="0" tIns="0" rIns="0" bIns="0" rtlCol="0" anchor="ctr"/>
+          <a:lstStyle/>
+          <a:p>
+            <a:pPr algn="r" indent="0" marL="0">
+              <a:buNone/>
+            </a:pPr>
+            <a:r>
+              <a:rPr lang="en-US" sz="1400" b="1" dirty="0">
+                <a:solidFill>
+                  <a:srgbClr val="1C3F6E"/>
+                </a:solidFill>
+                <a:latin typeface="Calibri" pitchFamily="34" charset="0"/>
+                <a:ea typeface="Calibri" pitchFamily="34" charset="-122"/>
+                <a:cs typeface="Calibri" pitchFamily="34" charset="-120"/>
+              </a:rPr>
+              <a:t>BOARD SUMMARY</a:t>
+            </a:r>
+            <a:endParaRPr lang="en-US" sz="1400" dirty="0"/>
+          </a:p>
+        </p:txBody>
+      </p:sp>
+      <p:pic>
+        <p:nvPicPr>
+          <p:cNvPr id="3" name="Image 0" descr="/home/claude/f4/img/minesec_sheet.png">    </p:cNvPr>
+          <p:cNvPicPr>
+            <a:picLocks noChangeAspect="1"/>
+          </p:cNvPicPr>
+          <p:nvPr/>
+        </p:nvPicPr>
+        <p:blipFill>
+          <a:blip r:embed="rId1"/>
+          <a:stretch>
+            <a:fillRect/>
+          </a:stretch>
+        </p:blipFill>
+        <p:spPr>
+          <a:xfrm>
+            <a:off x="0" y="658368"/>
+            <a:ext cx="5120640" cy="5833872"/>
+          </a:xfrm>
+          <a:prstGeom prst="rect">
+            <a:avLst/>
+          </a:prstGeom>
+        </p:spPr>
+      </p:pic>
+      <p:sp>
+        <p:nvSpPr>
+          <p:cNvPr id="4" name="Text 1"/>
+          <p:cNvSpPr/>
+          <p:nvPr/>
+        </p:nvSpPr>
+        <p:spPr>
+          <a:xfrm>
+            <a:off x="5349240" y="1005840"/>
+            <a:ext cx="6522415" cy="731520"/>
+          </a:xfrm>
+          <a:prstGeom prst="rect">
+            <a:avLst/>
+          </a:prstGeom>
+          <a:noFill/>
+          <a:ln/>
+        </p:spPr>
+        <p:txBody>
+          <a:bodyPr wrap="square" lIns="0" tIns="0" rIns="0" bIns="0" rtlCol="0" anchor="ctr">
+            <a:normAutofit/>
+          </a:bodyPr>
+          <a:lstStyle/>
+          <a:p>
+            <a:pPr algn="ctr" indent="0" marL="0">
+              <a:buNone/>
+            </a:pPr>
+            <a:r>
+              <a:rPr lang="en-US" sz="3600" b="1" dirty="0">
+                <a:solidFill>
+                  <a:srgbClr val="990011"/>
+                </a:solidFill>
+                <a:latin typeface="Times New Roman" pitchFamily="34" charset="0"/>
+                <a:ea typeface="Times New Roman" pitchFamily="34" charset="-122"/>
+                <a:cs typeface="Times New Roman" pitchFamily="34" charset="-120"/>
+              </a:rPr>
+              <a:t>3. Quartiles and the Interquartile Range</a:t>
+            </a:r>
+            <a:endParaRPr lang="en-US" sz="3600" dirty="0"/>
+          </a:p>
+        </p:txBody>
+      </p:sp>
+      <p:sp>
+        <p:nvSpPr>
+          <p:cNvPr id="5" name="Text 2"/>
+          <p:cNvSpPr/>
+          <p:nvPr/>
+        </p:nvSpPr>
+        <p:spPr>
+          <a:xfrm>
+            <a:off x="5349240" y="1783080"/>
+            <a:ext cx="6522415" cy="4663440"/>
+          </a:xfrm>
+          <a:prstGeom prst="rect">
+            <a:avLst/>
+          </a:prstGeom>
+          <a:noFill/>
+          <a:ln/>
+        </p:spPr>
+        <p:txBody>
+          <a:bodyPr wrap="square" lIns="0" tIns="0" rIns="0" bIns="0" rtlCol="0" anchor="t"/>
+          <a:lstStyle/>
+          <a:p>
+            <a:pPr algn="l" indent="0" marL="0">
+              <a:spcAft>
+                <a:spcPts val="800"/>
+              </a:spcAft>
+              <a:buNone/>
+            </a:pPr>
+            <a:r>
+              <a:rPr lang="en-US" sz="4000" b="1" dirty="0">
+                <a:solidFill>
+                  <a:srgbClr val="111111"/>
+                </a:solidFill>
+                <a:latin typeface="Times New Roman" pitchFamily="34" charset="0"/>
+                <a:ea typeface="Times New Roman" pitchFamily="34" charset="-122"/>
+                <a:cs typeface="Times New Roman" pitchFamily="34" charset="-120"/>
+              </a:rPr>
+              <a:t>Example 2 (n = 13): </a:t>
+            </a:r>
+            <a:pPr algn="l" indent="0" marL="0">
+              <a:spcAft>
+                <a:spcPts val="800"/>
+              </a:spcAft>
+              <a:buNone/>
+            </a:pPr>
+            <a:r>
+              <a:rPr lang="en-US" sz="4000" dirty="0">
+                <a:solidFill>
+                  <a:srgbClr val="111111"/>
+                </a:solidFill>
+                <a:latin typeface="Times New Roman" pitchFamily="34" charset="0"/>
+                <a:ea typeface="Times New Roman" pitchFamily="34" charset="-122"/>
+                <a:cs typeface="Times New Roman" pitchFamily="34" charset="-120"/>
+              </a:rPr>
+              <a:t>For 10, 25, 30, 30, 40, 41, 42, 50, 55, 70, 101, 110, 111, the median is 42 and Q1 = (30 + 30) ÷ 2 = 30. Q3 = (70 + 101) ÷ 2 = 85.5, so the IQR is 85.5 − 30 = 55.5.</a:t>
+            </a:r>
+            <a:endParaRPr lang="en-US" sz="4000" dirty="0"/>
+          </a:p>
+        </p:txBody>
+      </p:sp>
+      <p:sp>
+        <p:nvSpPr>
+          <p:cNvPr id="25" name="Slide Number Placeholder 0"/>
+          <p:cNvSpPr>
+            <a:spLocks noGrp="1"/>
+          </p:cNvSpPr>
+          <p:nvPr>
+            <p:ph type="sldNum" sz="quarter" idx="4294967295"/>
+          </p:nvPr>
+        </p:nvSpPr>
+        <p:spPr>
+          <a:xfrm>
+            <a:off x="27432" y="91440"/>
+            <a:ext cx="585216" cy="475488"/>
+          </a:xfrm>
+          <a:prstGeom prst="rect">
+            <a:avLst/>
+          </a:prstGeom>
+          <a:extLst>
+            <a:ext uri="{C572A759-6A51-4108-AA02-DFA0A04FC94B}">
+              <ma14:wrappingTextBoxFlag xmlns:ma14="http://schemas.microsoft.com/office/mac/drawingml/2011/main" val="0"/>
+            </a:ext>
+          </a:extLst>
+        </p:spPr>
+        <p:txBody>
+          <a:bodyPr/>
+          <a:lstStyle>
+            <a:lvl1pPr>
+              <a:defRPr sz="2000">
+                <a:solidFill>
+                  <a:srgbClr val="FFFFFF"/>
+                </a:solidFill>
+                <a:latin typeface="Calibri"/>
+                <a:ea typeface="Calibri"/>
+                <a:cs typeface="Calibri"/>
+              </a:defRPr>
+            </a:lvl1pPr>
+          </a:lstStyle>
+          <a:p>
+            <a:pPr algn="ctr"/>
+            <a:fld id="{F7021451-1387-4CA6-816F-3879F97B5CBC}" type="slidenum">
+              <a:rPr b="1" lang="en-US"/>
+              <a:t>66</a:t>
+            </a:fld>
+            <a:endParaRPr lang="en-US"/>
+          </a:p>
+        </p:txBody>
+      </p:sp>
+    </p:spTree>
+  </p:cSld>
+  <p:clrMapOvr>
+    <a:masterClrMapping/>
+  </p:clrMapOvr>
+</p:sld>
+</file>
+
+<file path=ppt/slides/slide67.xml><?xml version="1.0" encoding="utf-8"?>
+<p:sld xmlns:a="http://schemas.openxmlformats.org/drawingml/2006/main" xmlns:r="http://schemas.openxmlformats.org/officeDocument/2006/relationships" xmlns:p="http://schemas.openxmlformats.org/presentationml/2006/main">
+  <p:cSld name="Slide 67">
+    <p:spTree>
+      <p:nvGrpSpPr>
+        <p:cNvPr id="1" name=""/>
+        <p:cNvGrpSpPr/>
+        <p:nvPr/>
+      </p:nvGrpSpPr>
+      <p:grpSpPr>
+        <a:xfrm>
+          <a:off x="0" y="0"/>
+          <a:ext cx="0" cy="0"/>
+          <a:chOff x="0" y="0"/>
+          <a:chExt cx="0" cy="0"/>
+        </a:xfrm>
+      </p:grpSpPr>
+      <p:sp>
+        <p:nvSpPr>
+          <p:cNvPr id="2" name="Text 0"/>
+          <p:cNvSpPr/>
+          <p:nvPr/>
+        </p:nvSpPr>
+        <p:spPr>
+          <a:xfrm>
+            <a:off x="457200" y="713232"/>
+            <a:ext cx="11368735" cy="274320"/>
+          </a:xfrm>
+          <a:prstGeom prst="rect">
+            <a:avLst/>
+          </a:prstGeom>
+          <a:noFill/>
+          <a:ln/>
+        </p:spPr>
+        <p:txBody>
+          <a:bodyPr wrap="square" lIns="0" tIns="0" rIns="0" bIns="0" rtlCol="0" anchor="ctr"/>
+          <a:lstStyle/>
+          <a:p>
+            <a:pPr algn="r" indent="0" marL="0">
+              <a:buNone/>
+            </a:pPr>
+            <a:r>
+              <a:rPr lang="en-US" sz="1400" b="1" dirty="0">
+                <a:solidFill>
+                  <a:srgbClr val="1C3F6E"/>
+                </a:solidFill>
+                <a:latin typeface="Calibri" pitchFamily="34" charset="0"/>
+                <a:ea typeface="Calibri" pitchFamily="34" charset="-122"/>
+                <a:cs typeface="Calibri" pitchFamily="34" charset="-120"/>
+              </a:rPr>
+              <a:t>BOARD SUMMARY</a:t>
+            </a:r>
+            <a:endParaRPr lang="en-US" sz="1400" dirty="0"/>
+          </a:p>
+        </p:txBody>
+      </p:sp>
+      <p:sp>
+        <p:nvSpPr>
+          <p:cNvPr id="3" name="Text 1"/>
+          <p:cNvSpPr/>
+          <p:nvPr/>
+        </p:nvSpPr>
+        <p:spPr>
+          <a:xfrm>
+            <a:off x="365760" y="1005840"/>
+            <a:ext cx="11460175" cy="731520"/>
+          </a:xfrm>
+          <a:prstGeom prst="rect">
+            <a:avLst/>
+          </a:prstGeom>
+          <a:noFill/>
+          <a:ln/>
+        </p:spPr>
+        <p:txBody>
+          <a:bodyPr wrap="square" lIns="0" tIns="0" rIns="0" bIns="0" rtlCol="0" anchor="ctr">
+            <a:normAutofit/>
+          </a:bodyPr>
+          <a:lstStyle/>
+          <a:p>
+            <a:pPr algn="ctr" indent="0" marL="0">
+              <a:buNone/>
+            </a:pPr>
+            <a:r>
+              <a:rPr lang="en-US" sz="3600" b="1" dirty="0">
+                <a:solidFill>
+                  <a:srgbClr val="990011"/>
+                </a:solidFill>
+                <a:latin typeface="Times New Roman" pitchFamily="34" charset="0"/>
+                <a:ea typeface="Times New Roman" pitchFamily="34" charset="-122"/>
+                <a:cs typeface="Times New Roman" pitchFamily="34" charset="-120"/>
+              </a:rPr>
+              <a:t>3. Quartiles and the Interquartile Range</a:t>
+            </a:r>
+            <a:endParaRPr lang="en-US" sz="3600" dirty="0"/>
+          </a:p>
+        </p:txBody>
+      </p:sp>
+      <p:sp>
+        <p:nvSpPr>
+          <p:cNvPr id="4" name="Text 2"/>
+          <p:cNvSpPr/>
+          <p:nvPr/>
+        </p:nvSpPr>
+        <p:spPr>
+          <a:xfrm>
+            <a:off x="365760" y="1783080"/>
+            <a:ext cx="6035040" cy="4617720"/>
+          </a:xfrm>
+          <a:prstGeom prst="rect">
+            <a:avLst/>
+          </a:prstGeom>
+          <a:noFill/>
+          <a:ln/>
+        </p:spPr>
+        <p:txBody>
+          <a:bodyPr wrap="square" lIns="0" tIns="0" rIns="0" bIns="0" rtlCol="0" anchor="t"/>
+          <a:lstStyle/>
+          <a:p>
+            <a:pPr algn="l" indent="0" marL="0">
+              <a:spcAft>
+                <a:spcPts val="800"/>
+              </a:spcAft>
+              <a:buNone/>
+            </a:pPr>
+            <a:r>
+              <a:rPr lang="en-US" sz="3600" b="1" dirty="0">
+                <a:solidFill>
+                  <a:srgbClr val="111111"/>
+                </a:solidFill>
+                <a:latin typeface="Times New Roman" pitchFamily="34" charset="0"/>
+                <a:ea typeface="Times New Roman" pitchFamily="34" charset="-122"/>
+                <a:cs typeface="Times New Roman" pitchFamily="34" charset="-120"/>
+              </a:rPr>
+              <a:t>Advantage: </a:t>
+            </a:r>
+            <a:pPr algn="l" indent="0" marL="0">
+              <a:spcAft>
+                <a:spcPts val="800"/>
+              </a:spcAft>
+              <a:buNone/>
+            </a:pPr>
+            <a:r>
+              <a:rPr lang="en-US" sz="3600" dirty="0">
+                <a:solidFill>
+                  <a:srgbClr val="111111"/>
+                </a:solidFill>
+                <a:latin typeface="Times New Roman" pitchFamily="34" charset="0"/>
+                <a:ea typeface="Times New Roman" pitchFamily="34" charset="-122"/>
+                <a:cs typeface="Times New Roman" pitchFamily="34" charset="-120"/>
+              </a:rPr>
+              <a:t>The IQR covers the middle 50 % of the data and ignores the lowest and highest quarters. It is therefore not affected by outliers, unlike the range.</a:t>
+            </a:r>
+            <a:endParaRPr lang="en-US" sz="3600" dirty="0"/>
+          </a:p>
+        </p:txBody>
+      </p:sp>
+      <p:pic>
+        <p:nvPicPr>
+          <p:cNvPr id="5" name="Image 0" descr="/home/claude/f4/img/v2/box_whisker_big.png">    </p:cNvPr>
+          <p:cNvPicPr>
+            <a:picLocks noChangeAspect="1"/>
+          </p:cNvPicPr>
+          <p:nvPr/>
+        </p:nvPicPr>
+        <p:blipFill>
+          <a:blip r:embed="rId1"/>
+          <a:stretch>
+            <a:fillRect/>
+          </a:stretch>
+        </p:blipFill>
+        <p:spPr>
+          <a:xfrm>
+            <a:off x="6537960" y="2721454"/>
+            <a:ext cx="5470855" cy="2393499"/>
+          </a:xfrm>
+          <a:prstGeom prst="rect">
+            <a:avLst/>
+          </a:prstGeom>
+        </p:spPr>
+      </p:pic>
+      <p:sp>
+        <p:nvSpPr>
+          <p:cNvPr id="6" name="Text 3"/>
+          <p:cNvSpPr/>
+          <p:nvPr/>
+        </p:nvSpPr>
+        <p:spPr>
+          <a:xfrm>
+            <a:off x="6537960" y="6089904"/>
+            <a:ext cx="5470855" cy="347472"/>
+          </a:xfrm>
+          <a:prstGeom prst="rect">
+            <a:avLst/>
+          </a:prstGeom>
+          <a:noFill/>
+          <a:ln/>
+        </p:spPr>
+        <p:txBody>
+          <a:bodyPr wrap="square" lIns="0" tIns="0" rIns="0" bIns="0" rtlCol="0" anchor="ctr"/>
+          <a:lstStyle/>
+          <a:p>
+            <a:pPr algn="ctr" indent="0" marL="0">
+              <a:buNone/>
+            </a:pPr>
+            <a:r>
+              <a:rPr lang="en-US" sz="1600" i="1" dirty="0">
+                <a:solidFill>
+                  <a:srgbClr val="555555"/>
+                </a:solidFill>
+                <a:latin typeface="Times New Roman" pitchFamily="34" charset="0"/>
+                <a:ea typeface="Times New Roman" pitchFamily="34" charset="-122"/>
+                <a:cs typeface="Times New Roman" pitchFamily="34" charset="-120"/>
+              </a:rPr>
+              <a:t>Illustration: a box and whisker plot</a:t>
+            </a:r>
+            <a:endParaRPr lang="en-US" sz="1600" dirty="0"/>
+          </a:p>
+        </p:txBody>
+      </p:sp>
+      <p:sp>
+        <p:nvSpPr>
+          <p:cNvPr id="25" name="Slide Number Placeholder 0"/>
+          <p:cNvSpPr>
+            <a:spLocks noGrp="1"/>
+          </p:cNvSpPr>
+          <p:nvPr>
+            <p:ph type="sldNum" sz="quarter" idx="4294967295"/>
+          </p:nvPr>
+        </p:nvSpPr>
+        <p:spPr>
+          <a:xfrm>
+            <a:off x="27432" y="91440"/>
+            <a:ext cx="585216" cy="475488"/>
+          </a:xfrm>
+          <a:prstGeom prst="rect">
+            <a:avLst/>
+          </a:prstGeom>
+          <a:extLst>
+            <a:ext uri="{C572A759-6A51-4108-AA02-DFA0A04FC94B}">
+              <ma14:wrappingTextBoxFlag xmlns:ma14="http://schemas.microsoft.com/office/mac/drawingml/2011/main" val="0"/>
+            </a:ext>
+          </a:extLst>
+        </p:spPr>
+        <p:txBody>
+          <a:bodyPr/>
+          <a:lstStyle>
+            <a:lvl1pPr>
+              <a:defRPr sz="2000">
+                <a:solidFill>
+                  <a:srgbClr val="FFFFFF"/>
+                </a:solidFill>
+                <a:latin typeface="Calibri"/>
+                <a:ea typeface="Calibri"/>
+                <a:cs typeface="Calibri"/>
+              </a:defRPr>
+            </a:lvl1pPr>
+          </a:lstStyle>
+          <a:p>
+            <a:pPr algn="ctr"/>
+            <a:fld id="{F7021451-1387-4CA6-816F-3879F97B5CBC}" type="slidenum">
+              <a:rPr b="1" lang="en-US"/>
+              <a:t>67</a:t>
+            </a:fld>
+            <a:endParaRPr lang="en-US"/>
+          </a:p>
+        </p:txBody>
+      </p:sp>
+    </p:spTree>
+  </p:cSld>
+  <p:clrMapOvr>
+    <a:masterClrMapping/>
+  </p:clrMapOvr>
+</p:sld>
+</file>
+
+<file path=ppt/slides/slide68.xml><?xml version="1.0" encoding="utf-8"?>
+<p:sld xmlns:a="http://schemas.openxmlformats.org/drawingml/2006/main" xmlns:r="http://schemas.openxmlformats.org/officeDocument/2006/relationships" xmlns:p="http://schemas.openxmlformats.org/presentationml/2006/main">
+  <p:cSld name="Slide 68">
+    <p:spTree>
+      <p:nvGrpSpPr>
+        <p:cNvPr id="1" name=""/>
+        <p:cNvGrpSpPr/>
+        <p:nvPr/>
+      </p:nvGrpSpPr>
+      <p:grpSpPr>
+        <a:xfrm>
+          <a:off x="0" y="0"/>
+          <a:ext cx="0" cy="0"/>
+          <a:chOff x="0" y="0"/>
+          <a:chExt cx="0" cy="0"/>
+        </a:xfrm>
+      </p:grpSpPr>
+      <p:sp>
+        <p:nvSpPr>
+          <p:cNvPr id="2" name="Text 0"/>
+          <p:cNvSpPr/>
+          <p:nvPr/>
+        </p:nvSpPr>
+        <p:spPr>
+          <a:xfrm>
+            <a:off x="457200" y="713232"/>
+            <a:ext cx="11368735" cy="274320"/>
+          </a:xfrm>
+          <a:prstGeom prst="rect">
+            <a:avLst/>
+          </a:prstGeom>
+          <a:noFill/>
+          <a:ln/>
+        </p:spPr>
+        <p:txBody>
+          <a:bodyPr wrap="square" lIns="0" tIns="0" rIns="0" bIns="0" rtlCol="0" anchor="ctr"/>
+          <a:lstStyle/>
+          <a:p>
+            <a:pPr algn="r" indent="0" marL="0">
+              <a:buNone/>
+            </a:pPr>
+            <a:r>
+              <a:rPr lang="en-US" sz="1400" b="1" dirty="0">
+                <a:solidFill>
+                  <a:srgbClr val="1C3F6E"/>
+                </a:solidFill>
+                <a:latin typeface="Calibri" pitchFamily="34" charset="0"/>
+                <a:ea typeface="Calibri" pitchFamily="34" charset="-122"/>
+                <a:cs typeface="Calibri" pitchFamily="34" charset="-120"/>
+              </a:rPr>
+              <a:t>FORMATIVE EVALUATION</a:t>
+            </a:r>
+            <a:endParaRPr lang="en-US" sz="1400" dirty="0"/>
+          </a:p>
+        </p:txBody>
+      </p:sp>
+      <p:pic>
+        <p:nvPicPr>
+          <p:cNvPr id="3" name="Image 0" descr="/home/claude/f4/img/minesec_sheet.png">    </p:cNvPr>
+          <p:cNvPicPr>
+            <a:picLocks noChangeAspect="1"/>
+          </p:cNvPicPr>
+          <p:nvPr/>
+        </p:nvPicPr>
+        <p:blipFill>
+          <a:blip r:embed="rId1"/>
+          <a:stretch>
+            <a:fillRect/>
+          </a:stretch>
+        </p:blipFill>
+        <p:spPr>
+          <a:xfrm>
+            <a:off x="0" y="658368"/>
+            <a:ext cx="5120640" cy="5833872"/>
+          </a:xfrm>
+          <a:prstGeom prst="rect">
+            <a:avLst/>
+          </a:prstGeom>
+        </p:spPr>
+      </p:pic>
+      <p:sp>
+        <p:nvSpPr>
+          <p:cNvPr id="4" name="Text 1"/>
+          <p:cNvSpPr/>
+          <p:nvPr/>
+        </p:nvSpPr>
+        <p:spPr>
+          <a:xfrm>
+            <a:off x="5349240" y="1005840"/>
+            <a:ext cx="6522415" cy="731520"/>
+          </a:xfrm>
+          <a:prstGeom prst="rect">
+            <a:avLst/>
+          </a:prstGeom>
+          <a:noFill/>
+          <a:ln/>
+        </p:spPr>
+        <p:txBody>
+          <a:bodyPr wrap="square" lIns="0" tIns="0" rIns="0" bIns="0" rtlCol="0" anchor="ctr">
+            <a:normAutofit/>
+          </a:bodyPr>
+          <a:lstStyle/>
+          <a:p>
+            <a:pPr algn="ctr" indent="0" marL="0">
+              <a:buNone/>
+            </a:pPr>
+            <a:r>
+              <a:rPr lang="en-US" sz="3600" b="1" dirty="0">
+                <a:solidFill>
+                  <a:srgbClr val="990011"/>
+                </a:solidFill>
+                <a:latin typeface="Times New Roman" pitchFamily="34" charset="0"/>
+                <a:ea typeface="Times New Roman" pitchFamily="34" charset="-122"/>
+                <a:cs typeface="Times New Roman" pitchFamily="34" charset="-120"/>
+              </a:rPr>
+              <a:t>Evaluation 1</a:t>
+            </a:r>
+            <a:endParaRPr lang="en-US" sz="3600" dirty="0"/>
+          </a:p>
+        </p:txBody>
+      </p:sp>
+      <p:sp>
+        <p:nvSpPr>
+          <p:cNvPr id="5" name="Text 2"/>
+          <p:cNvSpPr/>
+          <p:nvPr/>
+        </p:nvSpPr>
+        <p:spPr>
+          <a:xfrm>
+            <a:off x="5349240" y="1783080"/>
+            <a:ext cx="6522415" cy="4663440"/>
+          </a:xfrm>
+          <a:prstGeom prst="rect">
+            <a:avLst/>
+          </a:prstGeom>
+          <a:noFill/>
+          <a:ln/>
+        </p:spPr>
+        <p:txBody>
+          <a:bodyPr wrap="square" lIns="0" tIns="0" rIns="0" bIns="0" rtlCol="0" anchor="t"/>
+          <a:lstStyle/>
+          <a:p>
+            <a:pPr algn="l" indent="0" marL="0">
+              <a:spcAft>
+                <a:spcPts val="800"/>
+              </a:spcAft>
+              <a:buNone/>
+            </a:pPr>
+            <a:r>
+              <a:rPr lang="en-US" sz="4000" dirty="0">
+                <a:solidFill>
+                  <a:srgbClr val="111111"/>
+                </a:solidFill>
+                <a:latin typeface="Times New Roman" pitchFamily="34" charset="0"/>
+                <a:ea typeface="Times New Roman" pitchFamily="34" charset="-122"/>
+                <a:cs typeface="Times New Roman" pitchFamily="34" charset="-120"/>
+              </a:rPr>
+              <a:t>Find the mean, median and mode of 4, 7, 7, 9, 13.</a:t>
+            </a:r>
+            <a:endParaRPr lang="en-US" sz="4000" dirty="0"/>
+          </a:p>
+        </p:txBody>
+      </p:sp>
+      <p:sp>
+        <p:nvSpPr>
+          <p:cNvPr id="25" name="Slide Number Placeholder 0"/>
+          <p:cNvSpPr>
+            <a:spLocks noGrp="1"/>
+          </p:cNvSpPr>
+          <p:nvPr>
+            <p:ph type="sldNum" sz="quarter" idx="4294967295"/>
+          </p:nvPr>
+        </p:nvSpPr>
+        <p:spPr>
+          <a:xfrm>
+            <a:off x="27432" y="91440"/>
+            <a:ext cx="585216" cy="475488"/>
+          </a:xfrm>
+          <a:prstGeom prst="rect">
+            <a:avLst/>
+          </a:prstGeom>
+          <a:extLst>
+            <a:ext uri="{C572A759-6A51-4108-AA02-DFA0A04FC94B}">
+              <ma14:wrappingTextBoxFlag xmlns:ma14="http://schemas.microsoft.com/office/mac/drawingml/2011/main" val="0"/>
+            </a:ext>
+          </a:extLst>
+        </p:spPr>
+        <p:txBody>
+          <a:bodyPr/>
+          <a:lstStyle>
+            <a:lvl1pPr>
+              <a:defRPr sz="2000">
+                <a:solidFill>
+                  <a:srgbClr val="FFFFFF"/>
+                </a:solidFill>
+                <a:latin typeface="Calibri"/>
+                <a:ea typeface="Calibri"/>
+                <a:cs typeface="Calibri"/>
+              </a:defRPr>
+            </a:lvl1pPr>
+          </a:lstStyle>
+          <a:p>
+            <a:pPr algn="ctr"/>
+            <a:fld id="{F7021451-1387-4CA6-816F-3879F97B5CBC}" type="slidenum">
+              <a:rPr b="1" lang="en-US"/>
+              <a:t>68</a:t>
+            </a:fld>
+            <a:endParaRPr lang="en-US"/>
+          </a:p>
+        </p:txBody>
+      </p:sp>
+    </p:spTree>
+  </p:cSld>
+  <p:clrMapOvr>
+    <a:masterClrMapping/>
+  </p:clrMapOvr>
+</p:sld>
+</file>
+
+<file path=ppt/slides/slide69.xml><?xml version="1.0" encoding="utf-8"?>
+<p:sld xmlns:a="http://schemas.openxmlformats.org/drawingml/2006/main" xmlns:r="http://schemas.openxmlformats.org/officeDocument/2006/relationships" xmlns:p="http://schemas.openxmlformats.org/presentationml/2006/main">
+  <p:cSld name="Slide 69">
+    <p:spTree>
+      <p:nvGrpSpPr>
+        <p:cNvPr id="1" name=""/>
+        <p:cNvGrpSpPr/>
+        <p:nvPr/>
+      </p:nvGrpSpPr>
+      <p:grpSpPr>
+        <a:xfrm>
+          <a:off x="0" y="0"/>
+          <a:ext cx="0" cy="0"/>
+          <a:chOff x="0" y="0"/>
+          <a:chExt cx="0" cy="0"/>
+        </a:xfrm>
+      </p:grpSpPr>
+      <p:sp>
+        <p:nvSpPr>
+          <p:cNvPr id="2" name="Text 0"/>
+          <p:cNvSpPr/>
+          <p:nvPr/>
+        </p:nvSpPr>
+        <p:spPr>
+          <a:xfrm>
+            <a:off x="457200" y="713232"/>
+            <a:ext cx="11368735" cy="274320"/>
+          </a:xfrm>
+          <a:prstGeom prst="rect">
+            <a:avLst/>
+          </a:prstGeom>
+          <a:noFill/>
+          <a:ln/>
+        </p:spPr>
+        <p:txBody>
+          <a:bodyPr wrap="square" lIns="0" tIns="0" rIns="0" bIns="0" rtlCol="0" anchor="ctr"/>
+          <a:lstStyle/>
+          <a:p>
+            <a:pPr algn="r" indent="0" marL="0">
+              <a:buNone/>
+            </a:pPr>
+            <a:r>
+              <a:rPr lang="en-US" sz="1400" b="1" dirty="0">
+                <a:solidFill>
+                  <a:srgbClr val="1C3F6E"/>
+                </a:solidFill>
+                <a:latin typeface="Calibri" pitchFamily="34" charset="0"/>
+                <a:ea typeface="Calibri" pitchFamily="34" charset="-122"/>
+                <a:cs typeface="Calibri" pitchFamily="34" charset="-120"/>
+              </a:rPr>
+              <a:t>FORMATIVE EVALUATION</a:t>
+            </a:r>
+            <a:endParaRPr lang="en-US" sz="1400" dirty="0"/>
+          </a:p>
+        </p:txBody>
+      </p:sp>
+      <p:pic>
+        <p:nvPicPr>
+          <p:cNvPr id="3" name="Image 0" descr="/home/claude/f4/img/minesec_sheet.png">    </p:cNvPr>
+          <p:cNvPicPr>
+            <a:picLocks noChangeAspect="1"/>
+          </p:cNvPicPr>
+          <p:nvPr/>
+        </p:nvPicPr>
+        <p:blipFill>
+          <a:blip r:embed="rId1"/>
+          <a:stretch>
+            <a:fillRect/>
+          </a:stretch>
+        </p:blipFill>
+        <p:spPr>
+          <a:xfrm>
+            <a:off x="0" y="658368"/>
+            <a:ext cx="5120640" cy="5833872"/>
+          </a:xfrm>
+          <a:prstGeom prst="rect">
+            <a:avLst/>
+          </a:prstGeom>
+        </p:spPr>
+      </p:pic>
+      <p:sp>
+        <p:nvSpPr>
+          <p:cNvPr id="4" name="Text 1"/>
+          <p:cNvSpPr/>
+          <p:nvPr/>
+        </p:nvSpPr>
+        <p:spPr>
+          <a:xfrm>
+            <a:off x="5349240" y="1005840"/>
+            <a:ext cx="6522415" cy="731520"/>
+          </a:xfrm>
+          <a:prstGeom prst="rect">
+            <a:avLst/>
+          </a:prstGeom>
+          <a:noFill/>
+          <a:ln/>
+        </p:spPr>
+        <p:txBody>
+          <a:bodyPr wrap="square" lIns="0" tIns="0" rIns="0" bIns="0" rtlCol="0" anchor="ctr">
+            <a:normAutofit/>
+          </a:bodyPr>
+          <a:lstStyle/>
+          <a:p>
+            <a:pPr algn="ctr" indent="0" marL="0">
+              <a:buNone/>
+            </a:pPr>
+            <a:r>
+              <a:rPr lang="en-US" sz="3600" b="1" dirty="0">
+                <a:solidFill>
+                  <a:srgbClr val="990011"/>
+                </a:solidFill>
+                <a:latin typeface="Times New Roman" pitchFamily="34" charset="0"/>
+                <a:ea typeface="Times New Roman" pitchFamily="34" charset="-122"/>
+                <a:cs typeface="Times New Roman" pitchFamily="34" charset="-120"/>
+              </a:rPr>
+              <a:t>Expected Answer</a:t>
+            </a:r>
+            <a:endParaRPr lang="en-US" sz="3600" dirty="0"/>
+          </a:p>
+        </p:txBody>
+      </p:sp>
+      <p:sp>
+        <p:nvSpPr>
+          <p:cNvPr id="5" name="Text 2"/>
+          <p:cNvSpPr/>
+          <p:nvPr/>
+        </p:nvSpPr>
+        <p:spPr>
+          <a:xfrm>
+            <a:off x="5349240" y="1783080"/>
+            <a:ext cx="6522415" cy="4663440"/>
+          </a:xfrm>
+          <a:prstGeom prst="rect">
+            <a:avLst/>
+          </a:prstGeom>
+          <a:noFill/>
+          <a:ln/>
+        </p:spPr>
+        <p:txBody>
+          <a:bodyPr wrap="square" lIns="0" tIns="0" rIns="0" bIns="0" rtlCol="0" anchor="t"/>
+          <a:lstStyle/>
+          <a:p>
+            <a:pPr algn="l" indent="0" marL="0">
+              <a:spcAft>
+                <a:spcPts val="800"/>
+              </a:spcAft>
+              <a:buNone/>
+            </a:pPr>
+            <a:r>
+              <a:rPr lang="en-US" sz="4000" dirty="0">
+                <a:solidFill>
+                  <a:srgbClr val="111111"/>
+                </a:solidFill>
+                <a:latin typeface="Times New Roman" pitchFamily="34" charset="0"/>
+                <a:ea typeface="Times New Roman" pitchFamily="34" charset="-122"/>
+                <a:cs typeface="Times New Roman" pitchFamily="34" charset="-120"/>
+              </a:rPr>
+              <a:t>Mean = 40 ÷ 5 = 8; median = 7; mode = 7.</a:t>
+            </a:r>
+            <a:endParaRPr lang="en-US" sz="4000" dirty="0"/>
+          </a:p>
+        </p:txBody>
+      </p:sp>
+      <p:sp>
+        <p:nvSpPr>
+          <p:cNvPr id="25" name="Slide Number Placeholder 0"/>
+          <p:cNvSpPr>
+            <a:spLocks noGrp="1"/>
+          </p:cNvSpPr>
+          <p:nvPr>
+            <p:ph type="sldNum" sz="quarter" idx="4294967295"/>
+          </p:nvPr>
+        </p:nvSpPr>
+        <p:spPr>
+          <a:xfrm>
+            <a:off x="27432" y="91440"/>
+            <a:ext cx="585216" cy="475488"/>
+          </a:xfrm>
+          <a:prstGeom prst="rect">
+            <a:avLst/>
+          </a:prstGeom>
+          <a:extLst>
+            <a:ext uri="{C572A759-6A51-4108-AA02-DFA0A04FC94B}">
+              <ma14:wrappingTextBoxFlag xmlns:ma14="http://schemas.microsoft.com/office/mac/drawingml/2011/main" val="0"/>
+            </a:ext>
+          </a:extLst>
+        </p:spPr>
+        <p:txBody>
+          <a:bodyPr/>
+          <a:lstStyle>
+            <a:lvl1pPr>
+              <a:defRPr sz="2000">
+                <a:solidFill>
+                  <a:srgbClr val="FFFFFF"/>
+                </a:solidFill>
+                <a:latin typeface="Calibri"/>
+                <a:ea typeface="Calibri"/>
+                <a:cs typeface="Calibri"/>
+              </a:defRPr>
+            </a:lvl1pPr>
+          </a:lstStyle>
+          <a:p>
+            <a:pPr algn="ctr"/>
+            <a:fld id="{F7021451-1387-4CA6-816F-3879F97B5CBC}" type="slidenum">
+              <a:rPr b="1" lang="en-US"/>
+              <a:t>69</a:t>
+            </a:fld>
+            <a:endParaRPr lang="en-US"/>
+          </a:p>
+        </p:txBody>
+      </p:sp>
+    </p:spTree>
+  </p:cSld>
+  <p:clrMapOvr>
+    <a:masterClrMapping/>
+  </p:clrMapOvr>
+</p:sld>
+</file>
+
+<file path=ppt/slides/slide7.xml><?xml version="1.0" encoding="utf-8"?>
+<p:sld xmlns:a="http://schemas.openxmlformats.org/drawingml/2006/main" xmlns:r="http://schemas.openxmlformats.org/officeDocument/2006/relationships" xmlns:p="http://schemas.openxmlformats.org/presentationml/2006/main">
+  <p:cSld name="Slide 7">
+    <p:spTree>
+      <p:nvGrpSpPr>
+        <p:cNvPr id="1" name=""/>
+        <p:cNvGrpSpPr/>
+        <p:nvPr/>
+      </p:nvGrpSpPr>
+      <p:grpSpPr>
+        <a:xfrm>
+          <a:off x="0" y="0"/>
+          <a:ext cx="0" cy="0"/>
+          <a:chOff x="0" y="0"/>
+          <a:chExt cx="0" cy="0"/>
+        </a:xfrm>
+      </p:grpSpPr>
+      <p:sp>
+        <p:nvSpPr>
+          <p:cNvPr id="2" name="Text 0"/>
+          <p:cNvSpPr/>
+          <p:nvPr/>
+        </p:nvSpPr>
+        <p:spPr>
+          <a:xfrm>
+            <a:off x="457200" y="713232"/>
+            <a:ext cx="11368735" cy="274320"/>
+          </a:xfrm>
+          <a:prstGeom prst="rect">
+            <a:avLst/>
+          </a:prstGeom>
+          <a:noFill/>
+          <a:ln/>
+        </p:spPr>
+        <p:txBody>
+          <a:bodyPr wrap="square" lIns="0" tIns="0" rIns="0" bIns="0" rtlCol="0" anchor="ctr"/>
+          <a:lstStyle/>
+          <a:p>
+            <a:pPr algn="r" indent="0" marL="0">
+              <a:buNone/>
+            </a:pPr>
+            <a:r>
+              <a:rPr lang="en-US" sz="1400" b="1" dirty="0">
+                <a:solidFill>
+                  <a:srgbClr val="1C3F6E"/>
+                </a:solidFill>
+                <a:latin typeface="Calibri" pitchFamily="34" charset="0"/>
+                <a:ea typeface="Calibri" pitchFamily="34" charset="-122"/>
+                <a:cs typeface="Calibri" pitchFamily="34" charset="-120"/>
+              </a:rPr>
+              <a:t>OBJECTIVES</a:t>
+            </a:r>
+            <a:endParaRPr lang="en-US" sz="1400" dirty="0"/>
+          </a:p>
+        </p:txBody>
+      </p:sp>
+      <p:pic>
+        <p:nvPicPr>
+          <p:cNvPr id="3" name="Image 0" descr="/home/claude/f4/img/minesec_sheet.png">    </p:cNvPr>
+          <p:cNvPicPr>
+            <a:picLocks noChangeAspect="1"/>
+          </p:cNvPicPr>
+          <p:nvPr/>
+        </p:nvPicPr>
+        <p:blipFill>
+          <a:blip r:embed="rId1"/>
+          <a:stretch>
+            <a:fillRect/>
+          </a:stretch>
+        </p:blipFill>
+        <p:spPr>
+          <a:xfrm>
+            <a:off x="0" y="658368"/>
+            <a:ext cx="5120640" cy="5833872"/>
+          </a:xfrm>
+          <a:prstGeom prst="rect">
+            <a:avLst/>
+          </a:prstGeom>
+        </p:spPr>
+      </p:pic>
+      <p:sp>
+        <p:nvSpPr>
+          <p:cNvPr id="4" name="Text 1"/>
+          <p:cNvSpPr/>
+          <p:nvPr/>
+        </p:nvSpPr>
+        <p:spPr>
+          <a:xfrm>
+            <a:off x="5349240" y="1005840"/>
+            <a:ext cx="6522415" cy="731520"/>
+          </a:xfrm>
+          <a:prstGeom prst="rect">
+            <a:avLst/>
+          </a:prstGeom>
+          <a:noFill/>
+          <a:ln/>
+        </p:spPr>
+        <p:txBody>
+          <a:bodyPr wrap="square" lIns="0" tIns="0" rIns="0" bIns="0" rtlCol="0" anchor="ctr">
+            <a:normAutofit/>
+          </a:bodyPr>
+          <a:lstStyle/>
+          <a:p>
+            <a:pPr algn="ctr" indent="0" marL="0">
+              <a:buNone/>
+            </a:pPr>
+            <a:r>
+              <a:rPr lang="en-US" sz="3600" b="1" dirty="0">
+                <a:solidFill>
+                  <a:srgbClr val="990011"/>
+                </a:solidFill>
+                <a:latin typeface="Times New Roman" pitchFamily="34" charset="0"/>
+                <a:ea typeface="Times New Roman" pitchFamily="34" charset="-122"/>
+                <a:cs typeface="Times New Roman" pitchFamily="34" charset="-120"/>
+              </a:rPr>
+              <a:t>Objectives</a:t>
+            </a:r>
+            <a:endParaRPr lang="en-US" sz="3600" dirty="0"/>
+          </a:p>
+        </p:txBody>
+      </p:sp>
+      <p:sp>
+        <p:nvSpPr>
+          <p:cNvPr id="5" name="Text 2"/>
+          <p:cNvSpPr/>
+          <p:nvPr/>
+        </p:nvSpPr>
+        <p:spPr>
+          <a:xfrm>
+            <a:off x="5349240" y="1783080"/>
+            <a:ext cx="6522415" cy="4663440"/>
+          </a:xfrm>
+          <a:prstGeom prst="rect">
+            <a:avLst/>
+          </a:prstGeom>
+          <a:noFill/>
+          <a:ln/>
+        </p:spPr>
+        <p:txBody>
+          <a:bodyPr wrap="square" lIns="0" tIns="0" rIns="0" bIns="0" rtlCol="0" anchor="t"/>
+          <a:lstStyle/>
+          <a:p>
+            <a:pPr algn="l" indent="0" marL="0">
+              <a:spcAft>
+                <a:spcPts val="800"/>
+              </a:spcAft>
+              <a:buNone/>
+            </a:pPr>
+            <a:r>
+              <a:rPr lang="en-US" sz="4000" b="1" dirty="0">
+                <a:solidFill>
+                  <a:srgbClr val="111111"/>
+                </a:solidFill>
+                <a:latin typeface="Times New Roman" pitchFamily="34" charset="0"/>
+                <a:ea typeface="Times New Roman" pitchFamily="34" charset="-122"/>
+                <a:cs typeface="Times New Roman" pitchFamily="34" charset="-120"/>
+              </a:rPr>
+              <a:t>By the end of this lesson, you should be able to:</a:t>
+            </a:r>
+            <a:endParaRPr lang="en-US" sz="4000" dirty="0"/>
+          </a:p>
+          <a:p>
+            <a:pPr algn="l" marL="342900" indent="-342900">
+              <a:spcAft>
+                <a:spcPts val="800"/>
+              </a:spcAft>
+              <a:buSzPct val="100000"/>
+              <a:buFont typeface="+mj-lt"/>
+              <a:buAutoNum type="arabicPeriod" startAt="1"/>
+            </a:pPr>
+            <a:r>
+              <a:rPr lang="en-US" sz="4000" dirty="0">
+                <a:solidFill>
+                  <a:srgbClr val="111111"/>
+                </a:solidFill>
+                <a:latin typeface="Times New Roman" pitchFamily="34" charset="0"/>
+                <a:ea typeface="Times New Roman" pitchFamily="34" charset="-122"/>
+                <a:cs typeface="Times New Roman" pitchFamily="34" charset="-120"/>
+              </a:rPr>
+              <a:t>Calculate the mean and state its advantages and disadvantages.</a:t>
+            </a:r>
+            <a:endParaRPr lang="en-US" sz="4000" dirty="0"/>
+          </a:p>
+          <a:p>
+            <a:pPr algn="l" marL="342900" indent="-342900">
+              <a:spcAft>
+                <a:spcPts val="800"/>
+              </a:spcAft>
+              <a:buSzPct val="100000"/>
+              <a:buFont typeface="+mj-lt"/>
+              <a:buAutoNum type="arabicPeriod" startAt="1"/>
+            </a:pPr>
+            <a:r>
+              <a:rPr lang="en-US" sz="4000" dirty="0">
+                <a:solidFill>
+                  <a:srgbClr val="111111"/>
+                </a:solidFill>
+                <a:latin typeface="Times New Roman" pitchFamily="34" charset="0"/>
+                <a:ea typeface="Times New Roman" pitchFamily="34" charset="-122"/>
+                <a:cs typeface="Times New Roman" pitchFamily="34" charset="-120"/>
+              </a:rPr>
+              <a:t>Find the median of odd and even sets of data.</a:t>
+            </a:r>
+            <a:endParaRPr lang="en-US" sz="4000" dirty="0"/>
+          </a:p>
+        </p:txBody>
+      </p:sp>
+      <p:sp>
+        <p:nvSpPr>
+          <p:cNvPr id="25" name="Slide Number Placeholder 0"/>
+          <p:cNvSpPr>
+            <a:spLocks noGrp="1"/>
+          </p:cNvSpPr>
+          <p:nvPr>
+            <p:ph type="sldNum" sz="quarter" idx="4294967295"/>
+          </p:nvPr>
+        </p:nvSpPr>
+        <p:spPr>
+          <a:xfrm>
+            <a:off x="27432" y="91440"/>
+            <a:ext cx="585216" cy="475488"/>
+          </a:xfrm>
+          <a:prstGeom prst="rect">
+            <a:avLst/>
+          </a:prstGeom>
+          <a:extLst>
+            <a:ext uri="{C572A759-6A51-4108-AA02-DFA0A04FC94B}">
+              <ma14:wrappingTextBoxFlag xmlns:ma14="http://schemas.microsoft.com/office/mac/drawingml/2011/main" val="0"/>
+            </a:ext>
+          </a:extLst>
+        </p:spPr>
+        <p:txBody>
+          <a:bodyPr/>
+          <a:lstStyle>
+            <a:lvl1pPr>
+              <a:defRPr sz="2000">
+                <a:solidFill>
+                  <a:srgbClr val="FFFFFF"/>
+                </a:solidFill>
+                <a:latin typeface="Calibri"/>
+                <a:ea typeface="Calibri"/>
+                <a:cs typeface="Calibri"/>
+              </a:defRPr>
+            </a:lvl1pPr>
+          </a:lstStyle>
+          <a:p>
+            <a:pPr algn="ctr"/>
+            <a:fld id="{F7021451-1387-4CA6-816F-3879F97B5CBC}" type="slidenum">
+              <a:rPr b="1" lang="en-US"/>
+              <a:t>7</a:t>
+            </a:fld>
+            <a:endParaRPr lang="en-US"/>
+          </a:p>
+        </p:txBody>
+      </p:sp>
+    </p:spTree>
+  </p:cSld>
+  <p:clrMapOvr>
+    <a:masterClrMapping/>
+  </p:clrMapOvr>
+</p:sld>
+</file>
+
+<file path=ppt/slides/slide70.xml><?xml version="1.0" encoding="utf-8"?>
+<p:sld xmlns:a="http://schemas.openxmlformats.org/drawingml/2006/main" xmlns:r="http://schemas.openxmlformats.org/officeDocument/2006/relationships" xmlns:p="http://schemas.openxmlformats.org/presentationml/2006/main">
+  <p:cSld name="Slide 70">
+    <p:spTree>
+      <p:nvGrpSpPr>
+        <p:cNvPr id="1" name=""/>
+        <p:cNvGrpSpPr/>
+        <p:nvPr/>
+      </p:nvGrpSpPr>
+      <p:grpSpPr>
+        <a:xfrm>
+          <a:off x="0" y="0"/>
+          <a:ext cx="0" cy="0"/>
+          <a:chOff x="0" y="0"/>
+          <a:chExt cx="0" cy="0"/>
+        </a:xfrm>
+      </p:grpSpPr>
+      <p:sp>
+        <p:nvSpPr>
+          <p:cNvPr id="2" name="Text 0"/>
+          <p:cNvSpPr/>
+          <p:nvPr/>
+        </p:nvSpPr>
+        <p:spPr>
+          <a:xfrm>
+            <a:off x="457200" y="713232"/>
+            <a:ext cx="11368735" cy="274320"/>
+          </a:xfrm>
+          <a:prstGeom prst="rect">
+            <a:avLst/>
+          </a:prstGeom>
+          <a:noFill/>
+          <a:ln/>
+        </p:spPr>
+        <p:txBody>
+          <a:bodyPr wrap="square" lIns="0" tIns="0" rIns="0" bIns="0" rtlCol="0" anchor="ctr"/>
+          <a:lstStyle/>
+          <a:p>
+            <a:pPr algn="r" indent="0" marL="0">
+              <a:buNone/>
+            </a:pPr>
+            <a:r>
+              <a:rPr lang="en-US" sz="1400" b="1" dirty="0">
+                <a:solidFill>
+                  <a:srgbClr val="1C3F6E"/>
+                </a:solidFill>
+                <a:latin typeface="Calibri" pitchFamily="34" charset="0"/>
+                <a:ea typeface="Calibri" pitchFamily="34" charset="-122"/>
+                <a:cs typeface="Calibri" pitchFamily="34" charset="-120"/>
+              </a:rPr>
+              <a:t>FORMATIVE EVALUATION</a:t>
+            </a:r>
+            <a:endParaRPr lang="en-US" sz="1400" dirty="0"/>
+          </a:p>
+        </p:txBody>
+      </p:sp>
+      <p:pic>
+        <p:nvPicPr>
+          <p:cNvPr id="3" name="Image 0" descr="/home/claude/f4/img/minesec_sheet.png">    </p:cNvPr>
+          <p:cNvPicPr>
+            <a:picLocks noChangeAspect="1"/>
+          </p:cNvPicPr>
+          <p:nvPr/>
+        </p:nvPicPr>
+        <p:blipFill>
+          <a:blip r:embed="rId1"/>
+          <a:stretch>
+            <a:fillRect/>
+          </a:stretch>
+        </p:blipFill>
+        <p:spPr>
+          <a:xfrm>
+            <a:off x="0" y="658368"/>
+            <a:ext cx="5120640" cy="5833872"/>
+          </a:xfrm>
+          <a:prstGeom prst="rect">
+            <a:avLst/>
+          </a:prstGeom>
+        </p:spPr>
+      </p:pic>
+      <p:sp>
+        <p:nvSpPr>
+          <p:cNvPr id="4" name="Text 1"/>
+          <p:cNvSpPr/>
+          <p:nvPr/>
+        </p:nvSpPr>
+        <p:spPr>
+          <a:xfrm>
+            <a:off x="5349240" y="1005840"/>
+            <a:ext cx="6522415" cy="731520"/>
+          </a:xfrm>
+          <a:prstGeom prst="rect">
+            <a:avLst/>
+          </a:prstGeom>
+          <a:noFill/>
+          <a:ln/>
+        </p:spPr>
+        <p:txBody>
+          <a:bodyPr wrap="square" lIns="0" tIns="0" rIns="0" bIns="0" rtlCol="0" anchor="ctr">
+            <a:normAutofit/>
+          </a:bodyPr>
+          <a:lstStyle/>
+          <a:p>
+            <a:pPr algn="ctr" indent="0" marL="0">
+              <a:buNone/>
+            </a:pPr>
+            <a:r>
+              <a:rPr lang="en-US" sz="3600" b="1" dirty="0">
+                <a:solidFill>
+                  <a:srgbClr val="990011"/>
+                </a:solidFill>
+                <a:latin typeface="Times New Roman" pitchFamily="34" charset="0"/>
+                <a:ea typeface="Times New Roman" pitchFamily="34" charset="-122"/>
+                <a:cs typeface="Times New Roman" pitchFamily="34" charset="-120"/>
+              </a:rPr>
+              <a:t>Evaluation 2</a:t>
+            </a:r>
+            <a:endParaRPr lang="en-US" sz="3600" dirty="0"/>
+          </a:p>
+        </p:txBody>
+      </p:sp>
+      <p:sp>
+        <p:nvSpPr>
+          <p:cNvPr id="5" name="Text 2"/>
+          <p:cNvSpPr/>
+          <p:nvPr/>
+        </p:nvSpPr>
+        <p:spPr>
+          <a:xfrm>
+            <a:off x="5349240" y="1783080"/>
+            <a:ext cx="6522415" cy="4663440"/>
+          </a:xfrm>
+          <a:prstGeom prst="rect">
+            <a:avLst/>
+          </a:prstGeom>
+          <a:noFill/>
+          <a:ln/>
+        </p:spPr>
+        <p:txBody>
+          <a:bodyPr wrap="square" lIns="0" tIns="0" rIns="0" bIns="0" rtlCol="0" anchor="t"/>
+          <a:lstStyle/>
+          <a:p>
+            <a:pPr algn="l" indent="0" marL="0">
+              <a:spcAft>
+                <a:spcPts val="800"/>
+              </a:spcAft>
+              <a:buNone/>
+            </a:pPr>
+            <a:r>
+              <a:rPr lang="en-US" sz="4000" dirty="0">
+                <a:solidFill>
+                  <a:srgbClr val="111111"/>
+                </a:solidFill>
+                <a:latin typeface="Times New Roman" pitchFamily="34" charset="0"/>
+                <a:ea typeface="Times New Roman" pitchFamily="34" charset="-122"/>
+                <a:cs typeface="Times New Roman" pitchFamily="34" charset="-120"/>
+              </a:rPr>
+              <a:t>Why is the median better than the mean for Oumarou's farms?</a:t>
+            </a:r>
+            <a:endParaRPr lang="en-US" sz="4000" dirty="0"/>
+          </a:p>
+        </p:txBody>
+      </p:sp>
+      <p:sp>
+        <p:nvSpPr>
+          <p:cNvPr id="25" name="Slide Number Placeholder 0"/>
+          <p:cNvSpPr>
+            <a:spLocks noGrp="1"/>
+          </p:cNvSpPr>
+          <p:nvPr>
+            <p:ph type="sldNum" sz="quarter" idx="4294967295"/>
+          </p:nvPr>
+        </p:nvSpPr>
+        <p:spPr>
+          <a:xfrm>
+            <a:off x="27432" y="91440"/>
+            <a:ext cx="585216" cy="475488"/>
+          </a:xfrm>
+          <a:prstGeom prst="rect">
+            <a:avLst/>
+          </a:prstGeom>
+          <a:extLst>
+            <a:ext uri="{C572A759-6A51-4108-AA02-DFA0A04FC94B}">
+              <ma14:wrappingTextBoxFlag xmlns:ma14="http://schemas.microsoft.com/office/mac/drawingml/2011/main" val="0"/>
+            </a:ext>
+          </a:extLst>
+        </p:spPr>
+        <p:txBody>
+          <a:bodyPr/>
+          <a:lstStyle>
+            <a:lvl1pPr>
+              <a:defRPr sz="2000">
+                <a:solidFill>
+                  <a:srgbClr val="FFFFFF"/>
+                </a:solidFill>
+                <a:latin typeface="Calibri"/>
+                <a:ea typeface="Calibri"/>
+                <a:cs typeface="Calibri"/>
+              </a:defRPr>
+            </a:lvl1pPr>
+          </a:lstStyle>
+          <a:p>
+            <a:pPr algn="ctr"/>
+            <a:fld id="{F7021451-1387-4CA6-816F-3879F97B5CBC}" type="slidenum">
+              <a:rPr b="1" lang="en-US"/>
+              <a:t>70</a:t>
+            </a:fld>
+            <a:endParaRPr lang="en-US"/>
+          </a:p>
+        </p:txBody>
+      </p:sp>
+    </p:spTree>
+  </p:cSld>
+  <p:clrMapOvr>
+    <a:masterClrMapping/>
+  </p:clrMapOvr>
+</p:sld>
+</file>
+
+<file path=ppt/slides/slide71.xml><?xml version="1.0" encoding="utf-8"?>
+<p:sld xmlns:a="http://schemas.openxmlformats.org/drawingml/2006/main" xmlns:r="http://schemas.openxmlformats.org/officeDocument/2006/relationships" xmlns:p="http://schemas.openxmlformats.org/presentationml/2006/main">
+  <p:cSld name="Slide 71">
+    <p:spTree>
+      <p:nvGrpSpPr>
+        <p:cNvPr id="1" name=""/>
+        <p:cNvGrpSpPr/>
+        <p:nvPr/>
+      </p:nvGrpSpPr>
+      <p:grpSpPr>
+        <a:xfrm>
+          <a:off x="0" y="0"/>
+          <a:ext cx="0" cy="0"/>
+          <a:chOff x="0" y="0"/>
+          <a:chExt cx="0" cy="0"/>
+        </a:xfrm>
+      </p:grpSpPr>
+      <p:sp>
+        <p:nvSpPr>
+          <p:cNvPr id="2" name="Text 0"/>
+          <p:cNvSpPr/>
+          <p:nvPr/>
+        </p:nvSpPr>
+        <p:spPr>
+          <a:xfrm>
+            <a:off x="457200" y="713232"/>
+            <a:ext cx="11368735" cy="274320"/>
+          </a:xfrm>
+          <a:prstGeom prst="rect">
+            <a:avLst/>
+          </a:prstGeom>
+          <a:noFill/>
+          <a:ln/>
+        </p:spPr>
+        <p:txBody>
+          <a:bodyPr wrap="square" lIns="0" tIns="0" rIns="0" bIns="0" rtlCol="0" anchor="ctr"/>
+          <a:lstStyle/>
+          <a:p>
+            <a:pPr algn="r" indent="0" marL="0">
+              <a:buNone/>
+            </a:pPr>
+            <a:r>
+              <a:rPr lang="en-US" sz="1400" b="1" dirty="0">
+                <a:solidFill>
+                  <a:srgbClr val="1C3F6E"/>
+                </a:solidFill>
+                <a:latin typeface="Calibri" pitchFamily="34" charset="0"/>
+                <a:ea typeface="Calibri" pitchFamily="34" charset="-122"/>
+                <a:cs typeface="Calibri" pitchFamily="34" charset="-120"/>
+              </a:rPr>
+              <a:t>FORMATIVE EVALUATION</a:t>
+            </a:r>
+            <a:endParaRPr lang="en-US" sz="1400" dirty="0"/>
+          </a:p>
+        </p:txBody>
+      </p:sp>
+      <p:pic>
+        <p:nvPicPr>
+          <p:cNvPr id="3" name="Image 0" descr="/home/claude/f4/img/minesec_sheet.png">    </p:cNvPr>
+          <p:cNvPicPr>
+            <a:picLocks noChangeAspect="1"/>
+          </p:cNvPicPr>
+          <p:nvPr/>
+        </p:nvPicPr>
+        <p:blipFill>
+          <a:blip r:embed="rId1"/>
+          <a:stretch>
+            <a:fillRect/>
+          </a:stretch>
+        </p:blipFill>
+        <p:spPr>
+          <a:xfrm>
+            <a:off x="0" y="658368"/>
+            <a:ext cx="5120640" cy="5833872"/>
+          </a:xfrm>
+          <a:prstGeom prst="rect">
+            <a:avLst/>
+          </a:prstGeom>
+        </p:spPr>
+      </p:pic>
+      <p:sp>
+        <p:nvSpPr>
+          <p:cNvPr id="4" name="Text 1"/>
+          <p:cNvSpPr/>
+          <p:nvPr/>
+        </p:nvSpPr>
+        <p:spPr>
+          <a:xfrm>
+            <a:off x="5349240" y="1005840"/>
+            <a:ext cx="6522415" cy="731520"/>
+          </a:xfrm>
+          <a:prstGeom prst="rect">
+            <a:avLst/>
+          </a:prstGeom>
+          <a:noFill/>
+          <a:ln/>
+        </p:spPr>
+        <p:txBody>
+          <a:bodyPr wrap="square" lIns="0" tIns="0" rIns="0" bIns="0" rtlCol="0" anchor="ctr">
+            <a:normAutofit/>
+          </a:bodyPr>
+          <a:lstStyle/>
+          <a:p>
+            <a:pPr algn="ctr" indent="0" marL="0">
+              <a:buNone/>
+            </a:pPr>
+            <a:r>
+              <a:rPr lang="en-US" sz="3600" b="1" dirty="0">
+                <a:solidFill>
+                  <a:srgbClr val="990011"/>
+                </a:solidFill>
+                <a:latin typeface="Times New Roman" pitchFamily="34" charset="0"/>
+                <a:ea typeface="Times New Roman" pitchFamily="34" charset="-122"/>
+                <a:cs typeface="Times New Roman" pitchFamily="34" charset="-120"/>
+              </a:rPr>
+              <a:t>Expected Answer</a:t>
+            </a:r>
+            <a:endParaRPr lang="en-US" sz="3600" dirty="0"/>
+          </a:p>
+        </p:txBody>
+      </p:sp>
+      <p:sp>
+        <p:nvSpPr>
+          <p:cNvPr id="5" name="Text 2"/>
+          <p:cNvSpPr/>
+          <p:nvPr/>
+        </p:nvSpPr>
+        <p:spPr>
+          <a:xfrm>
+            <a:off x="5349240" y="1783080"/>
+            <a:ext cx="6522415" cy="4663440"/>
+          </a:xfrm>
+          <a:prstGeom prst="rect">
+            <a:avLst/>
+          </a:prstGeom>
+          <a:noFill/>
+          <a:ln/>
+        </p:spPr>
+        <p:txBody>
+          <a:bodyPr wrap="square" lIns="0" tIns="0" rIns="0" bIns="0" rtlCol="0" anchor="t"/>
+          <a:lstStyle/>
+          <a:p>
+            <a:pPr algn="l" indent="0" marL="0">
+              <a:spcAft>
+                <a:spcPts val="800"/>
+              </a:spcAft>
+              <a:buNone/>
+            </a:pPr>
+            <a:r>
+              <a:rPr lang="en-US" sz="4000" dirty="0">
+                <a:solidFill>
+                  <a:srgbClr val="111111"/>
+                </a:solidFill>
+                <a:latin typeface="Times New Roman" pitchFamily="34" charset="0"/>
+                <a:ea typeface="Times New Roman" pitchFamily="34" charset="-122"/>
+                <a:cs typeface="Times New Roman" pitchFamily="34" charset="-120"/>
+              </a:rPr>
+              <a:t>The outlier (45 bags) raises the mean to about 21.3, while the median (19) represents most farms.</a:t>
+            </a:r>
+            <a:endParaRPr lang="en-US" sz="4000" dirty="0"/>
+          </a:p>
+        </p:txBody>
+      </p:sp>
+      <p:sp>
+        <p:nvSpPr>
+          <p:cNvPr id="25" name="Slide Number Placeholder 0"/>
+          <p:cNvSpPr>
+            <a:spLocks noGrp="1"/>
+          </p:cNvSpPr>
+          <p:nvPr>
+            <p:ph type="sldNum" sz="quarter" idx="4294967295"/>
+          </p:nvPr>
+        </p:nvSpPr>
+        <p:spPr>
+          <a:xfrm>
+            <a:off x="27432" y="91440"/>
+            <a:ext cx="585216" cy="475488"/>
+          </a:xfrm>
+          <a:prstGeom prst="rect">
+            <a:avLst/>
+          </a:prstGeom>
+          <a:extLst>
+            <a:ext uri="{C572A759-6A51-4108-AA02-DFA0A04FC94B}">
+              <ma14:wrappingTextBoxFlag xmlns:ma14="http://schemas.microsoft.com/office/mac/drawingml/2011/main" val="0"/>
+            </a:ext>
+          </a:extLst>
+        </p:spPr>
+        <p:txBody>
+          <a:bodyPr/>
+          <a:lstStyle>
+            <a:lvl1pPr>
+              <a:defRPr sz="2000">
+                <a:solidFill>
+                  <a:srgbClr val="FFFFFF"/>
+                </a:solidFill>
+                <a:latin typeface="Calibri"/>
+                <a:ea typeface="Calibri"/>
+                <a:cs typeface="Calibri"/>
+              </a:defRPr>
+            </a:lvl1pPr>
+          </a:lstStyle>
+          <a:p>
+            <a:pPr algn="ctr"/>
+            <a:fld id="{F7021451-1387-4CA6-816F-3879F97B5CBC}" type="slidenum">
+              <a:rPr b="1" lang="en-US"/>
+              <a:t>71</a:t>
+            </a:fld>
+            <a:endParaRPr lang="en-US"/>
+          </a:p>
+        </p:txBody>
+      </p:sp>
+    </p:spTree>
+  </p:cSld>
+  <p:clrMapOvr>
+    <a:masterClrMapping/>
+  </p:clrMapOvr>
+</p:sld>
+</file>
+
+<file path=ppt/slides/slide72.xml><?xml version="1.0" encoding="utf-8"?>
+<p:sld xmlns:a="http://schemas.openxmlformats.org/drawingml/2006/main" xmlns:r="http://schemas.openxmlformats.org/officeDocument/2006/relationships" xmlns:p="http://schemas.openxmlformats.org/presentationml/2006/main">
+  <p:cSld name="Slide 72">
+    <p:spTree>
+      <p:nvGrpSpPr>
+        <p:cNvPr id="1" name=""/>
+        <p:cNvGrpSpPr/>
+        <p:nvPr/>
+      </p:nvGrpSpPr>
+      <p:grpSpPr>
+        <a:xfrm>
+          <a:off x="0" y="0"/>
+          <a:ext cx="0" cy="0"/>
+          <a:chOff x="0" y="0"/>
+          <a:chExt cx="0" cy="0"/>
+        </a:xfrm>
+      </p:grpSpPr>
+      <p:sp>
+        <p:nvSpPr>
+          <p:cNvPr id="2" name="Text 0"/>
+          <p:cNvSpPr/>
+          <p:nvPr/>
+        </p:nvSpPr>
+        <p:spPr>
+          <a:xfrm>
+            <a:off x="457200" y="713232"/>
+            <a:ext cx="11368735" cy="274320"/>
+          </a:xfrm>
+          <a:prstGeom prst="rect">
+            <a:avLst/>
+          </a:prstGeom>
+          <a:noFill/>
+          <a:ln/>
+        </p:spPr>
+        <p:txBody>
+          <a:bodyPr wrap="square" lIns="0" tIns="0" rIns="0" bIns="0" rtlCol="0" anchor="ctr"/>
+          <a:lstStyle/>
+          <a:p>
+            <a:pPr algn="r" indent="0" marL="0">
+              <a:buNone/>
+            </a:pPr>
+            <a:r>
+              <a:rPr lang="en-US" sz="1400" b="1" dirty="0">
+                <a:solidFill>
+                  <a:srgbClr val="1C3F6E"/>
+                </a:solidFill>
+                <a:latin typeface="Calibri" pitchFamily="34" charset="0"/>
+                <a:ea typeface="Calibri" pitchFamily="34" charset="-122"/>
+                <a:cs typeface="Calibri" pitchFamily="34" charset="-120"/>
+              </a:rPr>
+              <a:t>REMEDIATION</a:t>
+            </a:r>
+            <a:endParaRPr lang="en-US" sz="1400" dirty="0"/>
+          </a:p>
+        </p:txBody>
+      </p:sp>
+      <p:pic>
+        <p:nvPicPr>
+          <p:cNvPr id="3" name="Image 0" descr="/home/claude/f4/img/minesec_sheet.png">    </p:cNvPr>
+          <p:cNvPicPr>
+            <a:picLocks noChangeAspect="1"/>
+          </p:cNvPicPr>
+          <p:nvPr/>
+        </p:nvPicPr>
+        <p:blipFill>
+          <a:blip r:embed="rId1"/>
+          <a:stretch>
+            <a:fillRect/>
+          </a:stretch>
+        </p:blipFill>
+        <p:spPr>
+          <a:xfrm>
+            <a:off x="0" y="658368"/>
+            <a:ext cx="5120640" cy="5833872"/>
+          </a:xfrm>
+          <a:prstGeom prst="rect">
+            <a:avLst/>
+          </a:prstGeom>
+        </p:spPr>
+      </p:pic>
+      <p:sp>
+        <p:nvSpPr>
+          <p:cNvPr id="4" name="Text 1"/>
+          <p:cNvSpPr/>
+          <p:nvPr/>
+        </p:nvSpPr>
+        <p:spPr>
+          <a:xfrm>
+            <a:off x="5349240" y="1005840"/>
+            <a:ext cx="6522415" cy="731520"/>
+          </a:xfrm>
+          <a:prstGeom prst="rect">
+            <a:avLst/>
+          </a:prstGeom>
+          <a:noFill/>
+          <a:ln/>
+        </p:spPr>
+        <p:txBody>
+          <a:bodyPr wrap="square" lIns="0" tIns="0" rIns="0" bIns="0" rtlCol="0" anchor="ctr">
+            <a:normAutofit/>
+          </a:bodyPr>
+          <a:lstStyle/>
+          <a:p>
+            <a:pPr algn="ctr" indent="0" marL="0">
+              <a:buNone/>
+            </a:pPr>
+            <a:r>
+              <a:rPr lang="en-US" sz="3600" b="1" dirty="0">
+                <a:solidFill>
+                  <a:srgbClr val="990011"/>
+                </a:solidFill>
+                <a:latin typeface="Times New Roman" pitchFamily="34" charset="0"/>
+                <a:ea typeface="Times New Roman" pitchFamily="34" charset="-122"/>
+                <a:cs typeface="Times New Roman" pitchFamily="34" charset="-120"/>
+              </a:rPr>
+              <a:t>Remediation</a:t>
+            </a:r>
+            <a:endParaRPr lang="en-US" sz="3600" dirty="0"/>
+          </a:p>
+        </p:txBody>
+      </p:sp>
+      <p:sp>
+        <p:nvSpPr>
+          <p:cNvPr id="5" name="Text 2"/>
+          <p:cNvSpPr/>
+          <p:nvPr/>
+        </p:nvSpPr>
+        <p:spPr>
+          <a:xfrm>
+            <a:off x="5349240" y="1783080"/>
+            <a:ext cx="6522415" cy="4663440"/>
+          </a:xfrm>
+          <a:prstGeom prst="rect">
+            <a:avLst/>
+          </a:prstGeom>
+          <a:noFill/>
+          <a:ln/>
+        </p:spPr>
+        <p:txBody>
+          <a:bodyPr wrap="square" lIns="0" tIns="0" rIns="0" bIns="0" rtlCol="0" anchor="t"/>
+          <a:lstStyle/>
+          <a:p>
+            <a:pPr algn="l" indent="0" marL="0">
+              <a:spcAft>
+                <a:spcPts val="800"/>
+              </a:spcAft>
+              <a:buNone/>
+            </a:pPr>
+            <a:r>
+              <a:rPr lang="en-US" sz="4000" b="1" dirty="0">
+                <a:solidFill>
+                  <a:srgbClr val="111111"/>
+                </a:solidFill>
+                <a:latin typeface="Times New Roman" pitchFamily="34" charset="0"/>
+                <a:ea typeface="Times New Roman" pitchFamily="34" charset="-122"/>
+                <a:cs typeface="Times New Roman" pitchFamily="34" charset="-120"/>
+              </a:rPr>
+              <a:t>Fill in the blanks:</a:t>
+            </a:r>
+            <a:endParaRPr lang="en-US" sz="4000" dirty="0"/>
+          </a:p>
+          <a:p>
+            <a:pPr algn="l" marL="342900" indent="-342900">
+              <a:spcAft>
+                <a:spcPts val="800"/>
+              </a:spcAft>
+              <a:buSzPct val="100000"/>
+              <a:buFont typeface="+mj-lt"/>
+              <a:buAutoNum type="arabicPeriod" startAt="1"/>
+            </a:pPr>
+            <a:r>
+              <a:rPr lang="en-US" sz="4000" dirty="0">
+                <a:solidFill>
+                  <a:srgbClr val="111111"/>
+                </a:solidFill>
+                <a:latin typeface="Times New Roman" pitchFamily="34" charset="0"/>
+                <a:ea typeface="Times New Roman" pitchFamily="34" charset="-122"/>
+                <a:cs typeface="Times New Roman" pitchFamily="34" charset="-120"/>
+              </a:rPr>
+              <a:t>Mean = Σx ÷ ______.</a:t>
+            </a:r>
+            <a:endParaRPr lang="en-US" sz="4000" dirty="0"/>
+          </a:p>
+          <a:p>
+            <a:pPr algn="l" marL="342900" indent="-342900">
+              <a:spcAft>
+                <a:spcPts val="800"/>
+              </a:spcAft>
+              <a:buSzPct val="100000"/>
+              <a:buFont typeface="+mj-lt"/>
+              <a:buAutoNum type="arabicPeriod" startAt="1"/>
+            </a:pPr>
+            <a:r>
+              <a:rPr lang="en-US" sz="4000" dirty="0">
+                <a:solidFill>
+                  <a:srgbClr val="111111"/>
+                </a:solidFill>
+                <a:latin typeface="Times New Roman" pitchFamily="34" charset="0"/>
+                <a:ea typeface="Times New Roman" pitchFamily="34" charset="-122"/>
+                <a:cs typeface="Times New Roman" pitchFamily="34" charset="-120"/>
+              </a:rPr>
+              <a:t>The most frequent value is the ______.</a:t>
+            </a:r>
+            <a:endParaRPr lang="en-US" sz="4000" dirty="0"/>
+          </a:p>
+          <a:p>
+            <a:pPr algn="l" marL="342900" indent="-342900">
+              <a:spcAft>
+                <a:spcPts val="800"/>
+              </a:spcAft>
+              <a:buSzPct val="100000"/>
+              <a:buFont typeface="+mj-lt"/>
+              <a:buAutoNum type="arabicPeriod" startAt="1"/>
+            </a:pPr>
+            <a:r>
+              <a:rPr lang="en-US" sz="4000" dirty="0">
+                <a:solidFill>
+                  <a:srgbClr val="111111"/>
+                </a:solidFill>
+                <a:latin typeface="Times New Roman" pitchFamily="34" charset="0"/>
+                <a:ea typeface="Times New Roman" pitchFamily="34" charset="-122"/>
+                <a:cs typeface="Times New Roman" pitchFamily="34" charset="-120"/>
+              </a:rPr>
+              <a:t>IQR = Q3 − ______.</a:t>
+            </a:r>
+            <a:endParaRPr lang="en-US" sz="4000" dirty="0"/>
+          </a:p>
+        </p:txBody>
+      </p:sp>
+      <p:sp>
+        <p:nvSpPr>
+          <p:cNvPr id="25" name="Slide Number Placeholder 0"/>
+          <p:cNvSpPr>
+            <a:spLocks noGrp="1"/>
+          </p:cNvSpPr>
+          <p:nvPr>
+            <p:ph type="sldNum" sz="quarter" idx="4294967295"/>
+          </p:nvPr>
+        </p:nvSpPr>
+        <p:spPr>
+          <a:xfrm>
+            <a:off x="27432" y="91440"/>
+            <a:ext cx="585216" cy="475488"/>
+          </a:xfrm>
+          <a:prstGeom prst="rect">
+            <a:avLst/>
+          </a:prstGeom>
+          <a:extLst>
+            <a:ext uri="{C572A759-6A51-4108-AA02-DFA0A04FC94B}">
+              <ma14:wrappingTextBoxFlag xmlns:ma14="http://schemas.microsoft.com/office/mac/drawingml/2011/main" val="0"/>
+            </a:ext>
+          </a:extLst>
+        </p:spPr>
+        <p:txBody>
+          <a:bodyPr/>
+          <a:lstStyle>
+            <a:lvl1pPr>
+              <a:defRPr sz="2000">
+                <a:solidFill>
+                  <a:srgbClr val="FFFFFF"/>
+                </a:solidFill>
+                <a:latin typeface="Calibri"/>
+                <a:ea typeface="Calibri"/>
+                <a:cs typeface="Calibri"/>
+              </a:defRPr>
+            </a:lvl1pPr>
+          </a:lstStyle>
+          <a:p>
+            <a:pPr algn="ctr"/>
+            <a:fld id="{F7021451-1387-4CA6-816F-3879F97B5CBC}" type="slidenum">
+              <a:rPr b="1" lang="en-US"/>
+              <a:t>72</a:t>
+            </a:fld>
+            <a:endParaRPr lang="en-US"/>
+          </a:p>
+        </p:txBody>
+      </p:sp>
+    </p:spTree>
+  </p:cSld>
+  <p:clrMapOvr>
+    <a:masterClrMapping/>
+  </p:clrMapOvr>
+</p:sld>
+</file>
+
+<file path=ppt/slides/slide73.xml><?xml version="1.0" encoding="utf-8"?>
+<p:sld xmlns:a="http://schemas.openxmlformats.org/drawingml/2006/main" xmlns:r="http://schemas.openxmlformats.org/officeDocument/2006/relationships" xmlns:p="http://schemas.openxmlformats.org/presentationml/2006/main">
+  <p:cSld name="Slide 73">
+    <p:spTree>
+      <p:nvGrpSpPr>
+        <p:cNvPr id="1" name=""/>
+        <p:cNvGrpSpPr/>
+        <p:nvPr/>
+      </p:nvGrpSpPr>
+      <p:grpSpPr>
+        <a:xfrm>
+          <a:off x="0" y="0"/>
+          <a:ext cx="0" cy="0"/>
+          <a:chOff x="0" y="0"/>
+          <a:chExt cx="0" cy="0"/>
+        </a:xfrm>
+      </p:grpSpPr>
+      <p:sp>
+        <p:nvSpPr>
+          <p:cNvPr id="2" name="Text 0"/>
+          <p:cNvSpPr/>
+          <p:nvPr/>
+        </p:nvSpPr>
+        <p:spPr>
+          <a:xfrm>
+            <a:off x="457200" y="713232"/>
+            <a:ext cx="11368735" cy="274320"/>
+          </a:xfrm>
+          <a:prstGeom prst="rect">
+            <a:avLst/>
+          </a:prstGeom>
+          <a:noFill/>
+          <a:ln/>
+        </p:spPr>
+        <p:txBody>
+          <a:bodyPr wrap="square" lIns="0" tIns="0" rIns="0" bIns="0" rtlCol="0" anchor="ctr"/>
+          <a:lstStyle/>
+          <a:p>
+            <a:pPr algn="r" indent="0" marL="0">
+              <a:buNone/>
+            </a:pPr>
+            <a:r>
+              <a:rPr lang="en-US" sz="1400" b="1" dirty="0">
+                <a:solidFill>
+                  <a:srgbClr val="1C3F6E"/>
+                </a:solidFill>
+                <a:latin typeface="Calibri" pitchFamily="34" charset="0"/>
+                <a:ea typeface="Calibri" pitchFamily="34" charset="-122"/>
+                <a:cs typeface="Calibri" pitchFamily="34" charset="-120"/>
+              </a:rPr>
+              <a:t>HOMEWORK</a:t>
+            </a:r>
+            <a:endParaRPr lang="en-US" sz="1400" dirty="0"/>
+          </a:p>
+        </p:txBody>
+      </p:sp>
+      <p:pic>
+        <p:nvPicPr>
+          <p:cNvPr id="3" name="Image 0" descr="/home/claude/f4/img/minesec_sheet.png">    </p:cNvPr>
+          <p:cNvPicPr>
+            <a:picLocks noChangeAspect="1"/>
+          </p:cNvPicPr>
+          <p:nvPr/>
+        </p:nvPicPr>
+        <p:blipFill>
+          <a:blip r:embed="rId1"/>
+          <a:stretch>
+            <a:fillRect/>
+          </a:stretch>
+        </p:blipFill>
+        <p:spPr>
+          <a:xfrm>
+            <a:off x="0" y="658368"/>
+            <a:ext cx="5120640" cy="5833872"/>
+          </a:xfrm>
+          <a:prstGeom prst="rect">
+            <a:avLst/>
+          </a:prstGeom>
+        </p:spPr>
+      </p:pic>
+      <p:sp>
+        <p:nvSpPr>
+          <p:cNvPr id="4" name="Text 1"/>
+          <p:cNvSpPr/>
+          <p:nvPr/>
+        </p:nvSpPr>
+        <p:spPr>
+          <a:xfrm>
+            <a:off x="5349240" y="1005840"/>
+            <a:ext cx="6522415" cy="731520"/>
+          </a:xfrm>
+          <a:prstGeom prst="rect">
+            <a:avLst/>
+          </a:prstGeom>
+          <a:noFill/>
+          <a:ln/>
+        </p:spPr>
+        <p:txBody>
+          <a:bodyPr wrap="square" lIns="0" tIns="0" rIns="0" bIns="0" rtlCol="0" anchor="ctr">
+            <a:normAutofit/>
+          </a:bodyPr>
+          <a:lstStyle/>
+          <a:p>
+            <a:pPr algn="ctr" indent="0" marL="0">
+              <a:buNone/>
+            </a:pPr>
+            <a:r>
+              <a:rPr lang="en-US" sz="3600" b="1" dirty="0">
+                <a:solidFill>
+                  <a:srgbClr val="990011"/>
+                </a:solidFill>
+                <a:latin typeface="Times New Roman" pitchFamily="34" charset="0"/>
+                <a:ea typeface="Times New Roman" pitchFamily="34" charset="-122"/>
+                <a:cs typeface="Times New Roman" pitchFamily="34" charset="-120"/>
+              </a:rPr>
+              <a:t>Homework</a:t>
+            </a:r>
+            <a:endParaRPr lang="en-US" sz="3600" dirty="0"/>
+          </a:p>
+        </p:txBody>
+      </p:sp>
+      <p:sp>
+        <p:nvSpPr>
+          <p:cNvPr id="5" name="Text 2"/>
+          <p:cNvSpPr/>
+          <p:nvPr/>
+        </p:nvSpPr>
+        <p:spPr>
+          <a:xfrm>
+            <a:off x="5349240" y="1783080"/>
+            <a:ext cx="6522415" cy="4663440"/>
+          </a:xfrm>
+          <a:prstGeom prst="rect">
+            <a:avLst/>
+          </a:prstGeom>
+          <a:noFill/>
+          <a:ln/>
+        </p:spPr>
+        <p:txBody>
+          <a:bodyPr wrap="square" lIns="0" tIns="0" rIns="0" bIns="0" rtlCol="0" anchor="t"/>
+          <a:lstStyle/>
+          <a:p>
+            <a:pPr algn="l" indent="0" marL="0">
+              <a:spcAft>
+                <a:spcPts val="800"/>
+              </a:spcAft>
+              <a:buNone/>
+            </a:pPr>
+            <a:r>
+              <a:rPr lang="en-US" sz="4000" dirty="0">
+                <a:solidFill>
+                  <a:srgbClr val="111111"/>
+                </a:solidFill>
+                <a:latin typeface="Times New Roman" pitchFamily="34" charset="0"/>
+                <a:ea typeface="Times New Roman" pitchFamily="34" charset="-122"/>
+                <a:cs typeface="Times New Roman" pitchFamily="34" charset="-120"/>
+              </a:rPr>
+              <a:t>Calculate the mean of 3, 5, 7 and 9.</a:t>
+            </a:r>
+            <a:endParaRPr lang="en-US" sz="4000" dirty="0"/>
+          </a:p>
+        </p:txBody>
+      </p:sp>
+      <p:sp>
+        <p:nvSpPr>
+          <p:cNvPr id="25" name="Slide Number Placeholder 0"/>
+          <p:cNvSpPr>
+            <a:spLocks noGrp="1"/>
+          </p:cNvSpPr>
+          <p:nvPr>
+            <p:ph type="sldNum" sz="quarter" idx="4294967295"/>
+          </p:nvPr>
+        </p:nvSpPr>
+        <p:spPr>
+          <a:xfrm>
+            <a:off x="27432" y="91440"/>
+            <a:ext cx="585216" cy="475488"/>
+          </a:xfrm>
+          <a:prstGeom prst="rect">
+            <a:avLst/>
+          </a:prstGeom>
+          <a:extLst>
+            <a:ext uri="{C572A759-6A51-4108-AA02-DFA0A04FC94B}">
+              <ma14:wrappingTextBoxFlag xmlns:ma14="http://schemas.microsoft.com/office/mac/drawingml/2011/main" val="0"/>
+            </a:ext>
+          </a:extLst>
+        </p:spPr>
+        <p:txBody>
+          <a:bodyPr/>
+          <a:lstStyle>
+            <a:lvl1pPr>
+              <a:defRPr sz="2000">
+                <a:solidFill>
+                  <a:srgbClr val="FFFFFF"/>
+                </a:solidFill>
+                <a:latin typeface="Calibri"/>
+                <a:ea typeface="Calibri"/>
+                <a:cs typeface="Calibri"/>
+              </a:defRPr>
+            </a:lvl1pPr>
+          </a:lstStyle>
+          <a:p>
+            <a:pPr algn="ctr"/>
+            <a:fld id="{F7021451-1387-4CA6-816F-3879F97B5CBC}" type="slidenum">
+              <a:rPr b="1" lang="en-US"/>
+              <a:t>73</a:t>
+            </a:fld>
+            <a:endParaRPr lang="en-US"/>
+          </a:p>
+        </p:txBody>
+      </p:sp>
+    </p:spTree>
+  </p:cSld>
+  <p:clrMapOvr>
+    <a:masterClrMapping/>
+  </p:clrMapOvr>
+</p:sld>
+</file>
+
+<file path=ppt/slides/slide74.xml><?xml version="1.0" encoding="utf-8"?>
+<p:sld xmlns:a="http://schemas.openxmlformats.org/drawingml/2006/main" xmlns:r="http://schemas.openxmlformats.org/officeDocument/2006/relationships" xmlns:p="http://schemas.openxmlformats.org/presentationml/2006/main">
+  <p:cSld name="Slide 74">
+    <p:spTree>
+      <p:nvGrpSpPr>
+        <p:cNvPr id="1" name=""/>
+        <p:cNvGrpSpPr/>
+        <p:nvPr/>
+      </p:nvGrpSpPr>
+      <p:grpSpPr>
+        <a:xfrm>
+          <a:off x="0" y="0"/>
+          <a:ext cx="0" cy="0"/>
+          <a:chOff x="0" y="0"/>
+          <a:chExt cx="0" cy="0"/>
+        </a:xfrm>
+      </p:grpSpPr>
+      <p:sp>
+        <p:nvSpPr>
+          <p:cNvPr id="2" name="Text 0"/>
+          <p:cNvSpPr/>
+          <p:nvPr/>
+        </p:nvSpPr>
+        <p:spPr>
+          <a:xfrm>
+            <a:off x="457200" y="713232"/>
+            <a:ext cx="11368735" cy="274320"/>
+          </a:xfrm>
+          <a:prstGeom prst="rect">
+            <a:avLst/>
+          </a:prstGeom>
+          <a:noFill/>
+          <a:ln/>
+        </p:spPr>
+        <p:txBody>
+          <a:bodyPr wrap="square" lIns="0" tIns="0" rIns="0" bIns="0" rtlCol="0" anchor="ctr"/>
+          <a:lstStyle/>
+          <a:p>
+            <a:pPr algn="r" indent="0" marL="0">
+              <a:buNone/>
+            </a:pPr>
+            <a:r>
+              <a:rPr lang="en-US" sz="1400" b="1" dirty="0">
+                <a:solidFill>
+                  <a:srgbClr val="1C3F6E"/>
+                </a:solidFill>
+                <a:latin typeface="Calibri" pitchFamily="34" charset="0"/>
+                <a:ea typeface="Calibri" pitchFamily="34" charset="-122"/>
+                <a:cs typeface="Calibri" pitchFamily="34" charset="-120"/>
+              </a:rPr>
+              <a:t>NEXT LESSON</a:t>
+            </a:r>
+            <a:endParaRPr lang="en-US" sz="1400" dirty="0"/>
+          </a:p>
+        </p:txBody>
+      </p:sp>
+      <p:pic>
+        <p:nvPicPr>
+          <p:cNvPr id="3" name="Image 0" descr="/home/claude/f4/img/minesec_sheet.png">    </p:cNvPr>
+          <p:cNvPicPr>
+            <a:picLocks noChangeAspect="1"/>
+          </p:cNvPicPr>
+          <p:nvPr/>
+        </p:nvPicPr>
+        <p:blipFill>
+          <a:blip r:embed="rId1"/>
+          <a:stretch>
+            <a:fillRect/>
+          </a:stretch>
+        </p:blipFill>
+        <p:spPr>
+          <a:xfrm>
+            <a:off x="0" y="658368"/>
+            <a:ext cx="5120640" cy="5833872"/>
+          </a:xfrm>
+          <a:prstGeom prst="rect">
+            <a:avLst/>
+          </a:prstGeom>
+        </p:spPr>
+      </p:pic>
+      <p:sp>
+        <p:nvSpPr>
+          <p:cNvPr id="4" name="Text 1"/>
+          <p:cNvSpPr/>
+          <p:nvPr/>
+        </p:nvSpPr>
+        <p:spPr>
+          <a:xfrm>
+            <a:off x="5349240" y="1005840"/>
+            <a:ext cx="6522415" cy="731520"/>
+          </a:xfrm>
+          <a:prstGeom prst="rect">
+            <a:avLst/>
+          </a:prstGeom>
+          <a:noFill/>
+          <a:ln/>
+        </p:spPr>
+        <p:txBody>
+          <a:bodyPr wrap="square" lIns="0" tIns="0" rIns="0" bIns="0" rtlCol="0" anchor="ctr">
+            <a:normAutofit/>
+          </a:bodyPr>
+          <a:lstStyle/>
+          <a:p>
+            <a:pPr algn="ctr" indent="0" marL="0">
+              <a:buNone/>
+            </a:pPr>
+            <a:r>
+              <a:rPr lang="en-US" sz="3600" b="1" dirty="0">
+                <a:solidFill>
+                  <a:srgbClr val="990011"/>
+                </a:solidFill>
+                <a:latin typeface="Times New Roman" pitchFamily="34" charset="0"/>
+                <a:ea typeface="Times New Roman" pitchFamily="34" charset="-122"/>
+                <a:cs typeface="Times New Roman" pitchFamily="34" charset="-120"/>
+              </a:rPr>
+              <a:t>Next Lesson</a:t>
+            </a:r>
+            <a:endParaRPr lang="en-US" sz="3600" dirty="0"/>
+          </a:p>
+        </p:txBody>
+      </p:sp>
+      <p:sp>
+        <p:nvSpPr>
+          <p:cNvPr id="5" name="Text 2"/>
+          <p:cNvSpPr/>
+          <p:nvPr/>
+        </p:nvSpPr>
+        <p:spPr>
+          <a:xfrm>
+            <a:off x="5349240" y="1783080"/>
+            <a:ext cx="6522415" cy="4663440"/>
+          </a:xfrm>
+          <a:prstGeom prst="rect">
+            <a:avLst/>
+          </a:prstGeom>
+          <a:noFill/>
+          <a:ln/>
+        </p:spPr>
+        <p:txBody>
+          <a:bodyPr wrap="square" lIns="0" tIns="0" rIns="0" bIns="0" rtlCol="0" anchor="ctr"/>
+          <a:lstStyle/>
+          <a:p>
+            <a:pPr algn="ctr" indent="0" marL="0">
+              <a:spcAft>
+                <a:spcPts val="800"/>
+              </a:spcAft>
+              <a:buNone/>
+            </a:pPr>
+            <a:r>
+              <a:rPr lang="en-US" sz="4000" b="1" dirty="0">
+                <a:solidFill>
+                  <a:srgbClr val="111111"/>
+                </a:solidFill>
+                <a:latin typeface="Times New Roman" pitchFamily="34" charset="0"/>
+                <a:ea typeface="Times New Roman" pitchFamily="34" charset="-122"/>
+                <a:cs typeface="Times New Roman" pitchFamily="34" charset="-120"/>
+              </a:rPr>
+              <a:t>Our next lesson will be on:</a:t>
+            </a:r>
+            <a:endParaRPr lang="en-US" sz="4000" dirty="0"/>
+          </a:p>
+          <a:p>
+            <a:pPr algn="ctr" indent="0" marL="0">
+              <a:spcAft>
+                <a:spcPts val="800"/>
+              </a:spcAft>
+              <a:buNone/>
+            </a:pPr>
+            <a:r>
+              <a:rPr lang="en-US" sz="4000" b="1" dirty="0">
+                <a:solidFill>
+                  <a:srgbClr val="990011"/>
+                </a:solidFill>
+                <a:latin typeface="Times New Roman" pitchFamily="34" charset="0"/>
+                <a:ea typeface="Times New Roman" pitchFamily="34" charset="-122"/>
+                <a:cs typeface="Times New Roman" pitchFamily="34" charset="-120"/>
+              </a:rPr>
+              <a:t>Quantitative Techniques 3 (Part 2): Measures of Dispersion: Variance, Standard Deviation and Coefficient of Variation</a:t>
+            </a:r>
+            <a:endParaRPr lang="en-US" sz="4000" dirty="0"/>
+          </a:p>
+        </p:txBody>
+      </p:sp>
+      <p:sp>
+        <p:nvSpPr>
+          <p:cNvPr id="25" name="Slide Number Placeholder 0"/>
+          <p:cNvSpPr>
+            <a:spLocks noGrp="1"/>
+          </p:cNvSpPr>
+          <p:nvPr>
+            <p:ph type="sldNum" sz="quarter" idx="4294967295"/>
+          </p:nvPr>
+        </p:nvSpPr>
+        <p:spPr>
+          <a:xfrm>
+            <a:off x="27432" y="91440"/>
+            <a:ext cx="585216" cy="475488"/>
+          </a:xfrm>
+          <a:prstGeom prst="rect">
+            <a:avLst/>
+          </a:prstGeom>
+          <a:extLst>
+            <a:ext uri="{C572A759-6A51-4108-AA02-DFA0A04FC94B}">
+              <ma14:wrappingTextBoxFlag xmlns:ma14="http://schemas.microsoft.com/office/mac/drawingml/2011/main" val="0"/>
+            </a:ext>
+          </a:extLst>
+        </p:spPr>
+        <p:txBody>
+          <a:bodyPr/>
+          <a:lstStyle>
+            <a:lvl1pPr>
+              <a:defRPr sz="2000">
+                <a:solidFill>
+                  <a:srgbClr val="FFFFFF"/>
+                </a:solidFill>
+                <a:latin typeface="Calibri"/>
+                <a:ea typeface="Calibri"/>
+                <a:cs typeface="Calibri"/>
+              </a:defRPr>
+            </a:lvl1pPr>
+          </a:lstStyle>
+          <a:p>
+            <a:pPr algn="ctr"/>
+            <a:fld id="{F7021451-1387-4CA6-816F-3879F97B5CBC}" type="slidenum">
+              <a:rPr b="1" lang="en-US"/>
+              <a:t>74</a:t>
+            </a:fld>
+            <a:endParaRPr lang="en-US"/>
+          </a:p>
+        </p:txBody>
+      </p:sp>
+    </p:spTree>
+  </p:cSld>
+  <p:clrMapOvr>
+    <a:masterClrMapping/>
+  </p:clrMapOvr>
+</p:sld>
+</file>
+
+<file path=ppt/slides/slide75.xml><?xml version="1.0" encoding="utf-8"?>
+<p:sld xmlns:a="http://schemas.openxmlformats.org/drawingml/2006/main" xmlns:r="http://schemas.openxmlformats.org/officeDocument/2006/relationships" xmlns:p="http://schemas.openxmlformats.org/presentationml/2006/main">
+  <p:cSld name="Slide 75">
+    <p:spTree>
+      <p:nvGrpSpPr>
+        <p:cNvPr id="1" name=""/>
+        <p:cNvGrpSpPr/>
+        <p:nvPr/>
+      </p:nvGrpSpPr>
+      <p:grpSpPr>
+        <a:xfrm>
+          <a:off x="0" y="0"/>
+          <a:ext cx="0" cy="0"/>
+          <a:chOff x="0" y="0"/>
+          <a:chExt cx="0" cy="0"/>
+        </a:xfrm>
+      </p:grpSpPr>
+      <p:sp>
+        <p:nvSpPr>
+          <p:cNvPr id="2" name="Text 0"/>
+          <p:cNvSpPr/>
+          <p:nvPr/>
+        </p:nvSpPr>
+        <p:spPr>
+          <a:xfrm>
+            <a:off x="457200" y="713232"/>
+            <a:ext cx="11368735" cy="274320"/>
+          </a:xfrm>
+          <a:prstGeom prst="rect">
+            <a:avLst/>
+          </a:prstGeom>
+          <a:noFill/>
+          <a:ln/>
+        </p:spPr>
+        <p:txBody>
+          <a:bodyPr wrap="square" lIns="0" tIns="0" rIns="0" bIns="0" rtlCol="0" anchor="ctr"/>
+          <a:lstStyle/>
+          <a:p>
+            <a:pPr algn="r" indent="0" marL="0">
+              <a:buNone/>
+            </a:pPr>
+            <a:r>
+              <a:rPr lang="en-US" sz="1400" b="1" dirty="0">
+                <a:solidFill>
+                  <a:srgbClr val="1C3F6E"/>
+                </a:solidFill>
+                <a:latin typeface="Calibri" pitchFamily="34" charset="0"/>
+                <a:ea typeface="Calibri" pitchFamily="34" charset="-122"/>
+                <a:cs typeface="Calibri" pitchFamily="34" charset="-120"/>
+              </a:rPr>
+              <a:t>BILINGUAL GAME</a:t>
+            </a:r>
+            <a:endParaRPr lang="en-US" sz="1400" dirty="0"/>
+          </a:p>
+        </p:txBody>
+      </p:sp>
+      <p:sp>
+        <p:nvSpPr>
+          <p:cNvPr id="3" name="Text 1"/>
+          <p:cNvSpPr/>
+          <p:nvPr/>
+        </p:nvSpPr>
+        <p:spPr>
+          <a:xfrm>
+            <a:off x="457200" y="1005840"/>
+            <a:ext cx="11277295" cy="731520"/>
+          </a:xfrm>
+          <a:prstGeom prst="rect">
+            <a:avLst/>
+          </a:prstGeom>
+          <a:noFill/>
+          <a:ln/>
+        </p:spPr>
+        <p:txBody>
+          <a:bodyPr wrap="square" lIns="0" tIns="0" rIns="0" bIns="0" rtlCol="0" anchor="ctr"/>
+          <a:lstStyle/>
+          <a:p>
+            <a:pPr algn="ctr" indent="0" marL="0">
+              <a:buNone/>
+            </a:pPr>
+            <a:r>
+              <a:rPr lang="en-US" sz="3600" b="1" dirty="0">
+                <a:solidFill>
+                  <a:srgbClr val="990011"/>
+                </a:solidFill>
+                <a:latin typeface="Times New Roman" pitchFamily="34" charset="0"/>
+                <a:ea typeface="Times New Roman" pitchFamily="34" charset="-122"/>
+                <a:cs typeface="Times New Roman" pitchFamily="34" charset="-120"/>
+              </a:rPr>
               <a:t>Bilingual Game (Jeu Bilingue)</a:t>
             </a:r>
             <a:endParaRPr lang="en-US" sz="3600" dirty="0"/>
@@ -23128,7 +27919,7 @@
       </p:sp>
       <p:graphicFrame>
         <p:nvGraphicFramePr>
-          <p:cNvPr id="64" name="Table 0"/>
+          <p:cNvPr id="76" name="Table 0"/>
           <p:cNvGraphicFramePr>
             <a:graphicFrameLocks noGrp="1"/>
           </p:cNvGraphicFramePr>
@@ -24164,7 +28955,7 @@
             <a:pPr algn="ctr"/>
             <a:fld id="{F7021451-1387-4CA6-816F-3879F97B5CBC}" type="slidenum">
               <a:rPr b="1" lang="en-US"/>
-              <a:t>63</a:t>
+              <a:t>75</a:t>
             </a:fld>
             <a:endParaRPr lang="en-US"/>
           </a:p>
@@ -24178,9 +28969,9 @@
 </p:sld>
 </file>
 
-<file path=ppt/slides/slide64.xml><?xml version="1.0" encoding="utf-8"?>
+<file path=ppt/slides/slide76.xml><?xml version="1.0" encoding="utf-8"?>
 <p:sld xmlns:a="http://schemas.openxmlformats.org/drawingml/2006/main" xmlns:r="http://schemas.openxmlformats.org/officeDocument/2006/relationships" xmlns:p="http://schemas.openxmlformats.org/presentationml/2006/main">
-  <p:cSld name="Slide 64">
+  <p:cSld name="Slide 76">
     <p:spTree>
       <p:nvGrpSpPr>
         <p:cNvPr id="1" name=""/>
@@ -24275,7 +29066,7 @@
       </p:sp>
       <p:graphicFrame>
         <p:nvGraphicFramePr>
-          <p:cNvPr id="65" name="Table 0"/>
+          <p:cNvPr id="77" name="Table 0"/>
           <p:cNvGraphicFramePr>
             <a:graphicFrameLocks noGrp="1"/>
           </p:cNvGraphicFramePr>
@@ -24897,7 +29688,7 @@
             <a:pPr algn="ctr"/>
             <a:fld id="{F7021451-1387-4CA6-816F-3879F97B5CBC}" type="slidenum">
               <a:rPr b="1" lang="en-US"/>
-              <a:t>64</a:t>
+              <a:t>76</a:t>
             </a:fld>
             <a:endParaRPr lang="en-US"/>
           </a:p>
@@ -24911,9 +29702,9 @@
 </p:sld>
 </file>
 
-<file path=ppt/slides/slide65.xml><?xml version="1.0" encoding="utf-8"?>
+<file path=ppt/slides/slide77.xml><?xml version="1.0" encoding="utf-8"?>
 <p:sld xmlns:a="http://schemas.openxmlformats.org/drawingml/2006/main" xmlns:r="http://schemas.openxmlformats.org/officeDocument/2006/relationships" xmlns:p="http://schemas.openxmlformats.org/presentationml/2006/main">
-  <p:cSld name="Slide 65">
+  <p:cSld name="Slide 77">
     <p:spTree>
       <p:nvGrpSpPr>
         <p:cNvPr id="1" name=""/>
@@ -25008,7 +29799,7 @@
       </p:sp>
       <p:graphicFrame>
         <p:nvGraphicFramePr>
-          <p:cNvPr id="66" name="Table 0"/>
+          <p:cNvPr id="78" name="Table 0"/>
           <p:cNvGraphicFramePr>
             <a:graphicFrameLocks noGrp="1"/>
           </p:cNvGraphicFramePr>
@@ -25118,7 +29909,7 @@
                           <a:ea typeface="Calibri" pitchFamily="34" charset="-122"/>
                           <a:cs typeface="Calibri" pitchFamily="34" charset="-120"/>
                         </a:rPr>
-                        <a:t>DEFINITIONS; The Mean; The Median; The Mode; The Range; Quartiles and the Interquartile Range.</a:t>
+                        <a:t>DEFINITIONS; The Mean: Calculation; The Mean: Advantages and Disadvantages; The Median: Calculation; The Median: Advantages and Disadvantages; The Mode: Calculation; The Mode: Advantages and Disadvantages; Calculation and Interpretation; Advantages and Disadvantages; Quartiles and the Interquartile Range.</a:t>
                       </a:r>
                       <a:endParaRPr lang="en-US" sz="1600" dirty="0">
                         <a:latin typeface="Calibri" charset="0"/>
@@ -25768,7 +30559,7 @@
             <a:pPr algn="ctr"/>
             <a:fld id="{F7021451-1387-4CA6-816F-3879F97B5CBC}" type="slidenum">
               <a:rPr b="1" lang="en-US"/>
-              <a:t>65</a:t>
+              <a:t>77</a:t>
             </a:fld>
             <a:endParaRPr lang="en-US"/>
           </a:p>
@@ -25782,9 +30573,9 @@
 </p:sld>
 </file>
 
-<file path=ppt/slides/slide66.xml><?xml version="1.0" encoding="utf-8"?>
+<file path=ppt/slides/slide78.xml><?xml version="1.0" encoding="utf-8"?>
 <p:sld xmlns:a="http://schemas.openxmlformats.org/drawingml/2006/main" xmlns:r="http://schemas.openxmlformats.org/officeDocument/2006/relationships" xmlns:p="http://schemas.openxmlformats.org/presentationml/2006/main">
-  <p:cSld name="Slide 66">
+  <p:cSld name="Slide 78">
     <p:spTree>
       <p:nvGrpSpPr>
         <p:cNvPr id="1" name=""/>
@@ -26093,7 +30884,7 @@
             <a:pPr algn="ctr"/>
             <a:fld id="{F7021451-1387-4CA6-816F-3879F97B5CBC}" type="slidenum">
               <a:rPr b="1" lang="en-US"/>
-              <a:t>66</a:t>
+              <a:t>78</a:t>
             </a:fld>
             <a:endParaRPr lang="en-US"/>
           </a:p>
@@ -26107,9 +30898,9 @@
 </p:sld>
 </file>
 
-<file path=ppt/slides/slide67.xml><?xml version="1.0" encoding="utf-8"?>
+<file path=ppt/slides/slide79.xml><?xml version="1.0" encoding="utf-8"?>
 <p:sld xmlns:a="http://schemas.openxmlformats.org/drawingml/2006/main" xmlns:r="http://schemas.openxmlformats.org/officeDocument/2006/relationships" xmlns:p="http://schemas.openxmlformats.org/presentationml/2006/main">
-  <p:cSld name="Slide 67">
+  <p:cSld name="Slide 79">
     <p:spTree>
       <p:nvGrpSpPr>
         <p:cNvPr id="1" name=""/>
@@ -26376,270 +31167,7 @@
             <a:pPr algn="ctr"/>
             <a:fld id="{F7021451-1387-4CA6-816F-3879F97B5CBC}" type="slidenum">
               <a:rPr b="1" lang="en-US"/>
-              <a:t>67</a:t>
-            </a:fld>
-            <a:endParaRPr lang="en-US"/>
-          </a:p>
-        </p:txBody>
-      </p:sp>
-    </p:spTree>
-  </p:cSld>
-  <p:clrMapOvr>
-    <a:masterClrMapping/>
-  </p:clrMapOvr>
-</p:sld>
-</file>
-
-<file path=ppt/slides/slide7.xml><?xml version="1.0" encoding="utf-8"?>
-<p:sld xmlns:a="http://schemas.openxmlformats.org/drawingml/2006/main" xmlns:r="http://schemas.openxmlformats.org/officeDocument/2006/relationships" xmlns:p="http://schemas.openxmlformats.org/presentationml/2006/main">
-  <p:cSld name="Slide 7">
-    <p:spTree>
-      <p:nvGrpSpPr>
-        <p:cNvPr id="1" name=""/>
-        <p:cNvGrpSpPr/>
-        <p:nvPr/>
-      </p:nvGrpSpPr>
-      <p:grpSpPr>
-        <a:xfrm>
-          <a:off x="0" y="0"/>
-          <a:ext cx="0" cy="0"/>
-          <a:chOff x="0" y="0"/>
-          <a:chExt cx="0" cy="0"/>
-        </a:xfrm>
-      </p:grpSpPr>
-      <p:sp>
-        <p:nvSpPr>
-          <p:cNvPr id="2" name="Text 0"/>
-          <p:cNvSpPr/>
-          <p:nvPr/>
-        </p:nvSpPr>
-        <p:spPr>
-          <a:xfrm>
-            <a:off x="457200" y="713232"/>
-            <a:ext cx="11368735" cy="274320"/>
-          </a:xfrm>
-          <a:prstGeom prst="rect">
-            <a:avLst/>
-          </a:prstGeom>
-          <a:noFill/>
-          <a:ln/>
-        </p:spPr>
-        <p:txBody>
-          <a:bodyPr wrap="square" lIns="0" tIns="0" rIns="0" bIns="0" rtlCol="0" anchor="ctr"/>
-          <a:lstStyle/>
-          <a:p>
-            <a:pPr algn="r" indent="0" marL="0">
-              <a:buNone/>
-            </a:pPr>
-            <a:r>
-              <a:rPr lang="en-US" sz="1400" b="1" dirty="0">
-                <a:solidFill>
-                  <a:srgbClr val="1C3F6E"/>
-                </a:solidFill>
-                <a:latin typeface="Calibri" pitchFamily="34" charset="0"/>
-                <a:ea typeface="Calibri" pitchFamily="34" charset="-122"/>
-                <a:cs typeface="Calibri" pitchFamily="34" charset="-120"/>
-              </a:rPr>
-              <a:t>OBJECTIVES</a:t>
-            </a:r>
-            <a:endParaRPr lang="en-US" sz="1400" dirty="0"/>
-          </a:p>
-        </p:txBody>
-      </p:sp>
-      <p:pic>
-        <p:nvPicPr>
-          <p:cNvPr id="3" name="Image 0" descr="/home/claude/f4/img/minesec_sheet.png">    </p:cNvPr>
-          <p:cNvPicPr>
-            <a:picLocks noChangeAspect="1"/>
-          </p:cNvPicPr>
-          <p:nvPr/>
-        </p:nvPicPr>
-        <p:blipFill>
-          <a:blip r:embed="rId1"/>
-          <a:stretch>
-            <a:fillRect/>
-          </a:stretch>
-        </p:blipFill>
-        <p:spPr>
-          <a:xfrm>
-            <a:off x="0" y="658368"/>
-            <a:ext cx="5120640" cy="5833872"/>
-          </a:xfrm>
-          <a:prstGeom prst="rect">
-            <a:avLst/>
-          </a:prstGeom>
-        </p:spPr>
-      </p:pic>
-      <p:sp>
-        <p:nvSpPr>
-          <p:cNvPr id="4" name="Text 1"/>
-          <p:cNvSpPr/>
-          <p:nvPr/>
-        </p:nvSpPr>
-        <p:spPr>
-          <a:xfrm>
-            <a:off x="5349240" y="1005840"/>
-            <a:ext cx="6522415" cy="731520"/>
-          </a:xfrm>
-          <a:prstGeom prst="rect">
-            <a:avLst/>
-          </a:prstGeom>
-          <a:noFill/>
-          <a:ln/>
-        </p:spPr>
-        <p:txBody>
-          <a:bodyPr wrap="square" lIns="0" tIns="0" rIns="0" bIns="0" rtlCol="0" anchor="ctr">
-            <a:normAutofit/>
-          </a:bodyPr>
-          <a:lstStyle/>
-          <a:p>
-            <a:pPr algn="ctr" indent="0" marL="0">
-              <a:buNone/>
-            </a:pPr>
-            <a:r>
-              <a:rPr lang="en-US" sz="3600" b="1" dirty="0">
-                <a:solidFill>
-                  <a:srgbClr val="990011"/>
-                </a:solidFill>
-                <a:latin typeface="Times New Roman" pitchFamily="34" charset="0"/>
-                <a:ea typeface="Times New Roman" pitchFamily="34" charset="-122"/>
-                <a:cs typeface="Times New Roman" pitchFamily="34" charset="-120"/>
-              </a:rPr>
-              <a:t>Objectives</a:t>
-            </a:r>
-            <a:endParaRPr lang="en-US" sz="3600" dirty="0"/>
-          </a:p>
-        </p:txBody>
-      </p:sp>
-      <p:sp>
-        <p:nvSpPr>
-          <p:cNvPr id="5" name="Text 2"/>
-          <p:cNvSpPr/>
-          <p:nvPr/>
-        </p:nvSpPr>
-        <p:spPr>
-          <a:xfrm>
-            <a:off x="5349240" y="1783080"/>
-            <a:ext cx="6522415" cy="4663440"/>
-          </a:xfrm>
-          <a:prstGeom prst="rect">
-            <a:avLst/>
-          </a:prstGeom>
-          <a:noFill/>
-          <a:ln/>
-        </p:spPr>
-        <p:txBody>
-          <a:bodyPr wrap="square" lIns="0" tIns="0" rIns="0" bIns="0" rtlCol="0" anchor="t"/>
-          <a:lstStyle/>
-          <a:p>
-            <a:pPr algn="l" indent="0" marL="0">
-              <a:spcAft>
-                <a:spcPts val="800"/>
-              </a:spcAft>
-              <a:buNone/>
-            </a:pPr>
-            <a:r>
-              <a:rPr lang="en-US" sz="4000" b="1" dirty="0">
-                <a:solidFill>
-                  <a:srgbClr val="111111"/>
-                </a:solidFill>
-                <a:latin typeface="Times New Roman" pitchFamily="34" charset="0"/>
-                <a:ea typeface="Times New Roman" pitchFamily="34" charset="-122"/>
-                <a:cs typeface="Times New Roman" pitchFamily="34" charset="-120"/>
-              </a:rPr>
-              <a:t>By the end of this lesson, you should be able to:</a:t>
-            </a:r>
-            <a:endParaRPr lang="en-US" sz="4000" dirty="0"/>
-          </a:p>
-          <a:p>
-            <a:pPr algn="l" marL="342900" indent="-342900">
-              <a:spcAft>
-                <a:spcPts val="800"/>
-              </a:spcAft>
-              <a:buSzPct val="100000"/>
-              <a:buFont typeface="+mj-lt"/>
-              <a:buAutoNum type="arabicPeriod" startAt="1"/>
-            </a:pPr>
-            <a:r>
-              <a:rPr lang="en-US" sz="4000" dirty="0">
-                <a:solidFill>
-                  <a:srgbClr val="111111"/>
-                </a:solidFill>
-                <a:latin typeface="Times New Roman" pitchFamily="34" charset="0"/>
-                <a:ea typeface="Times New Roman" pitchFamily="34" charset="-122"/>
-                <a:cs typeface="Times New Roman" pitchFamily="34" charset="-120"/>
-              </a:rPr>
-              <a:t>Calculate the mean and state its advantages and disadvantages.</a:t>
-            </a:r>
-            <a:endParaRPr lang="en-US" sz="4000" dirty="0"/>
-          </a:p>
-          <a:p>
-            <a:pPr algn="l" marL="342900" indent="-342900">
-              <a:spcAft>
-                <a:spcPts val="800"/>
-              </a:spcAft>
-              <a:buSzPct val="100000"/>
-              <a:buFont typeface="+mj-lt"/>
-              <a:buAutoNum type="arabicPeriod" startAt="1"/>
-            </a:pPr>
-            <a:r>
-              <a:rPr lang="en-US" sz="4000" dirty="0">
-                <a:solidFill>
-                  <a:srgbClr val="111111"/>
-                </a:solidFill>
-                <a:latin typeface="Times New Roman" pitchFamily="34" charset="0"/>
-                <a:ea typeface="Times New Roman" pitchFamily="34" charset="-122"/>
-                <a:cs typeface="Times New Roman" pitchFamily="34" charset="-120"/>
-              </a:rPr>
-              <a:t>Find the median of odd and even sets of data.</a:t>
-            </a:r>
-            <a:endParaRPr lang="en-US" sz="4000" dirty="0"/>
-          </a:p>
-        </p:txBody>
-      </p:sp>
-      <p:sp>
-        <p:nvSpPr>
-          <p:cNvPr id="25" name="Slide Number Placeholder 0"/>
-          <p:cNvSpPr>
-            <a:spLocks noGrp="1"/>
-          </p:cNvSpPr>
-          <p:nvPr>
-            <p:ph type="sldNum" sz="quarter" idx="4294967295"/>
-          </p:nvPr>
-        </p:nvSpPr>
-        <p:spPr>
-          <a:xfrm>
-            <a:off x="27432" y="91440"/>
-            <a:ext cx="585216" cy="475488"/>
-          </a:xfrm>
-          <a:prstGeom prst="rect">
-            <a:avLst/>
-          </a:prstGeom>
-          <a:extLst>
-            <a:ext uri="{C572A759-6A51-4108-AA02-DFA0A04FC94B}">
-              <ma14:wrappingTextBoxFlag xmlns:ma14="http://schemas.microsoft.com/office/mac/drawingml/2011/main" val="0"/>
-            </a:ext>
-          </a:extLst>
-        </p:spPr>
-        <p:txBody>
-          <a:bodyPr/>
-          <a:lstStyle>
-            <a:lvl1pPr>
-              <a:defRPr sz="2000">
-                <a:solidFill>
-                  <a:srgbClr val="FFFFFF"/>
-                </a:solidFill>
-                <a:latin typeface="Calibri"/>
-                <a:ea typeface="Calibri"/>
-                <a:cs typeface="Calibri"/>
-              </a:defRPr>
-            </a:lvl1pPr>
-          </a:lstStyle>
-          <a:p>
-            <a:pPr algn="ctr"/>
-            <a:fld id="{F7021451-1387-4CA6-816F-3879F97B5CBC}" type="slidenum">
-              <a:rPr b="1" lang="en-US"/>
-              <a:t>7</a:t>
+              <a:t>79</a:t>
             </a:fld>
             <a:endParaRPr lang="en-US"/>
           </a:p>
